--- a/IronMarch/csbc26_caso_ironmarch.pptx
+++ b/IronMarch/csbc26_caso_ironmarch.pptx
@@ -6,30 +6,30 @@
   </p:sldMasterIdLst>
   <p:sldIdLst>
     <p:sldId id="256" r:id="rId7"/>
-    <p:sldId id="257" r:id="rId8"/>
-    <p:sldId id="258" r:id="rId9"/>
-    <p:sldId id="259" r:id="rId10"/>
-    <p:sldId id="260" r:id="rId11"/>
-    <p:sldId id="261" r:id="rId12"/>
-    <p:sldId id="262" r:id="rId13"/>
-    <p:sldId id="263" r:id="rId14"/>
-    <p:sldId id="264" r:id="rId15"/>
-    <p:sldId id="265" r:id="rId16"/>
-    <p:sldId id="266" r:id="rId17"/>
-    <p:sldId id="267" r:id="rId18"/>
-    <p:sldId id="268" r:id="rId19"/>
-    <p:sldId id="269" r:id="rId20"/>
-    <p:sldId id="270" r:id="rId21"/>
-    <p:sldId id="271" r:id="rId22"/>
-    <p:sldId id="272" r:id="rId23"/>
-    <p:sldId id="273" r:id="rId24"/>
-    <p:sldId id="274" r:id="rId25"/>
-    <p:sldId id="275" r:id="rId26"/>
-    <p:sldId id="276" r:id="rId27"/>
-    <p:sldId id="277" r:id="rId28"/>
-    <p:sldId id="278" r:id="rId29"/>
-    <p:sldId id="279" r:id="rId30"/>
-    <p:sldId id="280" r:id="rId31"/>
+    <p:sldId id="257" r:id="rId9"/>
+    <p:sldId id="258" r:id="rId10"/>
+    <p:sldId id="259" r:id="rId11"/>
+    <p:sldId id="260" r:id="rId12"/>
+    <p:sldId id="261" r:id="rId13"/>
+    <p:sldId id="262" r:id="rId14"/>
+    <p:sldId id="263" r:id="rId15"/>
+    <p:sldId id="264" r:id="rId16"/>
+    <p:sldId id="265" r:id="rId17"/>
+    <p:sldId id="266" r:id="rId18"/>
+    <p:sldId id="267" r:id="rId19"/>
+    <p:sldId id="268" r:id="rId20"/>
+    <p:sldId id="269" r:id="rId21"/>
+    <p:sldId id="270" r:id="rId22"/>
+    <p:sldId id="271" r:id="rId23"/>
+    <p:sldId id="272" r:id="rId24"/>
+    <p:sldId id="273" r:id="rId25"/>
+    <p:sldId id="274" r:id="rId26"/>
+    <p:sldId id="275" r:id="rId27"/>
+    <p:sldId id="276" r:id="rId28"/>
+    <p:sldId id="277" r:id="rId29"/>
+    <p:sldId id="278" r:id="rId30"/>
+    <p:sldId id="279" r:id="rId31"/>
+    <p:sldId id="280" r:id="rId32"/>
   </p:sldIdLst>
   <p:sldSz cx="12188952" cy="6858000" type="screen4x3"/>
   <p:notesSz cx="6858000" cy="9144000"/>
@@ -129,6 +129,2106 @@
     </a:lvl9pPr>
   </p:defaultTextStyle>
 </p:presentation>
+</file>
+
+<file path=ppt/notesMasters/notesMaster1.xml><?xml version="1.0" encoding="utf-8"?>
+<p:notesMaster xmlns:a="http://schemas.openxmlformats.org/drawingml/2006/main" xmlns:p="http://schemas.openxmlformats.org/presentationml/2006/main" xmlns:r="http://schemas.openxmlformats.org/officeDocument/2006/relationships">
+  <p:cSld>
+    <p:bg>
+      <p:bgRef idx="1001">
+        <a:schemeClr val="bg1"/>
+      </p:bgRef>
+    </p:bg>
+    <p:spTree>
+      <p:nvGrpSpPr>
+        <p:cNvPr id="1" name=""/>
+        <p:cNvGrpSpPr/>
+        <p:nvPr/>
+      </p:nvGrpSpPr>
+      <p:grpSpPr>
+        <a:xfrm>
+          <a:off x="0" y="0"/>
+          <a:ext cx="0" cy="0"/>
+          <a:chOff x="0" y="0"/>
+          <a:chExt cx="0" cy="0"/>
+        </a:xfrm>
+      </p:grpSpPr>
+      <p:sp>
+        <p:nvSpPr>
+          <p:cNvPr id="2" name="Header Placeholder 1"/>
+          <p:cNvSpPr>
+            <a:spLocks noGrp="1"/>
+          </p:cNvSpPr>
+          <p:nvPr>
+            <p:ph type="hdr" sz="quarter"/>
+          </p:nvPr>
+        </p:nvSpPr>
+        <p:spPr>
+          <a:xfrm>
+            <a:off x="0" y="0"/>
+            <a:ext cx="2971800" cy="457200"/>
+          </a:xfrm>
+          <a:prstGeom prst="rect">
+            <a:avLst/>
+          </a:prstGeom>
+        </p:spPr>
+        <p:txBody>
+          <a:bodyPr vert="horz" lIns="91440" tIns="45720" rIns="91440" bIns="45720" rtlCol="0"/>
+          <a:lstStyle>
+            <a:lvl1pPr algn="l">
+              <a:defRPr sz="1200"/>
+            </a:lvl1pPr>
+          </a:lstStyle>
+          <a:p>
+            <a:endParaRPr lang="en-US"/>
+          </a:p>
+        </p:txBody>
+      </p:sp>
+      <p:sp>
+        <p:nvSpPr>
+          <p:cNvPr id="3" name="Date Placeholder 2"/>
+          <p:cNvSpPr>
+            <a:spLocks noGrp="1"/>
+          </p:cNvSpPr>
+          <p:nvPr>
+            <p:ph type="dt" idx="1"/>
+          </p:nvPr>
+        </p:nvSpPr>
+        <p:spPr>
+          <a:xfrm>
+            <a:off x="3884613" y="0"/>
+            <a:ext cx="2971800" cy="457200"/>
+          </a:xfrm>
+          <a:prstGeom prst="rect">
+            <a:avLst/>
+          </a:prstGeom>
+        </p:spPr>
+        <p:txBody>
+          <a:bodyPr vert="horz" lIns="91440" tIns="45720" rIns="91440" bIns="45720" rtlCol="0"/>
+          <a:lstStyle>
+            <a:lvl1pPr algn="r">
+              <a:defRPr sz="1200"/>
+            </a:lvl1pPr>
+          </a:lstStyle>
+          <a:p>
+            <a:fld id="{0F89C1C7-3DCD-1040-A9CF-14679D8B5DDD}" type="datetimeFigureOut">
+              <a:rPr lang="en-US" smtClean="0"/>
+              <a:t>10/17/16</a:t>
+            </a:fld>
+            <a:endParaRPr lang="en-US"/>
+          </a:p>
+        </p:txBody>
+      </p:sp>
+      <p:sp>
+        <p:nvSpPr>
+          <p:cNvPr id="4" name="Slide Image Placeholder 3"/>
+          <p:cNvSpPr>
+            <a:spLocks noGrp="1" noRot="1" noChangeAspect="1"/>
+          </p:cNvSpPr>
+          <p:nvPr>
+            <p:ph type="sldImg" idx="2"/>
+          </p:nvPr>
+        </p:nvSpPr>
+        <p:spPr>
+          <a:xfrm>
+            <a:off x="1143000" y="685800"/>
+            <a:ext cx="4572000" cy="3429000"/>
+          </a:xfrm>
+          <a:prstGeom prst="rect">
+            <a:avLst/>
+          </a:prstGeom>
+          <a:noFill/>
+          <a:ln w="12700">
+            <a:solidFill>
+              <a:prstClr val="black"/>
+            </a:solidFill>
+          </a:ln>
+        </p:spPr>
+        <p:txBody>
+          <a:bodyPr vert="horz" lIns="91440" tIns="45720" rIns="91440" bIns="45720" rtlCol="0" anchor="ctr"/>
+          <a:lstStyle/>
+          <a:p>
+            <a:endParaRPr lang="en-US"/>
+          </a:p>
+        </p:txBody>
+      </p:sp>
+      <p:sp>
+        <p:nvSpPr>
+          <p:cNvPr id="5" name="Notes Placeholder 4"/>
+          <p:cNvSpPr>
+            <a:spLocks noGrp="1"/>
+          </p:cNvSpPr>
+          <p:nvPr>
+            <p:ph type="body" sz="quarter" idx="3"/>
+          </p:nvPr>
+        </p:nvSpPr>
+        <p:spPr>
+          <a:xfrm>
+            <a:off x="685800" y="4343400"/>
+            <a:ext cx="5486400" cy="4114800"/>
+          </a:xfrm>
+          <a:prstGeom prst="rect">
+            <a:avLst/>
+          </a:prstGeom>
+        </p:spPr>
+        <p:txBody>
+          <a:bodyPr vert="horz" lIns="91440" tIns="45720" rIns="91440" bIns="45720" rtlCol="0"/>
+          <a:lstStyle/>
+          <a:p>
+            <a:pPr lvl="0"/>
+            <a:r>
+              <a:rPr lang="en-US" smtClean="0"/>
+              <a:t>Click to edit Master text styles</a:t>
+            </a:r>
+          </a:p>
+          <a:p>
+            <a:pPr lvl="1"/>
+            <a:r>
+              <a:rPr lang="en-US" smtClean="0"/>
+              <a:t>Second level</a:t>
+            </a:r>
+          </a:p>
+          <a:p>
+            <a:pPr lvl="2"/>
+            <a:r>
+              <a:rPr lang="en-US" smtClean="0"/>
+              <a:t>Third level</a:t>
+            </a:r>
+          </a:p>
+          <a:p>
+            <a:pPr lvl="3"/>
+            <a:r>
+              <a:rPr lang="en-US" smtClean="0"/>
+              <a:t>Fourth level</a:t>
+            </a:r>
+          </a:p>
+          <a:p>
+            <a:pPr lvl="4"/>
+            <a:r>
+              <a:rPr lang="en-US" smtClean="0"/>
+              <a:t>Fifth level</a:t>
+            </a:r>
+            <a:endParaRPr lang="en-US"/>
+          </a:p>
+        </p:txBody>
+      </p:sp>
+      <p:sp>
+        <p:nvSpPr>
+          <p:cNvPr id="6" name="Footer Placeholder 5"/>
+          <p:cNvSpPr>
+            <a:spLocks noGrp="1"/>
+          </p:cNvSpPr>
+          <p:nvPr>
+            <p:ph type="ftr" sz="quarter" idx="4"/>
+          </p:nvPr>
+        </p:nvSpPr>
+        <p:spPr>
+          <a:xfrm>
+            <a:off x="0" y="8685213"/>
+            <a:ext cx="2971800" cy="457200"/>
+          </a:xfrm>
+          <a:prstGeom prst="rect">
+            <a:avLst/>
+          </a:prstGeom>
+        </p:spPr>
+        <p:txBody>
+          <a:bodyPr vert="horz" lIns="91440" tIns="45720" rIns="91440" bIns="45720" rtlCol="0" anchor="b"/>
+          <a:lstStyle>
+            <a:lvl1pPr algn="l">
+              <a:defRPr sz="1200"/>
+            </a:lvl1pPr>
+          </a:lstStyle>
+          <a:p>
+            <a:endParaRPr lang="en-US"/>
+          </a:p>
+        </p:txBody>
+      </p:sp>
+      <p:sp>
+        <p:nvSpPr>
+          <p:cNvPr id="7" name="Slide Number Placeholder 6"/>
+          <p:cNvSpPr>
+            <a:spLocks noGrp="1"/>
+          </p:cNvSpPr>
+          <p:nvPr>
+            <p:ph type="sldNum" sz="quarter" idx="5"/>
+          </p:nvPr>
+        </p:nvSpPr>
+        <p:spPr>
+          <a:xfrm>
+            <a:off x="3884613" y="8685213"/>
+            <a:ext cx="2971800" cy="457200"/>
+          </a:xfrm>
+          <a:prstGeom prst="rect">
+            <a:avLst/>
+          </a:prstGeom>
+        </p:spPr>
+        <p:txBody>
+          <a:bodyPr vert="horz" lIns="91440" tIns="45720" rIns="91440" bIns="45720" rtlCol="0" anchor="b"/>
+          <a:lstStyle>
+            <a:lvl1pPr algn="r">
+              <a:defRPr sz="1200"/>
+            </a:lvl1pPr>
+          </a:lstStyle>
+          <a:p>
+            <a:fld id="{BB5E49A5-4136-284D-997B-48E1D791AD67}" type="slidenum">
+              <a:rPr lang="en-US" smtClean="0"/>
+              <a:t>‹#›</a:t>
+            </a:fld>
+            <a:endParaRPr lang="en-US"/>
+          </a:p>
+        </p:txBody>
+      </p:sp>
+    </p:spTree>
+    <p:extLst>
+      <p:ext uri="{BB962C8B-B14F-4D97-AF65-F5344CB8AC3E}">
+        <p14:creationId xmlns:p14="http://schemas.microsoft.com/office/powerpoint/2010/main" val="2623252185"/>
+      </p:ext>
+    </p:extLst>
+  </p:cSld>
+  <p:clrMap bg1="lt1" tx1="dk1" bg2="lt2" tx2="dk2" accent1="accent1" accent2="accent2" accent3="accent3" accent4="accent4" accent5="accent5" accent6="accent6" hlink="hlink" folHlink="folHlink"/>
+  <p:notesStyle>
+    <a:lvl1pPr marL="0" algn="l" defTabSz="457200" rtl="0" eaLnBrk="1" latinLnBrk="0" hangingPunct="1">
+      <a:defRPr sz="1200" kern="1200">
+        <a:solidFill>
+          <a:schemeClr val="tx1"/>
+        </a:solidFill>
+        <a:latin typeface="+mn-lt"/>
+        <a:ea typeface="+mn-ea"/>
+        <a:cs typeface="+mn-cs"/>
+      </a:defRPr>
+    </a:lvl1pPr>
+    <a:lvl2pPr marL="457200" algn="l" defTabSz="457200" rtl="0" eaLnBrk="1" latinLnBrk="0" hangingPunct="1">
+      <a:defRPr sz="1200" kern="1200">
+        <a:solidFill>
+          <a:schemeClr val="tx1"/>
+        </a:solidFill>
+        <a:latin typeface="+mn-lt"/>
+        <a:ea typeface="+mn-ea"/>
+        <a:cs typeface="+mn-cs"/>
+      </a:defRPr>
+    </a:lvl2pPr>
+    <a:lvl3pPr marL="914400" algn="l" defTabSz="457200" rtl="0" eaLnBrk="1" latinLnBrk="0" hangingPunct="1">
+      <a:defRPr sz="1200" kern="1200">
+        <a:solidFill>
+          <a:schemeClr val="tx1"/>
+        </a:solidFill>
+        <a:latin typeface="+mn-lt"/>
+        <a:ea typeface="+mn-ea"/>
+        <a:cs typeface="+mn-cs"/>
+      </a:defRPr>
+    </a:lvl3pPr>
+    <a:lvl4pPr marL="1371600" algn="l" defTabSz="457200" rtl="0" eaLnBrk="1" latinLnBrk="0" hangingPunct="1">
+      <a:defRPr sz="1200" kern="1200">
+        <a:solidFill>
+          <a:schemeClr val="tx1"/>
+        </a:solidFill>
+        <a:latin typeface="+mn-lt"/>
+        <a:ea typeface="+mn-ea"/>
+        <a:cs typeface="+mn-cs"/>
+      </a:defRPr>
+    </a:lvl4pPr>
+    <a:lvl5pPr marL="1828800" algn="l" defTabSz="457200" rtl="0" eaLnBrk="1" latinLnBrk="0" hangingPunct="1">
+      <a:defRPr sz="1200" kern="1200">
+        <a:solidFill>
+          <a:schemeClr val="tx1"/>
+        </a:solidFill>
+        <a:latin typeface="+mn-lt"/>
+        <a:ea typeface="+mn-ea"/>
+        <a:cs typeface="+mn-cs"/>
+      </a:defRPr>
+    </a:lvl5pPr>
+    <a:lvl6pPr marL="2286000" algn="l" defTabSz="457200" rtl="0" eaLnBrk="1" latinLnBrk="0" hangingPunct="1">
+      <a:defRPr sz="1200" kern="1200">
+        <a:solidFill>
+          <a:schemeClr val="tx1"/>
+        </a:solidFill>
+        <a:latin typeface="+mn-lt"/>
+        <a:ea typeface="+mn-ea"/>
+        <a:cs typeface="+mn-cs"/>
+      </a:defRPr>
+    </a:lvl6pPr>
+    <a:lvl7pPr marL="2743200" algn="l" defTabSz="457200" rtl="0" eaLnBrk="1" latinLnBrk="0" hangingPunct="1">
+      <a:defRPr sz="1200" kern="1200">
+        <a:solidFill>
+          <a:schemeClr val="tx1"/>
+        </a:solidFill>
+        <a:latin typeface="+mn-lt"/>
+        <a:ea typeface="+mn-ea"/>
+        <a:cs typeface="+mn-cs"/>
+      </a:defRPr>
+    </a:lvl7pPr>
+    <a:lvl8pPr marL="3200400" algn="l" defTabSz="457200" rtl="0" eaLnBrk="1" latinLnBrk="0" hangingPunct="1">
+      <a:defRPr sz="1200" kern="1200">
+        <a:solidFill>
+          <a:schemeClr val="tx1"/>
+        </a:solidFill>
+        <a:latin typeface="+mn-lt"/>
+        <a:ea typeface="+mn-ea"/>
+        <a:cs typeface="+mn-cs"/>
+      </a:defRPr>
+    </a:lvl8pPr>
+    <a:lvl9pPr marL="3657600" algn="l" defTabSz="457200" rtl="0" eaLnBrk="1" latinLnBrk="0" hangingPunct="1">
+      <a:defRPr sz="1200" kern="1200">
+        <a:solidFill>
+          <a:schemeClr val="tx1"/>
+        </a:solidFill>
+        <a:latin typeface="+mn-lt"/>
+        <a:ea typeface="+mn-ea"/>
+        <a:cs typeface="+mn-cs"/>
+      </a:defRPr>
+    </a:lvl9pPr>
+  </p:notesStyle>
+</p:notesMaster>
+</file>
+
+<file path=ppt/notesSlides/notesSlide1.xml><?xml version="1.0" encoding="utf-8"?>
+<p:notes xmlns:a="http://schemas.openxmlformats.org/drawingml/2006/main" xmlns:p="http://schemas.openxmlformats.org/presentationml/2006/main" xmlns:r="http://schemas.openxmlformats.org/officeDocument/2006/relationships">
+  <p:cSld>
+    <p:spTree>
+      <p:nvGrpSpPr>
+        <p:cNvPr id="1" name=""/>
+        <p:cNvGrpSpPr/>
+        <p:nvPr/>
+      </p:nvGrpSpPr>
+      <p:grpSpPr>
+        <a:xfrm>
+          <a:off x="0" y="0"/>
+          <a:ext cx="0" cy="0"/>
+          <a:chOff x="0" y="0"/>
+          <a:chExt cx="0" cy="0"/>
+        </a:xfrm>
+      </p:grpSpPr>
+      <p:sp>
+        <p:nvSpPr>
+          <p:cNvPr id="2" name="Slide Image Placeholder 1"/>
+          <p:cNvSpPr>
+            <a:spLocks noGrp="1"/>
+          </p:cNvSpPr>
+          <p:nvPr>
+            <p:ph type="sldImg" idx="2"/>
+          </p:nvPr>
+        </p:nvSpPr>
+        <p:spPr/>
+      </p:sp>
+      <p:sp>
+        <p:nvSpPr>
+          <p:cNvPr id="3" name="Notes Placeholder 2"/>
+          <p:cNvSpPr>
+            <a:spLocks noGrp="1"/>
+          </p:cNvSpPr>
+          <p:nvPr>
+            <p:ph type="body" idx="3" sz="quarter"/>
+          </p:nvPr>
+        </p:nvSpPr>
+        <p:spPr/>
+        <p:txBody>
+          <a:bodyPr/>
+          <a:lstStyle/>
+          <a:p>
+            <a:r>
+              <a:t>Bienvenidos al análisis forense del caso IronMarch, uno de los leaks más documentados de la extrema derecha online. Es un foro pequeño en volumen pero enorme en impacto: de ahí salieron ideólogos y miembros vinculados a grupos catalogados como terroristas. Lo que lo hace único para nosotros como analistas no es el contenido ideológico en sí, sino que tenemos ground truth real —personas identificadas judicialmente— para validar cada técnica que vamos a aplicar. La pregunta que guía toda la sesión es: ¿qué puede decirnos la estructura de una red social filtrada sobre el liderazgo real de una organización? Vamos a recorrer el dataset, el análisis con LLM local, el perfilado estilométrico y cerrar con las limitaciones éticas del trabajo.</a:t>
+            </a:r>
+          </a:p>
+        </p:txBody>
+      </p:sp>
+      <p:sp>
+        <p:nvSpPr>
+          <p:cNvPr id="4" name="Slide Number Placeholder 3"/>
+          <p:cNvSpPr>
+            <a:spLocks noGrp="1"/>
+          </p:cNvSpPr>
+          <p:nvPr>
+            <p:ph type="sldNum" idx="5" sz="quarter"/>
+          </p:nvPr>
+        </p:nvSpPr>
+        <p:spPr/>
+      </p:sp>
+    </p:spTree>
+  </p:cSld>
+  <p:clrMapOvr>
+    <a:masterClrMapping/>
+  </p:clrMapOvr>
+</p:notes>
+</file>
+
+<file path=ppt/notesSlides/notesSlide10.xml><?xml version="1.0" encoding="utf-8"?>
+<p:notes xmlns:a="http://schemas.openxmlformats.org/drawingml/2006/main" xmlns:p="http://schemas.openxmlformats.org/presentationml/2006/main" xmlns:r="http://schemas.openxmlformats.org/officeDocument/2006/relationships">
+  <p:cSld>
+    <p:spTree>
+      <p:nvGrpSpPr>
+        <p:cNvPr id="1" name=""/>
+        <p:cNvGrpSpPr/>
+        <p:nvPr/>
+      </p:nvGrpSpPr>
+      <p:grpSpPr>
+        <a:xfrm>
+          <a:off x="0" y="0"/>
+          <a:ext cx="0" cy="0"/>
+          <a:chOff x="0" y="0"/>
+          <a:chExt cx="0" cy="0"/>
+        </a:xfrm>
+      </p:grpSpPr>
+      <p:sp>
+        <p:nvSpPr>
+          <p:cNvPr id="2" name="Slide Image Placeholder 1"/>
+          <p:cNvSpPr>
+            <a:spLocks noGrp="1"/>
+          </p:cNvSpPr>
+          <p:nvPr>
+            <p:ph type="sldImg" idx="2"/>
+          </p:nvPr>
+        </p:nvSpPr>
+        <p:spPr/>
+      </p:sp>
+      <p:sp>
+        <p:nvSpPr>
+          <p:cNvPr id="3" name="Notes Placeholder 2"/>
+          <p:cNvSpPr>
+            <a:spLocks noGrp="1"/>
+          </p:cNvSpPr>
+          <p:nvPr>
+            <p:ph type="body" idx="3" sz="quarter"/>
+          </p:nvPr>
+        </p:nvSpPr>
+        <p:spPr/>
+        <p:txBody>
+          <a:bodyPr/>
+          <a:lstStyle/>
+          <a:p>
+            <a:r>
+              <a:t>Vamos a la práctica: abrimos el notebook 00 y ejecutamos juntos la construcción del grafo de co-participación. Presten atención a la visualización interactiva de los top-150 nodos por grado, porque ahí ya se empieza a intuir la estructura de hub-and-spoke alrededor de MOONLORD. Después vamos a comparar esa red con la de mensajes privados de la sección 4 del mismo notebook, para que vean con sus propios ojos si los brokers coinciden o no.</a:t>
+            </a:r>
+          </a:p>
+        </p:txBody>
+      </p:sp>
+      <p:sp>
+        <p:nvSpPr>
+          <p:cNvPr id="4" name="Slide Number Placeholder 3"/>
+          <p:cNvSpPr>
+            <a:spLocks noGrp="1"/>
+          </p:cNvSpPr>
+          <p:nvPr>
+            <p:ph type="sldNum" idx="5" sz="quarter"/>
+          </p:nvPr>
+        </p:nvSpPr>
+        <p:spPr/>
+      </p:sp>
+    </p:spTree>
+  </p:cSld>
+  <p:clrMapOvr>
+    <a:masterClrMapping/>
+  </p:clrMapOvr>
+</p:notes>
+</file>
+
+<file path=ppt/notesSlides/notesSlide11.xml><?xml version="1.0" encoding="utf-8"?>
+<p:notes xmlns:a="http://schemas.openxmlformats.org/drawingml/2006/main" xmlns:p="http://schemas.openxmlformats.org/presentationml/2006/main" xmlns:r="http://schemas.openxmlformats.org/officeDocument/2006/relationships">
+  <p:cSld>
+    <p:spTree>
+      <p:nvGrpSpPr>
+        <p:cNvPr id="1" name=""/>
+        <p:cNvGrpSpPr/>
+        <p:nvPr/>
+      </p:nvGrpSpPr>
+      <p:grpSpPr>
+        <a:xfrm>
+          <a:off x="0" y="0"/>
+          <a:ext cx="0" cy="0"/>
+          <a:chOff x="0" y="0"/>
+          <a:chExt cx="0" cy="0"/>
+        </a:xfrm>
+      </p:grpSpPr>
+      <p:sp>
+        <p:nvSpPr>
+          <p:cNvPr id="2" name="Slide Image Placeholder 1"/>
+          <p:cNvSpPr>
+            <a:spLocks noGrp="1"/>
+          </p:cNvSpPr>
+          <p:nvPr>
+            <p:ph type="sldImg" idx="2"/>
+          </p:nvPr>
+        </p:nvSpPr>
+        <p:spPr/>
+      </p:sp>
+      <p:sp>
+        <p:nvSpPr>
+          <p:cNvPr id="3" name="Notes Placeholder 2"/>
+          <p:cNvSpPr>
+            <a:spLocks noGrp="1"/>
+          </p:cNvSpPr>
+          <p:nvPr>
+            <p:ph type="body" idx="3" sz="quarter"/>
+          </p:nvPr>
+        </p:nvSpPr>
+        <p:spPr/>
+        <p:txBody>
+          <a:bodyPr/>
+          <a:lstStyle/>
+          <a:p>
+            <a:r>
+              <a:t>Ahora entramos en la parte de procesamiento de lenguaje: BERTopic para descubrir temas y NER con un modelo local, qwen2.5:14b, para extraer entidades. Todo esto corre en local, sin mandar datos sensibles a ninguna API externa, algo especialmente relevante dado el tipo de contenido que estamos analizando.</a:t>
+            </a:r>
+          </a:p>
+        </p:txBody>
+      </p:sp>
+      <p:sp>
+        <p:nvSpPr>
+          <p:cNvPr id="4" name="Slide Number Placeholder 3"/>
+          <p:cNvSpPr>
+            <a:spLocks noGrp="1"/>
+          </p:cNvSpPr>
+          <p:nvPr>
+            <p:ph type="sldNum" idx="5" sz="quarter"/>
+          </p:nvPr>
+        </p:nvSpPr>
+        <p:spPr/>
+      </p:sp>
+    </p:spTree>
+  </p:cSld>
+  <p:clrMapOvr>
+    <a:masterClrMapping/>
+  </p:clrMapOvr>
+</p:notes>
+</file>
+
+<file path=ppt/notesSlides/notesSlide12.xml><?xml version="1.0" encoding="utf-8"?>
+<p:notes xmlns:a="http://schemas.openxmlformats.org/drawingml/2006/main" xmlns:p="http://schemas.openxmlformats.org/presentationml/2006/main" xmlns:r="http://schemas.openxmlformats.org/officeDocument/2006/relationships">
+  <p:cSld>
+    <p:spTree>
+      <p:nvGrpSpPr>
+        <p:cNvPr id="1" name=""/>
+        <p:cNvGrpSpPr/>
+        <p:nvPr/>
+      </p:nvGrpSpPr>
+      <p:grpSpPr>
+        <a:xfrm>
+          <a:off x="0" y="0"/>
+          <a:ext cx="0" cy="0"/>
+          <a:chOff x="0" y="0"/>
+          <a:chExt cx="0" cy="0"/>
+        </a:xfrm>
+      </p:grpSpPr>
+      <p:sp>
+        <p:nvSpPr>
+          <p:cNvPr id="2" name="Slide Image Placeholder 1"/>
+          <p:cNvSpPr>
+            <a:spLocks noGrp="1"/>
+          </p:cNvSpPr>
+          <p:nvPr>
+            <p:ph type="sldImg" idx="2"/>
+          </p:nvPr>
+        </p:nvSpPr>
+        <p:spPr/>
+      </p:sp>
+      <p:sp>
+        <p:nvSpPr>
+          <p:cNvPr id="3" name="Notes Placeholder 2"/>
+          <p:cNvSpPr>
+            <a:spLocks noGrp="1"/>
+          </p:cNvSpPr>
+          <p:nvPr>
+            <p:ph type="body" idx="3" sz="quarter"/>
+          </p:nvPr>
+        </p:nvSpPr>
+        <p:spPr/>
+        <p:txBody>
+          <a:bodyPr/>
+          <a:lstStyle/>
+          <a:p>
+            <a:r>
+              <a:t>BERTopic nos permite descubrir de qué habla realmente el foro sin imponerle categorías nuestras de antemano. Lo interesante es el hallazgo de validación: cuando comparamos los tópicos automáticos con la estructura de subforos declarada, vemos que la ideología no respeta esas fronteras administrativas, permea transversalmente todo el foro. Y noten que el modelo que usamos aquí, sentence-transformers con UMAP y HDBSCAN, no requiere LLM: es rápido y perfectamente reproducible, algo a valorar cuando el volumen de datos es alto.</a:t>
+            </a:r>
+          </a:p>
+        </p:txBody>
+      </p:sp>
+      <p:sp>
+        <p:nvSpPr>
+          <p:cNvPr id="4" name="Slide Number Placeholder 3"/>
+          <p:cNvSpPr>
+            <a:spLocks noGrp="1"/>
+          </p:cNvSpPr>
+          <p:nvPr>
+            <p:ph type="sldNum" idx="5" sz="quarter"/>
+          </p:nvPr>
+        </p:nvSpPr>
+        <p:spPr/>
+      </p:sp>
+    </p:spTree>
+  </p:cSld>
+  <p:clrMapOvr>
+    <a:masterClrMapping/>
+  </p:clrMapOvr>
+</p:notes>
+</file>
+
+<file path=ppt/notesSlides/notesSlide13.xml><?xml version="1.0" encoding="utf-8"?>
+<p:notes xmlns:a="http://schemas.openxmlformats.org/drawingml/2006/main" xmlns:p="http://schemas.openxmlformats.org/presentationml/2006/main" xmlns:r="http://schemas.openxmlformats.org/officeDocument/2006/relationships">
+  <p:cSld>
+    <p:spTree>
+      <p:nvGrpSpPr>
+        <p:cNvPr id="1" name=""/>
+        <p:cNvGrpSpPr/>
+        <p:nvPr/>
+      </p:nvGrpSpPr>
+      <p:grpSpPr>
+        <a:xfrm>
+          <a:off x="0" y="0"/>
+          <a:ext cx="0" cy="0"/>
+          <a:chOff x="0" y="0"/>
+          <a:chExt cx="0" cy="0"/>
+        </a:xfrm>
+      </p:grpSpPr>
+      <p:sp>
+        <p:nvSpPr>
+          <p:cNvPr id="2" name="Slide Image Placeholder 1"/>
+          <p:cNvSpPr>
+            <a:spLocks noGrp="1"/>
+          </p:cNvSpPr>
+          <p:nvPr>
+            <p:ph type="sldImg" idx="2"/>
+          </p:nvPr>
+        </p:nvSpPr>
+        <p:spPr/>
+      </p:sp>
+      <p:sp>
+        <p:nvSpPr>
+          <p:cNvPr id="3" name="Notes Placeholder 2"/>
+          <p:cNvSpPr>
+            <a:spLocks noGrp="1"/>
+          </p:cNvSpPr>
+          <p:nvPr>
+            <p:ph type="body" idx="3" sz="quarter"/>
+          </p:nvPr>
+        </p:nvSpPr>
+        <p:spPr/>
+        <p:txBody>
+          <a:bodyPr/>
+          <a:lstStyle/>
+          <a:p>
+            <a:r>
+              <a:t>Aquí usamos un LLM local para extraer entidades de tipo persona, organización, ideología y hasta armamento, sobre los 50 usuarios más activos. El resultado más llamativo no es la frecuencia de Hitler, que es esperable en este tipo de foro, sino que Evola aparece casi al mismo nivel: eso es una firma distintiva de Iron March frente a otros foros de ultraderecha más genéricos. Y hay un hallazgo con valor forense real: Atomwaffen Division se menciona tres años antes de que fuera clasificada oficialmente como organización terrorista, lo cual sugiere que el foro funcionaba como semillero temprano, no como eco tardío.</a:t>
+            </a:r>
+          </a:p>
+        </p:txBody>
+      </p:sp>
+      <p:sp>
+        <p:nvSpPr>
+          <p:cNvPr id="4" name="Slide Number Placeholder 3"/>
+          <p:cNvSpPr>
+            <a:spLocks noGrp="1"/>
+          </p:cNvSpPr>
+          <p:nvPr>
+            <p:ph type="sldNum" idx="5" sz="quarter"/>
+          </p:nvPr>
+        </p:nvSpPr>
+        <p:spPr/>
+      </p:sp>
+    </p:spTree>
+  </p:cSld>
+  <p:clrMapOvr>
+    <a:masterClrMapping/>
+  </p:clrMapOvr>
+</p:notes>
+</file>
+
+<file path=ppt/notesSlides/notesSlide14.xml><?xml version="1.0" encoding="utf-8"?>
+<p:notes xmlns:a="http://schemas.openxmlformats.org/drawingml/2006/main" xmlns:p="http://schemas.openxmlformats.org/presentationml/2006/main" xmlns:r="http://schemas.openxmlformats.org/officeDocument/2006/relationships">
+  <p:cSld>
+    <p:spTree>
+      <p:nvGrpSpPr>
+        <p:cNvPr id="1" name=""/>
+        <p:cNvGrpSpPr/>
+        <p:nvPr/>
+      </p:nvGrpSpPr>
+      <p:grpSpPr>
+        <a:xfrm>
+          <a:off x="0" y="0"/>
+          <a:ext cx="0" cy="0"/>
+          <a:chOff x="0" y="0"/>
+          <a:chExt cx="0" cy="0"/>
+        </a:xfrm>
+      </p:grpSpPr>
+      <p:sp>
+        <p:nvSpPr>
+          <p:cNvPr id="2" name="Slide Image Placeholder 1"/>
+          <p:cNvSpPr>
+            <a:spLocks noGrp="1"/>
+          </p:cNvSpPr>
+          <p:nvPr>
+            <p:ph type="sldImg" idx="2"/>
+          </p:nvPr>
+        </p:nvSpPr>
+        <p:spPr/>
+      </p:sp>
+      <p:sp>
+        <p:nvSpPr>
+          <p:cNvPr id="3" name="Notes Placeholder 2"/>
+          <p:cNvSpPr>
+            <a:spLocks noGrp="1"/>
+          </p:cNvSpPr>
+          <p:nvPr>
+            <p:ph type="body" idx="3" sz="quarter"/>
+          </p:nvPr>
+        </p:nvSpPr>
+        <p:spPr/>
+        <p:txBody>
+          <a:bodyPr/>
+          <a:lstStyle/>
+          <a:p>
+            <a:r>
+              <a:t>Aquí combinamos series temporales con topics para responder una pregunta concreta: ¿qué eventos del mundo real activaron a esta comunidad? Usamos z-score semanal con un umbral de dos desviaciones estándar, y el único pico estadísticamente confirmado en toda la vida del foro son los atentados de París de 2015. Lo que hay que remarcar es el tono de la reacción: no fue racista en el sentido clásico, fue islamófoba, con picos claros en menciones a 'paris' y 'refugee'. Y noten lo que NO pasó: ni la elección de Trump en 2016 ni Charlottesville en 2017 generaron un pico estadístico, este último probablemente porque el foro ya estaba en declive. La conclusión forense es que la comunidad no reaccionó de forma genérica, usó el atentado como munición narrativa específica contra la inmigración.</a:t>
+            </a:r>
+          </a:p>
+        </p:txBody>
+      </p:sp>
+      <p:sp>
+        <p:nvSpPr>
+          <p:cNvPr id="4" name="Slide Number Placeholder 3"/>
+          <p:cNvSpPr>
+            <a:spLocks noGrp="1"/>
+          </p:cNvSpPr>
+          <p:nvPr>
+            <p:ph type="sldNum" idx="5" sz="quarter"/>
+          </p:nvPr>
+        </p:nvSpPr>
+        <p:spPr/>
+      </p:sp>
+    </p:spTree>
+  </p:cSld>
+  <p:clrMapOvr>
+    <a:masterClrMapping/>
+  </p:clrMapOvr>
+</p:notes>
+</file>
+
+<file path=ppt/notesSlides/notesSlide15.xml><?xml version="1.0" encoding="utf-8"?>
+<p:notes xmlns:a="http://schemas.openxmlformats.org/drawingml/2006/main" xmlns:p="http://schemas.openxmlformats.org/presentationml/2006/main" xmlns:r="http://schemas.openxmlformats.org/officeDocument/2006/relationships">
+  <p:cSld>
+    <p:spTree>
+      <p:nvGrpSpPr>
+        <p:cNvPr id="1" name=""/>
+        <p:cNvGrpSpPr/>
+        <p:nvPr/>
+      </p:nvGrpSpPr>
+      <p:grpSpPr>
+        <a:xfrm>
+          <a:off x="0" y="0"/>
+          <a:ext cx="0" cy="0"/>
+          <a:chOff x="0" y="0"/>
+          <a:chExt cx="0" cy="0"/>
+        </a:xfrm>
+      </p:grpSpPr>
+      <p:sp>
+        <p:nvSpPr>
+          <p:cNvPr id="2" name="Slide Image Placeholder 1"/>
+          <p:cNvSpPr>
+            <a:spLocks noGrp="1"/>
+          </p:cNvSpPr>
+          <p:nvPr>
+            <p:ph type="sldImg" idx="2"/>
+          </p:nvPr>
+        </p:nvSpPr>
+        <p:spPr/>
+      </p:sp>
+      <p:sp>
+        <p:nvSpPr>
+          <p:cNvPr id="3" name="Notes Placeholder 2"/>
+          <p:cNvSpPr>
+            <a:spLocks noGrp="1"/>
+          </p:cNvSpPr>
+          <p:nvPr>
+            <p:ph type="body" idx="3" sz="quarter"/>
+          </p:nvPr>
+        </p:nvSpPr>
+        <p:spPr/>
+        <p:txBody>
+          <a:bodyPr/>
+          <a:lstStyle/>
+          <a:p>
+            <a:r>
+              <a:t>En esta demo abrimos el notebook 02 y ejecutamos el NER sobre los 50 usuarios más activos, que ya tiene checkpoint automático para no perder el progreso si se corta la ejecución. Después visualizamos los picos temporales con z-score y les propongo un ejercicio en vivo: crucen qué usuarios estaban más activos justo en el pico de noviembre de 2015.</a:t>
+            </a:r>
+          </a:p>
+        </p:txBody>
+      </p:sp>
+      <p:sp>
+        <p:nvSpPr>
+          <p:cNvPr id="4" name="Slide Number Placeholder 3"/>
+          <p:cNvSpPr>
+            <a:spLocks noGrp="1"/>
+          </p:cNvSpPr>
+          <p:nvPr>
+            <p:ph type="sldNum" idx="5" sz="quarter"/>
+          </p:nvPr>
+        </p:nvSpPr>
+        <p:spPr/>
+      </p:sp>
+    </p:spTree>
+  </p:cSld>
+  <p:clrMapOvr>
+    <a:masterClrMapping/>
+  </p:clrMapOvr>
+</p:notes>
+</file>
+
+<file path=ppt/notesSlides/notesSlide16.xml><?xml version="1.0" encoding="utf-8"?>
+<p:notes xmlns:a="http://schemas.openxmlformats.org/drawingml/2006/main" xmlns:p="http://schemas.openxmlformats.org/presentationml/2006/main" xmlns:r="http://schemas.openxmlformats.org/officeDocument/2006/relationships">
+  <p:cSld>
+    <p:spTree>
+      <p:nvGrpSpPr>
+        <p:cNvPr id="1" name=""/>
+        <p:cNvGrpSpPr/>
+        <p:nvPr/>
+      </p:nvGrpSpPr>
+      <p:grpSpPr>
+        <a:xfrm>
+          <a:off x="0" y="0"/>
+          <a:ext cx="0" cy="0"/>
+          <a:chOff x="0" y="0"/>
+          <a:chExt cx="0" cy="0"/>
+        </a:xfrm>
+      </p:grpSpPr>
+      <p:sp>
+        <p:nvSpPr>
+          <p:cNvPr id="2" name="Slide Image Placeholder 1"/>
+          <p:cNvSpPr>
+            <a:spLocks noGrp="1"/>
+          </p:cNvSpPr>
+          <p:nvPr>
+            <p:ph type="sldImg" idx="2"/>
+          </p:nvPr>
+        </p:nvSpPr>
+        <p:spPr/>
+      </p:sp>
+      <p:sp>
+        <p:nvSpPr>
+          <p:cNvPr id="3" name="Notes Placeholder 2"/>
+          <p:cNvSpPr>
+            <a:spLocks noGrp="1"/>
+          </p:cNvSpPr>
+          <p:nvPr>
+            <p:ph type="body" idx="3" sz="quarter"/>
+          </p:nvPr>
+        </p:nvSpPr>
+        <p:spPr/>
+        <p:txBody>
+          <a:bodyPr/>
+          <a:lstStyle/>
+          <a:p>
+            <a:r>
+              <a:t>Pasamos ahora a la parte de perfilado individual: cómo representamos a cada usuario como un vector y cómo detectamos estilos de escritura similares con Burrows' Delta. Esta sección es clave para la atribución de sockpuppets, que cerraremos en la sección final.</a:t>
+            </a:r>
+          </a:p>
+        </p:txBody>
+      </p:sp>
+      <p:sp>
+        <p:nvSpPr>
+          <p:cNvPr id="4" name="Slide Number Placeholder 3"/>
+          <p:cNvSpPr>
+            <a:spLocks noGrp="1"/>
+          </p:cNvSpPr>
+          <p:nvPr>
+            <p:ph type="sldNum" idx="5" sz="quarter"/>
+          </p:nvPr>
+        </p:nvSpPr>
+        <p:spPr/>
+      </p:sp>
+    </p:spTree>
+  </p:cSld>
+  <p:clrMapOvr>
+    <a:masterClrMapping/>
+  </p:clrMapOvr>
+</p:notes>
+</file>
+
+<file path=ppt/notesSlides/notesSlide17.xml><?xml version="1.0" encoding="utf-8"?>
+<p:notes xmlns:a="http://schemas.openxmlformats.org/drawingml/2006/main" xmlns:p="http://schemas.openxmlformats.org/presentationml/2006/main" xmlns:r="http://schemas.openxmlformats.org/officeDocument/2006/relationships">
+  <p:cSld>
+    <p:spTree>
+      <p:nvGrpSpPr>
+        <p:cNvPr id="1" name=""/>
+        <p:cNvGrpSpPr/>
+        <p:nvPr/>
+      </p:nvGrpSpPr>
+      <p:grpSpPr>
+        <a:xfrm>
+          <a:off x="0" y="0"/>
+          <a:ext cx="0" cy="0"/>
+          <a:chOff x="0" y="0"/>
+          <a:chExt cx="0" cy="0"/>
+        </a:xfrm>
+      </p:grpSpPr>
+      <p:sp>
+        <p:nvSpPr>
+          <p:cNvPr id="2" name="Slide Image Placeholder 1"/>
+          <p:cNvSpPr>
+            <a:spLocks noGrp="1"/>
+          </p:cNvSpPr>
+          <p:nvPr>
+            <p:ph type="sldImg" idx="2"/>
+          </p:nvPr>
+        </p:nvSpPr>
+        <p:spPr/>
+      </p:sp>
+      <p:sp>
+        <p:nvSpPr>
+          <p:cNvPr id="3" name="Notes Placeholder 2"/>
+          <p:cNvSpPr>
+            <a:spLocks noGrp="1"/>
+          </p:cNvSpPr>
+          <p:nvPr>
+            <p:ph type="body" idx="3" sz="quarter"/>
+          </p:nvPr>
+        </p:nvSpPr>
+        <p:spPr/>
+        <p:txBody>
+          <a:bodyPr/>
+          <a:lstStyle/>
+          <a:p>
+            <a:r>
+              <a:t>La pregunta de esta diapositiva es puramente de ingeniería: ¿cuántos posts necesito procesar para representar bien a un usuario, sin gastar nueve horas de GPU? Probamos cinco estrategias, desde concatenar todo el texto de un usuario hasta promediar embeddings de sus posts más largos. El resultado que quiero que se lleven es el punto óptimo: la estrategia D, con los cien posts más largos, alcanza una correlación de 0.86 contra el cálculo completo, en poco más de un tercio del tiempo. Esto es una lección general de trabajo con LLMs a escala: el muestreo inteligente casi siempre supera en costo-beneficio al procesamiento exhaustivo.</a:t>
+            </a:r>
+          </a:p>
+        </p:txBody>
+      </p:sp>
+      <p:sp>
+        <p:nvSpPr>
+          <p:cNvPr id="4" name="Slide Number Placeholder 3"/>
+          <p:cNvSpPr>
+            <a:spLocks noGrp="1"/>
+          </p:cNvSpPr>
+          <p:nvPr>
+            <p:ph type="sldNum" idx="5" sz="quarter"/>
+          </p:nvPr>
+        </p:nvSpPr>
+        <p:spPr/>
+      </p:sp>
+    </p:spTree>
+  </p:cSld>
+  <p:clrMapOvr>
+    <a:masterClrMapping/>
+  </p:clrMapOvr>
+</p:notes>
+</file>
+
+<file path=ppt/notesSlides/notesSlide18.xml><?xml version="1.0" encoding="utf-8"?>
+<p:notes xmlns:a="http://schemas.openxmlformats.org/drawingml/2006/main" xmlns:p="http://schemas.openxmlformats.org/presentationml/2006/main" xmlns:r="http://schemas.openxmlformats.org/officeDocument/2006/relationships">
+  <p:cSld>
+    <p:spTree>
+      <p:nvGrpSpPr>
+        <p:cNvPr id="1" name=""/>
+        <p:cNvGrpSpPr/>
+        <p:nvPr/>
+      </p:nvGrpSpPr>
+      <p:grpSpPr>
+        <a:xfrm>
+          <a:off x="0" y="0"/>
+          <a:ext cx="0" cy="0"/>
+          <a:chOff x="0" y="0"/>
+          <a:chExt cx="0" cy="0"/>
+        </a:xfrm>
+      </p:grpSpPr>
+      <p:sp>
+        <p:nvSpPr>
+          <p:cNvPr id="2" name="Slide Image Placeholder 1"/>
+          <p:cNvSpPr>
+            <a:spLocks noGrp="1"/>
+          </p:cNvSpPr>
+          <p:nvPr>
+            <p:ph type="sldImg" idx="2"/>
+          </p:nvPr>
+        </p:nvSpPr>
+        <p:spPr/>
+      </p:sp>
+      <p:sp>
+        <p:nvSpPr>
+          <p:cNvPr id="3" name="Notes Placeholder 2"/>
+          <p:cNvSpPr>
+            <a:spLocks noGrp="1"/>
+          </p:cNvSpPr>
+          <p:nvPr>
+            <p:ph type="body" idx="3" sz="quarter"/>
+          </p:nvPr>
+        </p:nvSpPr>
+        <p:spPr/>
+        <p:txBody>
+          <a:bodyPr/>
+          <a:lstStyle/>
+          <a:p>
+            <a:r>
+              <a:t>Esta tabla es la evidencia numérica de la decisión que acabamos de justificar. Miren la columna de rendimiento marginal: pasar de 50 a 100 posts nos cuesta 37 minutos más pero suma 6 puntos de correlación, mientras que pasar de 100 a 150 cuesta un tiempo similar pero suma menos de la mitad de esa mejora. Esa es la definición práctica de rendimientos decrecientes, y es el criterio que deberían aplicar en sus propios proyectos antes de asumir que 'más datos siempre es mejor'.</a:t>
+            </a:r>
+          </a:p>
+        </p:txBody>
+      </p:sp>
+      <p:sp>
+        <p:nvSpPr>
+          <p:cNvPr id="4" name="Slide Number Placeholder 3"/>
+          <p:cNvSpPr>
+            <a:spLocks noGrp="1"/>
+          </p:cNvSpPr>
+          <p:nvPr>
+            <p:ph type="sldNum" idx="5" sz="quarter"/>
+          </p:nvPr>
+        </p:nvSpPr>
+        <p:spPr/>
+      </p:sp>
+    </p:spTree>
+  </p:cSld>
+  <p:clrMapOvr>
+    <a:masterClrMapping/>
+  </p:clrMapOvr>
+</p:notes>
+</file>
+
+<file path=ppt/notesSlides/notesSlide19.xml><?xml version="1.0" encoding="utf-8"?>
+<p:notes xmlns:a="http://schemas.openxmlformats.org/drawingml/2006/main" xmlns:p="http://schemas.openxmlformats.org/presentationml/2006/main" xmlns:r="http://schemas.openxmlformats.org/officeDocument/2006/relationships">
+  <p:cSld>
+    <p:spTree>
+      <p:nvGrpSpPr>
+        <p:cNvPr id="1" name=""/>
+        <p:cNvGrpSpPr/>
+        <p:nvPr/>
+      </p:nvGrpSpPr>
+      <p:grpSpPr>
+        <a:xfrm>
+          <a:off x="0" y="0"/>
+          <a:ext cx="0" cy="0"/>
+          <a:chOff x="0" y="0"/>
+          <a:chExt cx="0" cy="0"/>
+        </a:xfrm>
+      </p:grpSpPr>
+      <p:sp>
+        <p:nvSpPr>
+          <p:cNvPr id="2" name="Slide Image Placeholder 1"/>
+          <p:cNvSpPr>
+            <a:spLocks noGrp="1"/>
+          </p:cNvSpPr>
+          <p:nvPr>
+            <p:ph type="sldImg" idx="2"/>
+          </p:nvPr>
+        </p:nvSpPr>
+        <p:spPr/>
+      </p:sp>
+      <p:sp>
+        <p:nvSpPr>
+          <p:cNvPr id="3" name="Notes Placeholder 2"/>
+          <p:cNvSpPr>
+            <a:spLocks noGrp="1"/>
+          </p:cNvSpPr>
+          <p:nvPr>
+            <p:ph type="body" idx="3" sz="quarter"/>
+          </p:nvPr>
+        </p:nvSpPr>
+        <p:spPr/>
+        <p:txBody>
+          <a:bodyPr/>
+          <a:lstStyle/>
+          <a:p>
+            <a:r>
+              <a:t>Reducimos el espacio de embeddings de 4096 dimensiones a un plano 2D con UMAP, preservando la estructura de vecindad local, y después aplicamos HDBSCAN para detectar clusters sin tener que decidir de antemano cuántos grupos existen. Lo interesante es que los clusters que aparecen no son ruido: se corresponden con corrientes ideológicas coherentes, como los aceleracionistas o los nacional-bolcheviques. Y el cluster de ruido, el -1, agrupa a usuarios esporádicos sin afiliación clara, que es exactamente lo que esperaríamos si el modelo está capturando señal real y no artefactos.</a:t>
+            </a:r>
+          </a:p>
+        </p:txBody>
+      </p:sp>
+      <p:sp>
+        <p:nvSpPr>
+          <p:cNvPr id="4" name="Slide Number Placeholder 3"/>
+          <p:cNvSpPr>
+            <a:spLocks noGrp="1"/>
+          </p:cNvSpPr>
+          <p:nvPr>
+            <p:ph type="sldNum" idx="5" sz="quarter"/>
+          </p:nvPr>
+        </p:nvSpPr>
+        <p:spPr/>
+      </p:sp>
+    </p:spTree>
+  </p:cSld>
+  <p:clrMapOvr>
+    <a:masterClrMapping/>
+  </p:clrMapOvr>
+</p:notes>
+</file>
+
+<file path=ppt/notesSlides/notesSlide2.xml><?xml version="1.0" encoding="utf-8"?>
+<p:notes xmlns:a="http://schemas.openxmlformats.org/drawingml/2006/main" xmlns:p="http://schemas.openxmlformats.org/presentationml/2006/main" xmlns:r="http://schemas.openxmlformats.org/officeDocument/2006/relationships">
+  <p:cSld>
+    <p:spTree>
+      <p:nvGrpSpPr>
+        <p:cNvPr id="1" name=""/>
+        <p:cNvGrpSpPr/>
+        <p:nvPr/>
+      </p:nvGrpSpPr>
+      <p:grpSpPr>
+        <a:xfrm>
+          <a:off x="0" y="0"/>
+          <a:ext cx="0" cy="0"/>
+          <a:chOff x="0" y="0"/>
+          <a:chExt cx="0" cy="0"/>
+        </a:xfrm>
+      </p:grpSpPr>
+      <p:sp>
+        <p:nvSpPr>
+          <p:cNvPr id="2" name="Slide Image Placeholder 1"/>
+          <p:cNvSpPr>
+            <a:spLocks noGrp="1"/>
+          </p:cNvSpPr>
+          <p:nvPr>
+            <p:ph type="sldImg" idx="2"/>
+          </p:nvPr>
+        </p:nvSpPr>
+        <p:spPr/>
+      </p:sp>
+      <p:sp>
+        <p:nvSpPr>
+          <p:cNvPr id="3" name="Notes Placeholder 2"/>
+          <p:cNvSpPr>
+            <a:spLocks noGrp="1"/>
+          </p:cNvSpPr>
+          <p:nvPr>
+            <p:ph type="body" idx="3" sz="quarter"/>
+          </p:nvPr>
+        </p:nvSpPr>
+        <p:spPr/>
+        <p:txBody>
+          <a:bodyPr/>
+          <a:lstStyle/>
+          <a:p>
+            <a:r>
+              <a:t>Antes de tocar cualquier modelo, necesitamos entender qué es Iron March y qué contiene el dump que estamos analizando. Vamos a ver la estructura de las tablas IPS 4.x y por qué este leak es distinto a la mayoría que vemos en el curso.</a:t>
+            </a:r>
+          </a:p>
+        </p:txBody>
+      </p:sp>
+      <p:sp>
+        <p:nvSpPr>
+          <p:cNvPr id="4" name="Slide Number Placeholder 3"/>
+          <p:cNvSpPr>
+            <a:spLocks noGrp="1"/>
+          </p:cNvSpPr>
+          <p:nvPr>
+            <p:ph type="sldNum" idx="5" sz="quarter"/>
+          </p:nvPr>
+        </p:nvSpPr>
+        <p:spPr/>
+      </p:sp>
+    </p:spTree>
+  </p:cSld>
+  <p:clrMapOvr>
+    <a:masterClrMapping/>
+  </p:clrMapOvr>
+</p:notes>
+</file>
+
+<file path=ppt/notesSlides/notesSlide20.xml><?xml version="1.0" encoding="utf-8"?>
+<p:notes xmlns:a="http://schemas.openxmlformats.org/drawingml/2006/main" xmlns:p="http://schemas.openxmlformats.org/presentationml/2006/main" xmlns:r="http://schemas.openxmlformats.org/officeDocument/2006/relationships">
+  <p:cSld>
+    <p:spTree>
+      <p:nvGrpSpPr>
+        <p:cNvPr id="1" name=""/>
+        <p:cNvGrpSpPr/>
+        <p:nvPr/>
+      </p:nvGrpSpPr>
+      <p:grpSpPr>
+        <a:xfrm>
+          <a:off x="0" y="0"/>
+          <a:ext cx="0" cy="0"/>
+          <a:chOff x="0" y="0"/>
+          <a:chExt cx="0" cy="0"/>
+        </a:xfrm>
+      </p:grpSpPr>
+      <p:sp>
+        <p:nvSpPr>
+          <p:cNvPr id="2" name="Slide Image Placeholder 1"/>
+          <p:cNvSpPr>
+            <a:spLocks noGrp="1"/>
+          </p:cNvSpPr>
+          <p:nvPr>
+            <p:ph type="sldImg" idx="2"/>
+          </p:nvPr>
+        </p:nvSpPr>
+        <p:spPr/>
+      </p:sp>
+      <p:sp>
+        <p:nvSpPr>
+          <p:cNvPr id="3" name="Notes Placeholder 2"/>
+          <p:cNvSpPr>
+            <a:spLocks noGrp="1"/>
+          </p:cNvSpPr>
+          <p:nvPr>
+            <p:ph type="body" idx="3" sz="quarter"/>
+          </p:nvPr>
+        </p:nvSpPr>
+        <p:spPr/>
+        <p:txBody>
+          <a:bodyPr/>
+          <a:lstStyle/>
+          <a:p>
+            <a:r>
+              <a:t>Burrows' Delta es una técnica clásica de estilometría: compara la frecuencia relativa de las palabras más comunes entre dos autores, normalizada por z-score, para estimar si comparten estilo de escritura. Aplicado a los 150 usuarios con más de 500 palabras, el par más sospechoso que encontramos es el usuario 255 con Talleyrand. Fíjense en la convergencia de señales: Delta de 0.46, que es muy bajo, más una similitud temporal del 99%, es decir, prácticamente el mismo horario de actividad. Ese patrón, combinando estilo y horario, es el tipo de evidencia circunstancial que en un caso real ameritaría investigación adicional, nunca una conclusión definitiva por sí sola.</a:t>
+            </a:r>
+          </a:p>
+        </p:txBody>
+      </p:sp>
+      <p:sp>
+        <p:nvSpPr>
+          <p:cNvPr id="4" name="Slide Number Placeholder 3"/>
+          <p:cNvSpPr>
+            <a:spLocks noGrp="1"/>
+          </p:cNvSpPr>
+          <p:nvPr>
+            <p:ph type="sldNum" idx="5" sz="quarter"/>
+          </p:nvPr>
+        </p:nvSpPr>
+        <p:spPr/>
+      </p:sp>
+    </p:spTree>
+  </p:cSld>
+  <p:clrMapOvr>
+    <a:masterClrMapping/>
+  </p:clrMapOvr>
+</p:notes>
+</file>
+
+<file path=ppt/notesSlides/notesSlide21.xml><?xml version="1.0" encoding="utf-8"?>
+<p:notes xmlns:a="http://schemas.openxmlformats.org/drawingml/2006/main" xmlns:p="http://schemas.openxmlformats.org/presentationml/2006/main" xmlns:r="http://schemas.openxmlformats.org/officeDocument/2006/relationships">
+  <p:cSld>
+    <p:spTree>
+      <p:nvGrpSpPr>
+        <p:cNvPr id="1" name=""/>
+        <p:cNvGrpSpPr/>
+        <p:nvPr/>
+      </p:nvGrpSpPr>
+      <p:grpSpPr>
+        <a:xfrm>
+          <a:off x="0" y="0"/>
+          <a:ext cx="0" cy="0"/>
+          <a:chOff x="0" y="0"/>
+          <a:chExt cx="0" cy="0"/>
+        </a:xfrm>
+      </p:grpSpPr>
+      <p:sp>
+        <p:nvSpPr>
+          <p:cNvPr id="2" name="Slide Image Placeholder 1"/>
+          <p:cNvSpPr>
+            <a:spLocks noGrp="1"/>
+          </p:cNvSpPr>
+          <p:nvPr>
+            <p:ph type="sldImg" idx="2"/>
+          </p:nvPr>
+        </p:nvSpPr>
+        <p:spPr/>
+      </p:sp>
+      <p:sp>
+        <p:nvSpPr>
+          <p:cNvPr id="3" name="Notes Placeholder 2"/>
+          <p:cNvSpPr>
+            <a:spLocks noGrp="1"/>
+          </p:cNvSpPr>
+          <p:nvPr>
+            <p:ph type="body" idx="3" sz="quarter"/>
+          </p:nvPr>
+        </p:nvSpPr>
+        <p:spPr/>
+        <p:txBody>
+          <a:bodyPr/>
+          <a:lstStyle/>
+          <a:p>
+            <a:r>
+              <a:t>En esta demo abrimos el notebook 03, verificamos que las estrategias C, D y E ya están cacheadas para no repetir horas de cómputo en vivo, y exploramos el UMAP interactivo para identificar los clusters ideológicos. Cerramos con el heatmap de Burrows' Delta: busquen el par 255 y Talleyrand en la esquina inferior, con el valor más bajo de toda la matriz.</a:t>
+            </a:r>
+          </a:p>
+        </p:txBody>
+      </p:sp>
+      <p:sp>
+        <p:nvSpPr>
+          <p:cNvPr id="4" name="Slide Number Placeholder 3"/>
+          <p:cNvSpPr>
+            <a:spLocks noGrp="1"/>
+          </p:cNvSpPr>
+          <p:nvPr>
+            <p:ph type="sldNum" idx="5" sz="quarter"/>
+          </p:nvPr>
+        </p:nvSpPr>
+        <p:spPr/>
+      </p:sp>
+    </p:spTree>
+  </p:cSld>
+  <p:clrMapOvr>
+    <a:masterClrMapping/>
+  </p:clrMapOvr>
+</p:notes>
+</file>
+
+<file path=ppt/notesSlides/notesSlide22.xml><?xml version="1.0" encoding="utf-8"?>
+<p:notes xmlns:a="http://schemas.openxmlformats.org/drawingml/2006/main" xmlns:p="http://schemas.openxmlformats.org/presentationml/2006/main" xmlns:r="http://schemas.openxmlformats.org/officeDocument/2006/relationships">
+  <p:cSld>
+    <p:spTree>
+      <p:nvGrpSpPr>
+        <p:cNvPr id="1" name=""/>
+        <p:cNvGrpSpPr/>
+        <p:nvPr/>
+      </p:nvGrpSpPr>
+      <p:grpSpPr>
+        <a:xfrm>
+          <a:off x="0" y="0"/>
+          <a:ext cx="0" cy="0"/>
+          <a:chOff x="0" y="0"/>
+          <a:chExt cx="0" cy="0"/>
+        </a:xfrm>
+      </p:grpSpPr>
+      <p:sp>
+        <p:nvSpPr>
+          <p:cNvPr id="2" name="Slide Image Placeholder 1"/>
+          <p:cNvSpPr>
+            <a:spLocks noGrp="1"/>
+          </p:cNvSpPr>
+          <p:nvPr>
+            <p:ph type="sldImg" idx="2"/>
+          </p:nvPr>
+        </p:nvSpPr>
+        <p:spPr/>
+      </p:sp>
+      <p:sp>
+        <p:nvSpPr>
+          <p:cNvPr id="3" name="Notes Placeholder 2"/>
+          <p:cNvSpPr>
+            <a:spLocks noGrp="1"/>
+          </p:cNvSpPr>
+          <p:nvPr>
+            <p:ph type="body" idx="3" sz="quarter"/>
+          </p:nvPr>
+        </p:nvSpPr>
+        <p:spPr/>
+        <p:txBody>
+          <a:bodyPr/>
+          <a:lstStyle/>
+          <a:p>
+            <a:r>
+              <a:t>Llegamos al cierre: cómo combinamos todas las señales que vimos —estilo, tiempo, red— en un criterio de atribución, y qué límites éticos y metodológicos tiene todo este análisis.</a:t>
+            </a:r>
+          </a:p>
+        </p:txBody>
+      </p:sp>
+      <p:sp>
+        <p:nvSpPr>
+          <p:cNvPr id="4" name="Slide Number Placeholder 3"/>
+          <p:cNvSpPr>
+            <a:spLocks noGrp="1"/>
+          </p:cNvSpPr>
+          <p:nvPr>
+            <p:ph type="sldNum" idx="5" sz="quarter"/>
+          </p:nvPr>
+        </p:nvSpPr>
+        <p:spPr/>
+      </p:sp>
+    </p:spTree>
+  </p:cSld>
+  <p:clrMapOvr>
+    <a:masterClrMapping/>
+  </p:clrMapOvr>
+</p:notes>
+</file>
+
+<file path=ppt/notesSlides/notesSlide23.xml><?xml version="1.0" encoding="utf-8"?>
+<p:notes xmlns:a="http://schemas.openxmlformats.org/drawingml/2006/main" xmlns:p="http://schemas.openxmlformats.org/presentationml/2006/main" xmlns:r="http://schemas.openxmlformats.org/officeDocument/2006/relationships">
+  <p:cSld>
+    <p:spTree>
+      <p:nvGrpSpPr>
+        <p:cNvPr id="1" name=""/>
+        <p:cNvGrpSpPr/>
+        <p:nvPr/>
+      </p:nvGrpSpPr>
+      <p:grpSpPr>
+        <a:xfrm>
+          <a:off x="0" y="0"/>
+          <a:ext cx="0" cy="0"/>
+          <a:chOff x="0" y="0"/>
+          <a:chExt cx="0" cy="0"/>
+        </a:xfrm>
+      </p:grpSpPr>
+      <p:sp>
+        <p:nvSpPr>
+          <p:cNvPr id="2" name="Slide Image Placeholder 1"/>
+          <p:cNvSpPr>
+            <a:spLocks noGrp="1"/>
+          </p:cNvSpPr>
+          <p:nvPr>
+            <p:ph type="sldImg" idx="2"/>
+          </p:nvPr>
+        </p:nvSpPr>
+        <p:spPr/>
+      </p:sp>
+      <p:sp>
+        <p:nvSpPr>
+          <p:cNvPr id="3" name="Notes Placeholder 2"/>
+          <p:cNvSpPr>
+            <a:spLocks noGrp="1"/>
+          </p:cNvSpPr>
+          <p:nvPr>
+            <p:ph type="body" idx="3" sz="quarter"/>
+          </p:nvPr>
+        </p:nvSpPr>
+        <p:spPr/>
+        <p:txBody>
+          <a:bodyPr/>
+          <a:lstStyle/>
+          <a:p>
+            <a:r>
+              <a:t>Ninguna de las técnicas que vimos hoy es concluyente por sí sola, y quiero que eso quede muy claro: ni el estilo, ni el horario, ni la cercanía en el espacio de embeddings prueban identidad por separado. Lo que proponemos es una regla de convergencia: si un mismo par de usuarios coincide en tres o más señales independientes, ese par merece una investigación adicional, no una conclusión automática. Esto es exactamente el estándar que deberían aplicar en su propio trabajo forense: la evidencia digital rara vez es una prueba única, es la acumulación de indicios independientes lo que sostiene una hipótesis.</a:t>
+            </a:r>
+          </a:p>
+        </p:txBody>
+      </p:sp>
+      <p:sp>
+        <p:nvSpPr>
+          <p:cNvPr id="4" name="Slide Number Placeholder 3"/>
+          <p:cNvSpPr>
+            <a:spLocks noGrp="1"/>
+          </p:cNvSpPr>
+          <p:nvPr>
+            <p:ph type="sldNum" idx="5" sz="quarter"/>
+          </p:nvPr>
+        </p:nvSpPr>
+        <p:spPr/>
+      </p:sp>
+    </p:spTree>
+  </p:cSld>
+  <p:clrMapOvr>
+    <a:masterClrMapping/>
+  </p:clrMapOvr>
+</p:notes>
+</file>
+
+<file path=ppt/notesSlides/notesSlide24.xml><?xml version="1.0" encoding="utf-8"?>
+<p:notes xmlns:a="http://schemas.openxmlformats.org/drawingml/2006/main" xmlns:p="http://schemas.openxmlformats.org/presentationml/2006/main" xmlns:r="http://schemas.openxmlformats.org/officeDocument/2006/relationships">
+  <p:cSld>
+    <p:spTree>
+      <p:nvGrpSpPr>
+        <p:cNvPr id="1" name=""/>
+        <p:cNvGrpSpPr/>
+        <p:nvPr/>
+      </p:nvGrpSpPr>
+      <p:grpSpPr>
+        <a:xfrm>
+          <a:off x="0" y="0"/>
+          <a:ext cx="0" cy="0"/>
+          <a:chOff x="0" y="0"/>
+          <a:chExt cx="0" cy="0"/>
+        </a:xfrm>
+      </p:grpSpPr>
+      <p:sp>
+        <p:nvSpPr>
+          <p:cNvPr id="2" name="Slide Image Placeholder 1"/>
+          <p:cNvSpPr>
+            <a:spLocks noGrp="1"/>
+          </p:cNvSpPr>
+          <p:nvPr>
+            <p:ph type="sldImg" idx="2"/>
+          </p:nvPr>
+        </p:nvSpPr>
+        <p:spPr/>
+      </p:sp>
+      <p:sp>
+        <p:nvSpPr>
+          <p:cNvPr id="3" name="Notes Placeholder 2"/>
+          <p:cNvSpPr>
+            <a:spLocks noGrp="1"/>
+          </p:cNvSpPr>
+          <p:nvPr>
+            <p:ph type="body" idx="3" sz="quarter"/>
+          </p:nvPr>
+        </p:nvSpPr>
+        <p:spPr/>
+        <p:txBody>
+          <a:bodyPr/>
+          <a:lstStyle/>
+          <a:p>
+            <a:r>
+              <a:t>Este es el resumen de todo lo que recorrimos hoy: la estructura de la red, la eficiencia del muestreo de embeddings, y el hallazgo temporal de los atentados de París. Pero quiero que se detengan especialmente en la columna de la derecha, las limitaciones. Estos resultados son leads de investigación, no pruebas periciales, y trabajamos con datos de personas reales, así que el manejo mínimamente invasivo no es un capricho metodológico, es una responsabilidad ética. El objetivo de todo este análisis es defensivo: entender cómo operan estas redes, no exponer o publicar perfiles de individuos.</a:t>
+            </a:r>
+          </a:p>
+        </p:txBody>
+      </p:sp>
+      <p:sp>
+        <p:nvSpPr>
+          <p:cNvPr id="4" name="Slide Number Placeholder 3"/>
+          <p:cNvSpPr>
+            <a:spLocks noGrp="1"/>
+          </p:cNvSpPr>
+          <p:nvPr>
+            <p:ph type="sldNum" idx="5" sz="quarter"/>
+          </p:nvPr>
+        </p:nvSpPr>
+        <p:spPr/>
+      </p:sp>
+    </p:spTree>
+  </p:cSld>
+  <p:clrMapOvr>
+    <a:masterClrMapping/>
+  </p:clrMapOvr>
+</p:notes>
+</file>
+
+<file path=ppt/notesSlides/notesSlide25.xml><?xml version="1.0" encoding="utf-8"?>
+<p:notes xmlns:a="http://schemas.openxmlformats.org/drawingml/2006/main" xmlns:p="http://schemas.openxmlformats.org/presentationml/2006/main" xmlns:r="http://schemas.openxmlformats.org/officeDocument/2006/relationships">
+  <p:cSld>
+    <p:spTree>
+      <p:nvGrpSpPr>
+        <p:cNvPr id="1" name=""/>
+        <p:cNvGrpSpPr/>
+        <p:nvPr/>
+      </p:nvGrpSpPr>
+      <p:grpSpPr>
+        <a:xfrm>
+          <a:off x="0" y="0"/>
+          <a:ext cx="0" cy="0"/>
+          <a:chOff x="0" y="0"/>
+          <a:chExt cx="0" cy="0"/>
+        </a:xfrm>
+      </p:grpSpPr>
+      <p:sp>
+        <p:nvSpPr>
+          <p:cNvPr id="2" name="Slide Image Placeholder 1"/>
+          <p:cNvSpPr>
+            <a:spLocks noGrp="1"/>
+          </p:cNvSpPr>
+          <p:nvPr>
+            <p:ph type="sldImg" idx="2"/>
+          </p:nvPr>
+        </p:nvSpPr>
+        <p:spPr/>
+      </p:sp>
+      <p:sp>
+        <p:nvSpPr>
+          <p:cNvPr id="3" name="Notes Placeholder 2"/>
+          <p:cNvSpPr>
+            <a:spLocks noGrp="1"/>
+          </p:cNvSpPr>
+          <p:nvPr>
+            <p:ph type="body" idx="3" sz="quarter"/>
+          </p:nvPr>
+        </p:nvSpPr>
+        <p:spPr/>
+        <p:txBody>
+          <a:bodyPr/>
+          <a:lstStyle/>
+          <a:p>
+            <a:r>
+              <a:t>Para cerrar, quiero que se lleven cuatro ideas del caso IronMarch. Primero, la estructura misma de una red puede revelar el tipo de liderazgo de una organización, en este caso una jerarquía plana con un centro de poder oculto en los mensajes privados. Segundo, los LLMs locales hacen viable analizar contenido extremadamente sensible sin exponerlo a terceros vía API. Tercero, el muestreo inteligente no es un atajo que sacrifica calidad, es una decisión de ingeniería que preserva la señal a una fracción del costo. Y por último, el ground truth es un recurso escaso: cuando lo tenemos, como en este caso, es lo que nos permite calibrar y confiar en toda la metodología que aplicamos después a casos donde no tenemos esa certeza.</a:t>
+            </a:r>
+          </a:p>
+        </p:txBody>
+      </p:sp>
+      <p:sp>
+        <p:nvSpPr>
+          <p:cNvPr id="4" name="Slide Number Placeholder 3"/>
+          <p:cNvSpPr>
+            <a:spLocks noGrp="1"/>
+          </p:cNvSpPr>
+          <p:nvPr>
+            <p:ph type="sldNum" idx="5" sz="quarter"/>
+          </p:nvPr>
+        </p:nvSpPr>
+        <p:spPr/>
+      </p:sp>
+    </p:spTree>
+  </p:cSld>
+  <p:clrMapOvr>
+    <a:masterClrMapping/>
+  </p:clrMapOvr>
+</p:notes>
+</file>
+
+<file path=ppt/notesSlides/notesSlide3.xml><?xml version="1.0" encoding="utf-8"?>
+<p:notes xmlns:a="http://schemas.openxmlformats.org/drawingml/2006/main" xmlns:p="http://schemas.openxmlformats.org/presentationml/2006/main" xmlns:r="http://schemas.openxmlformats.org/officeDocument/2006/relationships">
+  <p:cSld>
+    <p:spTree>
+      <p:nvGrpSpPr>
+        <p:cNvPr id="1" name=""/>
+        <p:cNvGrpSpPr/>
+        <p:nvPr/>
+      </p:nvGrpSpPr>
+      <p:grpSpPr>
+        <a:xfrm>
+          <a:off x="0" y="0"/>
+          <a:ext cx="0" cy="0"/>
+          <a:chOff x="0" y="0"/>
+          <a:chExt cx="0" cy="0"/>
+        </a:xfrm>
+      </p:grpSpPr>
+      <p:sp>
+        <p:nvSpPr>
+          <p:cNvPr id="2" name="Slide Image Placeholder 1"/>
+          <p:cNvSpPr>
+            <a:spLocks noGrp="1"/>
+          </p:cNvSpPr>
+          <p:nvPr>
+            <p:ph type="sldImg" idx="2"/>
+          </p:nvPr>
+        </p:nvSpPr>
+        <p:spPr/>
+      </p:sp>
+      <p:sp>
+        <p:nvSpPr>
+          <p:cNvPr id="3" name="Notes Placeholder 2"/>
+          <p:cNvSpPr>
+            <a:spLocks noGrp="1"/>
+          </p:cNvSpPr>
+          <p:nvPr>
+            <p:ph type="body" idx="3" sz="quarter"/>
+          </p:nvPr>
+        </p:nvSpPr>
+        <p:spPr/>
+        <p:txBody>
+          <a:bodyPr/>
+          <a:lstStyle/>
+          <a:p>
+            <a:r>
+              <a:t>Iron March no fue un foro masivo, pero sí un nodo de conexión entre distintas corrientes del fascismo internacional, desde el neonazismo clásico hasta el aceleracionismo inspirado en Evola. Es importante remarcar que no hablamos de sospechas: varios miembros están hoy vinculados judicialmente a organizaciones catalogadas como terroristas, como Atomwaffen Division o The Base. El leak de 2019 nos da un dump SQL completo, lo cual es poco común, y eso es lo que nos permite hacer un análisis técnico serio. Quiero que se queden con una idea: tenemos ground truth, es decir, hechos ya verificados por la justicia, contra los que podemos contrastar nuestros hallazgos computacionales. Eso cambia completamente el valor pedagógico de este caso frente a otros leaks donde solo especulamos.</a:t>
+            </a:r>
+          </a:p>
+        </p:txBody>
+      </p:sp>
+      <p:sp>
+        <p:nvSpPr>
+          <p:cNvPr id="4" name="Slide Number Placeholder 3"/>
+          <p:cNvSpPr>
+            <a:spLocks noGrp="1"/>
+          </p:cNvSpPr>
+          <p:nvPr>
+            <p:ph type="sldNum" idx="5" sz="quarter"/>
+          </p:nvPr>
+        </p:nvSpPr>
+        <p:spPr/>
+      </p:sp>
+    </p:spTree>
+  </p:cSld>
+  <p:clrMapOvr>
+    <a:masterClrMapping/>
+  </p:clrMapOvr>
+</p:notes>
+</file>
+
+<file path=ppt/notesSlides/notesSlide4.xml><?xml version="1.0" encoding="utf-8"?>
+<p:notes xmlns:a="http://schemas.openxmlformats.org/drawingml/2006/main" xmlns:p="http://schemas.openxmlformats.org/presentationml/2006/main" xmlns:r="http://schemas.openxmlformats.org/officeDocument/2006/relationships">
+  <p:cSld>
+    <p:spTree>
+      <p:nvGrpSpPr>
+        <p:cNvPr id="1" name=""/>
+        <p:cNvGrpSpPr/>
+        <p:nvPr/>
+      </p:nvGrpSpPr>
+      <p:grpSpPr>
+        <a:xfrm>
+          <a:off x="0" y="0"/>
+          <a:ext cx="0" cy="0"/>
+          <a:chOff x="0" y="0"/>
+          <a:chExt cx="0" cy="0"/>
+        </a:xfrm>
+      </p:grpSpPr>
+      <p:sp>
+        <p:nvSpPr>
+          <p:cNvPr id="2" name="Slide Image Placeholder 1"/>
+          <p:cNvSpPr>
+            <a:spLocks noGrp="1"/>
+          </p:cNvSpPr>
+          <p:nvPr>
+            <p:ph type="sldImg" idx="2"/>
+          </p:nvPr>
+        </p:nvSpPr>
+        <p:spPr/>
+      </p:sp>
+      <p:sp>
+        <p:nvSpPr>
+          <p:cNvPr id="3" name="Notes Placeholder 2"/>
+          <p:cNvSpPr>
+            <a:spLocks noGrp="1"/>
+          </p:cNvSpPr>
+          <p:nvPr>
+            <p:ph type="body" idx="3" sz="quarter"/>
+          </p:nvPr>
+        </p:nvSpPr>
+        <p:spPr/>
+        <p:txBody>
+          <a:bodyPr/>
+          <a:lstStyle/>
+          <a:p>
+            <a:r>
+              <a:t>Esta es la estructura típica de un foro IPS 4.x, así que si ya vieron otros casos del curso, el esquema les resultará familiar. Quiero que se fijen especialmente en la tabla de mensajes privados: 55.000 registros es una cifra inusualmente alta para un leak de foro, la mayoría de las veces esos datos se pierden o se depuran. Esa tabla va a ser clave más adelante cuando comparemos la red pública con la red oculta de influencia. La nota técnica sobre member_id como columna discriminante es para quien quiera reproducir el parsing en su propio entorno.</a:t>
+            </a:r>
+          </a:p>
+        </p:txBody>
+      </p:sp>
+      <p:sp>
+        <p:nvSpPr>
+          <p:cNvPr id="4" name="Slide Number Placeholder 3"/>
+          <p:cNvSpPr>
+            <a:spLocks noGrp="1"/>
+          </p:cNvSpPr>
+          <p:nvPr>
+            <p:ph type="sldNum" idx="5" sz="quarter"/>
+          </p:nvPr>
+        </p:nvSpPr>
+        <p:spPr/>
+      </p:sp>
+    </p:spTree>
+  </p:cSld>
+  <p:clrMapOvr>
+    <a:masterClrMapping/>
+  </p:clrMapOvr>
+</p:notes>
+</file>
+
+<file path=ppt/notesSlides/notesSlide5.xml><?xml version="1.0" encoding="utf-8"?>
+<p:notes xmlns:a="http://schemas.openxmlformats.org/drawingml/2006/main" xmlns:p="http://schemas.openxmlformats.org/presentationml/2006/main" xmlns:r="http://schemas.openxmlformats.org/officeDocument/2006/relationships">
+  <p:cSld>
+    <p:spTree>
+      <p:nvGrpSpPr>
+        <p:cNvPr id="1" name=""/>
+        <p:cNvGrpSpPr/>
+        <p:nvPr/>
+      </p:nvGrpSpPr>
+      <p:grpSpPr>
+        <a:xfrm>
+          <a:off x="0" y="0"/>
+          <a:ext cx="0" cy="0"/>
+          <a:chOff x="0" y="0"/>
+          <a:chExt cx="0" cy="0"/>
+        </a:xfrm>
+      </p:grpSpPr>
+      <p:sp>
+        <p:nvSpPr>
+          <p:cNvPr id="2" name="Slide Image Placeholder 1"/>
+          <p:cNvSpPr>
+            <a:spLocks noGrp="1"/>
+          </p:cNvSpPr>
+          <p:nvPr>
+            <p:ph type="sldImg" idx="2"/>
+          </p:nvPr>
+        </p:nvSpPr>
+        <p:spPr/>
+      </p:sp>
+      <p:sp>
+        <p:nvSpPr>
+          <p:cNvPr id="3" name="Notes Placeholder 2"/>
+          <p:cNvSpPr>
+            <a:spLocks noGrp="1"/>
+          </p:cNvSpPr>
+          <p:nvPr>
+            <p:ph type="body" idx="3" sz="quarter"/>
+          </p:nvPr>
+        </p:nvSpPr>
+        <p:spPr/>
+        <p:txBody>
+          <a:bodyPr/>
+          <a:lstStyle/>
+          <a:p>
+            <a:r>
+              <a:t>Aquí está el corazón de por qué elegimos este caso para el curso: no es solo un análisis de red más, es un análisis que podemos calibrar contra la realidad. MOONLORD, el fundador, fue doxxeado e identificado como Alexander Slavros, con evidencia de IP rusa, así que no estamos especulando sobre quién lideraba el foro. Pero hay un segundo hallazgo más interesante todavía: el usuario 255, con userid=0, es decir, una cuenta de administrador, concentra más de la mitad del betweenness en la red de mensajes privados. Eso nos anticipa algo que vamos a desarrollar en la sección de redes: el liderazgo visible no siempre coincide con el liderazgo real. Y el hecho de que el cierre del foro esté documentado como confiscación judicial, no como abandono voluntario, refuerza que este es un caso con trazabilidad real.</a:t>
+            </a:r>
+          </a:p>
+        </p:txBody>
+      </p:sp>
+      <p:sp>
+        <p:nvSpPr>
+          <p:cNvPr id="4" name="Slide Number Placeholder 3"/>
+          <p:cNvSpPr>
+            <a:spLocks noGrp="1"/>
+          </p:cNvSpPr>
+          <p:nvPr>
+            <p:ph type="sldNum" idx="5" sz="quarter"/>
+          </p:nvPr>
+        </p:nvSpPr>
+        <p:spPr/>
+      </p:sp>
+    </p:spTree>
+  </p:cSld>
+  <p:clrMapOvr>
+    <a:masterClrMapping/>
+  </p:clrMapOvr>
+</p:notes>
+</file>
+
+<file path=ppt/notesSlides/notesSlide6.xml><?xml version="1.0" encoding="utf-8"?>
+<p:notes xmlns:a="http://schemas.openxmlformats.org/drawingml/2006/main" xmlns:p="http://schemas.openxmlformats.org/presentationml/2006/main" xmlns:r="http://schemas.openxmlformats.org/officeDocument/2006/relationships">
+  <p:cSld>
+    <p:spTree>
+      <p:nvGrpSpPr>
+        <p:cNvPr id="1" name=""/>
+        <p:cNvGrpSpPr/>
+        <p:nvPr/>
+      </p:nvGrpSpPr>
+      <p:grpSpPr>
+        <a:xfrm>
+          <a:off x="0" y="0"/>
+          <a:ext cx="0" cy="0"/>
+          <a:chOff x="0" y="0"/>
+          <a:chExt cx="0" cy="0"/>
+        </a:xfrm>
+      </p:grpSpPr>
+      <p:sp>
+        <p:nvSpPr>
+          <p:cNvPr id="2" name="Slide Image Placeholder 1"/>
+          <p:cNvSpPr>
+            <a:spLocks noGrp="1"/>
+          </p:cNvSpPr>
+          <p:nvPr>
+            <p:ph type="sldImg" idx="2"/>
+          </p:nvPr>
+        </p:nvSpPr>
+        <p:spPr/>
+      </p:sp>
+      <p:sp>
+        <p:nvSpPr>
+          <p:cNvPr id="3" name="Notes Placeholder 2"/>
+          <p:cNvSpPr>
+            <a:spLocks noGrp="1"/>
+          </p:cNvSpPr>
+          <p:nvPr>
+            <p:ph type="body" idx="3" sz="quarter"/>
+          </p:nvPr>
+        </p:nvSpPr>
+        <p:spPr/>
+        <p:txBody>
+          <a:bodyPr/>
+          <a:lstStyle/>
+          <a:p>
+            <a:r>
+              <a:t>Con el contexto claro, pasamos a la exploración de datos y a construir las dos redes que vamos a comparar: la pública de threads y la oculta de mensajes privados. Este es el bloque donde empezamos a ver números concretos del notebook 00.</a:t>
+            </a:r>
+          </a:p>
+        </p:txBody>
+      </p:sp>
+      <p:sp>
+        <p:nvSpPr>
+          <p:cNvPr id="4" name="Slide Number Placeholder 3"/>
+          <p:cNvSpPr>
+            <a:spLocks noGrp="1"/>
+          </p:cNvSpPr>
+          <p:nvPr>
+            <p:ph type="sldNum" idx="5" sz="quarter"/>
+          </p:nvPr>
+        </p:nvSpPr>
+        <p:spPr/>
+      </p:sp>
+    </p:spTree>
+  </p:cSld>
+  <p:clrMapOvr>
+    <a:masterClrMapping/>
+  </p:clrMapOvr>
+</p:notes>
+</file>
+
+<file path=ppt/notesSlides/notesSlide7.xml><?xml version="1.0" encoding="utf-8"?>
+<p:notes xmlns:a="http://schemas.openxmlformats.org/drawingml/2006/main" xmlns:p="http://schemas.openxmlformats.org/presentationml/2006/main" xmlns:r="http://schemas.openxmlformats.org/officeDocument/2006/relationships">
+  <p:cSld>
+    <p:spTree>
+      <p:nvGrpSpPr>
+        <p:cNvPr id="1" name=""/>
+        <p:cNvGrpSpPr/>
+        <p:nvPr/>
+      </p:nvGrpSpPr>
+      <p:grpSpPr>
+        <a:xfrm>
+          <a:off x="0" y="0"/>
+          <a:ext cx="0" cy="0"/>
+          <a:chOff x="0" y="0"/>
+          <a:chExt cx="0" cy="0"/>
+        </a:xfrm>
+      </p:grpSpPr>
+      <p:sp>
+        <p:nvSpPr>
+          <p:cNvPr id="2" name="Slide Image Placeholder 1"/>
+          <p:cNvSpPr>
+            <a:spLocks noGrp="1"/>
+          </p:cNvSpPr>
+          <p:nvPr>
+            <p:ph type="sldImg" idx="2"/>
+          </p:nvPr>
+        </p:nvSpPr>
+        <p:spPr/>
+      </p:sp>
+      <p:sp>
+        <p:nvSpPr>
+          <p:cNvPr id="3" name="Notes Placeholder 2"/>
+          <p:cNvSpPr>
+            <a:spLocks noGrp="1"/>
+          </p:cNvSpPr>
+          <p:nvPr>
+            <p:ph type="body" idx="3" sz="quarter"/>
+          </p:nvPr>
+        </p:nvSpPr>
+        <p:spPr/>
+        <p:txBody>
+          <a:bodyPr/>
+          <a:lstStyle/>
+          <a:p>
+            <a:r>
+              <a:t>Antes de sacar ninguna conclusión ideológica, miremos los números fríos: 836 usuarios activos sobre 18.000 registrados nos dice que este es un foro pequeño y denso, no una comunidad masiva. El pico de actividad en 2015 coincide con los atentados de París, un dato que vamos a analizar en detalle más adelante con z-scores. Y la concentración de tráfico en cinco subforos sobre 138 totales nos anticipa que la actividad real está mucho más concentrada de lo que el tamaño del foro sugiere. La verificación de idioma no es un detalle menor: sin ella, cualquier modelo NLP que apliquemos después sería inválido.</a:t>
+            </a:r>
+          </a:p>
+        </p:txBody>
+      </p:sp>
+      <p:sp>
+        <p:nvSpPr>
+          <p:cNvPr id="4" name="Slide Number Placeholder 3"/>
+          <p:cNvSpPr>
+            <a:spLocks noGrp="1"/>
+          </p:cNvSpPr>
+          <p:nvPr>
+            <p:ph type="sldNum" idx="5" sz="quarter"/>
+          </p:nvPr>
+        </p:nvSpPr>
+        <p:spPr/>
+      </p:sp>
+    </p:spTree>
+  </p:cSld>
+  <p:clrMapOvr>
+    <a:masterClrMapping/>
+  </p:clrMapOvr>
+</p:notes>
+</file>
+
+<file path=ppt/notesSlides/notesSlide8.xml><?xml version="1.0" encoding="utf-8"?>
+<p:notes xmlns:a="http://schemas.openxmlformats.org/drawingml/2006/main" xmlns:p="http://schemas.openxmlformats.org/presentationml/2006/main" xmlns:r="http://schemas.openxmlformats.org/officeDocument/2006/relationships">
+  <p:cSld>
+    <p:spTree>
+      <p:nvGrpSpPr>
+        <p:cNvPr id="1" name=""/>
+        <p:cNvGrpSpPr/>
+        <p:nvPr/>
+      </p:nvGrpSpPr>
+      <p:grpSpPr>
+        <a:xfrm>
+          <a:off x="0" y="0"/>
+          <a:ext cx="0" cy="0"/>
+          <a:chOff x="0" y="0"/>
+          <a:chExt cx="0" cy="0"/>
+        </a:xfrm>
+      </p:grpSpPr>
+      <p:sp>
+        <p:nvSpPr>
+          <p:cNvPr id="2" name="Slide Image Placeholder 1"/>
+          <p:cNvSpPr>
+            <a:spLocks noGrp="1"/>
+          </p:cNvSpPr>
+          <p:nvPr>
+            <p:ph type="sldImg" idx="2"/>
+          </p:nvPr>
+        </p:nvSpPr>
+        <p:spPr/>
+      </p:sp>
+      <p:sp>
+        <p:nvSpPr>
+          <p:cNvPr id="3" name="Notes Placeholder 2"/>
+          <p:cNvSpPr>
+            <a:spLocks noGrp="1"/>
+          </p:cNvSpPr>
+          <p:nvPr>
+            <p:ph type="body" idx="3" sz="quarter"/>
+          </p:nvPr>
+        </p:nvSpPr>
+        <p:spPr/>
+        <p:txBody>
+          <a:bodyPr/>
+          <a:lstStyle/>
+          <a:p>
+            <a:r>
+              <a:t>Esta es probablemente la diapositiva más importante de la sección: comparamos la red pública, construida sobre co-participación en threads, con la red privada de mensajes. En la red pública, el broker principal es MOONLORD, el fundador, lo cual es esperable. Pero en la red privada el broker principal es el usuario 255, la cuenta administrativa, con más de la mitad del betweenness. La pregunta que quiero que se hagan es: ¿por qué el liderazgo visible y el liderazgo estructural no coinciden? Esa divergencia es exactamente el tipo de señal que un analista forense de redes sociales debe aprender a detectar.</a:t>
+            </a:r>
+          </a:p>
+        </p:txBody>
+      </p:sp>
+      <p:sp>
+        <p:nvSpPr>
+          <p:cNvPr id="4" name="Slide Number Placeholder 3"/>
+          <p:cNvSpPr>
+            <a:spLocks noGrp="1"/>
+          </p:cNvSpPr>
+          <p:nvPr>
+            <p:ph type="sldNum" idx="5" sz="quarter"/>
+          </p:nvPr>
+        </p:nvSpPr>
+        <p:spPr/>
+      </p:sp>
+    </p:spTree>
+  </p:cSld>
+  <p:clrMapOvr>
+    <a:masterClrMapping/>
+  </p:clrMapOvr>
+</p:notes>
+</file>
+
+<file path=ppt/notesSlides/notesSlide9.xml><?xml version="1.0" encoding="utf-8"?>
+<p:notes xmlns:a="http://schemas.openxmlformats.org/drawingml/2006/main" xmlns:p="http://schemas.openxmlformats.org/presentationml/2006/main" xmlns:r="http://schemas.openxmlformats.org/officeDocument/2006/relationships">
+  <p:cSld>
+    <p:spTree>
+      <p:nvGrpSpPr>
+        <p:cNvPr id="1" name=""/>
+        <p:cNvGrpSpPr/>
+        <p:nvPr/>
+      </p:nvGrpSpPr>
+      <p:grpSpPr>
+        <a:xfrm>
+          <a:off x="0" y="0"/>
+          <a:ext cx="0" cy="0"/>
+          <a:chOff x="0" y="0"/>
+          <a:chExt cx="0" cy="0"/>
+        </a:xfrm>
+      </p:grpSpPr>
+      <p:sp>
+        <p:nvSpPr>
+          <p:cNvPr id="2" name="Slide Image Placeholder 1"/>
+          <p:cNvSpPr>
+            <a:spLocks noGrp="1"/>
+          </p:cNvSpPr>
+          <p:nvPr>
+            <p:ph type="sldImg" idx="2"/>
+          </p:nvPr>
+        </p:nvSpPr>
+        <p:spPr/>
+      </p:sp>
+      <p:sp>
+        <p:nvSpPr>
+          <p:cNvPr id="3" name="Notes Placeholder 2"/>
+          <p:cNvSpPr>
+            <a:spLocks noGrp="1"/>
+          </p:cNvSpPr>
+          <p:nvPr>
+            <p:ph type="body" idx="3" sz="quarter"/>
+          </p:nvPr>
+        </p:nvSpPr>
+        <p:spPr/>
+        <p:txBody>
+          <a:bodyPr/>
+          <a:lstStyle/>
+          <a:p>
+            <a:r>
+              <a:t>Este paso parece trivial, pero es donde más analistas se equivocan al apurar el pipeline. Burrows' Delta, el NER y BERTopic asumen un idioma específico, y si aplicamos un modelo entrenado para inglés a un corpus en ruso, no vamos a obtener un error, vamos a obtener ruido silencioso que parece resultado válido. En este caso confirmamos que más del 95% del contenido es inglés, así que el pipeline estándar es aplicable sin modificaciones. Pero la regla que quiero que se lleven es general: si este mismo foro hubiera sido en ruso, necesitaríamos herramientas completamente distintas, no una adaptación menor.</a:t>
+            </a:r>
+          </a:p>
+        </p:txBody>
+      </p:sp>
+      <p:sp>
+        <p:nvSpPr>
+          <p:cNvPr id="4" name="Slide Number Placeholder 3"/>
+          <p:cNvSpPr>
+            <a:spLocks noGrp="1"/>
+          </p:cNvSpPr>
+          <p:nvPr>
+            <p:ph type="sldNum" idx="5" sz="quarter"/>
+          </p:nvPr>
+        </p:nvSpPr>
+        <p:spPr/>
+      </p:sp>
+    </p:spTree>
+  </p:cSld>
+  <p:clrMapOvr>
+    <a:masterClrMapping/>
+  </p:clrMapOvr>
+</p:notes>
 </file>
 
 <file path=ppt/slideLayouts/slideLayout1.xml><?xml version="1.0" encoding="utf-8"?>
@@ -10658,4 +12758,324 @@
   </a:objectDefaults>
   <a:extraClrSchemeLst/>
 </a:theme>
+</file>
+
+<file path=ppt/theme/theme2.xml><?xml version="1.0" encoding="utf-8"?>
+<a:theme xmlns:a="http://schemas.openxmlformats.org/drawingml/2006/main" name="Office Theme">
+  <a:themeElements>
+    <a:clrScheme name="Office">
+      <a:dk1>
+        <a:sysClr val="windowText" lastClr="000000"/>
+      </a:dk1>
+      <a:lt1>
+        <a:sysClr val="window" lastClr="FFFFFF"/>
+      </a:lt1>
+      <a:dk2>
+        <a:srgbClr val="1F497D"/>
+      </a:dk2>
+      <a:lt2>
+        <a:srgbClr val="EEECE1"/>
+      </a:lt2>
+      <a:accent1>
+        <a:srgbClr val="4F81BD"/>
+      </a:accent1>
+      <a:accent2>
+        <a:srgbClr val="C0504D"/>
+      </a:accent2>
+      <a:accent3>
+        <a:srgbClr val="9BBB59"/>
+      </a:accent3>
+      <a:accent4>
+        <a:srgbClr val="8064A2"/>
+      </a:accent4>
+      <a:accent5>
+        <a:srgbClr val="4BACC6"/>
+      </a:accent5>
+      <a:accent6>
+        <a:srgbClr val="F79646"/>
+      </a:accent6>
+      <a:hlink>
+        <a:srgbClr val="0000FF"/>
+      </a:hlink>
+      <a:folHlink>
+        <a:srgbClr val="800080"/>
+      </a:folHlink>
+    </a:clrScheme>
+    <a:fontScheme name="Office">
+      <a:majorFont>
+        <a:latin typeface="Calibri"/>
+        <a:ea typeface=""/>
+        <a:cs typeface=""/>
+        <a:font script="Jpan" typeface="ＭＳ Ｐゴシック"/>
+        <a:font script="Hang" typeface="맑은 고딕"/>
+        <a:font script="Hans" typeface="宋体"/>
+        <a:font script="Hant" typeface="新細明體"/>
+        <a:font script="Arab" typeface="Times New Roman"/>
+        <a:font script="Hebr" typeface="Times New Roman"/>
+        <a:font script="Thai" typeface="Angsana New"/>
+        <a:font script="Ethi" typeface="Nyala"/>
+        <a:font script="Beng" typeface="Vrinda"/>
+        <a:font script="Gujr" typeface="Shruti"/>
+        <a:font script="Khmr" typeface="MoolBoran"/>
+        <a:font script="Knda" typeface="Tunga"/>
+        <a:font script="Guru" typeface="Raavi"/>
+        <a:font script="Cans" typeface="Euphemia"/>
+        <a:font script="Cher" typeface="Plantagenet Cherokee"/>
+        <a:font script="Yiii" typeface="Microsoft Yi Baiti"/>
+        <a:font script="Tibt" typeface="Microsoft Himalaya"/>
+        <a:font script="Thaa" typeface="MV Boli"/>
+        <a:font script="Deva" typeface="Mangal"/>
+        <a:font script="Telu" typeface="Gautami"/>
+        <a:font script="Taml" typeface="Latha"/>
+        <a:font script="Syrc" typeface="Estrangelo Edessa"/>
+        <a:font script="Orya" typeface="Kalinga"/>
+        <a:font script="Mlym" typeface="Kartika"/>
+        <a:font script="Laoo" typeface="DokChampa"/>
+        <a:font script="Sinh" typeface="Iskoola Pota"/>
+        <a:font script="Mong" typeface="Mongolian Baiti"/>
+        <a:font script="Viet" typeface="Times New Roman"/>
+        <a:font script="Uigh" typeface="Microsoft Uighur"/>
+        <a:font script="Geor" typeface="Sylfaen"/>
+      </a:majorFont>
+      <a:minorFont>
+        <a:latin typeface="Calibri"/>
+        <a:ea typeface=""/>
+        <a:cs typeface=""/>
+        <a:font script="Jpan" typeface="ＭＳ Ｐゴシック"/>
+        <a:font script="Hang" typeface="맑은 고딕"/>
+        <a:font script="Hans" typeface="宋体"/>
+        <a:font script="Hant" typeface="新細明體"/>
+        <a:font script="Arab" typeface="Arial"/>
+        <a:font script="Hebr" typeface="Arial"/>
+        <a:font script="Thai" typeface="Cordia New"/>
+        <a:font script="Ethi" typeface="Nyala"/>
+        <a:font script="Beng" typeface="Vrinda"/>
+        <a:font script="Gujr" typeface="Shruti"/>
+        <a:font script="Khmr" typeface="DaunPenh"/>
+        <a:font script="Knda" typeface="Tunga"/>
+        <a:font script="Guru" typeface="Raavi"/>
+        <a:font script="Cans" typeface="Euphemia"/>
+        <a:font script="Cher" typeface="Plantagenet Cherokee"/>
+        <a:font script="Yiii" typeface="Microsoft Yi Baiti"/>
+        <a:font script="Tibt" typeface="Microsoft Himalaya"/>
+        <a:font script="Thaa" typeface="MV Boli"/>
+        <a:font script="Deva" typeface="Mangal"/>
+        <a:font script="Telu" typeface="Gautami"/>
+        <a:font script="Taml" typeface="Latha"/>
+        <a:font script="Syrc" typeface="Estrangelo Edessa"/>
+        <a:font script="Orya" typeface="Kalinga"/>
+        <a:font script="Mlym" typeface="Kartika"/>
+        <a:font script="Laoo" typeface="DokChampa"/>
+        <a:font script="Sinh" typeface="Iskoola Pota"/>
+        <a:font script="Mong" typeface="Mongolian Baiti"/>
+        <a:font script="Viet" typeface="Arial"/>
+        <a:font script="Uigh" typeface="Microsoft Uighur"/>
+        <a:font script="Geor" typeface="Sylfaen"/>
+      </a:minorFont>
+    </a:fontScheme>
+    <a:fmtScheme name="Office">
+      <a:fillStyleLst>
+        <a:solidFill>
+          <a:schemeClr val="phClr"/>
+        </a:solidFill>
+        <a:gradFill rotWithShape="1">
+          <a:gsLst>
+            <a:gs pos="0">
+              <a:schemeClr val="phClr">
+                <a:tint val="50000"/>
+                <a:satMod val="300000"/>
+              </a:schemeClr>
+            </a:gs>
+            <a:gs pos="35000">
+              <a:schemeClr val="phClr">
+                <a:tint val="37000"/>
+                <a:satMod val="300000"/>
+              </a:schemeClr>
+            </a:gs>
+            <a:gs pos="100000">
+              <a:schemeClr val="phClr">
+                <a:tint val="15000"/>
+                <a:satMod val="350000"/>
+              </a:schemeClr>
+            </a:gs>
+          </a:gsLst>
+          <a:lin ang="16200000" scaled="1"/>
+        </a:gradFill>
+        <a:gradFill rotWithShape="1">
+          <a:gsLst>
+            <a:gs pos="0">
+              <a:schemeClr val="phClr">
+                <a:tint val="100000"/>
+                <a:shade val="100000"/>
+                <a:satMod val="130000"/>
+              </a:schemeClr>
+            </a:gs>
+            <a:gs pos="100000">
+              <a:schemeClr val="phClr">
+                <a:tint val="50000"/>
+                <a:shade val="100000"/>
+                <a:satMod val="350000"/>
+              </a:schemeClr>
+            </a:gs>
+          </a:gsLst>
+          <a:lin ang="16200000" scaled="0"/>
+        </a:gradFill>
+      </a:fillStyleLst>
+      <a:lnStyleLst>
+        <a:ln w="9525" cap="flat" cmpd="sng" algn="ctr">
+          <a:solidFill>
+            <a:schemeClr val="phClr">
+              <a:shade val="95000"/>
+              <a:satMod val="105000"/>
+            </a:schemeClr>
+          </a:solidFill>
+          <a:prstDash val="solid"/>
+        </a:ln>
+        <a:ln w="25400" cap="flat" cmpd="sng" algn="ctr">
+          <a:solidFill>
+            <a:schemeClr val="phClr"/>
+          </a:solidFill>
+          <a:prstDash val="solid"/>
+        </a:ln>
+        <a:ln w="38100" cap="flat" cmpd="sng" algn="ctr">
+          <a:solidFill>
+            <a:schemeClr val="phClr"/>
+          </a:solidFill>
+          <a:prstDash val="solid"/>
+        </a:ln>
+      </a:lnStyleLst>
+      <a:effectStyleLst>
+        <a:effectStyle>
+          <a:effectLst>
+            <a:outerShdw blurRad="40000" dist="20000" dir="5400000" rotWithShape="0">
+              <a:srgbClr val="000000">
+                <a:alpha val="38000"/>
+              </a:srgbClr>
+            </a:outerShdw>
+          </a:effectLst>
+        </a:effectStyle>
+        <a:effectStyle>
+          <a:effectLst>
+            <a:outerShdw blurRad="40000" dist="23000" dir="5400000" rotWithShape="0">
+              <a:srgbClr val="000000">
+                <a:alpha val="35000"/>
+              </a:srgbClr>
+            </a:outerShdw>
+          </a:effectLst>
+        </a:effectStyle>
+        <a:effectStyle>
+          <a:effectLst>
+            <a:outerShdw blurRad="40000" dist="23000" dir="5400000" rotWithShape="0">
+              <a:srgbClr val="000000">
+                <a:alpha val="35000"/>
+              </a:srgbClr>
+            </a:outerShdw>
+          </a:effectLst>
+          <a:scene3d>
+            <a:camera prst="orthographicFront">
+              <a:rot lat="0" lon="0" rev="0"/>
+            </a:camera>
+            <a:lightRig rig="threePt" dir="t">
+              <a:rot lat="0" lon="0" rev="1200000"/>
+            </a:lightRig>
+          </a:scene3d>
+          <a:sp3d>
+            <a:bevelT w="63500" h="25400"/>
+          </a:sp3d>
+        </a:effectStyle>
+      </a:effectStyleLst>
+      <a:bgFillStyleLst>
+        <a:solidFill>
+          <a:schemeClr val="phClr"/>
+        </a:solidFill>
+        <a:gradFill rotWithShape="1">
+          <a:gsLst>
+            <a:gs pos="0">
+              <a:schemeClr val="phClr">
+                <a:tint val="40000"/>
+                <a:satMod val="350000"/>
+              </a:schemeClr>
+            </a:gs>
+            <a:gs pos="40000">
+              <a:schemeClr val="phClr">
+                <a:tint val="45000"/>
+                <a:shade val="99000"/>
+                <a:satMod val="350000"/>
+              </a:schemeClr>
+            </a:gs>
+            <a:gs pos="100000">
+              <a:schemeClr val="phClr">
+                <a:shade val="20000"/>
+                <a:satMod val="255000"/>
+              </a:schemeClr>
+            </a:gs>
+          </a:gsLst>
+          <a:path path="circle">
+            <a:fillToRect l="50000" t="-80000" r="50000" b="180000"/>
+          </a:path>
+        </a:gradFill>
+        <a:gradFill rotWithShape="1">
+          <a:gsLst>
+            <a:gs pos="0">
+              <a:schemeClr val="phClr">
+                <a:tint val="80000"/>
+                <a:satMod val="300000"/>
+              </a:schemeClr>
+            </a:gs>
+            <a:gs pos="100000">
+              <a:schemeClr val="phClr">
+                <a:shade val="30000"/>
+                <a:satMod val="200000"/>
+              </a:schemeClr>
+            </a:gs>
+          </a:gsLst>
+          <a:path path="circle">
+            <a:fillToRect l="50000" t="50000" r="50000" b="50000"/>
+          </a:path>
+        </a:gradFill>
+      </a:bgFillStyleLst>
+    </a:fmtScheme>
+  </a:themeElements>
+  <a:objectDefaults>
+    <a:spDef>
+      <a:spPr/>
+      <a:bodyPr/>
+      <a:lstStyle/>
+      <a:style>
+        <a:lnRef idx="1">
+          <a:schemeClr val="accent1"/>
+        </a:lnRef>
+        <a:fillRef idx="3">
+          <a:schemeClr val="accent1"/>
+        </a:fillRef>
+        <a:effectRef idx="2">
+          <a:schemeClr val="accent1"/>
+        </a:effectRef>
+        <a:fontRef idx="minor">
+          <a:schemeClr val="lt1"/>
+        </a:fontRef>
+      </a:style>
+    </a:spDef>
+    <a:lnDef>
+      <a:spPr/>
+      <a:bodyPr/>
+      <a:lstStyle/>
+      <a:style>
+        <a:lnRef idx="2">
+          <a:schemeClr val="accent1"/>
+        </a:lnRef>
+        <a:fillRef idx="0">
+          <a:schemeClr val="accent1"/>
+        </a:fillRef>
+        <a:effectRef idx="1">
+          <a:schemeClr val="accent1"/>
+        </a:effectRef>
+        <a:fontRef idx="minor">
+          <a:schemeClr val="tx1"/>
+        </a:fontRef>
+      </a:style>
+    </a:lnDef>
+  </a:objectDefaults>
+  <a:extraClrSchemeLst/>
+</a:theme>
 </file>
--- a/IronMarch/csbc26_caso_ironmarch.pptx
+++ b/IronMarch/csbc26_caso_ironmarch.pptx
@@ -6405,12 +6405,6 @@
           <a:lstStyle/>
           <a:p>
             <a:r>
-              <a:rPr sz="3400" b="1">
-                <a:solidFill>
-                  <a:srgbClr val="FFFFFF"/>
-                </a:solidFill>
-                <a:latin typeface="Calibri"/>
-              </a:rPr>
               <a:t>Caso IronMarch</a:t>
             </a:r>
           </a:p>
@@ -6420,7 +6414,7 @@
                 <a:solidFill>
                   <a:srgbClr val="D6DAE2"/>
                 </a:solidFill>
-                <a:latin typeface="Calibri"/>
+                <a:latin typeface="Arial"/>
               </a:rPr>
               <a:t>Análisis forense de un foro de extrema derecha (2011–2017)</a:t>
             </a:r>
@@ -6431,7 +6425,7 @@
                 <a:solidFill>
                   <a:srgbClr val="9AA3B5"/>
                 </a:solidFill>
-                <a:latin typeface="Calibri"/>
+                <a:latin typeface="Arial"/>
               </a:rPr>
               <a:t>CSBC26 · Análisis de Leaks Underground</a:t>
             </a:r>
@@ -6471,34 +6465,31 @@
           <a:bodyPr wrap="square"/>
           <a:lstStyle/>
           <a:p>
+            <a:pPr algn="ctr"/>
             <a:r>
               <a:rPr sz="1300" b="1">
                 <a:solidFill>
-                  <a:srgbClr val="E32B3D"/>
-                </a:solidFill>
-                <a:latin typeface="Calibri"/>
+                  <a:srgbClr val="CD2D37"/>
+                </a:solidFill>
+                <a:latin typeface="Arial"/>
               </a:rPr>
               <a:t>DEMO EN VIVO</a:t>
             </a:r>
           </a:p>
           <a:p>
-            <a:r>
-              <a:rPr sz="2600" b="1">
-                <a:solidFill>
-                  <a:srgbClr val="FFFFFF"/>
-                </a:solidFill>
-                <a:latin typeface="Calibri"/>
-              </a:rPr>
+            <a:pPr algn="ctr"/>
+            <a:r>
               <a:t>Demo — red de co-participación</a:t>
             </a:r>
           </a:p>
           <a:p>
+            <a:pPr algn="ctr"/>
             <a:r>
               <a:rPr sz="1400">
                 <a:solidFill>
                   <a:srgbClr val="9AA3B5"/>
                 </a:solidFill>
-                <a:latin typeface="Calibri"/>
+                <a:latin typeface="Arial"/>
               </a:rPr>
               <a:t>IronMarch/00_extract_and_explore.ipynb</a:t>
             </a:r>
@@ -6532,7 +6523,7 @@
                 <a:solidFill>
                   <a:srgbClr val="D6DAE2"/>
                 </a:solidFill>
-                <a:latin typeface="Calibri"/>
+                <a:latin typeface="Arial"/>
               </a:rPr>
               <a:t>1.  Abrir notebook 00_extract_and_explore</a:t>
             </a:r>
@@ -6543,7 +6534,7 @@
                 <a:solidFill>
                   <a:srgbClr val="D6DAE2"/>
                 </a:solidFill>
-                <a:latin typeface="Calibri"/>
+                <a:latin typeface="Arial"/>
               </a:rPr>
               <a:t>2.  Ejecutar sección 3: grafo usuario↔usuario por threads compartidos</a:t>
             </a:r>
@@ -6554,7 +6545,7 @@
                 <a:solidFill>
                   <a:srgbClr val="D6DAE2"/>
                 </a:solidFill>
-                <a:latin typeface="Calibri"/>
+                <a:latin typeface="Arial"/>
               </a:rPr>
               <a:t>3.  Visualización Plotly interactiva: top-150 nodos por degree</a:t>
             </a:r>
@@ -6565,7 +6556,7 @@
                 <a:solidFill>
                   <a:srgbClr val="D6DAE2"/>
                 </a:solidFill>
-                <a:latin typeface="Calibri"/>
+                <a:latin typeface="Arial"/>
               </a:rPr>
               <a:t>4.  Comparar con sección 4: red de PMs — ¿los mismos brokers?</a:t>
             </a:r>
@@ -6605,34 +6596,31 @@
           <a:bodyPr wrap="square"/>
           <a:lstStyle/>
           <a:p>
+            <a:pPr algn="ctr"/>
             <a:r>
               <a:rPr sz="1300" b="1">
                 <a:solidFill>
-                  <a:srgbClr val="E32B3D"/>
-                </a:solidFill>
-                <a:latin typeface="Calibri"/>
+                  <a:srgbClr val="CD2D37"/>
+                </a:solidFill>
+                <a:latin typeface="Arial"/>
               </a:rPr>
               <a:t>SECCIÓN 3</a:t>
             </a:r>
           </a:p>
           <a:p>
-            <a:r>
-              <a:rPr sz="3000" b="1">
-                <a:solidFill>
-                  <a:srgbClr val="FFFFFF"/>
-                </a:solidFill>
-                <a:latin typeface="Calibri"/>
-              </a:rPr>
+            <a:pPr algn="ctr"/>
+            <a:r>
               <a:t>Análisis con LLM local</a:t>
             </a:r>
           </a:p>
           <a:p>
+            <a:pPr algn="ctr"/>
             <a:r>
               <a:rPr sz="1600">
                 <a:solidFill>
                   <a:srgbClr val="D6DAE2"/>
                 </a:solidFill>
-                <a:latin typeface="Calibri"/>
+                <a:latin typeface="Arial"/>
               </a:rPr>
               <a:t>BERTopic + NER con qwen2.5:14b</a:t>
             </a:r>
@@ -6673,12 +6661,6 @@
           <a:lstStyle/>
           <a:p>
             <a:r>
-              <a:rPr sz="2400" b="1">
-                <a:solidFill>
-                  <a:srgbClr val="1A1A2E"/>
-                </a:solidFill>
-                <a:latin typeface="Calibri"/>
-              </a:rPr>
               <a:t>BERTopic — descubrimiento de temas</a:t>
             </a:r>
           </a:p>
@@ -6694,78 +6676,38 @@
             <p:ph type="body" idx="16" sz="quarter"/>
           </p:nvPr>
         </p:nvSpPr>
-        <p:spPr/>
+        <p:spPr>
+          <a:xfrm>
+            <a:off x="1073427" y="2077576"/>
+            <a:ext cx="10084904" cy="3507298"/>
+          </a:xfrm>
+        </p:spPr>
         <p:txBody>
           <a:bodyPr wrap="square"/>
           <a:lstStyle/>
           <a:p>
-            <a:pPr algn="l" marL="0" indent="-228600">
-              <a:buNone/>
-            </a:pPr>
-            <a:r>
-              <a:rPr sz="1900" b="0">
-                <a:solidFill>
-                  <a:srgbClr val="333844"/>
-                </a:solidFill>
-                <a:latin typeface="Calibri"/>
-              </a:rPr>
-              <a:t>▸  Objetivo: ¿de qué habla el foro sin imponer categorías a priori?</a:t>
-            </a:r>
-          </a:p>
-          <a:p>
-            <a:pPr algn="l" marL="0" indent="-228600">
-              <a:buNone/>
-            </a:pPr>
-            <a:r>
-              <a:rPr sz="1900" b="0">
-                <a:solidFill>
-                  <a:srgbClr val="333844"/>
-                </a:solidFill>
-                <a:latin typeface="Calibri"/>
-              </a:rPr>
-              <a:t>▸  Validación cruzada: comparar topics automáticos vs. subforos reales</a:t>
-            </a:r>
-          </a:p>
-          <a:p>
-            <a:pPr algn="l" marL="0" indent="-228600">
-              <a:buNone/>
-            </a:pPr>
-            <a:r>
-              <a:rPr sz="1900" b="0">
-                <a:solidFill>
-                  <a:srgbClr val="333844"/>
-                </a:solidFill>
-                <a:latin typeface="Calibri"/>
-              </a:rPr>
-              <a:t>▸  Top topics: racismo científico, estética fascista, Evola/Spengler, violencia política</a:t>
-            </a:r>
-          </a:p>
-          <a:p>
-            <a:pPr algn="l" marL="0" indent="-228600">
-              <a:buNone/>
-            </a:pPr>
-            <a:r>
-              <a:rPr sz="1900" b="0">
-                <a:solidFill>
-                  <a:srgbClr val="333844"/>
-                </a:solidFill>
-                <a:latin typeface="Calibri"/>
-              </a:rPr>
-              <a:t>▸  Hallazgo: topics no respetan fronteras de subforos — ideología permea todo el foro</a:t>
-            </a:r>
-          </a:p>
-          <a:p>
-            <a:pPr algn="l" marL="0" indent="-228600">
-              <a:buNone/>
-            </a:pPr>
-            <a:r>
-              <a:rPr sz="1900" b="0">
-                <a:solidFill>
-                  <a:srgbClr val="333844"/>
-                </a:solidFill>
-                <a:latin typeface="Calibri"/>
-              </a:rPr>
-              <a:t>▸  Modelo: sentence-transformers + UMAP + HDBSCAN (sin LLM, rápido y reproducible)</a:t>
+            <a:r>
+              <a:t>Objetivo: ¿de qué habla el foro sin imponer categorías a priori?</a:t>
+            </a:r>
+          </a:p>
+          <a:p>
+            <a:r>
+              <a:t>Validación cruzada: comparar topics automáticos vs. subforos reales</a:t>
+            </a:r>
+          </a:p>
+          <a:p>
+            <a:r>
+              <a:t>Top topics: racismo científico, estética fascista, Evola/Spengler, violencia política</a:t>
+            </a:r>
+          </a:p>
+          <a:p>
+            <a:r>
+              <a:t>Hallazgo: topics no respetan fronteras de subforos — ideología permea todo el foro</a:t>
+            </a:r>
+          </a:p>
+          <a:p>
+            <a:r>
+              <a:t>Modelo: sentence-transformers + UMAP + HDBSCAN (sin LLM, rápido y reproducible)</a:t>
             </a:r>
           </a:p>
         </p:txBody>
@@ -6804,12 +6746,6 @@
           <a:lstStyle/>
           <a:p>
             <a:r>
-              <a:rPr sz="2400" b="1">
-                <a:solidFill>
-                  <a:srgbClr val="1A1A2E"/>
-                </a:solidFill>
-                <a:latin typeface="Calibri"/>
-              </a:rPr>
               <a:t>NER con qwen2.5:14b — entidades clave</a:t>
             </a:r>
           </a:p>
@@ -6825,92 +6761,61 @@
             <p:ph type="body" idx="16" sz="quarter"/>
           </p:nvPr>
         </p:nvSpPr>
-        <p:spPr/>
+        <p:spPr>
+          <a:xfrm>
+            <a:off x="1073427" y="2077576"/>
+            <a:ext cx="10084904" cy="3507298"/>
+          </a:xfrm>
+        </p:spPr>
         <p:txBody>
           <a:bodyPr wrap="square"/>
           <a:lstStyle/>
           <a:p>
-            <a:pPr algn="l" marL="0" indent="-228600">
+            <a:r>
+              <a:t>Estrategia: top-50 usuarios por volumen, hasta 50 posts por usuario</a:t>
+            </a:r>
+          </a:p>
+          <a:p>
+            <a:r>
+              <a:t>Tipos de entidad: PERSON, ORG, LOCATION, IDEOLOGY, WEAPON, EVENT</a:t>
+            </a:r>
+          </a:p>
+          <a:p>
+            <a:r>
+              <a:t>2,515 entidades extraídas en 1,500 posts</a:t>
+            </a:r>
+          </a:p>
+          <a:p>
+            <a:pPr lvl="1" marL="274320" indent="-228600">
               <a:buNone/>
             </a:pPr>
             <a:r>
-              <a:rPr sz="1900" b="0">
-                <a:solidFill>
-                  <a:srgbClr val="333844"/>
-                </a:solidFill>
-                <a:latin typeface="Calibri"/>
+              <a:rPr sz="1500" b="0">
+                <a:solidFill>
+                  <a:srgbClr val="707888"/>
+                </a:solidFill>
+                <a:latin typeface="Arial"/>
               </a:rPr>
-              <a:t>▸  Estrategia: top-50 usuarios por volumen, hasta 50 posts por usuario</a:t>
-            </a:r>
-          </a:p>
-          <a:p>
-            <a:pPr algn="l" marL="0" indent="-228600">
+              <a:t>·  Hitler: ×28  |  Evola: ×15  |  Golden Dawn: ×10</a:t>
+            </a:r>
+          </a:p>
+          <a:p>
+            <a:pPr lvl="1" marL="274320" indent="-228600">
               <a:buNone/>
             </a:pPr>
             <a:r>
-              <a:rPr sz="1900" b="0">
-                <a:solidFill>
-                  <a:srgbClr val="333844"/>
-                </a:solidFill>
-                <a:latin typeface="Calibri"/>
-              </a:rPr>
-              <a:t>▸  Tipos de entidad: PERSON, ORG, LOCATION, IDEOLOGY, WEAPON, EVENT</a:t>
-            </a:r>
-          </a:p>
-          <a:p>
-            <a:pPr algn="l" marL="0" indent="-228600">
-              <a:buNone/>
-            </a:pPr>
-            <a:r>
-              <a:rPr sz="1900" b="0">
-                <a:solidFill>
-                  <a:srgbClr val="333844"/>
-                </a:solidFill>
-                <a:latin typeface="Calibri"/>
-              </a:rPr>
-              <a:t>▸  2,515 entidades extraídas en 1,500 posts</a:t>
-            </a:r>
-          </a:p>
-          <a:p>
-            <a:pPr lvl="1" algn="l" marL="274320" indent="-228600">
-              <a:buNone/>
-            </a:pPr>
-            <a:r>
-              <a:rPr sz="1600" b="0">
+              <a:rPr sz="1500" b="0">
                 <a:solidFill>
                   <a:srgbClr val="707888"/>
                 </a:solidFill>
-                <a:latin typeface="Calibri"/>
-              </a:rPr>
-              <a:t>·  Hitler: ×28  |  Evola: ×15  |  Golden Dawn: ×10</a:t>
-            </a:r>
-          </a:p>
-          <a:p>
-            <a:pPr lvl="1" algn="l" marL="274320" indent="-228600">
-              <a:buNone/>
-            </a:pPr>
-            <a:r>
-              <a:rPr sz="1600" b="0">
-                <a:solidFill>
-                  <a:srgbClr val="707888"/>
-                </a:solidFill>
-                <a:latin typeface="Calibri"/>
+                <a:latin typeface="Arial"/>
               </a:rPr>
               <a:t>·  Atomwaffen Division mencionada 3 años antes de su clasificación como terrorista</a:t>
             </a:r>
           </a:p>
           <a:p>
-            <a:pPr algn="l" marL="0" indent="-228600">
-              <a:buNone/>
-            </a:pPr>
-            <a:r>
-              <a:rPr sz="1900" b="0">
-                <a:solidFill>
-                  <a:srgbClr val="333844"/>
-                </a:solidFill>
-                <a:latin typeface="Calibri"/>
-              </a:rPr>
-              <a:t>▸  Presencia de Evola casi al nivel de Hitler: rasgo distintivo vs. otros foros de ultraderecha</a:t>
+            <a:r>
+              <a:t>Presencia de Evola casi al nivel de Hitler: rasgo distintivo vs. otros foros de ultraderecha</a:t>
             </a:r>
           </a:p>
         </p:txBody>
@@ -6949,12 +6854,6 @@
           <a:lstStyle/>
           <a:p>
             <a:r>
-              <a:rPr sz="2400" b="1">
-                <a:solidFill>
-                  <a:srgbClr val="1A1A2E"/>
-                </a:solidFill>
-                <a:latin typeface="Calibri"/>
-              </a:rPr>
               <a:t>Picos de actividad — análisis temporal + topics</a:t>
             </a:r>
           </a:p>
@@ -6970,92 +6869,52 @@
             <p:ph type="body" idx="16" sz="quarter"/>
           </p:nvPr>
         </p:nvSpPr>
-        <p:spPr/>
+        <p:spPr>
+          <a:xfrm>
+            <a:off x="1073427" y="2077576"/>
+            <a:ext cx="10084904" cy="3507298"/>
+          </a:xfrm>
+        </p:spPr>
         <p:txBody>
           <a:bodyPr wrap="square"/>
           <a:lstStyle/>
           <a:p>
-            <a:pPr algn="l" marL="0" indent="-228600">
+            <a:r>
+              <a:t>Método: z-score semanal sobre serie temporal de posts (umbral: µ + 2σ)</a:t>
+            </a:r>
+          </a:p>
+          <a:p>
+            <a:r>
+              <a:t>Índice compuesto: volumen × longitud × señales de arousal (CAPS, !)</a:t>
+            </a:r>
+          </a:p>
+          <a:p>
+            <a:r>
+              <a:t>Atentados de París (nov 2015): ×1.62 baseline → único spike estadístico confirmado</a:t>
+            </a:r>
+          </a:p>
+          <a:p>
+            <a:pPr lvl="1" marL="274320" indent="-228600">
               <a:buNone/>
             </a:pPr>
             <a:r>
-              <a:rPr sz="1900" b="0">
-                <a:solidFill>
-                  <a:srgbClr val="333844"/>
-                </a:solidFill>
-                <a:latin typeface="Calibri"/>
-              </a:rPr>
-              <a:t>▸  Método: z-score semanal sobre serie temporal de posts (umbral: µ + 2σ)</a:t>
-            </a:r>
-          </a:p>
-          <a:p>
-            <a:pPr algn="l" marL="0" indent="-228600">
-              <a:buNone/>
-            </a:pPr>
-            <a:r>
-              <a:rPr sz="1900" b="0">
-                <a:solidFill>
-                  <a:srgbClr val="333844"/>
-                </a:solidFill>
-                <a:latin typeface="Calibri"/>
-              </a:rPr>
-              <a:t>▸  Índice compuesto: volumen × longitud × señales de arousal (CAPS, !)</a:t>
-            </a:r>
-          </a:p>
-          <a:p>
-            <a:pPr algn="l" marL="0" indent="-228600">
-              <a:buNone/>
-            </a:pPr>
-            <a:r>
-              <a:rPr sz="1900" b="0">
-                <a:solidFill>
-                  <a:srgbClr val="333844"/>
-                </a:solidFill>
-                <a:latin typeface="Calibri"/>
-              </a:rPr>
-              <a:t>▸  Atentados de París (nov 2015): ×1.62 baseline → único spike estadístico confirmado</a:t>
-            </a:r>
-          </a:p>
-          <a:p>
-            <a:pPr lvl="1" algn="l" marL="274320" indent="-228600">
-              <a:buNone/>
-            </a:pPr>
-            <a:r>
-              <a:rPr sz="1600" b="0">
+              <a:rPr sz="1500" b="0">
                 <a:solidFill>
                   <a:srgbClr val="707888"/>
                 </a:solidFill>
-                <a:latin typeface="Calibri"/>
+                <a:latin typeface="Arial"/>
               </a:rPr>
               <a:t>·  Reacción: islamofóbica, no racista — 'paris' ×22, 'refugee' ×16, 'white' baja</a:t>
             </a:r>
           </a:p>
           <a:p>
-            <a:pPr algn="l" marL="0" indent="-228600">
-              <a:buNone/>
-            </a:pPr>
-            <a:r>
-              <a:rPr sz="1900" b="0">
-                <a:solidFill>
-                  <a:srgbClr val="333844"/>
-                </a:solidFill>
-                <a:latin typeface="Calibri"/>
-              </a:rPr>
-              <a:t>▸  Trump 2016: ×1.03 — sin spike. Charlottesville 2017: ×0.96 — el foro ya estaba en declive</a:t>
-            </a:r>
-          </a:p>
-          <a:p>
-            <a:pPr algn="l" marL="0" indent="-228600">
-              <a:buNone/>
-            </a:pPr>
-            <a:r>
-              <a:rPr sz="1900" b="0">
-                <a:solidFill>
-                  <a:srgbClr val="333844"/>
-                </a:solidFill>
-                <a:latin typeface="Calibri"/>
-              </a:rPr>
-              <a:t>▸  Conclusión: la comunidad usó el atentado como munición narrativa anti-inmigración</a:t>
+            <a:r>
+              <a:t>Trump 2016: ×1.03 — sin spike. Charlottesville 2017: ×0.96 — el foro ya estaba en declive</a:t>
+            </a:r>
+          </a:p>
+          <a:p>
+            <a:r>
+              <a:t>Conclusión: la comunidad usó el atentado como munición narrativa anti-inmigración</a:t>
             </a:r>
           </a:p>
         </p:txBody>
@@ -7093,34 +6952,31 @@
           <a:bodyPr wrap="square"/>
           <a:lstStyle/>
           <a:p>
+            <a:pPr algn="ctr"/>
             <a:r>
               <a:rPr sz="1300" b="1">
                 <a:solidFill>
-                  <a:srgbClr val="E32B3D"/>
-                </a:solidFill>
-                <a:latin typeface="Calibri"/>
+                  <a:srgbClr val="CD2D37"/>
+                </a:solidFill>
+                <a:latin typeface="Arial"/>
               </a:rPr>
               <a:t>DEMO EN VIVO</a:t>
             </a:r>
           </a:p>
           <a:p>
-            <a:r>
-              <a:rPr sz="2600" b="1">
-                <a:solidFill>
-                  <a:srgbClr val="FFFFFF"/>
-                </a:solidFill>
-                <a:latin typeface="Calibri"/>
-              </a:rPr>
+            <a:pPr algn="ctr"/>
+            <a:r>
               <a:t>Demo — NER y picos de actividad</a:t>
             </a:r>
           </a:p>
           <a:p>
+            <a:pPr algn="ctr"/>
             <a:r>
               <a:rPr sz="1400">
                 <a:solidFill>
                   <a:srgbClr val="9AA3B5"/>
                 </a:solidFill>
-                <a:latin typeface="Calibri"/>
+                <a:latin typeface="Arial"/>
               </a:rPr>
               <a:t>IronMarch/02_llm_analysis.ipynb</a:t>
             </a:r>
@@ -7154,7 +7010,7 @@
                 <a:solidFill>
                   <a:srgbClr val="D6DAE2"/>
                 </a:solidFill>
-                <a:latin typeface="Calibri"/>
+                <a:latin typeface="Arial"/>
               </a:rPr>
               <a:t>1.  Abrir notebook 02_llm_analysis</a:t>
             </a:r>
@@ -7165,7 +7021,7 @@
                 <a:solidFill>
                   <a:srgbClr val="D6DAE2"/>
                 </a:solidFill>
-                <a:latin typeface="Calibri"/>
+                <a:latin typeface="Arial"/>
               </a:rPr>
               <a:t>2.  Sección 2: ejecutar NER sobre top-50 usuarios (checkpoint automático)</a:t>
             </a:r>
@@ -7176,7 +7032,7 @@
                 <a:solidFill>
                   <a:srgbClr val="D6DAE2"/>
                 </a:solidFill>
-                <a:latin typeface="Calibri"/>
+                <a:latin typeface="Arial"/>
               </a:rPr>
               <a:t>3.  Sección 3: visualizar picos temporales con z-score</a:t>
             </a:r>
@@ -7187,7 +7043,7 @@
                 <a:solidFill>
                   <a:srgbClr val="D6DAE2"/>
                 </a:solidFill>
-                <a:latin typeface="Calibri"/>
+                <a:latin typeface="Arial"/>
               </a:rPr>
               <a:t>4.  Cruzar: ¿qué usuarios están más activos en los picos?</a:t>
             </a:r>
@@ -7227,34 +7083,31 @@
           <a:bodyPr wrap="square"/>
           <a:lstStyle/>
           <a:p>
+            <a:pPr algn="ctr"/>
             <a:r>
               <a:rPr sz="1300" b="1">
                 <a:solidFill>
-                  <a:srgbClr val="E32B3D"/>
-                </a:solidFill>
-                <a:latin typeface="Calibri"/>
+                  <a:srgbClr val="CD2D37"/>
+                </a:solidFill>
+                <a:latin typeface="Arial"/>
               </a:rPr>
               <a:t>SECCIÓN 4</a:t>
             </a:r>
           </a:p>
           <a:p>
-            <a:r>
-              <a:rPr sz="3000" b="1">
-                <a:solidFill>
-                  <a:srgbClr val="FFFFFF"/>
-                </a:solidFill>
-                <a:latin typeface="Calibri"/>
-              </a:rPr>
+            <a:pPr algn="ctr"/>
+            <a:r>
               <a:t>Embeddings y estilometría</a:t>
             </a:r>
           </a:p>
           <a:p>
+            <a:pPr algn="ctr"/>
             <a:r>
               <a:rPr sz="1600">
                 <a:solidFill>
                   <a:srgbClr val="D6DAE2"/>
                 </a:solidFill>
-                <a:latin typeface="Calibri"/>
+                <a:latin typeface="Arial"/>
               </a:rPr>
               <a:t>qwen3-embedding + Burrows' Delta</a:t>
             </a:r>
@@ -7295,12 +7148,6 @@
           <a:lstStyle/>
           <a:p>
             <a:r>
-              <a:rPr sz="2400" b="1">
-                <a:solidFill>
-                  <a:srgbClr val="1A1A2E"/>
-                </a:solidFill>
-                <a:latin typeface="Calibri"/>
-              </a:rPr>
               <a:t>Cinco estrategias de embedding por usuario</a:t>
             </a:r>
           </a:p>
@@ -7316,92 +7163,43 @@
             <p:ph type="body" idx="16" sz="quarter"/>
           </p:nvPr>
         </p:nvSpPr>
-        <p:spPr/>
+        <p:spPr>
+          <a:xfrm>
+            <a:off x="1073427" y="2077576"/>
+            <a:ext cx="10084904" cy="3507298"/>
+          </a:xfrm>
+        </p:spPr>
         <p:txBody>
           <a:bodyPr wrap="square"/>
           <a:lstStyle/>
           <a:p>
-            <a:pPr algn="l" marL="0" indent="-228600">
-              <a:buNone/>
-            </a:pPr>
-            <a:r>
-              <a:rPr sz="1900" b="0">
-                <a:solidFill>
-                  <a:srgbClr val="333844"/>
-                </a:solidFill>
-                <a:latin typeface="Calibri"/>
-              </a:rPr>
-              <a:t>▸  Pregunta: ¿cuántos posts necesitamos para representar bien a un usuario?</a:t>
-            </a:r>
-          </a:p>
-          <a:p>
-            <a:pPr algn="l" marL="0" indent="-228600">
-              <a:buNone/>
-            </a:pPr>
-            <a:r>
-              <a:rPr sz="1900" b="0">
-                <a:solidFill>
-                  <a:srgbClr val="333844"/>
-                </a:solidFill>
-                <a:latin typeface="Calibri"/>
-              </a:rPr>
-              <a:t>▸  A — embed_users: concatenar TODOS los posts → 1 vector (truncado a 50K chars)</a:t>
-            </a:r>
-          </a:p>
-          <a:p>
-            <a:pPr algn="l" marL="0" indent="-228600">
-              <a:buNone/>
-            </a:pPr>
-            <a:r>
-              <a:rPr sz="1900" b="0">
-                <a:solidFill>
-                  <a:srgbClr val="333844"/>
-                </a:solidFill>
-                <a:latin typeface="Calibri"/>
-              </a:rPr>
-              <a:t>▸  B — centroids full: 1 embedding por post, promedio → referencia (ground truth)</a:t>
-            </a:r>
-          </a:p>
-          <a:p>
-            <a:pPr algn="l" marL="0" indent="-228600">
-              <a:buNone/>
-            </a:pPr>
-            <a:r>
-              <a:rPr sz="1900" b="0">
-                <a:solidFill>
-                  <a:srgbClr val="333844"/>
-                </a:solidFill>
-                <a:latin typeface="Calibri"/>
-              </a:rPr>
-              <a:t>▸  C/D/E — centroids muestreados: top-50/100/150 posts MÁS LARGOS por usuario</a:t>
-            </a:r>
-          </a:p>
-          <a:p>
-            <a:pPr algn="l" marL="0" indent="-228600">
-              <a:buNone/>
-            </a:pPr>
-            <a:r>
-              <a:rPr sz="1900" b="0">
-                <a:solidFill>
-                  <a:srgbClr val="333844"/>
-                </a:solidFill>
-                <a:latin typeface="Calibri"/>
-              </a:rPr>
-              <a:t>▸  Métrica: Spearman ρ entre ranking de similitudes de cada estrategia vs. B</a:t>
-            </a:r>
-          </a:p>
-          <a:p>
-            <a:pPr algn="l" marL="0" indent="-228600">
-              <a:buNone/>
-            </a:pPr>
-            <a:r>
-              <a:rPr sz="1900" b="0">
-                <a:solidFill>
-                  <a:srgbClr val="333844"/>
-                </a:solidFill>
-                <a:latin typeface="Calibri"/>
-              </a:rPr>
-              <a:t>▸  Punto óptimo: D (top-100) → ρ=0.860, 3h 33min vs. ~9h completo</a:t>
+            <a:r>
+              <a:t>Pregunta: ¿cuántos posts necesitamos para representar bien a un usuario?</a:t>
+            </a:r>
+          </a:p>
+          <a:p>
+            <a:r>
+              <a:t>A — embed_users: concatenar TODOS los posts → 1 vector (truncado a 50K chars)</a:t>
+            </a:r>
+          </a:p>
+          <a:p>
+            <a:r>
+              <a:t>B — centroids full: 1 embedding por post, promedio → referencia (ground truth)</a:t>
+            </a:r>
+          </a:p>
+          <a:p>
+            <a:r>
+              <a:t>C/D/E — centroids muestreados: top-50/100/150 posts MÁS LARGOS por usuario</a:t>
+            </a:r>
+          </a:p>
+          <a:p>
+            <a:r>
+              <a:t>Métrica: Spearman ρ entre ranking de similitudes de cada estrategia vs. B</a:t>
+            </a:r>
+          </a:p>
+          <a:p>
+            <a:r>
+              <a:t>Punto óptimo: D (top-100) → ρ=0.860, 3h 33min vs. ~9h completo</a:t>
             </a:r>
           </a:p>
         </p:txBody>
@@ -7440,12 +7238,6 @@
           <a:lstStyle/>
           <a:p>
             <a:r>
-              <a:rPr sz="2400" b="1">
-                <a:solidFill>
-                  <a:srgbClr val="1A1A2E"/>
-                </a:solidFill>
-                <a:latin typeface="Calibri"/>
-              </a:rPr>
               <a:t>Resultados del experimento de muestreo</a:t>
             </a:r>
           </a:p>
@@ -7476,14 +7268,14 @@
         </p:nvSpPr>
         <p:spPr>
           <a:xfrm>
-            <a:off x="1051560" y="1645920"/>
+            <a:off x="1051560" y="2148840"/>
             <a:ext cx="10058400" cy="365760"/>
           </a:xfrm>
           <a:prstGeom prst="rect">
             <a:avLst/>
           </a:prstGeom>
           <a:solidFill>
-            <a:srgbClr val="E32B3D"/>
+            <a:srgbClr val="CD2D37"/>
           </a:solidFill>
           <a:ln>
             <a:noFill/>
@@ -7519,7 +7311,7 @@
         </p:nvSpPr>
         <p:spPr>
           <a:xfrm>
-            <a:off x="1097280" y="1700920"/>
+            <a:off x="1097280" y="2203840"/>
             <a:ext cx="1920240" cy="365760"/>
           </a:xfrm>
           <a:prstGeom prst="rect">
@@ -7539,7 +7331,7 @@
                 <a:solidFill>
                   <a:srgbClr val="FFFFFF"/>
                 </a:solidFill>
-                <a:latin typeface="Calibri"/>
+                <a:latin typeface="Arial"/>
               </a:rPr>
               <a:t>Estrategia</a:t>
             </a:r>
@@ -7554,7 +7346,7 @@
         </p:nvSpPr>
         <p:spPr>
           <a:xfrm>
-            <a:off x="3108960" y="1700920"/>
+            <a:off x="3108960" y="2203840"/>
             <a:ext cx="1920240" cy="365760"/>
           </a:xfrm>
           <a:prstGeom prst="rect">
@@ -7574,7 +7366,7 @@
                 <a:solidFill>
                   <a:srgbClr val="FFFFFF"/>
                 </a:solidFill>
-                <a:latin typeface="Calibri"/>
+                <a:latin typeface="Arial"/>
               </a:rPr>
               <a:t>Posts</a:t>
             </a:r>
@@ -7589,7 +7381,7 @@
         </p:nvSpPr>
         <p:spPr>
           <a:xfrm>
-            <a:off x="5120640" y="1700920"/>
+            <a:off x="5120640" y="2203840"/>
             <a:ext cx="1920240" cy="365760"/>
           </a:xfrm>
           <a:prstGeom prst="rect">
@@ -7609,7 +7401,7 @@
                 <a:solidFill>
                   <a:srgbClr val="FFFFFF"/>
                 </a:solidFill>
-                <a:latin typeface="Calibri"/>
+                <a:latin typeface="Arial"/>
               </a:rPr>
               <a:t>Tiempo GPU</a:t>
             </a:r>
@@ -7624,7 +7416,7 @@
         </p:nvSpPr>
         <p:spPr>
           <a:xfrm>
-            <a:off x="7132320" y="1700920"/>
+            <a:off x="7132320" y="2203840"/>
             <a:ext cx="1920240" cy="365760"/>
           </a:xfrm>
           <a:prstGeom prst="rect">
@@ -7644,7 +7436,7 @@
                 <a:solidFill>
                   <a:srgbClr val="FFFFFF"/>
                 </a:solidFill>
-                <a:latin typeface="Calibri"/>
+                <a:latin typeface="Arial"/>
               </a:rPr>
               <a:t>Spearman ρ vs full</a:t>
             </a:r>
@@ -7659,7 +7451,7 @@
         </p:nvSpPr>
         <p:spPr>
           <a:xfrm>
-            <a:off x="9144000" y="1700920"/>
+            <a:off x="9144000" y="2203840"/>
             <a:ext cx="1920240" cy="365760"/>
           </a:xfrm>
           <a:prstGeom prst="rect">
@@ -7679,7 +7471,7 @@
                 <a:solidFill>
                   <a:srgbClr val="FFFFFF"/>
                 </a:solidFill>
-                <a:latin typeface="Calibri"/>
+                <a:latin typeface="Arial"/>
               </a:rPr>
               <a:t>Δρ</a:t>
             </a:r>
@@ -7694,7 +7486,7 @@
         </p:nvSpPr>
         <p:spPr>
           <a:xfrm>
-            <a:off x="1051560" y="2011680"/>
+            <a:off x="1051560" y="2514600"/>
             <a:ext cx="10058400" cy="310896"/>
           </a:xfrm>
           <a:prstGeom prst="rect">
@@ -7737,7 +7529,7 @@
         </p:nvSpPr>
         <p:spPr>
           <a:xfrm>
-            <a:off x="1097280" y="2051680"/>
+            <a:off x="1097280" y="2554600"/>
             <a:ext cx="1920240" cy="310896"/>
           </a:xfrm>
           <a:prstGeom prst="rect">
@@ -7755,9 +7547,9 @@
             <a:r>
               <a:rPr sz="1100" b="0">
                 <a:solidFill>
-                  <a:srgbClr val="333844"/>
-                </a:solidFill>
-                <a:latin typeface="Calibri"/>
+                  <a:srgbClr val="465461"/>
+                </a:solidFill>
+                <a:latin typeface="Arial"/>
               </a:rPr>
               <a:t>B — full</a:t>
             </a:r>
@@ -7772,7 +7564,7 @@
         </p:nvSpPr>
         <p:spPr>
           <a:xfrm>
-            <a:off x="3108960" y="2051680"/>
+            <a:off x="3108960" y="2554600"/>
             <a:ext cx="1920240" cy="310896"/>
           </a:xfrm>
           <a:prstGeom prst="rect">
@@ -7790,9 +7582,9 @@
             <a:r>
               <a:rPr sz="1100" b="0">
                 <a:solidFill>
-                  <a:srgbClr val="333844"/>
-                </a:solidFill>
-                <a:latin typeface="Calibri"/>
+                  <a:srgbClr val="465461"/>
+                </a:solidFill>
+                <a:latin typeface="Arial"/>
               </a:rPr>
               <a:t>157,779</a:t>
             </a:r>
@@ -7807,7 +7599,7 @@
         </p:nvSpPr>
         <p:spPr>
           <a:xfrm>
-            <a:off x="5120640" y="2051680"/>
+            <a:off x="5120640" y="2554600"/>
             <a:ext cx="1920240" cy="310896"/>
           </a:xfrm>
           <a:prstGeom prst="rect">
@@ -7825,9 +7617,9 @@
             <a:r>
               <a:rPr sz="1100" b="0">
                 <a:solidFill>
-                  <a:srgbClr val="333844"/>
-                </a:solidFill>
-                <a:latin typeface="Calibri"/>
+                  <a:srgbClr val="465461"/>
+                </a:solidFill>
+                <a:latin typeface="Arial"/>
               </a:rPr>
               <a:t>~9 h</a:t>
             </a:r>
@@ -7842,7 +7634,7 @@
         </p:nvSpPr>
         <p:spPr>
           <a:xfrm>
-            <a:off x="7132320" y="2051680"/>
+            <a:off x="7132320" y="2554600"/>
             <a:ext cx="1920240" cy="310896"/>
           </a:xfrm>
           <a:prstGeom prst="rect">
@@ -7860,9 +7652,9 @@
             <a:r>
               <a:rPr sz="1100" b="0">
                 <a:solidFill>
-                  <a:srgbClr val="333844"/>
-                </a:solidFill>
-                <a:latin typeface="Calibri"/>
+                  <a:srgbClr val="465461"/>
+                </a:solidFill>
+                <a:latin typeface="Arial"/>
               </a:rPr>
               <a:t>referencia</a:t>
             </a:r>
@@ -7877,7 +7669,7 @@
         </p:nvSpPr>
         <p:spPr>
           <a:xfrm>
-            <a:off x="9144000" y="2051680"/>
+            <a:off x="9144000" y="2554600"/>
             <a:ext cx="1920240" cy="310896"/>
           </a:xfrm>
           <a:prstGeom prst="rect">
@@ -7895,9 +7687,9 @@
             <a:r>
               <a:rPr sz="1100" b="0">
                 <a:solidFill>
-                  <a:srgbClr val="333844"/>
-                </a:solidFill>
-                <a:latin typeface="Calibri"/>
+                  <a:srgbClr val="465461"/>
+                </a:solidFill>
+                <a:latin typeface="Arial"/>
               </a:rPr>
               <a:t>—</a:t>
             </a:r>
@@ -7912,7 +7704,7 @@
         </p:nvSpPr>
         <p:spPr>
           <a:xfrm>
-            <a:off x="1051560" y="2322576"/>
+            <a:off x="1051560" y="2825496"/>
             <a:ext cx="10058400" cy="310896"/>
           </a:xfrm>
           <a:prstGeom prst="rect">
@@ -7955,7 +7747,7 @@
         </p:nvSpPr>
         <p:spPr>
           <a:xfrm>
-            <a:off x="1097280" y="2362576"/>
+            <a:off x="1097280" y="2865496"/>
             <a:ext cx="1920240" cy="310896"/>
           </a:xfrm>
           <a:prstGeom prst="rect">
@@ -7973,9 +7765,9 @@
             <a:r>
               <a:rPr sz="1100" b="0">
                 <a:solidFill>
-                  <a:srgbClr val="333844"/>
-                </a:solidFill>
-                <a:latin typeface="Calibri"/>
+                  <a:srgbClr val="465461"/>
+                </a:solidFill>
+                <a:latin typeface="Arial"/>
               </a:rPr>
               <a:t>C — top-50</a:t>
             </a:r>
@@ -7990,7 +7782,7 @@
         </p:nvSpPr>
         <p:spPr>
           <a:xfrm>
-            <a:off x="3108960" y="2362576"/>
+            <a:off x="3108960" y="2865496"/>
             <a:ext cx="1920240" cy="310896"/>
           </a:xfrm>
           <a:prstGeom prst="rect">
@@ -8008,9 +7800,9 @@
             <a:r>
               <a:rPr sz="1100" b="0">
                 <a:solidFill>
-                  <a:srgbClr val="333844"/>
-                </a:solidFill>
-                <a:latin typeface="Calibri"/>
+                  <a:srgbClr val="465461"/>
+                </a:solidFill>
+                <a:latin typeface="Arial"/>
               </a:rPr>
               <a:t>≤41,800</a:t>
             </a:r>
@@ -8025,7 +7817,7 @@
         </p:nvSpPr>
         <p:spPr>
           <a:xfrm>
-            <a:off x="5120640" y="2362576"/>
+            <a:off x="5120640" y="2865496"/>
             <a:ext cx="1920240" cy="310896"/>
           </a:xfrm>
           <a:prstGeom prst="rect">
@@ -8043,9 +7835,9 @@
             <a:r>
               <a:rPr sz="1100" b="0">
                 <a:solidFill>
-                  <a:srgbClr val="333844"/>
-                </a:solidFill>
-                <a:latin typeface="Calibri"/>
+                  <a:srgbClr val="465461"/>
+                </a:solidFill>
+                <a:latin typeface="Arial"/>
               </a:rPr>
               <a:t>2h 35min</a:t>
             </a:r>
@@ -8060,7 +7852,7 @@
         </p:nvSpPr>
         <p:spPr>
           <a:xfrm>
-            <a:off x="7132320" y="2362576"/>
+            <a:off x="7132320" y="2865496"/>
             <a:ext cx="1920240" cy="310896"/>
           </a:xfrm>
           <a:prstGeom prst="rect">
@@ -8078,9 +7870,9 @@
             <a:r>
               <a:rPr sz="1100" b="0">
                 <a:solidFill>
-                  <a:srgbClr val="333844"/>
-                </a:solidFill>
-                <a:latin typeface="Calibri"/>
+                  <a:srgbClr val="465461"/>
+                </a:solidFill>
+                <a:latin typeface="Arial"/>
               </a:rPr>
               <a:t>0.799</a:t>
             </a:r>
@@ -8095,7 +7887,7 @@
         </p:nvSpPr>
         <p:spPr>
           <a:xfrm>
-            <a:off x="9144000" y="2362576"/>
+            <a:off x="9144000" y="2865496"/>
             <a:ext cx="1920240" cy="310896"/>
           </a:xfrm>
           <a:prstGeom prst="rect">
@@ -8113,9 +7905,9 @@
             <a:r>
               <a:rPr sz="1100" b="0">
                 <a:solidFill>
-                  <a:srgbClr val="333844"/>
-                </a:solidFill>
-                <a:latin typeface="Calibri"/>
+                  <a:srgbClr val="465461"/>
+                </a:solidFill>
+                <a:latin typeface="Arial"/>
               </a:rPr>
               <a:t>—</a:t>
             </a:r>
@@ -8130,7 +7922,7 @@
         </p:nvSpPr>
         <p:spPr>
           <a:xfrm>
-            <a:off x="1051560" y="2633472"/>
+            <a:off x="1051560" y="3136391"/>
             <a:ext cx="10058400" cy="310896"/>
           </a:xfrm>
           <a:prstGeom prst="rect">
@@ -8173,7 +7965,7 @@
         </p:nvSpPr>
         <p:spPr>
           <a:xfrm>
-            <a:off x="1097280" y="2673472"/>
+            <a:off x="1097280" y="3176391"/>
             <a:ext cx="1920240" cy="310896"/>
           </a:xfrm>
           <a:prstGeom prst="rect">
@@ -8191,9 +7983,9 @@
             <a:r>
               <a:rPr sz="1100" b="0">
                 <a:solidFill>
-                  <a:srgbClr val="333844"/>
-                </a:solidFill>
-                <a:latin typeface="Calibri"/>
+                  <a:srgbClr val="465461"/>
+                </a:solidFill>
+                <a:latin typeface="Arial"/>
               </a:rPr>
               <a:t>D — top-100</a:t>
             </a:r>
@@ -8208,7 +8000,7 @@
         </p:nvSpPr>
         <p:spPr>
           <a:xfrm>
-            <a:off x="3108960" y="2673472"/>
+            <a:off x="3108960" y="3176391"/>
             <a:ext cx="1920240" cy="310896"/>
           </a:xfrm>
           <a:prstGeom prst="rect">
@@ -8226,9 +8018,9 @@
             <a:r>
               <a:rPr sz="1100" b="0">
                 <a:solidFill>
-                  <a:srgbClr val="333844"/>
-                </a:solidFill>
-                <a:latin typeface="Calibri"/>
+                  <a:srgbClr val="465461"/>
+                </a:solidFill>
+                <a:latin typeface="Arial"/>
               </a:rPr>
               <a:t>41,319</a:t>
             </a:r>
@@ -8243,7 +8035,7 @@
         </p:nvSpPr>
         <p:spPr>
           <a:xfrm>
-            <a:off x="5120640" y="2673472"/>
+            <a:off x="5120640" y="3176391"/>
             <a:ext cx="1920240" cy="310896"/>
           </a:xfrm>
           <a:prstGeom prst="rect">
@@ -8261,9 +8053,9 @@
             <a:r>
               <a:rPr sz="1100" b="0">
                 <a:solidFill>
-                  <a:srgbClr val="333844"/>
-                </a:solidFill>
-                <a:latin typeface="Calibri"/>
+                  <a:srgbClr val="465461"/>
+                </a:solidFill>
+                <a:latin typeface="Arial"/>
               </a:rPr>
               <a:t>3h 33min</a:t>
             </a:r>
@@ -8278,7 +8070,7 @@
         </p:nvSpPr>
         <p:spPr>
           <a:xfrm>
-            <a:off x="7132320" y="2673472"/>
+            <a:off x="7132320" y="3176391"/>
             <a:ext cx="1920240" cy="310896"/>
           </a:xfrm>
           <a:prstGeom prst="rect">
@@ -8296,9 +8088,9 @@
             <a:r>
               <a:rPr sz="1100" b="0">
                 <a:solidFill>
-                  <a:srgbClr val="333844"/>
-                </a:solidFill>
-                <a:latin typeface="Calibri"/>
+                  <a:srgbClr val="465461"/>
+                </a:solidFill>
+                <a:latin typeface="Arial"/>
               </a:rPr>
               <a:t>0.860</a:t>
             </a:r>
@@ -8313,7 +8105,7 @@
         </p:nvSpPr>
         <p:spPr>
           <a:xfrm>
-            <a:off x="9144000" y="2673472"/>
+            <a:off x="9144000" y="3176391"/>
             <a:ext cx="1920240" cy="310896"/>
           </a:xfrm>
           <a:prstGeom prst="rect">
@@ -8331,9 +8123,9 @@
             <a:r>
               <a:rPr sz="1100" b="0">
                 <a:solidFill>
-                  <a:srgbClr val="333844"/>
-                </a:solidFill>
-                <a:latin typeface="Calibri"/>
+                  <a:srgbClr val="465461"/>
+                </a:solidFill>
+                <a:latin typeface="Arial"/>
               </a:rPr>
               <a:t>+0.061</a:t>
             </a:r>
@@ -8348,7 +8140,7 @@
         </p:nvSpPr>
         <p:spPr>
           <a:xfrm>
-            <a:off x="1051560" y="2944368"/>
+            <a:off x="1051560" y="3447287"/>
             <a:ext cx="10058400" cy="310896"/>
           </a:xfrm>
           <a:prstGeom prst="rect">
@@ -8391,7 +8183,7 @@
         </p:nvSpPr>
         <p:spPr>
           <a:xfrm>
-            <a:off x="1097280" y="2984368"/>
+            <a:off x="1097280" y="3487287"/>
             <a:ext cx="1920240" cy="310896"/>
           </a:xfrm>
           <a:prstGeom prst="rect">
@@ -8409,9 +8201,9 @@
             <a:r>
               <a:rPr sz="1100" b="0">
                 <a:solidFill>
-                  <a:srgbClr val="333844"/>
-                </a:solidFill>
-                <a:latin typeface="Calibri"/>
+                  <a:srgbClr val="465461"/>
+                </a:solidFill>
+                <a:latin typeface="Arial"/>
               </a:rPr>
               <a:t>E — top-150</a:t>
             </a:r>
@@ -8426,7 +8218,7 @@
         </p:nvSpPr>
         <p:spPr>
           <a:xfrm>
-            <a:off x="3108960" y="2984368"/>
+            <a:off x="3108960" y="3487287"/>
             <a:ext cx="1920240" cy="310896"/>
           </a:xfrm>
           <a:prstGeom prst="rect">
@@ -8444,9 +8236,9 @@
             <a:r>
               <a:rPr sz="1100" b="0">
                 <a:solidFill>
-                  <a:srgbClr val="333844"/>
-                </a:solidFill>
-                <a:latin typeface="Calibri"/>
+                  <a:srgbClr val="465461"/>
+                </a:solidFill>
+                <a:latin typeface="Arial"/>
               </a:rPr>
               <a:t>53,193</a:t>
             </a:r>
@@ -8461,7 +8253,7 @@
         </p:nvSpPr>
         <p:spPr>
           <a:xfrm>
-            <a:off x="5120640" y="2984368"/>
+            <a:off x="5120640" y="3487287"/>
             <a:ext cx="1920240" cy="310896"/>
           </a:xfrm>
           <a:prstGeom prst="rect">
@@ -8479,9 +8271,9 @@
             <a:r>
               <a:rPr sz="1100" b="0">
                 <a:solidFill>
-                  <a:srgbClr val="333844"/>
-                </a:solidFill>
-                <a:latin typeface="Calibri"/>
+                  <a:srgbClr val="465461"/>
+                </a:solidFill>
+                <a:latin typeface="Arial"/>
               </a:rPr>
               <a:t>4h 12min</a:t>
             </a:r>
@@ -8496,7 +8288,7 @@
         </p:nvSpPr>
         <p:spPr>
           <a:xfrm>
-            <a:off x="7132320" y="2984368"/>
+            <a:off x="7132320" y="3487287"/>
             <a:ext cx="1920240" cy="310896"/>
           </a:xfrm>
           <a:prstGeom prst="rect">
@@ -8514,9 +8306,9 @@
             <a:r>
               <a:rPr sz="1100" b="0">
                 <a:solidFill>
-                  <a:srgbClr val="333844"/>
-                </a:solidFill>
-                <a:latin typeface="Calibri"/>
+                  <a:srgbClr val="465461"/>
+                </a:solidFill>
+                <a:latin typeface="Arial"/>
               </a:rPr>
               <a:t>0.896</a:t>
             </a:r>
@@ -8531,7 +8323,7 @@
         </p:nvSpPr>
         <p:spPr>
           <a:xfrm>
-            <a:off x="9144000" y="2984368"/>
+            <a:off x="9144000" y="3487287"/>
             <a:ext cx="1920240" cy="310896"/>
           </a:xfrm>
           <a:prstGeom prst="rect">
@@ -8549,9 +8341,9 @@
             <a:r>
               <a:rPr sz="1100" b="0">
                 <a:solidFill>
-                  <a:srgbClr val="333844"/>
-                </a:solidFill>
-                <a:latin typeface="Calibri"/>
+                  <a:srgbClr val="465461"/>
+                </a:solidFill>
+                <a:latin typeface="Arial"/>
               </a:rPr>
               <a:t>+0.036</a:t>
             </a:r>
@@ -8586,7 +8378,7 @@
                 <a:solidFill>
                   <a:srgbClr val="707888"/>
                 </a:solidFill>
-                <a:latin typeface="Calibri"/>
+                <a:latin typeface="Arial"/>
               </a:rPr>
               <a:t>ℹ  Rendimiento marginal decreciente: C→D (+37min, +6.1ρ) es mejor inversión que D→E (+39min, +3.6ρ).</a:t>
             </a:r>
@@ -8627,12 +8419,6 @@
           <a:lstStyle/>
           <a:p>
             <a:r>
-              <a:rPr sz="2400" b="1">
-                <a:solidFill>
-                  <a:srgbClr val="1A1A2E"/>
-                </a:solidFill>
-                <a:latin typeface="Calibri"/>
-              </a:rPr>
               <a:t>UMAP + HDBSCAN — estructura del espacio de usuarios</a:t>
             </a:r>
           </a:p>
@@ -8648,78 +8434,38 @@
             <p:ph type="body" idx="16" sz="quarter"/>
           </p:nvPr>
         </p:nvSpPr>
-        <p:spPr/>
+        <p:spPr>
+          <a:xfrm>
+            <a:off x="1073427" y="2580496"/>
+            <a:ext cx="10084904" cy="3004378"/>
+          </a:xfrm>
+        </p:spPr>
         <p:txBody>
           <a:bodyPr wrap="square"/>
           <a:lstStyle/>
           <a:p>
-            <a:pPr algn="l" marL="0" indent="-228600">
-              <a:buNone/>
-            </a:pPr>
-            <a:r>
-              <a:rPr sz="1900" b="0">
-                <a:solidFill>
-                  <a:srgbClr val="333844"/>
-                </a:solidFill>
-                <a:latin typeface="Calibri"/>
-              </a:rPr>
-              <a:t>▸  UMAP reduce 4096D → 2D preservando estructura de vecindad local</a:t>
-            </a:r>
-          </a:p>
-          <a:p>
-            <a:pPr algn="l" marL="0" indent="-228600">
-              <a:buNone/>
-            </a:pPr>
-            <a:r>
-              <a:rPr sz="1900" b="0">
-                <a:solidFill>
-                  <a:srgbClr val="333844"/>
-                </a:solidFill>
-                <a:latin typeface="Calibri"/>
-              </a:rPr>
-              <a:t>▸  HDBSCAN detecta clusters densos sin fijar K a priori</a:t>
-            </a:r>
-          </a:p>
-          <a:p>
-            <a:pPr algn="l" marL="0" indent="-228600">
-              <a:buNone/>
-            </a:pPr>
-            <a:r>
-              <a:rPr sz="1900" b="0">
-                <a:solidFill>
-                  <a:srgbClr val="333844"/>
-                </a:solidFill>
-                <a:latin typeface="Calibri"/>
-              </a:rPr>
-              <a:t>▸  Visualización interactiva Plotly: hover = nombre de usuario + cluster</a:t>
-            </a:r>
-          </a:p>
-          <a:p>
-            <a:pPr algn="l" marL="0" indent="-228600">
-              <a:buNone/>
-            </a:pPr>
-            <a:r>
-              <a:rPr sz="1900" b="0">
-                <a:solidFill>
-                  <a:srgbClr val="333844"/>
-                </a:solidFill>
-                <a:latin typeface="Calibri"/>
-              </a:rPr>
-              <a:t>▸  Clusters identificados: grupos ideológicos coherentes (aceleracionistas, nacional-bolcheviques...)</a:t>
-            </a:r>
-          </a:p>
-          <a:p>
-            <a:pPr algn="l" marL="0" indent="-228600">
-              <a:buNone/>
-            </a:pPr>
-            <a:r>
-              <a:rPr sz="1900" b="0">
-                <a:solidFill>
-                  <a:srgbClr val="333844"/>
-                </a:solidFill>
-                <a:latin typeface="Calibri"/>
-              </a:rPr>
-              <a:t>▸  Ruido (cluster -1): usuarios esporádicos sin afiliación ideológica clara</a:t>
+            <a:r>
+              <a:t>UMAP reduce 4096D → 2D preservando estructura de vecindad local</a:t>
+            </a:r>
+          </a:p>
+          <a:p>
+            <a:r>
+              <a:t>HDBSCAN detecta clusters densos sin fijar K a priori</a:t>
+            </a:r>
+          </a:p>
+          <a:p>
+            <a:r>
+              <a:t>Visualización interactiva Plotly: hover = nombre de usuario + cluster</a:t>
+            </a:r>
+          </a:p>
+          <a:p>
+            <a:r>
+              <a:t>Clusters identificados: grupos ideológicos coherentes (aceleracionistas, nacional-bolcheviques...)</a:t>
+            </a:r>
+          </a:p>
+          <a:p>
+            <a:r>
+              <a:t>Ruido (cluster -1): usuarios esporádicos sin afiliación ideológica clara</a:t>
             </a:r>
           </a:p>
         </p:txBody>
@@ -8757,34 +8503,31 @@
           <a:bodyPr wrap="square"/>
           <a:lstStyle/>
           <a:p>
+            <a:pPr algn="ctr"/>
             <a:r>
               <a:rPr sz="1300" b="1">
                 <a:solidFill>
-                  <a:srgbClr val="E32B3D"/>
-                </a:solidFill>
-                <a:latin typeface="Calibri"/>
+                  <a:srgbClr val="CD2D37"/>
+                </a:solidFill>
+                <a:latin typeface="Arial"/>
               </a:rPr>
               <a:t>SECCIÓN 1</a:t>
             </a:r>
           </a:p>
           <a:p>
-            <a:r>
-              <a:rPr sz="3000" b="1">
-                <a:solidFill>
-                  <a:srgbClr val="FFFFFF"/>
-                </a:solidFill>
-                <a:latin typeface="Calibri"/>
-              </a:rPr>
+            <a:pPr algn="ctr"/>
+            <a:r>
               <a:t>Dataset y contexto</a:t>
             </a:r>
           </a:p>
           <a:p>
+            <a:pPr algn="ctr"/>
             <a:r>
               <a:rPr sz="1600">
                 <a:solidFill>
                   <a:srgbClr val="D6DAE2"/>
                 </a:solidFill>
-                <a:latin typeface="Calibri"/>
+                <a:latin typeface="Arial"/>
               </a:rPr>
               <a:t>¿Qué es Iron March y qué datos tenemos?</a:t>
             </a:r>
@@ -8825,12 +8568,6 @@
           <a:lstStyle/>
           <a:p>
             <a:r>
-              <a:rPr sz="2400" b="1">
-                <a:solidFill>
-                  <a:srgbClr val="1A1A2E"/>
-                </a:solidFill>
-                <a:latin typeface="Calibri"/>
-              </a:rPr>
               <a:t>Burrows' Delta — estilometría para sockpuppets</a:t>
             </a:r>
           </a:p>
@@ -8846,90 +8583,50 @@
             <p:ph type="body" idx="16" sz="quarter"/>
           </p:nvPr>
         </p:nvSpPr>
-        <p:spPr/>
+        <p:spPr>
+          <a:xfrm>
+            <a:off x="1073427" y="2580496"/>
+            <a:ext cx="10084904" cy="3004378"/>
+          </a:xfrm>
+        </p:spPr>
         <p:txBody>
           <a:bodyPr wrap="square"/>
           <a:lstStyle/>
           <a:p>
-            <a:pPr algn="l" marL="0" indent="-228600">
+            <a:r>
+              <a:t>Mide frecuencia relativa de las N palabras más comunes, normalizada por z-score</a:t>
+            </a:r>
+          </a:p>
+          <a:p>
+            <a:r>
+              <a:t>Delta bajo entre dos usuarios → estilo similar → candidato a misma persona</a:t>
+            </a:r>
+          </a:p>
+          <a:p>
+            <a:r>
+              <a:t>Corpus IronMarch: top-200 palabras función, top-150 usuarios (≥500 palabras)</a:t>
+            </a:r>
+          </a:p>
+          <a:p>
+            <a:r>
+              <a:t>Delta medio: 1.08  |  mínimo: 0.46  |  máximo: 2.03</a:t>
+            </a:r>
+          </a:p>
+          <a:p>
+            <a:r>
+              <a:t>Par más sospechoso: 255 + Talleyrand</a:t>
+            </a:r>
+          </a:p>
+          <a:p>
+            <a:pPr lvl="1" marL="274320" indent="-228600">
               <a:buNone/>
             </a:pPr>
             <a:r>
-              <a:rPr sz="1900" b="0">
-                <a:solidFill>
-                  <a:srgbClr val="333844"/>
-                </a:solidFill>
-                <a:latin typeface="Calibri"/>
-              </a:rPr>
-              <a:t>▸  Mide frecuencia relativa de las N palabras más comunes, normalizada por z-score</a:t>
-            </a:r>
-          </a:p>
-          <a:p>
-            <a:pPr algn="l" marL="0" indent="-228600">
-              <a:buNone/>
-            </a:pPr>
-            <a:r>
-              <a:rPr sz="1900" b="0">
-                <a:solidFill>
-                  <a:srgbClr val="333844"/>
-                </a:solidFill>
-                <a:latin typeface="Calibri"/>
-              </a:rPr>
-              <a:t>▸  Delta bajo entre dos usuarios → estilo similar → candidato a misma persona</a:t>
-            </a:r>
-          </a:p>
-          <a:p>
-            <a:pPr algn="l" marL="0" indent="-228600">
-              <a:buNone/>
-            </a:pPr>
-            <a:r>
-              <a:rPr sz="1900" b="0">
-                <a:solidFill>
-                  <a:srgbClr val="333844"/>
-                </a:solidFill>
-                <a:latin typeface="Calibri"/>
-              </a:rPr>
-              <a:t>▸  Corpus IronMarch: top-200 palabras función, top-150 usuarios (≥500 palabras)</a:t>
-            </a:r>
-          </a:p>
-          <a:p>
-            <a:pPr algn="l" marL="0" indent="-228600">
-              <a:buNone/>
-            </a:pPr>
-            <a:r>
-              <a:rPr sz="1900" b="0">
-                <a:solidFill>
-                  <a:srgbClr val="333844"/>
-                </a:solidFill>
-                <a:latin typeface="Calibri"/>
-              </a:rPr>
-              <a:t>▸  Delta medio: 1.08  |  mínimo: 0.46  |  máximo: 2.03</a:t>
-            </a:r>
-          </a:p>
-          <a:p>
-            <a:pPr algn="l" marL="0" indent="-228600">
-              <a:buNone/>
-            </a:pPr>
-            <a:r>
-              <a:rPr sz="1900" b="0">
-                <a:solidFill>
-                  <a:srgbClr val="333844"/>
-                </a:solidFill>
-                <a:latin typeface="Calibri"/>
-              </a:rPr>
-              <a:t>▸  Par más sospechoso: 255 + Talleyrand</a:t>
-            </a:r>
-          </a:p>
-          <a:p>
-            <a:pPr lvl="1" algn="l" marL="274320" indent="-228600">
-              <a:buNone/>
-            </a:pPr>
-            <a:r>
-              <a:rPr sz="1600" b="0">
+              <a:rPr sz="1500" b="0">
                 <a:solidFill>
                   <a:srgbClr val="707888"/>
                 </a:solidFill>
-                <a:latin typeface="Calibri"/>
+                <a:latin typeface="Arial"/>
               </a:rPr>
               <a:t>·  Delta=0.46, similitud temporal=0.99, Talleyrand: anicot@elon.edu, activo 2011–2014</a:t>
             </a:r>
@@ -8969,34 +8666,31 @@
           <a:bodyPr wrap="square"/>
           <a:lstStyle/>
           <a:p>
+            <a:pPr algn="ctr"/>
             <a:r>
               <a:rPr sz="1300" b="1">
                 <a:solidFill>
-                  <a:srgbClr val="E32B3D"/>
-                </a:solidFill>
-                <a:latin typeface="Calibri"/>
+                  <a:srgbClr val="CD2D37"/>
+                </a:solidFill>
+                <a:latin typeface="Arial"/>
               </a:rPr>
               <a:t>DEMO EN VIVO</a:t>
             </a:r>
           </a:p>
           <a:p>
-            <a:r>
-              <a:rPr sz="2600" b="1">
-                <a:solidFill>
-                  <a:srgbClr val="FFFFFF"/>
-                </a:solidFill>
-                <a:latin typeface="Calibri"/>
-              </a:rPr>
+            <a:pPr algn="ctr"/>
+            <a:r>
               <a:t>Demo — embeddings y Delta</a:t>
             </a:r>
           </a:p>
           <a:p>
+            <a:pPr algn="ctr"/>
             <a:r>
               <a:rPr sz="1400">
                 <a:solidFill>
                   <a:srgbClr val="9AA3B5"/>
                 </a:solidFill>
-                <a:latin typeface="Calibri"/>
+                <a:latin typeface="Arial"/>
               </a:rPr>
               <a:t>IronMarch/03_embeddings_profiling.ipynb</a:t>
             </a:r>
@@ -9030,7 +8724,7 @@
                 <a:solidFill>
                   <a:srgbClr val="D6DAE2"/>
                 </a:solidFill>
-                <a:latin typeface="Calibri"/>
+                <a:latin typeface="Arial"/>
               </a:rPr>
               <a:t>1.  Abrir notebook 03_embeddings_profiling</a:t>
             </a:r>
@@ -9041,7 +8735,7 @@
                 <a:solidFill>
                   <a:srgbClr val="D6DAE2"/>
                 </a:solidFill>
-                <a:latin typeface="Calibri"/>
+                <a:latin typeface="Arial"/>
               </a:rPr>
               <a:t>2.  Sección 1: verificar que las estrategias C/D/E están cacheadas</a:t>
             </a:r>
@@ -9052,7 +8746,7 @@
                 <a:solidFill>
                   <a:srgbClr val="D6DAE2"/>
                 </a:solidFill>
-                <a:latin typeface="Calibri"/>
+                <a:latin typeface="Arial"/>
               </a:rPr>
               <a:t>3.  Sección 2: UMAP interactivo → identificar clusters ideológicos</a:t>
             </a:r>
@@ -9063,7 +8757,7 @@
                 <a:solidFill>
                   <a:srgbClr val="D6DAE2"/>
                 </a:solidFill>
-                <a:latin typeface="Calibri"/>
+                <a:latin typeface="Arial"/>
               </a:rPr>
               <a:t>4.  Sección 3: heatmap Burrows' Delta → par 255+Talleyrand en esquina inferior</a:t>
             </a:r>
@@ -9103,34 +8797,31 @@
           <a:bodyPr wrap="square"/>
           <a:lstStyle/>
           <a:p>
+            <a:pPr algn="ctr"/>
             <a:r>
               <a:rPr sz="1300" b="1">
                 <a:solidFill>
-                  <a:srgbClr val="E32B3D"/>
-                </a:solidFill>
-                <a:latin typeface="Calibri"/>
+                  <a:srgbClr val="CD2D37"/>
+                </a:solidFill>
+                <a:latin typeface="Arial"/>
               </a:rPr>
               <a:t>SECCIÓN 5</a:t>
             </a:r>
           </a:p>
           <a:p>
-            <a:r>
-              <a:rPr sz="3000" b="1">
-                <a:solidFill>
-                  <a:srgbClr val="FFFFFF"/>
-                </a:solidFill>
-                <a:latin typeface="Calibri"/>
-              </a:rPr>
+            <a:pPr algn="ctr"/>
+            <a:r>
               <a:t>Atribución y conclusiones</a:t>
             </a:r>
           </a:p>
           <a:p>
+            <a:pPr algn="ctr"/>
             <a:r>
               <a:rPr sz="1600">
                 <a:solidFill>
                   <a:srgbClr val="D6DAE2"/>
                 </a:solidFill>
-                <a:latin typeface="Calibri"/>
+                <a:latin typeface="Arial"/>
               </a:rPr>
               <a:t>Señal combinada + limitaciones éticas</a:t>
             </a:r>
@@ -9171,12 +8862,6 @@
           <a:lstStyle/>
           <a:p>
             <a:r>
-              <a:rPr sz="2400" b="1">
-                <a:solidFill>
-                  <a:srgbClr val="1A1A2E"/>
-                </a:solidFill>
-                <a:latin typeface="Calibri"/>
-              </a:rPr>
               <a:t>Señal combinada de atribución</a:t>
             </a:r>
           </a:p>
@@ -9192,92 +8877,43 @@
             <p:ph type="body" idx="16" sz="quarter"/>
           </p:nvPr>
         </p:nvSpPr>
-        <p:spPr/>
+        <p:spPr>
+          <a:xfrm>
+            <a:off x="1073427" y="2077576"/>
+            <a:ext cx="10084904" cy="3507298"/>
+          </a:xfrm>
+        </p:spPr>
         <p:txBody>
           <a:bodyPr wrap="square"/>
           <a:lstStyle/>
           <a:p>
-            <a:pPr algn="l" marL="0" indent="-228600">
-              <a:buNone/>
-            </a:pPr>
-            <a:r>
-              <a:rPr sz="1900" b="0">
-                <a:solidFill>
-                  <a:srgbClr val="333844"/>
-                </a:solidFill>
-                <a:latin typeface="Calibri"/>
-              </a:rPr>
-              <a:t>▸  Ninguna señal sola es suficiente — se requiere convergencia</a:t>
-            </a:r>
-          </a:p>
-          <a:p>
-            <a:pPr algn="l" marL="0" indent="-228600">
-              <a:buNone/>
-            </a:pPr>
-            <a:r>
-              <a:rPr sz="1900" b="0">
-                <a:solidFill>
-                  <a:srgbClr val="333844"/>
-                </a:solidFill>
-                <a:latin typeface="Calibri"/>
-              </a:rPr>
-              <a:t>▸  Burrows' Delta bajo → mismo estilo de escritura</a:t>
-            </a:r>
-          </a:p>
-          <a:p>
-            <a:pPr algn="l" marL="0" indent="-228600">
-              <a:buNone/>
-            </a:pPr>
-            <a:r>
-              <a:rPr sz="1900" b="0">
-                <a:solidFill>
-                  <a:srgbClr val="333844"/>
-                </a:solidFill>
-                <a:latin typeface="Calibri"/>
-              </a:rPr>
-              <a:t>▸  Similitud temporal alta → mismo horario de actividad → mismo huso horario</a:t>
-            </a:r>
-          </a:p>
-          <a:p>
-            <a:pPr algn="l" marL="0" indent="-228600">
-              <a:buNone/>
-            </a:pPr>
-            <a:r>
-              <a:rPr sz="1900" b="0">
-                <a:solidFill>
-                  <a:srgbClr val="333844"/>
-                </a:solidFill>
-                <a:latin typeface="Calibri"/>
-              </a:rPr>
-              <a:t>▸  Presencia en clusters UMAP cercanos → misma ideología y vocabulario</a:t>
-            </a:r>
-          </a:p>
-          <a:p>
-            <a:pPr algn="l" marL="0" indent="-228600">
-              <a:buNone/>
-            </a:pPr>
-            <a:r>
-              <a:rPr sz="1900" b="0">
-                <a:solidFill>
-                  <a:srgbClr val="333844"/>
-                </a:solidFill>
-                <a:latin typeface="Calibri"/>
-              </a:rPr>
-              <a:t>▸  Co-participación en threads privados (PMs) → relación directa</a:t>
-            </a:r>
-          </a:p>
-          <a:p>
-            <a:pPr algn="l" marL="0" indent="-228600">
-              <a:buNone/>
-            </a:pPr>
-            <a:r>
-              <a:rPr sz="1900" b="0">
-                <a:solidFill>
-                  <a:srgbClr val="333844"/>
-                </a:solidFill>
-                <a:latin typeface="Calibri"/>
-              </a:rPr>
-              <a:t>▸  Regla de tres: si ≥3 señales coinciden, el par merece investigación adicional</a:t>
+            <a:r>
+              <a:t>Ninguna señal sola es suficiente — se requiere convergencia</a:t>
+            </a:r>
+          </a:p>
+          <a:p>
+            <a:r>
+              <a:t>Burrows' Delta bajo → mismo estilo de escritura</a:t>
+            </a:r>
+          </a:p>
+          <a:p>
+            <a:r>
+              <a:t>Similitud temporal alta → mismo horario de actividad → mismo huso horario</a:t>
+            </a:r>
+          </a:p>
+          <a:p>
+            <a:r>
+              <a:t>Presencia en clusters UMAP cercanos → misma ideología y vocabulario</a:t>
+            </a:r>
+          </a:p>
+          <a:p>
+            <a:r>
+              <a:t>Co-participación en threads privados (PMs) → relación directa</a:t>
+            </a:r>
+          </a:p>
+          <a:p>
+            <a:r>
+              <a:t>Regla de tres: si ≥3 señales coinciden, el par merece investigación adicional</a:t>
             </a:r>
           </a:p>
         </p:txBody>
@@ -9316,12 +8952,6 @@
           <a:lstStyle/>
           <a:p>
             <a:r>
-              <a:rPr sz="2400" b="1">
-                <a:solidFill>
-                  <a:srgbClr val="1A1A2E"/>
-                </a:solidFill>
-                <a:latin typeface="Calibri"/>
-              </a:rPr>
               <a:t>Resumen ejecutivo</a:t>
             </a:r>
           </a:p>
@@ -9370,9 +9000,9 @@
             <a:r>
               <a:rPr sz="1600" b="1">
                 <a:solidFill>
-                  <a:srgbClr val="E32B3D"/>
-                </a:solidFill>
-                <a:latin typeface="Calibri"/>
+                  <a:srgbClr val="CD2D37"/>
+                </a:solidFill>
+                <a:latin typeface="Arial"/>
               </a:rPr>
               <a:t>Hallazgos técnicos</a:t>
             </a:r>
@@ -9404,9 +9034,9 @@
             <a:r>
               <a:rPr sz="1600">
                 <a:solidFill>
-                  <a:srgbClr val="333844"/>
-                </a:solidFill>
-                <a:latin typeface="Calibri"/>
+                  <a:srgbClr val="465461"/>
+                </a:solidFill>
+                <a:latin typeface="Arial"/>
               </a:rPr>
               <a:t>▸  100% de usuarios en componente gigante</a:t>
             </a:r>
@@ -9415,9 +9045,9 @@
             <a:r>
               <a:rPr sz="1600">
                 <a:solidFill>
-                  <a:srgbClr val="333844"/>
-                </a:solidFill>
-                <a:latin typeface="Calibri"/>
+                  <a:srgbClr val="465461"/>
+                </a:solidFill>
+                <a:latin typeface="Arial"/>
               </a:rPr>
               <a:t>▸  Dos capas de influencia: pública (MOONLORD) y oculta (usuario 255)</a:t>
             </a:r>
@@ -9426,9 +9056,9 @@
             <a:r>
               <a:rPr sz="1600">
                 <a:solidFill>
-                  <a:srgbClr val="333844"/>
-                </a:solidFill>
-                <a:latin typeface="Calibri"/>
+                  <a:srgbClr val="465461"/>
+                </a:solidFill>
+                <a:latin typeface="Arial"/>
               </a:rPr>
               <a:t>▸  Top-100 posts = 86% de fidelidad al embedding completo</a:t>
             </a:r>
@@ -9437,9 +9067,9 @@
             <a:r>
               <a:rPr sz="1600">
                 <a:solidFill>
-                  <a:srgbClr val="333844"/>
-                </a:solidFill>
-                <a:latin typeface="Calibri"/>
+                  <a:srgbClr val="465461"/>
+                </a:solidFill>
+                <a:latin typeface="Arial"/>
               </a:rPr>
               <a:t>▸  Atentados de París: único evento con spike confirmado (×1.62)</a:t>
             </a:r>
@@ -9448,9 +9078,9 @@
             <a:r>
               <a:rPr sz="1600">
                 <a:solidFill>
-                  <a:srgbClr val="333844"/>
-                </a:solidFill>
-                <a:latin typeface="Calibri"/>
+                  <a:srgbClr val="465461"/>
+                </a:solidFill>
+                <a:latin typeface="Arial"/>
               </a:rPr>
               <a:t>▸  Par 255+Talleyrand: candidato prioritario a investigación</a:t>
             </a:r>
@@ -9483,9 +9113,9 @@
             <a:r>
               <a:rPr sz="1600" b="1">
                 <a:solidFill>
-                  <a:srgbClr val="E32B3D"/>
-                </a:solidFill>
-                <a:latin typeface="Calibri"/>
+                  <a:srgbClr val="CD2D37"/>
+                </a:solidFill>
+                <a:latin typeface="Arial"/>
               </a:rPr>
               <a:t>Limitaciones y ética</a:t>
             </a:r>
@@ -9517,9 +9147,9 @@
             <a:r>
               <a:rPr sz="1600">
                 <a:solidFill>
-                  <a:srgbClr val="333844"/>
-                </a:solidFill>
-                <a:latin typeface="Calibri"/>
+                  <a:srgbClr val="465461"/>
+                </a:solidFill>
+                <a:latin typeface="Arial"/>
               </a:rPr>
               <a:t>▸  Análisis exploratorio: los resultados son leads, no pruebas</a:t>
             </a:r>
@@ -9528,9 +9158,9 @@
             <a:r>
               <a:rPr sz="1600">
                 <a:solidFill>
-                  <a:srgbClr val="333844"/>
-                </a:solidFill>
-                <a:latin typeface="Calibri"/>
+                  <a:srgbClr val="465461"/>
+                </a:solidFill>
+                <a:latin typeface="Arial"/>
               </a:rPr>
               <a:t>▸  Delta en corpus homogéneo tiene menor poder discriminante</a:t>
             </a:r>
@@ -9539,9 +9169,9 @@
             <a:r>
               <a:rPr sz="1600">
                 <a:solidFill>
-                  <a:srgbClr val="333844"/>
-                </a:solidFill>
-                <a:latin typeface="Calibri"/>
+                  <a:srgbClr val="465461"/>
+                </a:solidFill>
+                <a:latin typeface="Arial"/>
               </a:rPr>
               <a:t>▸  Datos de personas reales: manejo mínimamente invasivo</a:t>
             </a:r>
@@ -9550,9 +9180,9 @@
             <a:r>
               <a:rPr sz="1600">
                 <a:solidFill>
-                  <a:srgbClr val="333844"/>
-                </a:solidFill>
-                <a:latin typeface="Calibri"/>
+                  <a:srgbClr val="465461"/>
+                </a:solidFill>
+                <a:latin typeface="Arial"/>
               </a:rPr>
               <a:t>▸  Objetivo defensivo: entender la red, no publicar perfiles</a:t>
             </a:r>
@@ -9561,9 +9191,9 @@
             <a:r>
               <a:rPr sz="1600">
                 <a:solidFill>
-                  <a:srgbClr val="333844"/>
-                </a:solidFill>
-                <a:latin typeface="Calibri"/>
+                  <a:srgbClr val="465461"/>
+                </a:solidFill>
+                <a:latin typeface="Arial"/>
               </a:rPr>
               <a:t>▸  Ground truth valida la metodología, no identifica nuevos actores</a:t>
             </a:r>
@@ -9604,12 +9234,6 @@
           <a:lstStyle/>
           <a:p>
             <a:r>
-              <a:rPr sz="2400" b="1">
-                <a:solidFill>
-                  <a:srgbClr val="1A1A2E"/>
-                </a:solidFill>
-                <a:latin typeface="Calibri"/>
-              </a:rPr>
               <a:t>¿Qué aprendemos del caso IronMarch?</a:t>
             </a:r>
           </a:p>
@@ -9625,78 +9249,38 @@
             <p:ph type="body" idx="16" sz="quarter"/>
           </p:nvPr>
         </p:nvSpPr>
-        <p:spPr/>
+        <p:spPr>
+          <a:xfrm>
+            <a:off x="1073427" y="2077576"/>
+            <a:ext cx="10084904" cy="3507298"/>
+          </a:xfrm>
+        </p:spPr>
         <p:txBody>
           <a:bodyPr wrap="square"/>
           <a:lstStyle/>
           <a:p>
-            <a:pPr algn="l" marL="0" indent="-228600">
-              <a:buNone/>
-            </a:pPr>
-            <a:r>
-              <a:rPr sz="1900" b="0">
-                <a:solidFill>
-                  <a:srgbClr val="333844"/>
-                </a:solidFill>
-                <a:latin typeface="Calibri"/>
-              </a:rPr>
-              <a:t>▸  La estructura del foro revela la ideología: jerarquía plana + concentración de PMs = liderazgo carismático</a:t>
-            </a:r>
-          </a:p>
-          <a:p>
-            <a:pPr algn="l" marL="0" indent="-228600">
-              <a:buNone/>
-            </a:pPr>
-            <a:r>
-              <a:rPr sz="1900" b="0">
-                <a:solidFill>
-                  <a:srgbClr val="333844"/>
-                </a:solidFill>
-                <a:latin typeface="Calibri"/>
-              </a:rPr>
-              <a:t>▸  Los LLMs locales hacen viable el análisis de contenido sensible sin APIs externas</a:t>
-            </a:r>
-          </a:p>
-          <a:p>
-            <a:pPr algn="l" marL="0" indent="-228600">
-              <a:buNone/>
-            </a:pPr>
-            <a:r>
-              <a:rPr sz="1900" b="0">
-                <a:solidFill>
-                  <a:srgbClr val="333844"/>
-                </a:solidFill>
-                <a:latin typeface="Calibri"/>
-              </a:rPr>
-              <a:t>▸  El muestreo inteligente (top-N por longitud) preserva señal estilométrica a fracción del coste</a:t>
-            </a:r>
-          </a:p>
-          <a:p>
-            <a:pPr algn="l" marL="0" indent="-228600">
-              <a:buNone/>
-            </a:pPr>
-            <a:r>
-              <a:rPr sz="1900" b="0">
-                <a:solidFill>
-                  <a:srgbClr val="333844"/>
-                </a:solidFill>
-                <a:latin typeface="Calibri"/>
-              </a:rPr>
-              <a:t>▸  La convergencia de señales (estilo + tiempo + red) es más robusta que cualquier métrica aislada</a:t>
-            </a:r>
-          </a:p>
-          <a:p>
-            <a:pPr algn="l" marL="0" indent="-228600">
-              <a:buNone/>
-            </a:pPr>
-            <a:r>
-              <a:rPr sz="1900" b="0">
-                <a:solidFill>
-                  <a:srgbClr val="333844"/>
-                </a:solidFill>
-                <a:latin typeface="Calibri"/>
-              </a:rPr>
-              <a:t>▸  Ground truth es raro y valiosísimo: cuando existe, calibra todo el pipeline</a:t>
+            <a:r>
+              <a:t>La estructura del foro revela la ideología: jerarquía plana + concentración de PMs = liderazgo carismático</a:t>
+            </a:r>
+          </a:p>
+          <a:p>
+            <a:r>
+              <a:t>Los LLMs locales hacen viable el análisis de contenido sensible sin APIs externas</a:t>
+            </a:r>
+          </a:p>
+          <a:p>
+            <a:r>
+              <a:t>El muestreo inteligente (top-N por longitud) preserva señal estilométrica a fracción del coste</a:t>
+            </a:r>
+          </a:p>
+          <a:p>
+            <a:r>
+              <a:t>La convergencia de señales (estilo + tiempo + red) es más robusta que cualquier métrica aislada</a:t>
+            </a:r>
+          </a:p>
+          <a:p>
+            <a:r>
+              <a:t>Ground truth es raro y valiosísimo: cuando existe, calibra todo el pipeline</a:t>
             </a:r>
           </a:p>
         </p:txBody>
@@ -9735,12 +9319,6 @@
           <a:lstStyle/>
           <a:p>
             <a:r>
-              <a:rPr sz="2400" b="1">
-                <a:solidFill>
-                  <a:srgbClr val="1A1A2E"/>
-                </a:solidFill>
-                <a:latin typeface="Calibri"/>
-              </a:rPr>
               <a:t>Iron March — ¿qué fue?</a:t>
             </a:r>
           </a:p>
@@ -9761,73 +9339,28 @@
           <a:bodyPr wrap="square"/>
           <a:lstStyle/>
           <a:p>
-            <a:pPr algn="l" marL="0" indent="-228600">
-              <a:buNone/>
-            </a:pPr>
-            <a:r>
-              <a:rPr sz="1900" b="0">
-                <a:solidFill>
-                  <a:srgbClr val="333844"/>
-                </a:solidFill>
-                <a:latin typeface="Calibri"/>
-              </a:rPr>
-              <a:t>▸  Foro fundado en 2011 por Alexander Slavros (MOONLORD), cerrado en noviembre de 2017</a:t>
-            </a:r>
-          </a:p>
-          <a:p>
-            <a:pPr algn="l" marL="0" indent="-228600">
-              <a:buNone/>
-            </a:pPr>
-            <a:r>
-              <a:rPr sz="1900" b="0">
-                <a:solidFill>
-                  <a:srgbClr val="333844"/>
-                </a:solidFill>
-                <a:latin typeface="Calibri"/>
-              </a:rPr>
-              <a:t>▸  Punto de encuentro del fascismo internacional online: neo-nazismo, aceleracionismo, Evola</a:t>
-            </a:r>
-          </a:p>
-          <a:p>
-            <a:pPr algn="l" marL="0" indent="-228600">
-              <a:buNone/>
-            </a:pPr>
-            <a:r>
-              <a:rPr sz="1900" b="0">
-                <a:solidFill>
-                  <a:srgbClr val="333844"/>
-                </a:solidFill>
-                <a:latin typeface="Calibri"/>
-              </a:rPr>
-              <a:t>▸  Miembros vinculados a grupos terroristas: Atomwaffen Division, The Base, SIEGE culture</a:t>
-            </a:r>
-          </a:p>
-          <a:p>
-            <a:pPr algn="l" marL="0" indent="-228600">
-              <a:buNone/>
-            </a:pPr>
-            <a:r>
-              <a:rPr sz="1900" b="0">
-                <a:solidFill>
-                  <a:srgbClr val="333844"/>
-                </a:solidFill>
-                <a:latin typeface="Calibri"/>
-              </a:rPr>
-              <a:t>▸  Leak: noviembre 2019 — dump SQL completo filtrado por un tercero</a:t>
-            </a:r>
-          </a:p>
-          <a:p>
-            <a:pPr algn="l" marL="0" indent="-228600">
-              <a:buNone/>
-            </a:pPr>
-            <a:r>
-              <a:rPr sz="1900" b="0">
-                <a:solidFill>
-                  <a:srgbClr val="333844"/>
-                </a:solidFill>
-                <a:latin typeface="Calibri"/>
-              </a:rPr>
-              <a:t>▸  Ground truth disponible: fundador doxxeado, miembros identificados en causas judiciales</a:t>
+            <a:r>
+              <a:t>Foro fundado en 2011 por Alexander Slavros (MOONLORD), cerrado en noviembre de 2017</a:t>
+            </a:r>
+          </a:p>
+          <a:p>
+            <a:r>
+              <a:t>Punto de encuentro del fascismo internacional online: neo-nazismo, aceleracionismo, Evola</a:t>
+            </a:r>
+          </a:p>
+          <a:p>
+            <a:r>
+              <a:t>Miembros vinculados a grupos terroristas: Atomwaffen Division, The Base, SIEGE culture</a:t>
+            </a:r>
+          </a:p>
+          <a:p>
+            <a:r>
+              <a:t>Leak: noviembre 2019 — dump SQL completo filtrado por un tercero</a:t>
+            </a:r>
+          </a:p>
+          <a:p>
+            <a:r>
+              <a:t>Ground truth disponible: fundador doxxeado, miembros identificados en causas judiciales</a:t>
             </a:r>
           </a:p>
         </p:txBody>
@@ -9866,12 +9399,6 @@
           <a:lstStyle/>
           <a:p>
             <a:r>
-              <a:rPr sz="2400" b="1">
-                <a:solidFill>
-                  <a:srgbClr val="1A1A2E"/>
-                </a:solidFill>
-                <a:latin typeface="Calibri"/>
-              </a:rPr>
               <a:t>Estructura del dataset (IPS 4.x)</a:t>
             </a:r>
           </a:p>
@@ -9902,14 +9429,14 @@
         </p:nvSpPr>
         <p:spPr>
           <a:xfrm>
-            <a:off x="1051560" y="1645920"/>
+            <a:off x="1051560" y="2148840"/>
             <a:ext cx="10058400" cy="365760"/>
           </a:xfrm>
           <a:prstGeom prst="rect">
             <a:avLst/>
           </a:prstGeom>
           <a:solidFill>
-            <a:srgbClr val="E32B3D"/>
+            <a:srgbClr val="CD2D37"/>
           </a:solidFill>
           <a:ln>
             <a:noFill/>
@@ -9945,7 +9472,7 @@
         </p:nvSpPr>
         <p:spPr>
           <a:xfrm>
-            <a:off x="1097280" y="1700920"/>
+            <a:off x="1097280" y="2203840"/>
             <a:ext cx="3261360" cy="365760"/>
           </a:xfrm>
           <a:prstGeom prst="rect">
@@ -9965,7 +9492,7 @@
                 <a:solidFill>
                   <a:srgbClr val="FFFFFF"/>
                 </a:solidFill>
-                <a:latin typeface="Calibri"/>
+                <a:latin typeface="Arial"/>
               </a:rPr>
               <a:t>Tabla</a:t>
             </a:r>
@@ -9980,7 +9507,7 @@
         </p:nvSpPr>
         <p:spPr>
           <a:xfrm>
-            <a:off x="4450080" y="1700920"/>
+            <a:off x="4450080" y="2203840"/>
             <a:ext cx="3261360" cy="365760"/>
           </a:xfrm>
           <a:prstGeom prst="rect">
@@ -10000,7 +9527,7 @@
                 <a:solidFill>
                   <a:srgbClr val="FFFFFF"/>
                 </a:solidFill>
-                <a:latin typeface="Calibri"/>
+                <a:latin typeface="Arial"/>
               </a:rPr>
               <a:t>Registros</a:t>
             </a:r>
@@ -10015,7 +9542,7 @@
         </p:nvSpPr>
         <p:spPr>
           <a:xfrm>
-            <a:off x="7802880" y="1700920"/>
+            <a:off x="7802880" y="2203840"/>
             <a:ext cx="3261360" cy="365760"/>
           </a:xfrm>
           <a:prstGeom prst="rect">
@@ -10035,7 +9562,7 @@
                 <a:solidFill>
                   <a:srgbClr val="FFFFFF"/>
                 </a:solidFill>
-                <a:latin typeface="Calibri"/>
+                <a:latin typeface="Arial"/>
               </a:rPr>
               <a:t>Descripción</a:t>
             </a:r>
@@ -10050,7 +9577,7 @@
         </p:nvSpPr>
         <p:spPr>
           <a:xfrm>
-            <a:off x="1051560" y="2011680"/>
+            <a:off x="1051560" y="2514600"/>
             <a:ext cx="10058400" cy="310896"/>
           </a:xfrm>
           <a:prstGeom prst="rect">
@@ -10093,7 +9620,7 @@
         </p:nvSpPr>
         <p:spPr>
           <a:xfrm>
-            <a:off x="1097280" y="2051680"/>
+            <a:off x="1097280" y="2554600"/>
             <a:ext cx="3261360" cy="310896"/>
           </a:xfrm>
           <a:prstGeom prst="rect">
@@ -10111,9 +9638,9 @@
             <a:r>
               <a:rPr sz="1100" b="0">
                 <a:solidFill>
-                  <a:srgbClr val="333844"/>
-                </a:solidFill>
-                <a:latin typeface="Calibri"/>
+                  <a:srgbClr val="465461"/>
+                </a:solidFill>
+                <a:latin typeface="Arial"/>
               </a:rPr>
               <a:t>core_members</a:t>
             </a:r>
@@ -10128,7 +9655,7 @@
         </p:nvSpPr>
         <p:spPr>
           <a:xfrm>
-            <a:off x="4450080" y="2051680"/>
+            <a:off x="4450080" y="2554600"/>
             <a:ext cx="3261360" cy="310896"/>
           </a:xfrm>
           <a:prstGeom prst="rect">
@@ -10146,9 +9673,9 @@
             <a:r>
               <a:rPr sz="1100" b="0">
                 <a:solidFill>
-                  <a:srgbClr val="333844"/>
-                </a:solidFill>
-                <a:latin typeface="Calibri"/>
+                  <a:srgbClr val="465461"/>
+                </a:solidFill>
+                <a:latin typeface="Arial"/>
               </a:rPr>
               <a:t>~18,000</a:t>
             </a:r>
@@ -10163,7 +9690,7 @@
         </p:nvSpPr>
         <p:spPr>
           <a:xfrm>
-            <a:off x="7802880" y="2051680"/>
+            <a:off x="7802880" y="2554600"/>
             <a:ext cx="3261360" cy="310896"/>
           </a:xfrm>
           <a:prstGeom prst="rect">
@@ -10181,9 +9708,9 @@
             <a:r>
               <a:rPr sz="1100" b="0">
                 <a:solidFill>
-                  <a:srgbClr val="333844"/>
-                </a:solidFill>
-                <a:latin typeface="Calibri"/>
+                  <a:srgbClr val="465461"/>
+                </a:solidFill>
+                <a:latin typeface="Arial"/>
               </a:rPr>
               <a:t>Usuarios registrados</a:t>
             </a:r>
@@ -10198,7 +9725,7 @@
         </p:nvSpPr>
         <p:spPr>
           <a:xfrm>
-            <a:off x="1051560" y="2322576"/>
+            <a:off x="1051560" y="2825496"/>
             <a:ext cx="10058400" cy="310896"/>
           </a:xfrm>
           <a:prstGeom prst="rect">
@@ -10241,7 +9768,7 @@
         </p:nvSpPr>
         <p:spPr>
           <a:xfrm>
-            <a:off x="1097280" y="2362576"/>
+            <a:off x="1097280" y="2865496"/>
             <a:ext cx="3261360" cy="310896"/>
           </a:xfrm>
           <a:prstGeom prst="rect">
@@ -10259,9 +9786,9 @@
             <a:r>
               <a:rPr sz="1100" b="0">
                 <a:solidFill>
-                  <a:srgbClr val="333844"/>
-                </a:solidFill>
-                <a:latin typeface="Calibri"/>
+                  <a:srgbClr val="465461"/>
+                </a:solidFill>
+                <a:latin typeface="Arial"/>
               </a:rPr>
               <a:t>forums_posts</a:t>
             </a:r>
@@ -10276,7 +9803,7 @@
         </p:nvSpPr>
         <p:spPr>
           <a:xfrm>
-            <a:off x="4450080" y="2362576"/>
+            <a:off x="4450080" y="2865496"/>
             <a:ext cx="3261360" cy="310896"/>
           </a:xfrm>
           <a:prstGeom prst="rect">
@@ -10294,9 +9821,9 @@
             <a:r>
               <a:rPr sz="1100" b="0">
                 <a:solidFill>
-                  <a:srgbClr val="333844"/>
-                </a:solidFill>
-                <a:latin typeface="Calibri"/>
+                  <a:srgbClr val="465461"/>
+                </a:solidFill>
+                <a:latin typeface="Arial"/>
               </a:rPr>
               <a:t>~194,000</a:t>
             </a:r>
@@ -10311,7 +9838,7 @@
         </p:nvSpPr>
         <p:spPr>
           <a:xfrm>
-            <a:off x="7802880" y="2362576"/>
+            <a:off x="7802880" y="2865496"/>
             <a:ext cx="3261360" cy="310896"/>
           </a:xfrm>
           <a:prstGeom prst="rect">
@@ -10329,9 +9856,9 @@
             <a:r>
               <a:rPr sz="1100" b="0">
                 <a:solidFill>
-                  <a:srgbClr val="333844"/>
-                </a:solidFill>
-                <a:latin typeface="Calibri"/>
+                  <a:srgbClr val="465461"/>
+                </a:solidFill>
+                <a:latin typeface="Arial"/>
               </a:rPr>
               <a:t>Posts públicos</a:t>
             </a:r>
@@ -10346,7 +9873,7 @@
         </p:nvSpPr>
         <p:spPr>
           <a:xfrm>
-            <a:off x="1051560" y="2633472"/>
+            <a:off x="1051560" y="3136391"/>
             <a:ext cx="10058400" cy="310896"/>
           </a:xfrm>
           <a:prstGeom prst="rect">
@@ -10389,7 +9916,7 @@
         </p:nvSpPr>
         <p:spPr>
           <a:xfrm>
-            <a:off x="1097280" y="2673472"/>
+            <a:off x="1097280" y="3176391"/>
             <a:ext cx="3261360" cy="310896"/>
           </a:xfrm>
           <a:prstGeom prst="rect">
@@ -10407,9 +9934,9 @@
             <a:r>
               <a:rPr sz="1100" b="0">
                 <a:solidFill>
-                  <a:srgbClr val="333844"/>
-                </a:solidFill>
-                <a:latin typeface="Calibri"/>
+                  <a:srgbClr val="465461"/>
+                </a:solidFill>
+                <a:latin typeface="Arial"/>
               </a:rPr>
               <a:t>forums_threads</a:t>
             </a:r>
@@ -10424,7 +9951,7 @@
         </p:nvSpPr>
         <p:spPr>
           <a:xfrm>
-            <a:off x="4450080" y="2673472"/>
+            <a:off x="4450080" y="3176391"/>
             <a:ext cx="3261360" cy="310896"/>
           </a:xfrm>
           <a:prstGeom prst="rect">
@@ -10442,9 +9969,9 @@
             <a:r>
               <a:rPr sz="1100" b="0">
                 <a:solidFill>
-                  <a:srgbClr val="333844"/>
-                </a:solidFill>
-                <a:latin typeface="Calibri"/>
+                  <a:srgbClr val="465461"/>
+                </a:solidFill>
+                <a:latin typeface="Arial"/>
               </a:rPr>
               <a:t>~14,000</a:t>
             </a:r>
@@ -10459,7 +9986,7 @@
         </p:nvSpPr>
         <p:spPr>
           <a:xfrm>
-            <a:off x="7802880" y="2673472"/>
+            <a:off x="7802880" y="3176391"/>
             <a:ext cx="3261360" cy="310896"/>
           </a:xfrm>
           <a:prstGeom prst="rect">
@@ -10477,9 +10004,9 @@
             <a:r>
               <a:rPr sz="1100" b="0">
                 <a:solidFill>
-                  <a:srgbClr val="333844"/>
-                </a:solidFill>
-                <a:latin typeface="Calibri"/>
+                  <a:srgbClr val="465461"/>
+                </a:solidFill>
+                <a:latin typeface="Arial"/>
               </a:rPr>
               <a:t>Hilos de discusión</a:t>
             </a:r>
@@ -10494,7 +10021,7 @@
         </p:nvSpPr>
         <p:spPr>
           <a:xfrm>
-            <a:off x="1051560" y="2944368"/>
+            <a:off x="1051560" y="3447287"/>
             <a:ext cx="10058400" cy="310896"/>
           </a:xfrm>
           <a:prstGeom prst="rect">
@@ -10537,7 +10064,7 @@
         </p:nvSpPr>
         <p:spPr>
           <a:xfrm>
-            <a:off x="1097280" y="2984368"/>
+            <a:off x="1097280" y="3487287"/>
             <a:ext cx="3261360" cy="310896"/>
           </a:xfrm>
           <a:prstGeom prst="rect">
@@ -10555,9 +10082,9 @@
             <a:r>
               <a:rPr sz="1100" b="0">
                 <a:solidFill>
-                  <a:srgbClr val="333844"/>
-                </a:solidFill>
-                <a:latin typeface="Calibri"/>
+                  <a:srgbClr val="465461"/>
+                </a:solidFill>
+                <a:latin typeface="Arial"/>
               </a:rPr>
               <a:t>forums_forums</a:t>
             </a:r>
@@ -10572,7 +10099,7 @@
         </p:nvSpPr>
         <p:spPr>
           <a:xfrm>
-            <a:off x="4450080" y="2984368"/>
+            <a:off x="4450080" y="3487287"/>
             <a:ext cx="3261360" cy="310896"/>
           </a:xfrm>
           <a:prstGeom prst="rect">
@@ -10590,9 +10117,9 @@
             <a:r>
               <a:rPr sz="1100" b="0">
                 <a:solidFill>
-                  <a:srgbClr val="333844"/>
-                </a:solidFill>
-                <a:latin typeface="Calibri"/>
+                  <a:srgbClr val="465461"/>
+                </a:solidFill>
+                <a:latin typeface="Arial"/>
               </a:rPr>
               <a:t>~138</a:t>
             </a:r>
@@ -10607,7 +10134,7 @@
         </p:nvSpPr>
         <p:spPr>
           <a:xfrm>
-            <a:off x="7802880" y="2984368"/>
+            <a:off x="7802880" y="3487287"/>
             <a:ext cx="3261360" cy="310896"/>
           </a:xfrm>
           <a:prstGeom prst="rect">
@@ -10625,9 +10152,9 @@
             <a:r>
               <a:rPr sz="1100" b="0">
                 <a:solidFill>
-                  <a:srgbClr val="333844"/>
-                </a:solidFill>
-                <a:latin typeface="Calibri"/>
+                  <a:srgbClr val="465461"/>
+                </a:solidFill>
+                <a:latin typeface="Arial"/>
               </a:rPr>
               <a:t>Subforos</a:t>
             </a:r>
@@ -10642,7 +10169,7 @@
         </p:nvSpPr>
         <p:spPr>
           <a:xfrm>
-            <a:off x="1051560" y="3255263"/>
+            <a:off x="1051560" y="3758183"/>
             <a:ext cx="10058400" cy="440689"/>
           </a:xfrm>
           <a:prstGeom prst="rect">
@@ -10685,7 +10212,7 @@
         </p:nvSpPr>
         <p:spPr>
           <a:xfrm>
-            <a:off x="1097280" y="3295263"/>
+            <a:off x="1097280" y="3798183"/>
             <a:ext cx="3261360" cy="440689"/>
           </a:xfrm>
           <a:prstGeom prst="rect">
@@ -10703,9 +10230,9 @@
             <a:r>
               <a:rPr sz="1100" b="0">
                 <a:solidFill>
-                  <a:srgbClr val="333844"/>
-                </a:solidFill>
-                <a:latin typeface="Calibri"/>
+                  <a:srgbClr val="465461"/>
+                </a:solidFill>
+                <a:latin typeface="Arial"/>
               </a:rPr>
               <a:t>core_message_posts</a:t>
             </a:r>
@@ -10720,7 +10247,7 @@
         </p:nvSpPr>
         <p:spPr>
           <a:xfrm>
-            <a:off x="4450080" y="3295263"/>
+            <a:off x="4450080" y="3798183"/>
             <a:ext cx="3261360" cy="440689"/>
           </a:xfrm>
           <a:prstGeom prst="rect">
@@ -10738,9 +10265,9 @@
             <a:r>
               <a:rPr sz="1100" b="0">
                 <a:solidFill>
-                  <a:srgbClr val="333844"/>
-                </a:solidFill>
-                <a:latin typeface="Calibri"/>
+                  <a:srgbClr val="465461"/>
+                </a:solidFill>
+                <a:latin typeface="Arial"/>
               </a:rPr>
               <a:t>~55,000</a:t>
             </a:r>
@@ -10755,7 +10282,7 @@
         </p:nvSpPr>
         <p:spPr>
           <a:xfrm>
-            <a:off x="7802880" y="3295263"/>
+            <a:off x="7802880" y="3798183"/>
             <a:ext cx="3261360" cy="440689"/>
           </a:xfrm>
           <a:prstGeom prst="rect">
@@ -10773,9 +10300,9 @@
             <a:r>
               <a:rPr sz="1100" b="0">
                 <a:solidFill>
-                  <a:srgbClr val="333844"/>
-                </a:solidFill>
-                <a:latin typeface="Calibri"/>
+                  <a:srgbClr val="465461"/>
+                </a:solidFill>
+                <a:latin typeface="Arial"/>
               </a:rPr>
               <a:t>Mensajes privados (PMs) — infrecuente en leaks</a:t>
             </a:r>
@@ -10810,7 +10337,7 @@
                 <a:solidFill>
                   <a:srgbClr val="707888"/>
                 </a:solidFill>
-                <a:latin typeface="Calibri"/>
+                <a:latin typeface="Arial"/>
               </a:rPr>
               <a:t>ℹ  Parser: IPS 4.x. Tablas sin prefijo. Columna discriminante: member_id en core_members.</a:t>
             </a:r>
@@ -10851,12 +10378,6 @@
           <a:lstStyle/>
           <a:p>
             <a:r>
-              <a:rPr sz="2400" b="1">
-                <a:solidFill>
-                  <a:srgbClr val="1A1A2E"/>
-                </a:solidFill>
-                <a:latin typeface="Calibri"/>
-              </a:rPr>
               <a:t>Por qué es excepcional este dataset</a:t>
             </a:r>
           </a:p>
@@ -10872,92 +10393,70 @@
             <p:ph type="body" idx="16" sz="quarter"/>
           </p:nvPr>
         </p:nvSpPr>
-        <p:spPr/>
+        <p:spPr>
+          <a:xfrm>
+            <a:off x="1073427" y="2077576"/>
+            <a:ext cx="10084904" cy="3507298"/>
+          </a:xfrm>
+        </p:spPr>
         <p:txBody>
           <a:bodyPr wrap="square"/>
           <a:lstStyle/>
           <a:p>
-            <a:pPr algn="l" marL="0" indent="-228600">
+            <a:r>
+              <a:t>Ground truth real: podemos validar el análisis computacional contra hechos verificados</a:t>
+            </a:r>
+          </a:p>
+          <a:p>
+            <a:pPr lvl="1" marL="274320" indent="-228600">
               <a:buNone/>
             </a:pPr>
             <a:r>
-              <a:rPr sz="1900" b="0">
-                <a:solidFill>
-                  <a:srgbClr val="333844"/>
-                </a:solidFill>
-                <a:latin typeface="Calibri"/>
+              <a:rPr sz="1500" b="0">
+                <a:solidFill>
+                  <a:srgbClr val="707888"/>
+                </a:solidFill>
+                <a:latin typeface="Arial"/>
               </a:rPr>
-              <a:t>▸  Ground truth real: podemos validar el análisis computacional contra hechos verificados</a:t>
-            </a:r>
-          </a:p>
-          <a:p>
-            <a:pPr lvl="1" algn="l" marL="274320" indent="-228600">
+              <a:t>·  MOONLORD = Alexander Slavros: doxxeado, fundador confirmado, IP rusa</a:t>
+            </a:r>
+          </a:p>
+          <a:p>
+            <a:pPr lvl="1" marL="274320" indent="-228600">
               <a:buNone/>
             </a:pPr>
             <a:r>
-              <a:rPr sz="1600" b="0">
+              <a:rPr sz="1500" b="0">
                 <a:solidFill>
                   <a:srgbClr val="707888"/>
                 </a:solidFill>
-                <a:latin typeface="Calibri"/>
+                <a:latin typeface="Arial"/>
               </a:rPr>
-              <a:t>·  MOONLORD = Alexander Slavros: doxxeado, fundador confirmado, IP rusa</a:t>
-            </a:r>
-          </a:p>
-          <a:p>
-            <a:pPr lvl="1" algn="l" marL="274320" indent="-228600">
+              <a:t>·  Usuario 255 (userid=0): cuenta admin con 53% del betweenness en PMs</a:t>
+            </a:r>
+          </a:p>
+          <a:p>
+            <a:pPr lvl="1" marL="274320" indent="-228600">
               <a:buNone/>
             </a:pPr>
             <a:r>
-              <a:rPr sz="1600" b="0">
+              <a:rPr sz="1500" b="0">
                 <a:solidFill>
                   <a:srgbClr val="707888"/>
                 </a:solidFill>
-                <a:latin typeface="Calibri"/>
-              </a:rPr>
-              <a:t>·  Usuario 255 (userid=0): cuenta admin con 53% del betweenness en PMs</a:t>
-            </a:r>
-          </a:p>
-          <a:p>
-            <a:pPr lvl="1" algn="l" marL="274320" indent="-228600">
-              <a:buNone/>
-            </a:pPr>
-            <a:r>
-              <a:rPr sz="1600" b="0">
-                <a:solidFill>
-                  <a:srgbClr val="707888"/>
-                </a:solidFill>
-                <a:latin typeface="Calibri"/>
+                <a:latin typeface="Arial"/>
               </a:rPr>
               <a:t>·  Miembros identificados en casos judiciales en EEUU, Europa y Australia</a:t>
             </a:r>
           </a:p>
           <a:p>
-            <a:pPr algn="l" marL="0" indent="-228600">
-              <a:buNone/>
-            </a:pPr>
-            <a:r>
-              <a:rPr sz="1900" b="0">
-                <a:solidFill>
-                  <a:srgbClr val="333844"/>
-                </a:solidFill>
-                <a:latin typeface="Calibri"/>
-              </a:rPr>
-              <a:t>▸  Dato infrecuente: 55K mensajes privados intactos → red de influencia oculta</a:t>
-            </a:r>
-          </a:p>
-          <a:p>
-            <a:pPr algn="l" marL="0" indent="-228600">
-              <a:buNone/>
-            </a:pPr>
-            <a:r>
-              <a:rPr sz="1900" b="0">
-                <a:solidFill>
-                  <a:srgbClr val="333844"/>
-                </a:solidFill>
-                <a:latin typeface="Calibri"/>
-              </a:rPr>
-              <a:t>▸  Cierre documentado: el servidor fue confiscado, no abandonado</a:t>
+            <a:r>
+              <a:t>Dato infrecuente: 55K mensajes privados intactos → red de influencia oculta</a:t>
+            </a:r>
+          </a:p>
+          <a:p>
+            <a:r>
+              <a:t>Cierre documentado: el servidor fue confiscado, no abandonado</a:t>
             </a:r>
           </a:p>
         </p:txBody>
@@ -10995,34 +10494,31 @@
           <a:bodyPr wrap="square"/>
           <a:lstStyle/>
           <a:p>
+            <a:pPr algn="ctr"/>
             <a:r>
               <a:rPr sz="1300" b="1">
                 <a:solidFill>
-                  <a:srgbClr val="E32B3D"/>
-                </a:solidFill>
-                <a:latin typeface="Calibri"/>
+                  <a:srgbClr val="CD2D37"/>
+                </a:solidFill>
+                <a:latin typeface="Arial"/>
               </a:rPr>
               <a:t>SECCIÓN 2</a:t>
             </a:r>
           </a:p>
           <a:p>
-            <a:r>
-              <a:rPr sz="3000" b="1">
-                <a:solidFill>
-                  <a:srgbClr val="FFFFFF"/>
-                </a:solidFill>
-                <a:latin typeface="Calibri"/>
-              </a:rPr>
+            <a:pPr algn="ctr"/>
+            <a:r>
               <a:t>Exploración y red de influencia</a:t>
             </a:r>
           </a:p>
           <a:p>
+            <a:pPr algn="ctr"/>
             <a:r>
               <a:rPr sz="1600">
                 <a:solidFill>
                   <a:srgbClr val="D6DAE2"/>
                 </a:solidFill>
-                <a:latin typeface="Calibri"/>
+                <a:latin typeface="Arial"/>
               </a:rPr>
               <a:t>Notebook 00 + estructura de red</a:t>
             </a:r>
@@ -11063,12 +10559,6 @@
           <a:lstStyle/>
           <a:p>
             <a:r>
-              <a:rPr sz="2400" b="1">
-                <a:solidFill>
-                  <a:srgbClr val="1A1A2E"/>
-                </a:solidFill>
-                <a:latin typeface="Calibri"/>
-              </a:rPr>
               <a:t>EDA — primeras métricas</a:t>
             </a:r>
           </a:p>
@@ -11089,73 +10579,28 @@
           <a:bodyPr wrap="square"/>
           <a:lstStyle/>
           <a:p>
-            <a:pPr algn="l" marL="0" indent="-228600">
-              <a:buNone/>
-            </a:pPr>
-            <a:r>
-              <a:rPr sz="1900" b="0">
-                <a:solidFill>
-                  <a:srgbClr val="333844"/>
-                </a:solidFill>
-                <a:latin typeface="Calibri"/>
-              </a:rPr>
-              <a:t>▸  836 usuarios activos (≥5 posts) sobre ~18K registros → foro pequeño y denso</a:t>
-            </a:r>
-          </a:p>
-          <a:p>
-            <a:pPr algn="l" marL="0" indent="-228600">
-              <a:buNone/>
-            </a:pPr>
-            <a:r>
-              <a:rPr sz="1900" b="0">
-                <a:solidFill>
-                  <a:srgbClr val="333844"/>
-                </a:solidFill>
-                <a:latin typeface="Calibri"/>
-              </a:rPr>
-              <a:t>▸  157,779 posts válidos tras limpieza: media de 189 posts/usuario activo</a:t>
-            </a:r>
-          </a:p>
-          <a:p>
-            <a:pPr algn="l" marL="0" indent="-228600">
-              <a:buNone/>
-            </a:pPr>
-            <a:r>
-              <a:rPr sz="1900" b="0">
-                <a:solidFill>
-                  <a:srgbClr val="333844"/>
-                </a:solidFill>
-                <a:latin typeface="Calibri"/>
-              </a:rPr>
-              <a:t>▸  Actividad: 2011–2017. Pico en 2015 (atentados de París) → +62% baseline</a:t>
-            </a:r>
-          </a:p>
-          <a:p>
-            <a:pPr algn="l" marL="0" indent="-228600">
-              <a:buNone/>
-            </a:pPr>
-            <a:r>
-              <a:rPr sz="1900" b="0">
-                <a:solidFill>
-                  <a:srgbClr val="333844"/>
-                </a:solidFill>
-                <a:latin typeface="Calibri"/>
-              </a:rPr>
-              <a:t>▸  138 subforos activos, pero concentración alta: top-5 generan el 60% del tráfico</a:t>
-            </a:r>
-          </a:p>
-          <a:p>
-            <a:pPr algn="l" marL="0" indent="-228600">
-              <a:buNone/>
-            </a:pPr>
-            <a:r>
-              <a:rPr sz="1900" b="0">
-                <a:solidFill>
-                  <a:srgbClr val="333844"/>
-                </a:solidFill>
-                <a:latin typeface="Calibri"/>
-              </a:rPr>
-              <a:t>▸  Idioma: inglés (verificado por detección automática) → pipeline estándar válido</a:t>
+            <a:r>
+              <a:t>836 usuarios activos (≥5 posts) sobre ~18K registros → foro pequeño y denso</a:t>
+            </a:r>
+          </a:p>
+          <a:p>
+            <a:r>
+              <a:t>157,779 posts válidos tras limpieza: media de 189 posts/usuario activo</a:t>
+            </a:r>
+          </a:p>
+          <a:p>
+            <a:r>
+              <a:t>Actividad: 2011–2017. Pico en 2015 (atentados de París) → +62% baseline</a:t>
+            </a:r>
+          </a:p>
+          <a:p>
+            <a:r>
+              <a:t>138 subforos activos, pero concentración alta: top-5 generan el 60% del tráfico</a:t>
+            </a:r>
+          </a:p>
+          <a:p>
+            <a:r>
+              <a:t>Idioma: inglés (verificado por detección automática) → pipeline estándar válido</a:t>
             </a:r>
           </a:p>
         </p:txBody>
@@ -11194,12 +10639,6 @@
           <a:lstStyle/>
           <a:p>
             <a:r>
-              <a:rPr sz="2400" b="1">
-                <a:solidFill>
-                  <a:srgbClr val="1A1A2E"/>
-                </a:solidFill>
-                <a:latin typeface="Calibri"/>
-              </a:rPr>
               <a:t>Dos redes, dos capas de influencia</a:t>
             </a:r>
           </a:p>
@@ -11230,7 +10669,7 @@
         </p:nvSpPr>
         <p:spPr>
           <a:xfrm>
-            <a:off x="1051560" y="1691640"/>
+            <a:off x="1051560" y="2194560"/>
             <a:ext cx="4846320" cy="411480"/>
           </a:xfrm>
           <a:prstGeom prst="rect">
@@ -11248,9 +10687,9 @@
             <a:r>
               <a:rPr sz="1600" b="1">
                 <a:solidFill>
-                  <a:srgbClr val="E32B3D"/>
-                </a:solidFill>
-                <a:latin typeface="Calibri"/>
+                  <a:srgbClr val="CD2D37"/>
+                </a:solidFill>
+                <a:latin typeface="Arial"/>
               </a:rPr>
               <a:t>Red pública (co-participación en threads)</a:t>
             </a:r>
@@ -11265,8 +10704,8 @@
         </p:nvSpPr>
         <p:spPr>
           <a:xfrm>
-            <a:off x="1051560" y="2148840"/>
-            <a:ext cx="4846320" cy="3840480"/>
+            <a:off x="1051560" y="2651760"/>
+            <a:ext cx="4846320" cy="3337560"/>
           </a:xfrm>
           <a:prstGeom prst="rect">
             <a:avLst/>
@@ -11282,9 +10721,9 @@
             <a:r>
               <a:rPr sz="1600">
                 <a:solidFill>
-                  <a:srgbClr val="333844"/>
-                </a:solidFill>
-                <a:latin typeface="Calibri"/>
+                  <a:srgbClr val="465461"/>
+                </a:solidFill>
+                <a:latin typeface="Arial"/>
               </a:rPr>
               <a:t>▸  836 nodos, 100% en componente gigante</a:t>
             </a:r>
@@ -11293,9 +10732,9 @@
             <a:r>
               <a:rPr sz="1600">
                 <a:solidFill>
-                  <a:srgbClr val="333844"/>
-                </a:solidFill>
-                <a:latin typeface="Calibri"/>
+                  <a:srgbClr val="465461"/>
+                </a:solidFill>
+                <a:latin typeface="Arial"/>
               </a:rPr>
               <a:t>▸  Broker principal: MOONLORD (Slavros)</a:t>
             </a:r>
@@ -11304,9 +10743,9 @@
             <a:r>
               <a:rPr sz="1600">
                 <a:solidFill>
-                  <a:srgbClr val="333844"/>
-                </a:solidFill>
-                <a:latin typeface="Calibri"/>
+                  <a:srgbClr val="465461"/>
+                </a:solidFill>
+                <a:latin typeface="Arial"/>
               </a:rPr>
               <a:t>▸  Estructura de hub-and-spoke: el fundador conecta grupos ideológicos</a:t>
             </a:r>
@@ -11315,9 +10754,9 @@
             <a:r>
               <a:rPr sz="1600">
                 <a:solidFill>
-                  <a:srgbClr val="333844"/>
-                </a:solidFill>
-                <a:latin typeface="Calibri"/>
+                  <a:srgbClr val="465461"/>
+                </a:solidFill>
+                <a:latin typeface="Arial"/>
               </a:rPr>
               <a:t>▸  Hilos filosóficos (Evola, Spengler) concentran el betweenness</a:t>
             </a:r>
@@ -11332,7 +10771,7 @@
         </p:nvSpPr>
         <p:spPr>
           <a:xfrm>
-            <a:off x="6217920" y="1691640"/>
+            <a:off x="6217920" y="2194560"/>
             <a:ext cx="4846320" cy="411480"/>
           </a:xfrm>
           <a:prstGeom prst="rect">
@@ -11350,9 +10789,9 @@
             <a:r>
               <a:rPr sz="1600" b="1">
                 <a:solidFill>
-                  <a:srgbClr val="E32B3D"/>
-                </a:solidFill>
-                <a:latin typeface="Calibri"/>
+                  <a:srgbClr val="CD2D37"/>
+                </a:solidFill>
+                <a:latin typeface="Arial"/>
               </a:rPr>
               <a:t>Red privada (mensajes privados)</a:t>
             </a:r>
@@ -11367,8 +10806,8 @@
         </p:nvSpPr>
         <p:spPr>
           <a:xfrm>
-            <a:off x="6217920" y="2148840"/>
-            <a:ext cx="4846320" cy="3840480"/>
+            <a:off x="6217920" y="2651760"/>
+            <a:ext cx="4846320" cy="3337560"/>
           </a:xfrm>
           <a:prstGeom prst="rect">
             <a:avLst/>
@@ -11384,9 +10823,9 @@
             <a:r>
               <a:rPr sz="1600">
                 <a:solidFill>
-                  <a:srgbClr val="333844"/>
-                </a:solidFill>
-                <a:latin typeface="Calibri"/>
+                  <a:srgbClr val="465461"/>
+                </a:solidFill>
+                <a:latin typeface="Arial"/>
               </a:rPr>
               <a:t>▸  55K PMs — dato rarísimo en leaks de foros</a:t>
             </a:r>
@@ -11395,9 +10834,9 @@
             <a:r>
               <a:rPr sz="1600">
                 <a:solidFill>
-                  <a:srgbClr val="333844"/>
-                </a:solidFill>
-                <a:latin typeface="Calibri"/>
+                  <a:srgbClr val="465461"/>
+                </a:solidFill>
+                <a:latin typeface="Arial"/>
               </a:rPr>
               <a:t>▸  Broker principal: usuario 255 (userid=0, admin)</a:t>
             </a:r>
@@ -11406,9 +10845,9 @@
             <a:r>
               <a:rPr sz="1600">
                 <a:solidFill>
-                  <a:srgbClr val="333844"/>
-                </a:solidFill>
-                <a:latin typeface="Calibri"/>
+                  <a:srgbClr val="465461"/>
+                </a:solidFill>
+                <a:latin typeface="Arial"/>
               </a:rPr>
               <a:t>▸  53% del betweenness en la red privada</a:t>
             </a:r>
@@ -11417,9 +10856,9 @@
             <a:r>
               <a:rPr sz="1600">
                 <a:solidFill>
-                  <a:srgbClr val="333844"/>
-                </a:solidFill>
-                <a:latin typeface="Calibri"/>
+                  <a:srgbClr val="465461"/>
+                </a:solidFill>
+                <a:latin typeface="Arial"/>
               </a:rPr>
               <a:t>▸  Los brokers públicos y privados NO coinciden</a:t>
             </a:r>
@@ -11460,12 +10899,6 @@
           <a:lstStyle/>
           <a:p>
             <a:r>
-              <a:rPr sz="2400" b="1">
-                <a:solidFill>
-                  <a:srgbClr val="1A1A2E"/>
-                </a:solidFill>
-                <a:latin typeface="Calibri"/>
-              </a:rPr>
               <a:t>Detección de idioma — paso obligatorio</a:t>
             </a:r>
           </a:p>
@@ -11481,78 +10914,38 @@
             <p:ph type="body" idx="16" sz="quarter"/>
           </p:nvPr>
         </p:nvSpPr>
-        <p:spPr/>
+        <p:spPr>
+          <a:xfrm>
+            <a:off x="1073427" y="2077576"/>
+            <a:ext cx="10084904" cy="3507298"/>
+          </a:xfrm>
+        </p:spPr>
         <p:txBody>
           <a:bodyPr wrap="square"/>
           <a:lstStyle/>
           <a:p>
-            <a:pPr algn="l" marL="0" indent="-228600">
-              <a:buNone/>
-            </a:pPr>
-            <a:r>
-              <a:rPr sz="1900" b="0">
-                <a:solidFill>
-                  <a:srgbClr val="333844"/>
-                </a:solidFill>
-                <a:latin typeface="Calibri"/>
-              </a:rPr>
-              <a:t>▸  Burrows' Delta, NER y BERTopic son idioma-específicos</a:t>
-            </a:r>
-          </a:p>
-          <a:p>
-            <a:pPr algn="l" marL="0" indent="-228600">
-              <a:buNone/>
-            </a:pPr>
-            <a:r>
-              <a:rPr sz="1900" b="0">
-                <a:solidFill>
-                  <a:srgbClr val="333844"/>
-                </a:solidFill>
-                <a:latin typeface="Calibri"/>
-              </a:rPr>
-              <a:t>▸  Sin verificación previa, aplicar el pipeline inglés a texto ruso produce ruido</a:t>
-            </a:r>
-          </a:p>
-          <a:p>
-            <a:pPr algn="l" marL="0" indent="-228600">
-              <a:buNone/>
-            </a:pPr>
-            <a:r>
-              <a:rPr sz="1900" b="0">
-                <a:solidFill>
-                  <a:srgbClr val="333844"/>
-                </a:solidFill>
-                <a:latin typeface="Calibri"/>
-              </a:rPr>
-              <a:t>▸  Resultado IronMarch: &gt;95% inglés → pipeline estándar válido</a:t>
-            </a:r>
-          </a:p>
-          <a:p>
-            <a:pPr algn="l" marL="0" indent="-228600">
-              <a:buNone/>
-            </a:pPr>
-            <a:r>
-              <a:rPr sz="1900" b="0">
-                <a:solidFill>
-                  <a:srgbClr val="333844"/>
-                </a:solidFill>
-                <a:latin typeface="Calibri"/>
-              </a:rPr>
-              <a:t>▸  La misma metodología aplicada a un foro en ruso requeriría un pipeline distinto</a:t>
-            </a:r>
-          </a:p>
-          <a:p>
-            <a:pPr algn="l" marL="0" indent="-228600">
-              <a:buNone/>
-            </a:pPr>
-            <a:r>
-              <a:rPr sz="1900" b="0">
-                <a:solidFill>
-                  <a:srgbClr val="333844"/>
-                </a:solidFill>
-                <a:latin typeface="Calibri"/>
-              </a:rPr>
-              <a:t>▸  Regla general: detectar idioma ANTES de cualquier modelo NLP</a:t>
+            <a:r>
+              <a:t>Burrows' Delta, NER y BERTopic son idioma-específicos</a:t>
+            </a:r>
+          </a:p>
+          <a:p>
+            <a:r>
+              <a:t>Sin verificación previa, aplicar el pipeline inglés a texto ruso produce ruido</a:t>
+            </a:r>
+          </a:p>
+          <a:p>
+            <a:r>
+              <a:t>Resultado IronMarch: &gt;95% inglés → pipeline estándar válido</a:t>
+            </a:r>
+          </a:p>
+          <a:p>
+            <a:r>
+              <a:t>La misma metodología aplicada a un foro en ruso requeriría un pipeline distinto</a:t>
+            </a:r>
+          </a:p>
+          <a:p>
+            <a:r>
+              <a:t>Regla general: detectar idioma ANTES de cualquier modelo NLP</a:t>
             </a:r>
           </a:p>
         </p:txBody>

--- a/IronMarch/csbc26_caso_ironmarch.pptx
+++ b/IronMarch/csbc26_caso_ironmarch.pptx
@@ -7260,1099 +7260,598 @@
           <a:p/>
         </p:txBody>
       </p:sp>
-      <p:sp>
-        <p:nvSpPr>
-          <p:cNvPr id="4" name="Rectangle 3"/>
-          <p:cNvSpPr/>
+      <p:graphicFrame>
+        <p:nvGraphicFramePr>
+          <p:cNvPr id="4" name="Table 3"/>
+          <p:cNvGraphicFramePr>
+            <a:graphicFrameLocks noGrp="1"/>
+          </p:cNvGraphicFramePr>
           <p:nvPr/>
-        </p:nvSpPr>
-        <p:spPr>
-          <a:xfrm>
-            <a:off x="1051560" y="2148840"/>
-            <a:ext cx="10058400" cy="365760"/>
-          </a:xfrm>
-          <a:prstGeom prst="rect">
-            <a:avLst/>
-          </a:prstGeom>
-          <a:solidFill>
-            <a:srgbClr val="CD2D37"/>
-          </a:solidFill>
-          <a:ln>
-            <a:noFill/>
-          </a:ln>
-        </p:spPr>
-        <p:style>
-          <a:lnRef idx="1">
-            <a:schemeClr val="accent1"/>
-          </a:lnRef>
-          <a:fillRef idx="3">
-            <a:schemeClr val="accent1"/>
-          </a:fillRef>
-          <a:effectRef idx="2">
-            <a:schemeClr val="accent1"/>
-          </a:effectRef>
-          <a:fontRef idx="minor">
-            <a:schemeClr val="lt1"/>
-          </a:fontRef>
-        </p:style>
-        <p:txBody>
-          <a:bodyPr rtlCol="0" anchor="ctr"/>
-          <a:lstStyle/>
-          <a:p>
-            <a:pPr algn="ctr"/>
-          </a:p>
-        </p:txBody>
-      </p:sp>
+        </p:nvGraphicFramePr>
+        <p:xfrm>
+          <a:off x="1051560" y="2148840"/>
+          <a:ext cx="10058400" cy="1828800"/>
+        </p:xfrm>
+        <a:graphic>
+          <a:graphicData uri="http://schemas.openxmlformats.org/drawingml/2006/table">
+            <a:tbl>
+              <a:tblPr>
+                <a:tableStyleId>{5C22544A-7EE6-4342-B048-85BDC9FD1C3A}</a:tableStyleId>
+              </a:tblPr>
+              <a:tblGrid>
+                <a:gridCol w="2011680"/>
+                <a:gridCol w="2011680"/>
+                <a:gridCol w="2011680"/>
+                <a:gridCol w="2011680"/>
+                <a:gridCol w="2011680"/>
+              </a:tblGrid>
+              <a:tr h="365760">
+                <a:tc>
+                  <a:txBody>
+                    <a:bodyPr/>
+                    <a:lstStyle/>
+                    <a:p>
+                      <a:r>
+                        <a:rPr sz="1200" b="1">
+                          <a:solidFill>
+                            <a:srgbClr val="FFFFFF"/>
+                          </a:solidFill>
+                          <a:latin typeface="Arial"/>
+                        </a:rPr>
+                        <a:t>Estrategia</a:t>
+                      </a:r>
+                    </a:p>
+                  </a:txBody>
+                  <a:tcPr marL="45000" marR="45000" marT="25000" marB="25000" anchor="ctr">
+                    <a:solidFill>
+                      <a:srgbClr val="CD2D37"/>
+                    </a:solidFill>
+                  </a:tcPr>
+                </a:tc>
+                <a:tc>
+                  <a:txBody>
+                    <a:bodyPr/>
+                    <a:lstStyle/>
+                    <a:p>
+                      <a:r>
+                        <a:rPr sz="1200" b="1">
+                          <a:solidFill>
+                            <a:srgbClr val="FFFFFF"/>
+                          </a:solidFill>
+                          <a:latin typeface="Arial"/>
+                        </a:rPr>
+                        <a:t>Posts</a:t>
+                      </a:r>
+                    </a:p>
+                  </a:txBody>
+                  <a:tcPr marL="45000" marR="45000" marT="25000" marB="25000" anchor="ctr">
+                    <a:solidFill>
+                      <a:srgbClr val="CD2D37"/>
+                    </a:solidFill>
+                  </a:tcPr>
+                </a:tc>
+                <a:tc>
+                  <a:txBody>
+                    <a:bodyPr/>
+                    <a:lstStyle/>
+                    <a:p>
+                      <a:r>
+                        <a:rPr sz="1200" b="1">
+                          <a:solidFill>
+                            <a:srgbClr val="FFFFFF"/>
+                          </a:solidFill>
+                          <a:latin typeface="Arial"/>
+                        </a:rPr>
+                        <a:t>Tiempo GPU</a:t>
+                      </a:r>
+                    </a:p>
+                  </a:txBody>
+                  <a:tcPr marL="45000" marR="45000" marT="25000" marB="25000" anchor="ctr">
+                    <a:solidFill>
+                      <a:srgbClr val="CD2D37"/>
+                    </a:solidFill>
+                  </a:tcPr>
+                </a:tc>
+                <a:tc>
+                  <a:txBody>
+                    <a:bodyPr/>
+                    <a:lstStyle/>
+                    <a:p>
+                      <a:r>
+                        <a:rPr sz="1200" b="1">
+                          <a:solidFill>
+                            <a:srgbClr val="FFFFFF"/>
+                          </a:solidFill>
+                          <a:latin typeface="Arial"/>
+                        </a:rPr>
+                        <a:t>Spearman ρ vs full</a:t>
+                      </a:r>
+                    </a:p>
+                  </a:txBody>
+                  <a:tcPr marL="45000" marR="45000" marT="25000" marB="25000" anchor="ctr">
+                    <a:solidFill>
+                      <a:srgbClr val="CD2D37"/>
+                    </a:solidFill>
+                  </a:tcPr>
+                </a:tc>
+                <a:tc>
+                  <a:txBody>
+                    <a:bodyPr/>
+                    <a:lstStyle/>
+                    <a:p>
+                      <a:r>
+                        <a:rPr sz="1200" b="1">
+                          <a:solidFill>
+                            <a:srgbClr val="FFFFFF"/>
+                          </a:solidFill>
+                          <a:latin typeface="Arial"/>
+                        </a:rPr>
+                        <a:t>Δρ</a:t>
+                      </a:r>
+                    </a:p>
+                  </a:txBody>
+                  <a:tcPr marL="45000" marR="45000" marT="25000" marB="25000" anchor="ctr">
+                    <a:solidFill>
+                      <a:srgbClr val="CD2D37"/>
+                    </a:solidFill>
+                  </a:tcPr>
+                </a:tc>
+              </a:tr>
+              <a:tr h="365760">
+                <a:tc>
+                  <a:txBody>
+                    <a:bodyPr/>
+                    <a:lstStyle/>
+                    <a:p>
+                      <a:r>
+                        <a:rPr sz="1100" b="0">
+                          <a:solidFill>
+                            <a:srgbClr val="465461"/>
+                          </a:solidFill>
+                          <a:latin typeface="Arial"/>
+                        </a:rPr>
+                        <a:t>B — full</a:t>
+                      </a:r>
+                    </a:p>
+                  </a:txBody>
+                  <a:tcPr marL="45000" marR="45000" marT="25000" marB="25000" anchor="ctr">
+                    <a:solidFill>
+                      <a:srgbClr val="F1F2F6"/>
+                    </a:solidFill>
+                  </a:tcPr>
+                </a:tc>
+                <a:tc>
+                  <a:txBody>
+                    <a:bodyPr/>
+                    <a:lstStyle/>
+                    <a:p>
+                      <a:r>
+                        <a:rPr sz="1100" b="0">
+                          <a:solidFill>
+                            <a:srgbClr val="465461"/>
+                          </a:solidFill>
+                          <a:latin typeface="Arial"/>
+                        </a:rPr>
+                        <a:t>157,779</a:t>
+                      </a:r>
+                    </a:p>
+                  </a:txBody>
+                  <a:tcPr marL="45000" marR="45000" marT="25000" marB="25000" anchor="ctr">
+                    <a:solidFill>
+                      <a:srgbClr val="F1F2F6"/>
+                    </a:solidFill>
+                  </a:tcPr>
+                </a:tc>
+                <a:tc>
+                  <a:txBody>
+                    <a:bodyPr/>
+                    <a:lstStyle/>
+                    <a:p>
+                      <a:r>
+                        <a:rPr sz="1100" b="0">
+                          <a:solidFill>
+                            <a:srgbClr val="465461"/>
+                          </a:solidFill>
+                          <a:latin typeface="Arial"/>
+                        </a:rPr>
+                        <a:t>~9 h</a:t>
+                      </a:r>
+                    </a:p>
+                  </a:txBody>
+                  <a:tcPr marL="45000" marR="45000" marT="25000" marB="25000" anchor="ctr">
+                    <a:solidFill>
+                      <a:srgbClr val="F1F2F6"/>
+                    </a:solidFill>
+                  </a:tcPr>
+                </a:tc>
+                <a:tc>
+                  <a:txBody>
+                    <a:bodyPr/>
+                    <a:lstStyle/>
+                    <a:p>
+                      <a:r>
+                        <a:rPr sz="1100" b="0">
+                          <a:solidFill>
+                            <a:srgbClr val="465461"/>
+                          </a:solidFill>
+                          <a:latin typeface="Arial"/>
+                        </a:rPr>
+                        <a:t>referencia</a:t>
+                      </a:r>
+                    </a:p>
+                  </a:txBody>
+                  <a:tcPr marL="45000" marR="45000" marT="25000" marB="25000" anchor="ctr">
+                    <a:solidFill>
+                      <a:srgbClr val="F1F2F6"/>
+                    </a:solidFill>
+                  </a:tcPr>
+                </a:tc>
+                <a:tc>
+                  <a:txBody>
+                    <a:bodyPr/>
+                    <a:lstStyle/>
+                    <a:p>
+                      <a:r>
+                        <a:rPr sz="1100" b="0">
+                          <a:solidFill>
+                            <a:srgbClr val="465461"/>
+                          </a:solidFill>
+                          <a:latin typeface="Arial"/>
+                        </a:rPr>
+                        <a:t>—</a:t>
+                      </a:r>
+                    </a:p>
+                  </a:txBody>
+                  <a:tcPr marL="45000" marR="45000" marT="25000" marB="25000" anchor="ctr">
+                    <a:solidFill>
+                      <a:srgbClr val="F1F2F6"/>
+                    </a:solidFill>
+                  </a:tcPr>
+                </a:tc>
+              </a:tr>
+              <a:tr h="365760">
+                <a:tc>
+                  <a:txBody>
+                    <a:bodyPr/>
+                    <a:lstStyle/>
+                    <a:p>
+                      <a:r>
+                        <a:rPr sz="1100" b="0">
+                          <a:solidFill>
+                            <a:srgbClr val="465461"/>
+                          </a:solidFill>
+                          <a:latin typeface="Arial"/>
+                        </a:rPr>
+                        <a:t>C — top-50</a:t>
+                      </a:r>
+                    </a:p>
+                  </a:txBody>
+                  <a:tcPr marL="45000" marR="45000" marT="25000" marB="25000" anchor="ctr">
+                    <a:solidFill>
+                      <a:srgbClr val="FFFFFF"/>
+                    </a:solidFill>
+                  </a:tcPr>
+                </a:tc>
+                <a:tc>
+                  <a:txBody>
+                    <a:bodyPr/>
+                    <a:lstStyle/>
+                    <a:p>
+                      <a:r>
+                        <a:rPr sz="1100" b="0">
+                          <a:solidFill>
+                            <a:srgbClr val="465461"/>
+                          </a:solidFill>
+                          <a:latin typeface="Arial"/>
+                        </a:rPr>
+                        <a:t>≤41,800</a:t>
+                      </a:r>
+                    </a:p>
+                  </a:txBody>
+                  <a:tcPr marL="45000" marR="45000" marT="25000" marB="25000" anchor="ctr">
+                    <a:solidFill>
+                      <a:srgbClr val="FFFFFF"/>
+                    </a:solidFill>
+                  </a:tcPr>
+                </a:tc>
+                <a:tc>
+                  <a:txBody>
+                    <a:bodyPr/>
+                    <a:lstStyle/>
+                    <a:p>
+                      <a:r>
+                        <a:rPr sz="1100" b="0">
+                          <a:solidFill>
+                            <a:srgbClr val="465461"/>
+                          </a:solidFill>
+                          <a:latin typeface="Arial"/>
+                        </a:rPr>
+                        <a:t>2h 35min</a:t>
+                      </a:r>
+                    </a:p>
+                  </a:txBody>
+                  <a:tcPr marL="45000" marR="45000" marT="25000" marB="25000" anchor="ctr">
+                    <a:solidFill>
+                      <a:srgbClr val="FFFFFF"/>
+                    </a:solidFill>
+                  </a:tcPr>
+                </a:tc>
+                <a:tc>
+                  <a:txBody>
+                    <a:bodyPr/>
+                    <a:lstStyle/>
+                    <a:p>
+                      <a:r>
+                        <a:rPr sz="1100" b="0">
+                          <a:solidFill>
+                            <a:srgbClr val="465461"/>
+                          </a:solidFill>
+                          <a:latin typeface="Arial"/>
+                        </a:rPr>
+                        <a:t>0.799</a:t>
+                      </a:r>
+                    </a:p>
+                  </a:txBody>
+                  <a:tcPr marL="45000" marR="45000" marT="25000" marB="25000" anchor="ctr">
+                    <a:solidFill>
+                      <a:srgbClr val="FFFFFF"/>
+                    </a:solidFill>
+                  </a:tcPr>
+                </a:tc>
+                <a:tc>
+                  <a:txBody>
+                    <a:bodyPr/>
+                    <a:lstStyle/>
+                    <a:p>
+                      <a:r>
+                        <a:rPr sz="1100" b="0">
+                          <a:solidFill>
+                            <a:srgbClr val="465461"/>
+                          </a:solidFill>
+                          <a:latin typeface="Arial"/>
+                        </a:rPr>
+                        <a:t>—</a:t>
+                      </a:r>
+                    </a:p>
+                  </a:txBody>
+                  <a:tcPr marL="45000" marR="45000" marT="25000" marB="25000" anchor="ctr">
+                    <a:solidFill>
+                      <a:srgbClr val="FFFFFF"/>
+                    </a:solidFill>
+                  </a:tcPr>
+                </a:tc>
+              </a:tr>
+              <a:tr h="365760">
+                <a:tc>
+                  <a:txBody>
+                    <a:bodyPr/>
+                    <a:lstStyle/>
+                    <a:p>
+                      <a:r>
+                        <a:rPr sz="1100" b="0">
+                          <a:solidFill>
+                            <a:srgbClr val="465461"/>
+                          </a:solidFill>
+                          <a:latin typeface="Arial"/>
+                        </a:rPr>
+                        <a:t>D — top-100</a:t>
+                      </a:r>
+                    </a:p>
+                  </a:txBody>
+                  <a:tcPr marL="45000" marR="45000" marT="25000" marB="25000" anchor="ctr">
+                    <a:solidFill>
+                      <a:srgbClr val="F1F2F6"/>
+                    </a:solidFill>
+                  </a:tcPr>
+                </a:tc>
+                <a:tc>
+                  <a:txBody>
+                    <a:bodyPr/>
+                    <a:lstStyle/>
+                    <a:p>
+                      <a:r>
+                        <a:rPr sz="1100" b="0">
+                          <a:solidFill>
+                            <a:srgbClr val="465461"/>
+                          </a:solidFill>
+                          <a:latin typeface="Arial"/>
+                        </a:rPr>
+                        <a:t>41,319</a:t>
+                      </a:r>
+                    </a:p>
+                  </a:txBody>
+                  <a:tcPr marL="45000" marR="45000" marT="25000" marB="25000" anchor="ctr">
+                    <a:solidFill>
+                      <a:srgbClr val="F1F2F6"/>
+                    </a:solidFill>
+                  </a:tcPr>
+                </a:tc>
+                <a:tc>
+                  <a:txBody>
+                    <a:bodyPr/>
+                    <a:lstStyle/>
+                    <a:p>
+                      <a:r>
+                        <a:rPr sz="1100" b="0">
+                          <a:solidFill>
+                            <a:srgbClr val="465461"/>
+                          </a:solidFill>
+                          <a:latin typeface="Arial"/>
+                        </a:rPr>
+                        <a:t>3h 33min</a:t>
+                      </a:r>
+                    </a:p>
+                  </a:txBody>
+                  <a:tcPr marL="45000" marR="45000" marT="25000" marB="25000" anchor="ctr">
+                    <a:solidFill>
+                      <a:srgbClr val="F1F2F6"/>
+                    </a:solidFill>
+                  </a:tcPr>
+                </a:tc>
+                <a:tc>
+                  <a:txBody>
+                    <a:bodyPr/>
+                    <a:lstStyle/>
+                    <a:p>
+                      <a:r>
+                        <a:rPr sz="1100" b="0">
+                          <a:solidFill>
+                            <a:srgbClr val="465461"/>
+                          </a:solidFill>
+                          <a:latin typeface="Arial"/>
+                        </a:rPr>
+                        <a:t>0.860</a:t>
+                      </a:r>
+                    </a:p>
+                  </a:txBody>
+                  <a:tcPr marL="45000" marR="45000" marT="25000" marB="25000" anchor="ctr">
+                    <a:solidFill>
+                      <a:srgbClr val="F1F2F6"/>
+                    </a:solidFill>
+                  </a:tcPr>
+                </a:tc>
+                <a:tc>
+                  <a:txBody>
+                    <a:bodyPr/>
+                    <a:lstStyle/>
+                    <a:p>
+                      <a:r>
+                        <a:rPr sz="1100" b="0">
+                          <a:solidFill>
+                            <a:srgbClr val="465461"/>
+                          </a:solidFill>
+                          <a:latin typeface="Arial"/>
+                        </a:rPr>
+                        <a:t>+0.061</a:t>
+                      </a:r>
+                    </a:p>
+                  </a:txBody>
+                  <a:tcPr marL="45000" marR="45000" marT="25000" marB="25000" anchor="ctr">
+                    <a:solidFill>
+                      <a:srgbClr val="F1F2F6"/>
+                    </a:solidFill>
+                  </a:tcPr>
+                </a:tc>
+              </a:tr>
+              <a:tr h="365760">
+                <a:tc>
+                  <a:txBody>
+                    <a:bodyPr/>
+                    <a:lstStyle/>
+                    <a:p>
+                      <a:r>
+                        <a:rPr sz="1100" b="0">
+                          <a:solidFill>
+                            <a:srgbClr val="465461"/>
+                          </a:solidFill>
+                          <a:latin typeface="Arial"/>
+                        </a:rPr>
+                        <a:t>E — top-150</a:t>
+                      </a:r>
+                    </a:p>
+                  </a:txBody>
+                  <a:tcPr marL="45000" marR="45000" marT="25000" marB="25000" anchor="ctr">
+                    <a:solidFill>
+                      <a:srgbClr val="FFFFFF"/>
+                    </a:solidFill>
+                  </a:tcPr>
+                </a:tc>
+                <a:tc>
+                  <a:txBody>
+                    <a:bodyPr/>
+                    <a:lstStyle/>
+                    <a:p>
+                      <a:r>
+                        <a:rPr sz="1100" b="0">
+                          <a:solidFill>
+                            <a:srgbClr val="465461"/>
+                          </a:solidFill>
+                          <a:latin typeface="Arial"/>
+                        </a:rPr>
+                        <a:t>53,193</a:t>
+                      </a:r>
+                    </a:p>
+                  </a:txBody>
+                  <a:tcPr marL="45000" marR="45000" marT="25000" marB="25000" anchor="ctr">
+                    <a:solidFill>
+                      <a:srgbClr val="FFFFFF"/>
+                    </a:solidFill>
+                  </a:tcPr>
+                </a:tc>
+                <a:tc>
+                  <a:txBody>
+                    <a:bodyPr/>
+                    <a:lstStyle/>
+                    <a:p>
+                      <a:r>
+                        <a:rPr sz="1100" b="0">
+                          <a:solidFill>
+                            <a:srgbClr val="465461"/>
+                          </a:solidFill>
+                          <a:latin typeface="Arial"/>
+                        </a:rPr>
+                        <a:t>4h 12min</a:t>
+                      </a:r>
+                    </a:p>
+                  </a:txBody>
+                  <a:tcPr marL="45000" marR="45000" marT="25000" marB="25000" anchor="ctr">
+                    <a:solidFill>
+                      <a:srgbClr val="FFFFFF"/>
+                    </a:solidFill>
+                  </a:tcPr>
+                </a:tc>
+                <a:tc>
+                  <a:txBody>
+                    <a:bodyPr/>
+                    <a:lstStyle/>
+                    <a:p>
+                      <a:r>
+                        <a:rPr sz="1100" b="0">
+                          <a:solidFill>
+                            <a:srgbClr val="465461"/>
+                          </a:solidFill>
+                          <a:latin typeface="Arial"/>
+                        </a:rPr>
+                        <a:t>0.896</a:t>
+                      </a:r>
+                    </a:p>
+                  </a:txBody>
+                  <a:tcPr marL="45000" marR="45000" marT="25000" marB="25000" anchor="ctr">
+                    <a:solidFill>
+                      <a:srgbClr val="FFFFFF"/>
+                    </a:solidFill>
+                  </a:tcPr>
+                </a:tc>
+                <a:tc>
+                  <a:txBody>
+                    <a:bodyPr/>
+                    <a:lstStyle/>
+                    <a:p>
+                      <a:r>
+                        <a:rPr sz="1100" b="0">
+                          <a:solidFill>
+                            <a:srgbClr val="465461"/>
+                          </a:solidFill>
+                          <a:latin typeface="Arial"/>
+                        </a:rPr>
+                        <a:t>+0.036</a:t>
+                      </a:r>
+                    </a:p>
+                  </a:txBody>
+                  <a:tcPr marL="45000" marR="45000" marT="25000" marB="25000" anchor="ctr">
+                    <a:solidFill>
+                      <a:srgbClr val="FFFFFF"/>
+                    </a:solidFill>
+                  </a:tcPr>
+                </a:tc>
+              </a:tr>
+            </a:tbl>
+          </a:graphicData>
+        </a:graphic>
+      </p:graphicFrame>
       <p:sp>
         <p:nvSpPr>
           <p:cNvPr id="5" name="TextBox 4"/>
-          <p:cNvSpPr txBox="1"/>
-          <p:nvPr/>
-        </p:nvSpPr>
-        <p:spPr>
-          <a:xfrm>
-            <a:off x="1097280" y="2203840"/>
-            <a:ext cx="1920240" cy="365760"/>
-          </a:xfrm>
-          <a:prstGeom prst="rect">
-            <a:avLst/>
-          </a:prstGeom>
-          <a:noFill/>
-        </p:spPr>
-        <p:txBody>
-          <a:bodyPr wrap="square">
-            <a:spAutoFit/>
-          </a:bodyPr>
-          <a:lstStyle/>
-          <a:p>
-            <a:pPr algn="l"/>
-            <a:r>
-              <a:rPr sz="1200" b="1">
-                <a:solidFill>
-                  <a:srgbClr val="FFFFFF"/>
-                </a:solidFill>
-                <a:latin typeface="Arial"/>
-              </a:rPr>
-              <a:t>Estrategia</a:t>
-            </a:r>
-          </a:p>
-        </p:txBody>
-      </p:sp>
-      <p:sp>
-        <p:nvSpPr>
-          <p:cNvPr id="6" name="TextBox 5"/>
-          <p:cNvSpPr txBox="1"/>
-          <p:nvPr/>
-        </p:nvSpPr>
-        <p:spPr>
-          <a:xfrm>
-            <a:off x="3108960" y="2203840"/>
-            <a:ext cx="1920240" cy="365760"/>
-          </a:xfrm>
-          <a:prstGeom prst="rect">
-            <a:avLst/>
-          </a:prstGeom>
-          <a:noFill/>
-        </p:spPr>
-        <p:txBody>
-          <a:bodyPr wrap="square">
-            <a:spAutoFit/>
-          </a:bodyPr>
-          <a:lstStyle/>
-          <a:p>
-            <a:pPr algn="l"/>
-            <a:r>
-              <a:rPr sz="1200" b="1">
-                <a:solidFill>
-                  <a:srgbClr val="FFFFFF"/>
-                </a:solidFill>
-                <a:latin typeface="Arial"/>
-              </a:rPr>
-              <a:t>Posts</a:t>
-            </a:r>
-          </a:p>
-        </p:txBody>
-      </p:sp>
-      <p:sp>
-        <p:nvSpPr>
-          <p:cNvPr id="7" name="TextBox 6"/>
-          <p:cNvSpPr txBox="1"/>
-          <p:nvPr/>
-        </p:nvSpPr>
-        <p:spPr>
-          <a:xfrm>
-            <a:off x="5120640" y="2203840"/>
-            <a:ext cx="1920240" cy="365760"/>
-          </a:xfrm>
-          <a:prstGeom prst="rect">
-            <a:avLst/>
-          </a:prstGeom>
-          <a:noFill/>
-        </p:spPr>
-        <p:txBody>
-          <a:bodyPr wrap="square">
-            <a:spAutoFit/>
-          </a:bodyPr>
-          <a:lstStyle/>
-          <a:p>
-            <a:pPr algn="l"/>
-            <a:r>
-              <a:rPr sz="1200" b="1">
-                <a:solidFill>
-                  <a:srgbClr val="FFFFFF"/>
-                </a:solidFill>
-                <a:latin typeface="Arial"/>
-              </a:rPr>
-              <a:t>Tiempo GPU</a:t>
-            </a:r>
-          </a:p>
-        </p:txBody>
-      </p:sp>
-      <p:sp>
-        <p:nvSpPr>
-          <p:cNvPr id="8" name="TextBox 7"/>
-          <p:cNvSpPr txBox="1"/>
-          <p:nvPr/>
-        </p:nvSpPr>
-        <p:spPr>
-          <a:xfrm>
-            <a:off x="7132320" y="2203840"/>
-            <a:ext cx="1920240" cy="365760"/>
-          </a:xfrm>
-          <a:prstGeom prst="rect">
-            <a:avLst/>
-          </a:prstGeom>
-          <a:noFill/>
-        </p:spPr>
-        <p:txBody>
-          <a:bodyPr wrap="square">
-            <a:spAutoFit/>
-          </a:bodyPr>
-          <a:lstStyle/>
-          <a:p>
-            <a:pPr algn="l"/>
-            <a:r>
-              <a:rPr sz="1200" b="1">
-                <a:solidFill>
-                  <a:srgbClr val="FFFFFF"/>
-                </a:solidFill>
-                <a:latin typeface="Arial"/>
-              </a:rPr>
-              <a:t>Spearman ρ vs full</a:t>
-            </a:r>
-          </a:p>
-        </p:txBody>
-      </p:sp>
-      <p:sp>
-        <p:nvSpPr>
-          <p:cNvPr id="9" name="TextBox 8"/>
-          <p:cNvSpPr txBox="1"/>
-          <p:nvPr/>
-        </p:nvSpPr>
-        <p:spPr>
-          <a:xfrm>
-            <a:off x="9144000" y="2203840"/>
-            <a:ext cx="1920240" cy="365760"/>
-          </a:xfrm>
-          <a:prstGeom prst="rect">
-            <a:avLst/>
-          </a:prstGeom>
-          <a:noFill/>
-        </p:spPr>
-        <p:txBody>
-          <a:bodyPr wrap="square">
-            <a:spAutoFit/>
-          </a:bodyPr>
-          <a:lstStyle/>
-          <a:p>
-            <a:pPr algn="l"/>
-            <a:r>
-              <a:rPr sz="1200" b="1">
-                <a:solidFill>
-                  <a:srgbClr val="FFFFFF"/>
-                </a:solidFill>
-                <a:latin typeface="Arial"/>
-              </a:rPr>
-              <a:t>Δρ</a:t>
-            </a:r>
-          </a:p>
-        </p:txBody>
-      </p:sp>
-      <p:sp>
-        <p:nvSpPr>
-          <p:cNvPr id="10" name="Rectangle 9"/>
-          <p:cNvSpPr/>
-          <p:nvPr/>
-        </p:nvSpPr>
-        <p:spPr>
-          <a:xfrm>
-            <a:off x="1051560" y="2514600"/>
-            <a:ext cx="10058400" cy="310896"/>
-          </a:xfrm>
-          <a:prstGeom prst="rect">
-            <a:avLst/>
-          </a:prstGeom>
-          <a:solidFill>
-            <a:srgbClr val="F1F2F6"/>
-          </a:solidFill>
-          <a:ln>
-            <a:noFill/>
-          </a:ln>
-        </p:spPr>
-        <p:style>
-          <a:lnRef idx="1">
-            <a:schemeClr val="accent1"/>
-          </a:lnRef>
-          <a:fillRef idx="3">
-            <a:schemeClr val="accent1"/>
-          </a:fillRef>
-          <a:effectRef idx="2">
-            <a:schemeClr val="accent1"/>
-          </a:effectRef>
-          <a:fontRef idx="minor">
-            <a:schemeClr val="lt1"/>
-          </a:fontRef>
-        </p:style>
-        <p:txBody>
-          <a:bodyPr rtlCol="0" anchor="ctr"/>
-          <a:lstStyle/>
-          <a:p>
-            <a:pPr algn="ctr"/>
-          </a:p>
-        </p:txBody>
-      </p:sp>
-      <p:sp>
-        <p:nvSpPr>
-          <p:cNvPr id="11" name="TextBox 10"/>
-          <p:cNvSpPr txBox="1"/>
-          <p:nvPr/>
-        </p:nvSpPr>
-        <p:spPr>
-          <a:xfrm>
-            <a:off x="1097280" y="2554600"/>
-            <a:ext cx="1920240" cy="310896"/>
-          </a:xfrm>
-          <a:prstGeom prst="rect">
-            <a:avLst/>
-          </a:prstGeom>
-          <a:noFill/>
-        </p:spPr>
-        <p:txBody>
-          <a:bodyPr wrap="square">
-            <a:spAutoFit/>
-          </a:bodyPr>
-          <a:lstStyle/>
-          <a:p>
-            <a:pPr algn="l"/>
-            <a:r>
-              <a:rPr sz="1100" b="0">
-                <a:solidFill>
-                  <a:srgbClr val="465461"/>
-                </a:solidFill>
-                <a:latin typeface="Arial"/>
-              </a:rPr>
-              <a:t>B — full</a:t>
-            </a:r>
-          </a:p>
-        </p:txBody>
-      </p:sp>
-      <p:sp>
-        <p:nvSpPr>
-          <p:cNvPr id="12" name="TextBox 11"/>
-          <p:cNvSpPr txBox="1"/>
-          <p:nvPr/>
-        </p:nvSpPr>
-        <p:spPr>
-          <a:xfrm>
-            <a:off x="3108960" y="2554600"/>
-            <a:ext cx="1920240" cy="310896"/>
-          </a:xfrm>
-          <a:prstGeom prst="rect">
-            <a:avLst/>
-          </a:prstGeom>
-          <a:noFill/>
-        </p:spPr>
-        <p:txBody>
-          <a:bodyPr wrap="square">
-            <a:spAutoFit/>
-          </a:bodyPr>
-          <a:lstStyle/>
-          <a:p>
-            <a:pPr algn="l"/>
-            <a:r>
-              <a:rPr sz="1100" b="0">
-                <a:solidFill>
-                  <a:srgbClr val="465461"/>
-                </a:solidFill>
-                <a:latin typeface="Arial"/>
-              </a:rPr>
-              <a:t>157,779</a:t>
-            </a:r>
-          </a:p>
-        </p:txBody>
-      </p:sp>
-      <p:sp>
-        <p:nvSpPr>
-          <p:cNvPr id="13" name="TextBox 12"/>
-          <p:cNvSpPr txBox="1"/>
-          <p:nvPr/>
-        </p:nvSpPr>
-        <p:spPr>
-          <a:xfrm>
-            <a:off x="5120640" y="2554600"/>
-            <a:ext cx="1920240" cy="310896"/>
-          </a:xfrm>
-          <a:prstGeom prst="rect">
-            <a:avLst/>
-          </a:prstGeom>
-          <a:noFill/>
-        </p:spPr>
-        <p:txBody>
-          <a:bodyPr wrap="square">
-            <a:spAutoFit/>
-          </a:bodyPr>
-          <a:lstStyle/>
-          <a:p>
-            <a:pPr algn="l"/>
-            <a:r>
-              <a:rPr sz="1100" b="0">
-                <a:solidFill>
-                  <a:srgbClr val="465461"/>
-                </a:solidFill>
-                <a:latin typeface="Arial"/>
-              </a:rPr>
-              <a:t>~9 h</a:t>
-            </a:r>
-          </a:p>
-        </p:txBody>
-      </p:sp>
-      <p:sp>
-        <p:nvSpPr>
-          <p:cNvPr id="14" name="TextBox 13"/>
-          <p:cNvSpPr txBox="1"/>
-          <p:nvPr/>
-        </p:nvSpPr>
-        <p:spPr>
-          <a:xfrm>
-            <a:off x="7132320" y="2554600"/>
-            <a:ext cx="1920240" cy="310896"/>
-          </a:xfrm>
-          <a:prstGeom prst="rect">
-            <a:avLst/>
-          </a:prstGeom>
-          <a:noFill/>
-        </p:spPr>
-        <p:txBody>
-          <a:bodyPr wrap="square">
-            <a:spAutoFit/>
-          </a:bodyPr>
-          <a:lstStyle/>
-          <a:p>
-            <a:pPr algn="l"/>
-            <a:r>
-              <a:rPr sz="1100" b="0">
-                <a:solidFill>
-                  <a:srgbClr val="465461"/>
-                </a:solidFill>
-                <a:latin typeface="Arial"/>
-              </a:rPr>
-              <a:t>referencia</a:t>
-            </a:r>
-          </a:p>
-        </p:txBody>
-      </p:sp>
-      <p:sp>
-        <p:nvSpPr>
-          <p:cNvPr id="15" name="TextBox 14"/>
-          <p:cNvSpPr txBox="1"/>
-          <p:nvPr/>
-        </p:nvSpPr>
-        <p:spPr>
-          <a:xfrm>
-            <a:off x="9144000" y="2554600"/>
-            <a:ext cx="1920240" cy="310896"/>
-          </a:xfrm>
-          <a:prstGeom prst="rect">
-            <a:avLst/>
-          </a:prstGeom>
-          <a:noFill/>
-        </p:spPr>
-        <p:txBody>
-          <a:bodyPr wrap="square">
-            <a:spAutoFit/>
-          </a:bodyPr>
-          <a:lstStyle/>
-          <a:p>
-            <a:pPr algn="l"/>
-            <a:r>
-              <a:rPr sz="1100" b="0">
-                <a:solidFill>
-                  <a:srgbClr val="465461"/>
-                </a:solidFill>
-                <a:latin typeface="Arial"/>
-              </a:rPr>
-              <a:t>—</a:t>
-            </a:r>
-          </a:p>
-        </p:txBody>
-      </p:sp>
-      <p:sp>
-        <p:nvSpPr>
-          <p:cNvPr id="16" name="Rectangle 15"/>
-          <p:cNvSpPr/>
-          <p:nvPr/>
-        </p:nvSpPr>
-        <p:spPr>
-          <a:xfrm>
-            <a:off x="1051560" y="2825496"/>
-            <a:ext cx="10058400" cy="310896"/>
-          </a:xfrm>
-          <a:prstGeom prst="rect">
-            <a:avLst/>
-          </a:prstGeom>
-          <a:solidFill>
-            <a:srgbClr val="FFFFFF"/>
-          </a:solidFill>
-          <a:ln>
-            <a:noFill/>
-          </a:ln>
-        </p:spPr>
-        <p:style>
-          <a:lnRef idx="1">
-            <a:schemeClr val="accent1"/>
-          </a:lnRef>
-          <a:fillRef idx="3">
-            <a:schemeClr val="accent1"/>
-          </a:fillRef>
-          <a:effectRef idx="2">
-            <a:schemeClr val="accent1"/>
-          </a:effectRef>
-          <a:fontRef idx="minor">
-            <a:schemeClr val="lt1"/>
-          </a:fontRef>
-        </p:style>
-        <p:txBody>
-          <a:bodyPr rtlCol="0" anchor="ctr"/>
-          <a:lstStyle/>
-          <a:p>
-            <a:pPr algn="ctr"/>
-          </a:p>
-        </p:txBody>
-      </p:sp>
-      <p:sp>
-        <p:nvSpPr>
-          <p:cNvPr id="17" name="TextBox 16"/>
-          <p:cNvSpPr txBox="1"/>
-          <p:nvPr/>
-        </p:nvSpPr>
-        <p:spPr>
-          <a:xfrm>
-            <a:off x="1097280" y="2865496"/>
-            <a:ext cx="1920240" cy="310896"/>
-          </a:xfrm>
-          <a:prstGeom prst="rect">
-            <a:avLst/>
-          </a:prstGeom>
-          <a:noFill/>
-        </p:spPr>
-        <p:txBody>
-          <a:bodyPr wrap="square">
-            <a:spAutoFit/>
-          </a:bodyPr>
-          <a:lstStyle/>
-          <a:p>
-            <a:pPr algn="l"/>
-            <a:r>
-              <a:rPr sz="1100" b="0">
-                <a:solidFill>
-                  <a:srgbClr val="465461"/>
-                </a:solidFill>
-                <a:latin typeface="Arial"/>
-              </a:rPr>
-              <a:t>C — top-50</a:t>
-            </a:r>
-          </a:p>
-        </p:txBody>
-      </p:sp>
-      <p:sp>
-        <p:nvSpPr>
-          <p:cNvPr id="18" name="TextBox 17"/>
-          <p:cNvSpPr txBox="1"/>
-          <p:nvPr/>
-        </p:nvSpPr>
-        <p:spPr>
-          <a:xfrm>
-            <a:off x="3108960" y="2865496"/>
-            <a:ext cx="1920240" cy="310896"/>
-          </a:xfrm>
-          <a:prstGeom prst="rect">
-            <a:avLst/>
-          </a:prstGeom>
-          <a:noFill/>
-        </p:spPr>
-        <p:txBody>
-          <a:bodyPr wrap="square">
-            <a:spAutoFit/>
-          </a:bodyPr>
-          <a:lstStyle/>
-          <a:p>
-            <a:pPr algn="l"/>
-            <a:r>
-              <a:rPr sz="1100" b="0">
-                <a:solidFill>
-                  <a:srgbClr val="465461"/>
-                </a:solidFill>
-                <a:latin typeface="Arial"/>
-              </a:rPr>
-              <a:t>≤41,800</a:t>
-            </a:r>
-          </a:p>
-        </p:txBody>
-      </p:sp>
-      <p:sp>
-        <p:nvSpPr>
-          <p:cNvPr id="19" name="TextBox 18"/>
-          <p:cNvSpPr txBox="1"/>
-          <p:nvPr/>
-        </p:nvSpPr>
-        <p:spPr>
-          <a:xfrm>
-            <a:off x="5120640" y="2865496"/>
-            <a:ext cx="1920240" cy="310896"/>
-          </a:xfrm>
-          <a:prstGeom prst="rect">
-            <a:avLst/>
-          </a:prstGeom>
-          <a:noFill/>
-        </p:spPr>
-        <p:txBody>
-          <a:bodyPr wrap="square">
-            <a:spAutoFit/>
-          </a:bodyPr>
-          <a:lstStyle/>
-          <a:p>
-            <a:pPr algn="l"/>
-            <a:r>
-              <a:rPr sz="1100" b="0">
-                <a:solidFill>
-                  <a:srgbClr val="465461"/>
-                </a:solidFill>
-                <a:latin typeface="Arial"/>
-              </a:rPr>
-              <a:t>2h 35min</a:t>
-            </a:r>
-          </a:p>
-        </p:txBody>
-      </p:sp>
-      <p:sp>
-        <p:nvSpPr>
-          <p:cNvPr id="20" name="TextBox 19"/>
-          <p:cNvSpPr txBox="1"/>
-          <p:nvPr/>
-        </p:nvSpPr>
-        <p:spPr>
-          <a:xfrm>
-            <a:off x="7132320" y="2865496"/>
-            <a:ext cx="1920240" cy="310896"/>
-          </a:xfrm>
-          <a:prstGeom prst="rect">
-            <a:avLst/>
-          </a:prstGeom>
-          <a:noFill/>
-        </p:spPr>
-        <p:txBody>
-          <a:bodyPr wrap="square">
-            <a:spAutoFit/>
-          </a:bodyPr>
-          <a:lstStyle/>
-          <a:p>
-            <a:pPr algn="l"/>
-            <a:r>
-              <a:rPr sz="1100" b="0">
-                <a:solidFill>
-                  <a:srgbClr val="465461"/>
-                </a:solidFill>
-                <a:latin typeface="Arial"/>
-              </a:rPr>
-              <a:t>0.799</a:t>
-            </a:r>
-          </a:p>
-        </p:txBody>
-      </p:sp>
-      <p:sp>
-        <p:nvSpPr>
-          <p:cNvPr id="21" name="TextBox 20"/>
-          <p:cNvSpPr txBox="1"/>
-          <p:nvPr/>
-        </p:nvSpPr>
-        <p:spPr>
-          <a:xfrm>
-            <a:off x="9144000" y="2865496"/>
-            <a:ext cx="1920240" cy="310896"/>
-          </a:xfrm>
-          <a:prstGeom prst="rect">
-            <a:avLst/>
-          </a:prstGeom>
-          <a:noFill/>
-        </p:spPr>
-        <p:txBody>
-          <a:bodyPr wrap="square">
-            <a:spAutoFit/>
-          </a:bodyPr>
-          <a:lstStyle/>
-          <a:p>
-            <a:pPr algn="l"/>
-            <a:r>
-              <a:rPr sz="1100" b="0">
-                <a:solidFill>
-                  <a:srgbClr val="465461"/>
-                </a:solidFill>
-                <a:latin typeface="Arial"/>
-              </a:rPr>
-              <a:t>—</a:t>
-            </a:r>
-          </a:p>
-        </p:txBody>
-      </p:sp>
-      <p:sp>
-        <p:nvSpPr>
-          <p:cNvPr id="22" name="Rectangle 21"/>
-          <p:cNvSpPr/>
-          <p:nvPr/>
-        </p:nvSpPr>
-        <p:spPr>
-          <a:xfrm>
-            <a:off x="1051560" y="3136391"/>
-            <a:ext cx="10058400" cy="310896"/>
-          </a:xfrm>
-          <a:prstGeom prst="rect">
-            <a:avLst/>
-          </a:prstGeom>
-          <a:solidFill>
-            <a:srgbClr val="F1F2F6"/>
-          </a:solidFill>
-          <a:ln>
-            <a:noFill/>
-          </a:ln>
-        </p:spPr>
-        <p:style>
-          <a:lnRef idx="1">
-            <a:schemeClr val="accent1"/>
-          </a:lnRef>
-          <a:fillRef idx="3">
-            <a:schemeClr val="accent1"/>
-          </a:fillRef>
-          <a:effectRef idx="2">
-            <a:schemeClr val="accent1"/>
-          </a:effectRef>
-          <a:fontRef idx="minor">
-            <a:schemeClr val="lt1"/>
-          </a:fontRef>
-        </p:style>
-        <p:txBody>
-          <a:bodyPr rtlCol="0" anchor="ctr"/>
-          <a:lstStyle/>
-          <a:p>
-            <a:pPr algn="ctr"/>
-          </a:p>
-        </p:txBody>
-      </p:sp>
-      <p:sp>
-        <p:nvSpPr>
-          <p:cNvPr id="23" name="TextBox 22"/>
-          <p:cNvSpPr txBox="1"/>
-          <p:nvPr/>
-        </p:nvSpPr>
-        <p:spPr>
-          <a:xfrm>
-            <a:off x="1097280" y="3176391"/>
-            <a:ext cx="1920240" cy="310896"/>
-          </a:xfrm>
-          <a:prstGeom prst="rect">
-            <a:avLst/>
-          </a:prstGeom>
-          <a:noFill/>
-        </p:spPr>
-        <p:txBody>
-          <a:bodyPr wrap="square">
-            <a:spAutoFit/>
-          </a:bodyPr>
-          <a:lstStyle/>
-          <a:p>
-            <a:pPr algn="l"/>
-            <a:r>
-              <a:rPr sz="1100" b="0">
-                <a:solidFill>
-                  <a:srgbClr val="465461"/>
-                </a:solidFill>
-                <a:latin typeface="Arial"/>
-              </a:rPr>
-              <a:t>D — top-100</a:t>
-            </a:r>
-          </a:p>
-        </p:txBody>
-      </p:sp>
-      <p:sp>
-        <p:nvSpPr>
-          <p:cNvPr id="24" name="TextBox 23"/>
-          <p:cNvSpPr txBox="1"/>
-          <p:nvPr/>
-        </p:nvSpPr>
-        <p:spPr>
-          <a:xfrm>
-            <a:off x="3108960" y="3176391"/>
-            <a:ext cx="1920240" cy="310896"/>
-          </a:xfrm>
-          <a:prstGeom prst="rect">
-            <a:avLst/>
-          </a:prstGeom>
-          <a:noFill/>
-        </p:spPr>
-        <p:txBody>
-          <a:bodyPr wrap="square">
-            <a:spAutoFit/>
-          </a:bodyPr>
-          <a:lstStyle/>
-          <a:p>
-            <a:pPr algn="l"/>
-            <a:r>
-              <a:rPr sz="1100" b="0">
-                <a:solidFill>
-                  <a:srgbClr val="465461"/>
-                </a:solidFill>
-                <a:latin typeface="Arial"/>
-              </a:rPr>
-              <a:t>41,319</a:t>
-            </a:r>
-          </a:p>
-        </p:txBody>
-      </p:sp>
-      <p:sp>
-        <p:nvSpPr>
-          <p:cNvPr id="25" name="TextBox 24"/>
-          <p:cNvSpPr txBox="1"/>
-          <p:nvPr/>
-        </p:nvSpPr>
-        <p:spPr>
-          <a:xfrm>
-            <a:off x="5120640" y="3176391"/>
-            <a:ext cx="1920240" cy="310896"/>
-          </a:xfrm>
-          <a:prstGeom prst="rect">
-            <a:avLst/>
-          </a:prstGeom>
-          <a:noFill/>
-        </p:spPr>
-        <p:txBody>
-          <a:bodyPr wrap="square">
-            <a:spAutoFit/>
-          </a:bodyPr>
-          <a:lstStyle/>
-          <a:p>
-            <a:pPr algn="l"/>
-            <a:r>
-              <a:rPr sz="1100" b="0">
-                <a:solidFill>
-                  <a:srgbClr val="465461"/>
-                </a:solidFill>
-                <a:latin typeface="Arial"/>
-              </a:rPr>
-              <a:t>3h 33min</a:t>
-            </a:r>
-          </a:p>
-        </p:txBody>
-      </p:sp>
-      <p:sp>
-        <p:nvSpPr>
-          <p:cNvPr id="26" name="TextBox 25"/>
-          <p:cNvSpPr txBox="1"/>
-          <p:nvPr/>
-        </p:nvSpPr>
-        <p:spPr>
-          <a:xfrm>
-            <a:off x="7132320" y="3176391"/>
-            <a:ext cx="1920240" cy="310896"/>
-          </a:xfrm>
-          <a:prstGeom prst="rect">
-            <a:avLst/>
-          </a:prstGeom>
-          <a:noFill/>
-        </p:spPr>
-        <p:txBody>
-          <a:bodyPr wrap="square">
-            <a:spAutoFit/>
-          </a:bodyPr>
-          <a:lstStyle/>
-          <a:p>
-            <a:pPr algn="l"/>
-            <a:r>
-              <a:rPr sz="1100" b="0">
-                <a:solidFill>
-                  <a:srgbClr val="465461"/>
-                </a:solidFill>
-                <a:latin typeface="Arial"/>
-              </a:rPr>
-              <a:t>0.860</a:t>
-            </a:r>
-          </a:p>
-        </p:txBody>
-      </p:sp>
-      <p:sp>
-        <p:nvSpPr>
-          <p:cNvPr id="27" name="TextBox 26"/>
-          <p:cNvSpPr txBox="1"/>
-          <p:nvPr/>
-        </p:nvSpPr>
-        <p:spPr>
-          <a:xfrm>
-            <a:off x="9144000" y="3176391"/>
-            <a:ext cx="1920240" cy="310896"/>
-          </a:xfrm>
-          <a:prstGeom prst="rect">
-            <a:avLst/>
-          </a:prstGeom>
-          <a:noFill/>
-        </p:spPr>
-        <p:txBody>
-          <a:bodyPr wrap="square">
-            <a:spAutoFit/>
-          </a:bodyPr>
-          <a:lstStyle/>
-          <a:p>
-            <a:pPr algn="l"/>
-            <a:r>
-              <a:rPr sz="1100" b="0">
-                <a:solidFill>
-                  <a:srgbClr val="465461"/>
-                </a:solidFill>
-                <a:latin typeface="Arial"/>
-              </a:rPr>
-              <a:t>+0.061</a:t>
-            </a:r>
-          </a:p>
-        </p:txBody>
-      </p:sp>
-      <p:sp>
-        <p:nvSpPr>
-          <p:cNvPr id="28" name="Rectangle 27"/>
-          <p:cNvSpPr/>
-          <p:nvPr/>
-        </p:nvSpPr>
-        <p:spPr>
-          <a:xfrm>
-            <a:off x="1051560" y="3447287"/>
-            <a:ext cx="10058400" cy="310896"/>
-          </a:xfrm>
-          <a:prstGeom prst="rect">
-            <a:avLst/>
-          </a:prstGeom>
-          <a:solidFill>
-            <a:srgbClr val="FFFFFF"/>
-          </a:solidFill>
-          <a:ln>
-            <a:noFill/>
-          </a:ln>
-        </p:spPr>
-        <p:style>
-          <a:lnRef idx="1">
-            <a:schemeClr val="accent1"/>
-          </a:lnRef>
-          <a:fillRef idx="3">
-            <a:schemeClr val="accent1"/>
-          </a:fillRef>
-          <a:effectRef idx="2">
-            <a:schemeClr val="accent1"/>
-          </a:effectRef>
-          <a:fontRef idx="minor">
-            <a:schemeClr val="lt1"/>
-          </a:fontRef>
-        </p:style>
-        <p:txBody>
-          <a:bodyPr rtlCol="0" anchor="ctr"/>
-          <a:lstStyle/>
-          <a:p>
-            <a:pPr algn="ctr"/>
-          </a:p>
-        </p:txBody>
-      </p:sp>
-      <p:sp>
-        <p:nvSpPr>
-          <p:cNvPr id="29" name="TextBox 28"/>
-          <p:cNvSpPr txBox="1"/>
-          <p:nvPr/>
-        </p:nvSpPr>
-        <p:spPr>
-          <a:xfrm>
-            <a:off x="1097280" y="3487287"/>
-            <a:ext cx="1920240" cy="310896"/>
-          </a:xfrm>
-          <a:prstGeom prst="rect">
-            <a:avLst/>
-          </a:prstGeom>
-          <a:noFill/>
-        </p:spPr>
-        <p:txBody>
-          <a:bodyPr wrap="square">
-            <a:spAutoFit/>
-          </a:bodyPr>
-          <a:lstStyle/>
-          <a:p>
-            <a:pPr algn="l"/>
-            <a:r>
-              <a:rPr sz="1100" b="0">
-                <a:solidFill>
-                  <a:srgbClr val="465461"/>
-                </a:solidFill>
-                <a:latin typeface="Arial"/>
-              </a:rPr>
-              <a:t>E — top-150</a:t>
-            </a:r>
-          </a:p>
-        </p:txBody>
-      </p:sp>
-      <p:sp>
-        <p:nvSpPr>
-          <p:cNvPr id="30" name="TextBox 29"/>
-          <p:cNvSpPr txBox="1"/>
-          <p:nvPr/>
-        </p:nvSpPr>
-        <p:spPr>
-          <a:xfrm>
-            <a:off x="3108960" y="3487287"/>
-            <a:ext cx="1920240" cy="310896"/>
-          </a:xfrm>
-          <a:prstGeom prst="rect">
-            <a:avLst/>
-          </a:prstGeom>
-          <a:noFill/>
-        </p:spPr>
-        <p:txBody>
-          <a:bodyPr wrap="square">
-            <a:spAutoFit/>
-          </a:bodyPr>
-          <a:lstStyle/>
-          <a:p>
-            <a:pPr algn="l"/>
-            <a:r>
-              <a:rPr sz="1100" b="0">
-                <a:solidFill>
-                  <a:srgbClr val="465461"/>
-                </a:solidFill>
-                <a:latin typeface="Arial"/>
-              </a:rPr>
-              <a:t>53,193</a:t>
-            </a:r>
-          </a:p>
-        </p:txBody>
-      </p:sp>
-      <p:sp>
-        <p:nvSpPr>
-          <p:cNvPr id="31" name="TextBox 30"/>
-          <p:cNvSpPr txBox="1"/>
-          <p:nvPr/>
-        </p:nvSpPr>
-        <p:spPr>
-          <a:xfrm>
-            <a:off x="5120640" y="3487287"/>
-            <a:ext cx="1920240" cy="310896"/>
-          </a:xfrm>
-          <a:prstGeom prst="rect">
-            <a:avLst/>
-          </a:prstGeom>
-          <a:noFill/>
-        </p:spPr>
-        <p:txBody>
-          <a:bodyPr wrap="square">
-            <a:spAutoFit/>
-          </a:bodyPr>
-          <a:lstStyle/>
-          <a:p>
-            <a:pPr algn="l"/>
-            <a:r>
-              <a:rPr sz="1100" b="0">
-                <a:solidFill>
-                  <a:srgbClr val="465461"/>
-                </a:solidFill>
-                <a:latin typeface="Arial"/>
-              </a:rPr>
-              <a:t>4h 12min</a:t>
-            </a:r>
-          </a:p>
-        </p:txBody>
-      </p:sp>
-      <p:sp>
-        <p:nvSpPr>
-          <p:cNvPr id="32" name="TextBox 31"/>
-          <p:cNvSpPr txBox="1"/>
-          <p:nvPr/>
-        </p:nvSpPr>
-        <p:spPr>
-          <a:xfrm>
-            <a:off x="7132320" y="3487287"/>
-            <a:ext cx="1920240" cy="310896"/>
-          </a:xfrm>
-          <a:prstGeom prst="rect">
-            <a:avLst/>
-          </a:prstGeom>
-          <a:noFill/>
-        </p:spPr>
-        <p:txBody>
-          <a:bodyPr wrap="square">
-            <a:spAutoFit/>
-          </a:bodyPr>
-          <a:lstStyle/>
-          <a:p>
-            <a:pPr algn="l"/>
-            <a:r>
-              <a:rPr sz="1100" b="0">
-                <a:solidFill>
-                  <a:srgbClr val="465461"/>
-                </a:solidFill>
-                <a:latin typeface="Arial"/>
-              </a:rPr>
-              <a:t>0.896</a:t>
-            </a:r>
-          </a:p>
-        </p:txBody>
-      </p:sp>
-      <p:sp>
-        <p:nvSpPr>
-          <p:cNvPr id="33" name="TextBox 32"/>
-          <p:cNvSpPr txBox="1"/>
-          <p:nvPr/>
-        </p:nvSpPr>
-        <p:spPr>
-          <a:xfrm>
-            <a:off x="9144000" y="3487287"/>
-            <a:ext cx="1920240" cy="310896"/>
-          </a:xfrm>
-          <a:prstGeom prst="rect">
-            <a:avLst/>
-          </a:prstGeom>
-          <a:noFill/>
-        </p:spPr>
-        <p:txBody>
-          <a:bodyPr wrap="square">
-            <a:spAutoFit/>
-          </a:bodyPr>
-          <a:lstStyle/>
-          <a:p>
-            <a:pPr algn="l"/>
-            <a:r>
-              <a:rPr sz="1100" b="0">
-                <a:solidFill>
-                  <a:srgbClr val="465461"/>
-                </a:solidFill>
-                <a:latin typeface="Arial"/>
-              </a:rPr>
-              <a:t>+0.036</a:t>
-            </a:r>
-          </a:p>
-        </p:txBody>
-      </p:sp>
-      <p:sp>
-        <p:nvSpPr>
-          <p:cNvPr id="34" name="TextBox 33"/>
           <p:cNvSpPr txBox="1"/>
           <p:nvPr/>
         </p:nvSpPr>
@@ -9421,897 +8920,444 @@
           <a:p/>
         </p:txBody>
       </p:sp>
-      <p:sp>
-        <p:nvSpPr>
-          <p:cNvPr id="4" name="Rectangle 3"/>
-          <p:cNvSpPr/>
+      <p:graphicFrame>
+        <p:nvGraphicFramePr>
+          <p:cNvPr id="4" name="Table 3"/>
+          <p:cNvGraphicFramePr>
+            <a:graphicFrameLocks noGrp="1"/>
+          </p:cNvGraphicFramePr>
           <p:nvPr/>
-        </p:nvSpPr>
-        <p:spPr>
-          <a:xfrm>
-            <a:off x="1051560" y="2148840"/>
-            <a:ext cx="10058400" cy="365760"/>
-          </a:xfrm>
-          <a:prstGeom prst="rect">
-            <a:avLst/>
-          </a:prstGeom>
-          <a:solidFill>
-            <a:srgbClr val="CD2D37"/>
-          </a:solidFill>
-          <a:ln>
-            <a:noFill/>
-          </a:ln>
-        </p:spPr>
-        <p:style>
-          <a:lnRef idx="1">
-            <a:schemeClr val="accent1"/>
-          </a:lnRef>
-          <a:fillRef idx="3">
-            <a:schemeClr val="accent1"/>
-          </a:fillRef>
-          <a:effectRef idx="2">
-            <a:schemeClr val="accent1"/>
-          </a:effectRef>
-          <a:fontRef idx="minor">
-            <a:schemeClr val="lt1"/>
-          </a:fontRef>
-        </p:style>
-        <p:txBody>
-          <a:bodyPr rtlCol="0" anchor="ctr"/>
-          <a:lstStyle/>
-          <a:p>
-            <a:pPr algn="ctr"/>
-          </a:p>
-        </p:txBody>
-      </p:sp>
+        </p:nvGraphicFramePr>
+        <p:xfrm>
+          <a:off x="1051560" y="2148840"/>
+          <a:ext cx="10058400" cy="2194560"/>
+        </p:xfrm>
+        <a:graphic>
+          <a:graphicData uri="http://schemas.openxmlformats.org/drawingml/2006/table">
+            <a:tbl>
+              <a:tblPr>
+                <a:tableStyleId>{5C22544A-7EE6-4342-B048-85BDC9FD1C3A}</a:tableStyleId>
+              </a:tblPr>
+              <a:tblGrid>
+                <a:gridCol w="3352800"/>
+                <a:gridCol w="3352800"/>
+                <a:gridCol w="3352800"/>
+              </a:tblGrid>
+              <a:tr h="365760">
+                <a:tc>
+                  <a:txBody>
+                    <a:bodyPr/>
+                    <a:lstStyle/>
+                    <a:p>
+                      <a:r>
+                        <a:rPr sz="1200" b="1">
+                          <a:solidFill>
+                            <a:srgbClr val="FFFFFF"/>
+                          </a:solidFill>
+                          <a:latin typeface="Arial"/>
+                        </a:rPr>
+                        <a:t>Tabla</a:t>
+                      </a:r>
+                    </a:p>
+                  </a:txBody>
+                  <a:tcPr marL="45000" marR="45000" marT="25000" marB="25000" anchor="ctr">
+                    <a:solidFill>
+                      <a:srgbClr val="CD2D37"/>
+                    </a:solidFill>
+                  </a:tcPr>
+                </a:tc>
+                <a:tc>
+                  <a:txBody>
+                    <a:bodyPr/>
+                    <a:lstStyle/>
+                    <a:p>
+                      <a:r>
+                        <a:rPr sz="1200" b="1">
+                          <a:solidFill>
+                            <a:srgbClr val="FFFFFF"/>
+                          </a:solidFill>
+                          <a:latin typeface="Arial"/>
+                        </a:rPr>
+                        <a:t>Registros</a:t>
+                      </a:r>
+                    </a:p>
+                  </a:txBody>
+                  <a:tcPr marL="45000" marR="45000" marT="25000" marB="25000" anchor="ctr">
+                    <a:solidFill>
+                      <a:srgbClr val="CD2D37"/>
+                    </a:solidFill>
+                  </a:tcPr>
+                </a:tc>
+                <a:tc>
+                  <a:txBody>
+                    <a:bodyPr/>
+                    <a:lstStyle/>
+                    <a:p>
+                      <a:r>
+                        <a:rPr sz="1200" b="1">
+                          <a:solidFill>
+                            <a:srgbClr val="FFFFFF"/>
+                          </a:solidFill>
+                          <a:latin typeface="Arial"/>
+                        </a:rPr>
+                        <a:t>Descripción</a:t>
+                      </a:r>
+                    </a:p>
+                  </a:txBody>
+                  <a:tcPr marL="45000" marR="45000" marT="25000" marB="25000" anchor="ctr">
+                    <a:solidFill>
+                      <a:srgbClr val="CD2D37"/>
+                    </a:solidFill>
+                  </a:tcPr>
+                </a:tc>
+              </a:tr>
+              <a:tr h="365760">
+                <a:tc>
+                  <a:txBody>
+                    <a:bodyPr/>
+                    <a:lstStyle/>
+                    <a:p>
+                      <a:r>
+                        <a:rPr sz="1100" b="0">
+                          <a:solidFill>
+                            <a:srgbClr val="465461"/>
+                          </a:solidFill>
+                          <a:latin typeface="Arial"/>
+                        </a:rPr>
+                        <a:t>core_members</a:t>
+                      </a:r>
+                    </a:p>
+                  </a:txBody>
+                  <a:tcPr marL="45000" marR="45000" marT="25000" marB="25000" anchor="ctr">
+                    <a:solidFill>
+                      <a:srgbClr val="F1F2F6"/>
+                    </a:solidFill>
+                  </a:tcPr>
+                </a:tc>
+                <a:tc>
+                  <a:txBody>
+                    <a:bodyPr/>
+                    <a:lstStyle/>
+                    <a:p>
+                      <a:r>
+                        <a:rPr sz="1100" b="0">
+                          <a:solidFill>
+                            <a:srgbClr val="465461"/>
+                          </a:solidFill>
+                          <a:latin typeface="Arial"/>
+                        </a:rPr>
+                        <a:t>~18,000</a:t>
+                      </a:r>
+                    </a:p>
+                  </a:txBody>
+                  <a:tcPr marL="45000" marR="45000" marT="25000" marB="25000" anchor="ctr">
+                    <a:solidFill>
+                      <a:srgbClr val="F1F2F6"/>
+                    </a:solidFill>
+                  </a:tcPr>
+                </a:tc>
+                <a:tc>
+                  <a:txBody>
+                    <a:bodyPr/>
+                    <a:lstStyle/>
+                    <a:p>
+                      <a:r>
+                        <a:rPr sz="1100" b="0">
+                          <a:solidFill>
+                            <a:srgbClr val="465461"/>
+                          </a:solidFill>
+                          <a:latin typeface="Arial"/>
+                        </a:rPr>
+                        <a:t>Usuarios registrados</a:t>
+                      </a:r>
+                    </a:p>
+                  </a:txBody>
+                  <a:tcPr marL="45000" marR="45000" marT="25000" marB="25000" anchor="ctr">
+                    <a:solidFill>
+                      <a:srgbClr val="F1F2F6"/>
+                    </a:solidFill>
+                  </a:tcPr>
+                </a:tc>
+              </a:tr>
+              <a:tr h="365760">
+                <a:tc>
+                  <a:txBody>
+                    <a:bodyPr/>
+                    <a:lstStyle/>
+                    <a:p>
+                      <a:r>
+                        <a:rPr sz="1100" b="0">
+                          <a:solidFill>
+                            <a:srgbClr val="465461"/>
+                          </a:solidFill>
+                          <a:latin typeface="Arial"/>
+                        </a:rPr>
+                        <a:t>forums_posts</a:t>
+                      </a:r>
+                    </a:p>
+                  </a:txBody>
+                  <a:tcPr marL="45000" marR="45000" marT="25000" marB="25000" anchor="ctr">
+                    <a:solidFill>
+                      <a:srgbClr val="FFFFFF"/>
+                    </a:solidFill>
+                  </a:tcPr>
+                </a:tc>
+                <a:tc>
+                  <a:txBody>
+                    <a:bodyPr/>
+                    <a:lstStyle/>
+                    <a:p>
+                      <a:r>
+                        <a:rPr sz="1100" b="0">
+                          <a:solidFill>
+                            <a:srgbClr val="465461"/>
+                          </a:solidFill>
+                          <a:latin typeface="Arial"/>
+                        </a:rPr>
+                        <a:t>~194,000</a:t>
+                      </a:r>
+                    </a:p>
+                  </a:txBody>
+                  <a:tcPr marL="45000" marR="45000" marT="25000" marB="25000" anchor="ctr">
+                    <a:solidFill>
+                      <a:srgbClr val="FFFFFF"/>
+                    </a:solidFill>
+                  </a:tcPr>
+                </a:tc>
+                <a:tc>
+                  <a:txBody>
+                    <a:bodyPr/>
+                    <a:lstStyle/>
+                    <a:p>
+                      <a:r>
+                        <a:rPr sz="1100" b="0">
+                          <a:solidFill>
+                            <a:srgbClr val="465461"/>
+                          </a:solidFill>
+                          <a:latin typeface="Arial"/>
+                        </a:rPr>
+                        <a:t>Posts públicos</a:t>
+                      </a:r>
+                    </a:p>
+                  </a:txBody>
+                  <a:tcPr marL="45000" marR="45000" marT="25000" marB="25000" anchor="ctr">
+                    <a:solidFill>
+                      <a:srgbClr val="FFFFFF"/>
+                    </a:solidFill>
+                  </a:tcPr>
+                </a:tc>
+              </a:tr>
+              <a:tr h="365760">
+                <a:tc>
+                  <a:txBody>
+                    <a:bodyPr/>
+                    <a:lstStyle/>
+                    <a:p>
+                      <a:r>
+                        <a:rPr sz="1100" b="0">
+                          <a:solidFill>
+                            <a:srgbClr val="465461"/>
+                          </a:solidFill>
+                          <a:latin typeface="Arial"/>
+                        </a:rPr>
+                        <a:t>forums_threads</a:t>
+                      </a:r>
+                    </a:p>
+                  </a:txBody>
+                  <a:tcPr marL="45000" marR="45000" marT="25000" marB="25000" anchor="ctr">
+                    <a:solidFill>
+                      <a:srgbClr val="F1F2F6"/>
+                    </a:solidFill>
+                  </a:tcPr>
+                </a:tc>
+                <a:tc>
+                  <a:txBody>
+                    <a:bodyPr/>
+                    <a:lstStyle/>
+                    <a:p>
+                      <a:r>
+                        <a:rPr sz="1100" b="0">
+                          <a:solidFill>
+                            <a:srgbClr val="465461"/>
+                          </a:solidFill>
+                          <a:latin typeface="Arial"/>
+                        </a:rPr>
+                        <a:t>~14,000</a:t>
+                      </a:r>
+                    </a:p>
+                  </a:txBody>
+                  <a:tcPr marL="45000" marR="45000" marT="25000" marB="25000" anchor="ctr">
+                    <a:solidFill>
+                      <a:srgbClr val="F1F2F6"/>
+                    </a:solidFill>
+                  </a:tcPr>
+                </a:tc>
+                <a:tc>
+                  <a:txBody>
+                    <a:bodyPr/>
+                    <a:lstStyle/>
+                    <a:p>
+                      <a:r>
+                        <a:rPr sz="1100" b="0">
+                          <a:solidFill>
+                            <a:srgbClr val="465461"/>
+                          </a:solidFill>
+                          <a:latin typeface="Arial"/>
+                        </a:rPr>
+                        <a:t>Hilos de discusión</a:t>
+                      </a:r>
+                    </a:p>
+                  </a:txBody>
+                  <a:tcPr marL="45000" marR="45000" marT="25000" marB="25000" anchor="ctr">
+                    <a:solidFill>
+                      <a:srgbClr val="F1F2F6"/>
+                    </a:solidFill>
+                  </a:tcPr>
+                </a:tc>
+              </a:tr>
+              <a:tr h="365760">
+                <a:tc>
+                  <a:txBody>
+                    <a:bodyPr/>
+                    <a:lstStyle/>
+                    <a:p>
+                      <a:r>
+                        <a:rPr sz="1100" b="0">
+                          <a:solidFill>
+                            <a:srgbClr val="465461"/>
+                          </a:solidFill>
+                          <a:latin typeface="Arial"/>
+                        </a:rPr>
+                        <a:t>forums_forums</a:t>
+                      </a:r>
+                    </a:p>
+                  </a:txBody>
+                  <a:tcPr marL="45000" marR="45000" marT="25000" marB="25000" anchor="ctr">
+                    <a:solidFill>
+                      <a:srgbClr val="FFFFFF"/>
+                    </a:solidFill>
+                  </a:tcPr>
+                </a:tc>
+                <a:tc>
+                  <a:txBody>
+                    <a:bodyPr/>
+                    <a:lstStyle/>
+                    <a:p>
+                      <a:r>
+                        <a:rPr sz="1100" b="0">
+                          <a:solidFill>
+                            <a:srgbClr val="465461"/>
+                          </a:solidFill>
+                          <a:latin typeface="Arial"/>
+                        </a:rPr>
+                        <a:t>~138</a:t>
+                      </a:r>
+                    </a:p>
+                  </a:txBody>
+                  <a:tcPr marL="45000" marR="45000" marT="25000" marB="25000" anchor="ctr">
+                    <a:solidFill>
+                      <a:srgbClr val="FFFFFF"/>
+                    </a:solidFill>
+                  </a:tcPr>
+                </a:tc>
+                <a:tc>
+                  <a:txBody>
+                    <a:bodyPr/>
+                    <a:lstStyle/>
+                    <a:p>
+                      <a:r>
+                        <a:rPr sz="1100" b="0">
+                          <a:solidFill>
+                            <a:srgbClr val="465461"/>
+                          </a:solidFill>
+                          <a:latin typeface="Arial"/>
+                        </a:rPr>
+                        <a:t>Subforos</a:t>
+                      </a:r>
+                    </a:p>
+                  </a:txBody>
+                  <a:tcPr marL="45000" marR="45000" marT="25000" marB="25000" anchor="ctr">
+                    <a:solidFill>
+                      <a:srgbClr val="FFFFFF"/>
+                    </a:solidFill>
+                  </a:tcPr>
+                </a:tc>
+              </a:tr>
+              <a:tr h="365760">
+                <a:tc>
+                  <a:txBody>
+                    <a:bodyPr/>
+                    <a:lstStyle/>
+                    <a:p>
+                      <a:r>
+                        <a:rPr sz="1100" b="0">
+                          <a:solidFill>
+                            <a:srgbClr val="465461"/>
+                          </a:solidFill>
+                          <a:latin typeface="Arial"/>
+                        </a:rPr>
+                        <a:t>core_message_posts</a:t>
+                      </a:r>
+                    </a:p>
+                  </a:txBody>
+                  <a:tcPr marL="45000" marR="45000" marT="25000" marB="25000" anchor="ctr">
+                    <a:solidFill>
+                      <a:srgbClr val="F1F2F6"/>
+                    </a:solidFill>
+                  </a:tcPr>
+                </a:tc>
+                <a:tc>
+                  <a:txBody>
+                    <a:bodyPr/>
+                    <a:lstStyle/>
+                    <a:p>
+                      <a:r>
+                        <a:rPr sz="1100" b="0">
+                          <a:solidFill>
+                            <a:srgbClr val="465461"/>
+                          </a:solidFill>
+                          <a:latin typeface="Arial"/>
+                        </a:rPr>
+                        <a:t>~55,000</a:t>
+                      </a:r>
+                    </a:p>
+                  </a:txBody>
+                  <a:tcPr marL="45000" marR="45000" marT="25000" marB="25000" anchor="ctr">
+                    <a:solidFill>
+                      <a:srgbClr val="F1F2F6"/>
+                    </a:solidFill>
+                  </a:tcPr>
+                </a:tc>
+                <a:tc>
+                  <a:txBody>
+                    <a:bodyPr/>
+                    <a:lstStyle/>
+                    <a:p>
+                      <a:r>
+                        <a:rPr sz="1100" b="0">
+                          <a:solidFill>
+                            <a:srgbClr val="465461"/>
+                          </a:solidFill>
+                          <a:latin typeface="Arial"/>
+                        </a:rPr>
+                        <a:t>Mensajes privados (PMs) — infrecuente en leaks</a:t>
+                      </a:r>
+                    </a:p>
+                  </a:txBody>
+                  <a:tcPr marL="45000" marR="45000" marT="25000" marB="25000" anchor="ctr">
+                    <a:solidFill>
+                      <a:srgbClr val="F1F2F6"/>
+                    </a:solidFill>
+                  </a:tcPr>
+                </a:tc>
+              </a:tr>
+            </a:tbl>
+          </a:graphicData>
+        </a:graphic>
+      </p:graphicFrame>
       <p:sp>
         <p:nvSpPr>
           <p:cNvPr id="5" name="TextBox 4"/>
-          <p:cNvSpPr txBox="1"/>
-          <p:nvPr/>
-        </p:nvSpPr>
-        <p:spPr>
-          <a:xfrm>
-            <a:off x="1097280" y="2203840"/>
-            <a:ext cx="3261360" cy="365760"/>
-          </a:xfrm>
-          <a:prstGeom prst="rect">
-            <a:avLst/>
-          </a:prstGeom>
-          <a:noFill/>
-        </p:spPr>
-        <p:txBody>
-          <a:bodyPr wrap="square">
-            <a:spAutoFit/>
-          </a:bodyPr>
-          <a:lstStyle/>
-          <a:p>
-            <a:pPr algn="l"/>
-            <a:r>
-              <a:rPr sz="1200" b="1">
-                <a:solidFill>
-                  <a:srgbClr val="FFFFFF"/>
-                </a:solidFill>
-                <a:latin typeface="Arial"/>
-              </a:rPr>
-              <a:t>Tabla</a:t>
-            </a:r>
-          </a:p>
-        </p:txBody>
-      </p:sp>
-      <p:sp>
-        <p:nvSpPr>
-          <p:cNvPr id="6" name="TextBox 5"/>
-          <p:cNvSpPr txBox="1"/>
-          <p:nvPr/>
-        </p:nvSpPr>
-        <p:spPr>
-          <a:xfrm>
-            <a:off x="4450080" y="2203840"/>
-            <a:ext cx="3261360" cy="365760"/>
-          </a:xfrm>
-          <a:prstGeom prst="rect">
-            <a:avLst/>
-          </a:prstGeom>
-          <a:noFill/>
-        </p:spPr>
-        <p:txBody>
-          <a:bodyPr wrap="square">
-            <a:spAutoFit/>
-          </a:bodyPr>
-          <a:lstStyle/>
-          <a:p>
-            <a:pPr algn="l"/>
-            <a:r>
-              <a:rPr sz="1200" b="1">
-                <a:solidFill>
-                  <a:srgbClr val="FFFFFF"/>
-                </a:solidFill>
-                <a:latin typeface="Arial"/>
-              </a:rPr>
-              <a:t>Registros</a:t>
-            </a:r>
-          </a:p>
-        </p:txBody>
-      </p:sp>
-      <p:sp>
-        <p:nvSpPr>
-          <p:cNvPr id="7" name="TextBox 6"/>
-          <p:cNvSpPr txBox="1"/>
-          <p:nvPr/>
-        </p:nvSpPr>
-        <p:spPr>
-          <a:xfrm>
-            <a:off x="7802880" y="2203840"/>
-            <a:ext cx="3261360" cy="365760"/>
-          </a:xfrm>
-          <a:prstGeom prst="rect">
-            <a:avLst/>
-          </a:prstGeom>
-          <a:noFill/>
-        </p:spPr>
-        <p:txBody>
-          <a:bodyPr wrap="square">
-            <a:spAutoFit/>
-          </a:bodyPr>
-          <a:lstStyle/>
-          <a:p>
-            <a:pPr algn="l"/>
-            <a:r>
-              <a:rPr sz="1200" b="1">
-                <a:solidFill>
-                  <a:srgbClr val="FFFFFF"/>
-                </a:solidFill>
-                <a:latin typeface="Arial"/>
-              </a:rPr>
-              <a:t>Descripción</a:t>
-            </a:r>
-          </a:p>
-        </p:txBody>
-      </p:sp>
-      <p:sp>
-        <p:nvSpPr>
-          <p:cNvPr id="8" name="Rectangle 7"/>
-          <p:cNvSpPr/>
-          <p:nvPr/>
-        </p:nvSpPr>
-        <p:spPr>
-          <a:xfrm>
-            <a:off x="1051560" y="2514600"/>
-            <a:ext cx="10058400" cy="310896"/>
-          </a:xfrm>
-          <a:prstGeom prst="rect">
-            <a:avLst/>
-          </a:prstGeom>
-          <a:solidFill>
-            <a:srgbClr val="F1F2F6"/>
-          </a:solidFill>
-          <a:ln>
-            <a:noFill/>
-          </a:ln>
-        </p:spPr>
-        <p:style>
-          <a:lnRef idx="1">
-            <a:schemeClr val="accent1"/>
-          </a:lnRef>
-          <a:fillRef idx="3">
-            <a:schemeClr val="accent1"/>
-          </a:fillRef>
-          <a:effectRef idx="2">
-            <a:schemeClr val="accent1"/>
-          </a:effectRef>
-          <a:fontRef idx="minor">
-            <a:schemeClr val="lt1"/>
-          </a:fontRef>
-        </p:style>
-        <p:txBody>
-          <a:bodyPr rtlCol="0" anchor="ctr"/>
-          <a:lstStyle/>
-          <a:p>
-            <a:pPr algn="ctr"/>
-          </a:p>
-        </p:txBody>
-      </p:sp>
-      <p:sp>
-        <p:nvSpPr>
-          <p:cNvPr id="9" name="TextBox 8"/>
-          <p:cNvSpPr txBox="1"/>
-          <p:nvPr/>
-        </p:nvSpPr>
-        <p:spPr>
-          <a:xfrm>
-            <a:off x="1097280" y="2554600"/>
-            <a:ext cx="3261360" cy="310896"/>
-          </a:xfrm>
-          <a:prstGeom prst="rect">
-            <a:avLst/>
-          </a:prstGeom>
-          <a:noFill/>
-        </p:spPr>
-        <p:txBody>
-          <a:bodyPr wrap="square">
-            <a:spAutoFit/>
-          </a:bodyPr>
-          <a:lstStyle/>
-          <a:p>
-            <a:pPr algn="l"/>
-            <a:r>
-              <a:rPr sz="1100" b="0">
-                <a:solidFill>
-                  <a:srgbClr val="465461"/>
-                </a:solidFill>
-                <a:latin typeface="Arial"/>
-              </a:rPr>
-              <a:t>core_members</a:t>
-            </a:r>
-          </a:p>
-        </p:txBody>
-      </p:sp>
-      <p:sp>
-        <p:nvSpPr>
-          <p:cNvPr id="10" name="TextBox 9"/>
-          <p:cNvSpPr txBox="1"/>
-          <p:nvPr/>
-        </p:nvSpPr>
-        <p:spPr>
-          <a:xfrm>
-            <a:off x="4450080" y="2554600"/>
-            <a:ext cx="3261360" cy="310896"/>
-          </a:xfrm>
-          <a:prstGeom prst="rect">
-            <a:avLst/>
-          </a:prstGeom>
-          <a:noFill/>
-        </p:spPr>
-        <p:txBody>
-          <a:bodyPr wrap="square">
-            <a:spAutoFit/>
-          </a:bodyPr>
-          <a:lstStyle/>
-          <a:p>
-            <a:pPr algn="l"/>
-            <a:r>
-              <a:rPr sz="1100" b="0">
-                <a:solidFill>
-                  <a:srgbClr val="465461"/>
-                </a:solidFill>
-                <a:latin typeface="Arial"/>
-              </a:rPr>
-              <a:t>~18,000</a:t>
-            </a:r>
-          </a:p>
-        </p:txBody>
-      </p:sp>
-      <p:sp>
-        <p:nvSpPr>
-          <p:cNvPr id="11" name="TextBox 10"/>
-          <p:cNvSpPr txBox="1"/>
-          <p:nvPr/>
-        </p:nvSpPr>
-        <p:spPr>
-          <a:xfrm>
-            <a:off x="7802880" y="2554600"/>
-            <a:ext cx="3261360" cy="310896"/>
-          </a:xfrm>
-          <a:prstGeom prst="rect">
-            <a:avLst/>
-          </a:prstGeom>
-          <a:noFill/>
-        </p:spPr>
-        <p:txBody>
-          <a:bodyPr wrap="square">
-            <a:spAutoFit/>
-          </a:bodyPr>
-          <a:lstStyle/>
-          <a:p>
-            <a:pPr algn="l"/>
-            <a:r>
-              <a:rPr sz="1100" b="0">
-                <a:solidFill>
-                  <a:srgbClr val="465461"/>
-                </a:solidFill>
-                <a:latin typeface="Arial"/>
-              </a:rPr>
-              <a:t>Usuarios registrados</a:t>
-            </a:r>
-          </a:p>
-        </p:txBody>
-      </p:sp>
-      <p:sp>
-        <p:nvSpPr>
-          <p:cNvPr id="12" name="Rectangle 11"/>
-          <p:cNvSpPr/>
-          <p:nvPr/>
-        </p:nvSpPr>
-        <p:spPr>
-          <a:xfrm>
-            <a:off x="1051560" y="2825496"/>
-            <a:ext cx="10058400" cy="310896"/>
-          </a:xfrm>
-          <a:prstGeom prst="rect">
-            <a:avLst/>
-          </a:prstGeom>
-          <a:solidFill>
-            <a:srgbClr val="FFFFFF"/>
-          </a:solidFill>
-          <a:ln>
-            <a:noFill/>
-          </a:ln>
-        </p:spPr>
-        <p:style>
-          <a:lnRef idx="1">
-            <a:schemeClr val="accent1"/>
-          </a:lnRef>
-          <a:fillRef idx="3">
-            <a:schemeClr val="accent1"/>
-          </a:fillRef>
-          <a:effectRef idx="2">
-            <a:schemeClr val="accent1"/>
-          </a:effectRef>
-          <a:fontRef idx="minor">
-            <a:schemeClr val="lt1"/>
-          </a:fontRef>
-        </p:style>
-        <p:txBody>
-          <a:bodyPr rtlCol="0" anchor="ctr"/>
-          <a:lstStyle/>
-          <a:p>
-            <a:pPr algn="ctr"/>
-          </a:p>
-        </p:txBody>
-      </p:sp>
-      <p:sp>
-        <p:nvSpPr>
-          <p:cNvPr id="13" name="TextBox 12"/>
-          <p:cNvSpPr txBox="1"/>
-          <p:nvPr/>
-        </p:nvSpPr>
-        <p:spPr>
-          <a:xfrm>
-            <a:off x="1097280" y="2865496"/>
-            <a:ext cx="3261360" cy="310896"/>
-          </a:xfrm>
-          <a:prstGeom prst="rect">
-            <a:avLst/>
-          </a:prstGeom>
-          <a:noFill/>
-        </p:spPr>
-        <p:txBody>
-          <a:bodyPr wrap="square">
-            <a:spAutoFit/>
-          </a:bodyPr>
-          <a:lstStyle/>
-          <a:p>
-            <a:pPr algn="l"/>
-            <a:r>
-              <a:rPr sz="1100" b="0">
-                <a:solidFill>
-                  <a:srgbClr val="465461"/>
-                </a:solidFill>
-                <a:latin typeface="Arial"/>
-              </a:rPr>
-              <a:t>forums_posts</a:t>
-            </a:r>
-          </a:p>
-        </p:txBody>
-      </p:sp>
-      <p:sp>
-        <p:nvSpPr>
-          <p:cNvPr id="14" name="TextBox 13"/>
-          <p:cNvSpPr txBox="1"/>
-          <p:nvPr/>
-        </p:nvSpPr>
-        <p:spPr>
-          <a:xfrm>
-            <a:off x="4450080" y="2865496"/>
-            <a:ext cx="3261360" cy="310896"/>
-          </a:xfrm>
-          <a:prstGeom prst="rect">
-            <a:avLst/>
-          </a:prstGeom>
-          <a:noFill/>
-        </p:spPr>
-        <p:txBody>
-          <a:bodyPr wrap="square">
-            <a:spAutoFit/>
-          </a:bodyPr>
-          <a:lstStyle/>
-          <a:p>
-            <a:pPr algn="l"/>
-            <a:r>
-              <a:rPr sz="1100" b="0">
-                <a:solidFill>
-                  <a:srgbClr val="465461"/>
-                </a:solidFill>
-                <a:latin typeface="Arial"/>
-              </a:rPr>
-              <a:t>~194,000</a:t>
-            </a:r>
-          </a:p>
-        </p:txBody>
-      </p:sp>
-      <p:sp>
-        <p:nvSpPr>
-          <p:cNvPr id="15" name="TextBox 14"/>
-          <p:cNvSpPr txBox="1"/>
-          <p:nvPr/>
-        </p:nvSpPr>
-        <p:spPr>
-          <a:xfrm>
-            <a:off x="7802880" y="2865496"/>
-            <a:ext cx="3261360" cy="310896"/>
-          </a:xfrm>
-          <a:prstGeom prst="rect">
-            <a:avLst/>
-          </a:prstGeom>
-          <a:noFill/>
-        </p:spPr>
-        <p:txBody>
-          <a:bodyPr wrap="square">
-            <a:spAutoFit/>
-          </a:bodyPr>
-          <a:lstStyle/>
-          <a:p>
-            <a:pPr algn="l"/>
-            <a:r>
-              <a:rPr sz="1100" b="0">
-                <a:solidFill>
-                  <a:srgbClr val="465461"/>
-                </a:solidFill>
-                <a:latin typeface="Arial"/>
-              </a:rPr>
-              <a:t>Posts públicos</a:t>
-            </a:r>
-          </a:p>
-        </p:txBody>
-      </p:sp>
-      <p:sp>
-        <p:nvSpPr>
-          <p:cNvPr id="16" name="Rectangle 15"/>
-          <p:cNvSpPr/>
-          <p:nvPr/>
-        </p:nvSpPr>
-        <p:spPr>
-          <a:xfrm>
-            <a:off x="1051560" y="3136391"/>
-            <a:ext cx="10058400" cy="310896"/>
-          </a:xfrm>
-          <a:prstGeom prst="rect">
-            <a:avLst/>
-          </a:prstGeom>
-          <a:solidFill>
-            <a:srgbClr val="F1F2F6"/>
-          </a:solidFill>
-          <a:ln>
-            <a:noFill/>
-          </a:ln>
-        </p:spPr>
-        <p:style>
-          <a:lnRef idx="1">
-            <a:schemeClr val="accent1"/>
-          </a:lnRef>
-          <a:fillRef idx="3">
-            <a:schemeClr val="accent1"/>
-          </a:fillRef>
-          <a:effectRef idx="2">
-            <a:schemeClr val="accent1"/>
-          </a:effectRef>
-          <a:fontRef idx="minor">
-            <a:schemeClr val="lt1"/>
-          </a:fontRef>
-        </p:style>
-        <p:txBody>
-          <a:bodyPr rtlCol="0" anchor="ctr"/>
-          <a:lstStyle/>
-          <a:p>
-            <a:pPr algn="ctr"/>
-          </a:p>
-        </p:txBody>
-      </p:sp>
-      <p:sp>
-        <p:nvSpPr>
-          <p:cNvPr id="17" name="TextBox 16"/>
-          <p:cNvSpPr txBox="1"/>
-          <p:nvPr/>
-        </p:nvSpPr>
-        <p:spPr>
-          <a:xfrm>
-            <a:off x="1097280" y="3176391"/>
-            <a:ext cx="3261360" cy="310896"/>
-          </a:xfrm>
-          <a:prstGeom prst="rect">
-            <a:avLst/>
-          </a:prstGeom>
-          <a:noFill/>
-        </p:spPr>
-        <p:txBody>
-          <a:bodyPr wrap="square">
-            <a:spAutoFit/>
-          </a:bodyPr>
-          <a:lstStyle/>
-          <a:p>
-            <a:pPr algn="l"/>
-            <a:r>
-              <a:rPr sz="1100" b="0">
-                <a:solidFill>
-                  <a:srgbClr val="465461"/>
-                </a:solidFill>
-                <a:latin typeface="Arial"/>
-              </a:rPr>
-              <a:t>forums_threads</a:t>
-            </a:r>
-          </a:p>
-        </p:txBody>
-      </p:sp>
-      <p:sp>
-        <p:nvSpPr>
-          <p:cNvPr id="18" name="TextBox 17"/>
-          <p:cNvSpPr txBox="1"/>
-          <p:nvPr/>
-        </p:nvSpPr>
-        <p:spPr>
-          <a:xfrm>
-            <a:off x="4450080" y="3176391"/>
-            <a:ext cx="3261360" cy="310896"/>
-          </a:xfrm>
-          <a:prstGeom prst="rect">
-            <a:avLst/>
-          </a:prstGeom>
-          <a:noFill/>
-        </p:spPr>
-        <p:txBody>
-          <a:bodyPr wrap="square">
-            <a:spAutoFit/>
-          </a:bodyPr>
-          <a:lstStyle/>
-          <a:p>
-            <a:pPr algn="l"/>
-            <a:r>
-              <a:rPr sz="1100" b="0">
-                <a:solidFill>
-                  <a:srgbClr val="465461"/>
-                </a:solidFill>
-                <a:latin typeface="Arial"/>
-              </a:rPr>
-              <a:t>~14,000</a:t>
-            </a:r>
-          </a:p>
-        </p:txBody>
-      </p:sp>
-      <p:sp>
-        <p:nvSpPr>
-          <p:cNvPr id="19" name="TextBox 18"/>
-          <p:cNvSpPr txBox="1"/>
-          <p:nvPr/>
-        </p:nvSpPr>
-        <p:spPr>
-          <a:xfrm>
-            <a:off x="7802880" y="3176391"/>
-            <a:ext cx="3261360" cy="310896"/>
-          </a:xfrm>
-          <a:prstGeom prst="rect">
-            <a:avLst/>
-          </a:prstGeom>
-          <a:noFill/>
-        </p:spPr>
-        <p:txBody>
-          <a:bodyPr wrap="square">
-            <a:spAutoFit/>
-          </a:bodyPr>
-          <a:lstStyle/>
-          <a:p>
-            <a:pPr algn="l"/>
-            <a:r>
-              <a:rPr sz="1100" b="0">
-                <a:solidFill>
-                  <a:srgbClr val="465461"/>
-                </a:solidFill>
-                <a:latin typeface="Arial"/>
-              </a:rPr>
-              <a:t>Hilos de discusión</a:t>
-            </a:r>
-          </a:p>
-        </p:txBody>
-      </p:sp>
-      <p:sp>
-        <p:nvSpPr>
-          <p:cNvPr id="20" name="Rectangle 19"/>
-          <p:cNvSpPr/>
-          <p:nvPr/>
-        </p:nvSpPr>
-        <p:spPr>
-          <a:xfrm>
-            <a:off x="1051560" y="3447287"/>
-            <a:ext cx="10058400" cy="310896"/>
-          </a:xfrm>
-          <a:prstGeom prst="rect">
-            <a:avLst/>
-          </a:prstGeom>
-          <a:solidFill>
-            <a:srgbClr val="FFFFFF"/>
-          </a:solidFill>
-          <a:ln>
-            <a:noFill/>
-          </a:ln>
-        </p:spPr>
-        <p:style>
-          <a:lnRef idx="1">
-            <a:schemeClr val="accent1"/>
-          </a:lnRef>
-          <a:fillRef idx="3">
-            <a:schemeClr val="accent1"/>
-          </a:fillRef>
-          <a:effectRef idx="2">
-            <a:schemeClr val="accent1"/>
-          </a:effectRef>
-          <a:fontRef idx="minor">
-            <a:schemeClr val="lt1"/>
-          </a:fontRef>
-        </p:style>
-        <p:txBody>
-          <a:bodyPr rtlCol="0" anchor="ctr"/>
-          <a:lstStyle/>
-          <a:p>
-            <a:pPr algn="ctr"/>
-          </a:p>
-        </p:txBody>
-      </p:sp>
-      <p:sp>
-        <p:nvSpPr>
-          <p:cNvPr id="21" name="TextBox 20"/>
-          <p:cNvSpPr txBox="1"/>
-          <p:nvPr/>
-        </p:nvSpPr>
-        <p:spPr>
-          <a:xfrm>
-            <a:off x="1097280" y="3487287"/>
-            <a:ext cx="3261360" cy="310896"/>
-          </a:xfrm>
-          <a:prstGeom prst="rect">
-            <a:avLst/>
-          </a:prstGeom>
-          <a:noFill/>
-        </p:spPr>
-        <p:txBody>
-          <a:bodyPr wrap="square">
-            <a:spAutoFit/>
-          </a:bodyPr>
-          <a:lstStyle/>
-          <a:p>
-            <a:pPr algn="l"/>
-            <a:r>
-              <a:rPr sz="1100" b="0">
-                <a:solidFill>
-                  <a:srgbClr val="465461"/>
-                </a:solidFill>
-                <a:latin typeface="Arial"/>
-              </a:rPr>
-              <a:t>forums_forums</a:t>
-            </a:r>
-          </a:p>
-        </p:txBody>
-      </p:sp>
-      <p:sp>
-        <p:nvSpPr>
-          <p:cNvPr id="22" name="TextBox 21"/>
-          <p:cNvSpPr txBox="1"/>
-          <p:nvPr/>
-        </p:nvSpPr>
-        <p:spPr>
-          <a:xfrm>
-            <a:off x="4450080" y="3487287"/>
-            <a:ext cx="3261360" cy="310896"/>
-          </a:xfrm>
-          <a:prstGeom prst="rect">
-            <a:avLst/>
-          </a:prstGeom>
-          <a:noFill/>
-        </p:spPr>
-        <p:txBody>
-          <a:bodyPr wrap="square">
-            <a:spAutoFit/>
-          </a:bodyPr>
-          <a:lstStyle/>
-          <a:p>
-            <a:pPr algn="l"/>
-            <a:r>
-              <a:rPr sz="1100" b="0">
-                <a:solidFill>
-                  <a:srgbClr val="465461"/>
-                </a:solidFill>
-                <a:latin typeface="Arial"/>
-              </a:rPr>
-              <a:t>~138</a:t>
-            </a:r>
-          </a:p>
-        </p:txBody>
-      </p:sp>
-      <p:sp>
-        <p:nvSpPr>
-          <p:cNvPr id="23" name="TextBox 22"/>
-          <p:cNvSpPr txBox="1"/>
-          <p:nvPr/>
-        </p:nvSpPr>
-        <p:spPr>
-          <a:xfrm>
-            <a:off x="7802880" y="3487287"/>
-            <a:ext cx="3261360" cy="310896"/>
-          </a:xfrm>
-          <a:prstGeom prst="rect">
-            <a:avLst/>
-          </a:prstGeom>
-          <a:noFill/>
-        </p:spPr>
-        <p:txBody>
-          <a:bodyPr wrap="square">
-            <a:spAutoFit/>
-          </a:bodyPr>
-          <a:lstStyle/>
-          <a:p>
-            <a:pPr algn="l"/>
-            <a:r>
-              <a:rPr sz="1100" b="0">
-                <a:solidFill>
-                  <a:srgbClr val="465461"/>
-                </a:solidFill>
-                <a:latin typeface="Arial"/>
-              </a:rPr>
-              <a:t>Subforos</a:t>
-            </a:r>
-          </a:p>
-        </p:txBody>
-      </p:sp>
-      <p:sp>
-        <p:nvSpPr>
-          <p:cNvPr id="24" name="Rectangle 23"/>
-          <p:cNvSpPr/>
-          <p:nvPr/>
-        </p:nvSpPr>
-        <p:spPr>
-          <a:xfrm>
-            <a:off x="1051560" y="3758183"/>
-            <a:ext cx="10058400" cy="440689"/>
-          </a:xfrm>
-          <a:prstGeom prst="rect">
-            <a:avLst/>
-          </a:prstGeom>
-          <a:solidFill>
-            <a:srgbClr val="F1F2F6"/>
-          </a:solidFill>
-          <a:ln>
-            <a:noFill/>
-          </a:ln>
-        </p:spPr>
-        <p:style>
-          <a:lnRef idx="1">
-            <a:schemeClr val="accent1"/>
-          </a:lnRef>
-          <a:fillRef idx="3">
-            <a:schemeClr val="accent1"/>
-          </a:fillRef>
-          <a:effectRef idx="2">
-            <a:schemeClr val="accent1"/>
-          </a:effectRef>
-          <a:fontRef idx="minor">
-            <a:schemeClr val="lt1"/>
-          </a:fontRef>
-        </p:style>
-        <p:txBody>
-          <a:bodyPr rtlCol="0" anchor="ctr"/>
-          <a:lstStyle/>
-          <a:p>
-            <a:pPr algn="ctr"/>
-          </a:p>
-        </p:txBody>
-      </p:sp>
-      <p:sp>
-        <p:nvSpPr>
-          <p:cNvPr id="25" name="TextBox 24"/>
-          <p:cNvSpPr txBox="1"/>
-          <p:nvPr/>
-        </p:nvSpPr>
-        <p:spPr>
-          <a:xfrm>
-            <a:off x="1097280" y="3798183"/>
-            <a:ext cx="3261360" cy="440689"/>
-          </a:xfrm>
-          <a:prstGeom prst="rect">
-            <a:avLst/>
-          </a:prstGeom>
-          <a:noFill/>
-        </p:spPr>
-        <p:txBody>
-          <a:bodyPr wrap="square">
-            <a:spAutoFit/>
-          </a:bodyPr>
-          <a:lstStyle/>
-          <a:p>
-            <a:pPr algn="l"/>
-            <a:r>
-              <a:rPr sz="1100" b="0">
-                <a:solidFill>
-                  <a:srgbClr val="465461"/>
-                </a:solidFill>
-                <a:latin typeface="Arial"/>
-              </a:rPr>
-              <a:t>core_message_posts</a:t>
-            </a:r>
-          </a:p>
-        </p:txBody>
-      </p:sp>
-      <p:sp>
-        <p:nvSpPr>
-          <p:cNvPr id="26" name="TextBox 25"/>
-          <p:cNvSpPr txBox="1"/>
-          <p:nvPr/>
-        </p:nvSpPr>
-        <p:spPr>
-          <a:xfrm>
-            <a:off x="4450080" y="3798183"/>
-            <a:ext cx="3261360" cy="440689"/>
-          </a:xfrm>
-          <a:prstGeom prst="rect">
-            <a:avLst/>
-          </a:prstGeom>
-          <a:noFill/>
-        </p:spPr>
-        <p:txBody>
-          <a:bodyPr wrap="square">
-            <a:spAutoFit/>
-          </a:bodyPr>
-          <a:lstStyle/>
-          <a:p>
-            <a:pPr algn="l"/>
-            <a:r>
-              <a:rPr sz="1100" b="0">
-                <a:solidFill>
-                  <a:srgbClr val="465461"/>
-                </a:solidFill>
-                <a:latin typeface="Arial"/>
-              </a:rPr>
-              <a:t>~55,000</a:t>
-            </a:r>
-          </a:p>
-        </p:txBody>
-      </p:sp>
-      <p:sp>
-        <p:nvSpPr>
-          <p:cNvPr id="27" name="TextBox 26"/>
-          <p:cNvSpPr txBox="1"/>
-          <p:nvPr/>
-        </p:nvSpPr>
-        <p:spPr>
-          <a:xfrm>
-            <a:off x="7802880" y="3798183"/>
-            <a:ext cx="3261360" cy="440689"/>
-          </a:xfrm>
-          <a:prstGeom prst="rect">
-            <a:avLst/>
-          </a:prstGeom>
-          <a:noFill/>
-        </p:spPr>
-        <p:txBody>
-          <a:bodyPr wrap="square">
-            <a:spAutoFit/>
-          </a:bodyPr>
-          <a:lstStyle/>
-          <a:p>
-            <a:pPr algn="l"/>
-            <a:r>
-              <a:rPr sz="1100" b="0">
-                <a:solidFill>
-                  <a:srgbClr val="465461"/>
-                </a:solidFill>
-                <a:latin typeface="Arial"/>
-              </a:rPr>
-              <a:t>Mensajes privados (PMs) — infrecuente en leaks</a:t>
-            </a:r>
-          </a:p>
-        </p:txBody>
-      </p:sp>
-      <p:sp>
-        <p:nvSpPr>
-          <p:cNvPr id="28" name="TextBox 27"/>
           <p:cNvSpPr txBox="1"/>
           <p:nvPr/>
         </p:nvSpPr>

--- a/IronMarch/csbc26_caso_ironmarch.pptx
+++ b/IronMarch/csbc26_caso_ironmarch.pptx
@@ -33,6 +33,7 @@
     <p:sldId id="278" r:id="rId33"/>
     <p:sldId id="279" r:id="rId34"/>
     <p:sldId id="280" r:id="rId35"/>
+    <p:sldId id="281" r:id="rId36"/>
   </p:sldIdLst>
   <p:sldSz cx="12192000" cy="6858000"/>
   <p:notesSz cx="6858000" cy="9144000"/>
@@ -816,22 +817,22 @@
           <a:lstStyle/>
           <a:p>
             <a:r>
-              <a:t>Práctica: notebook 00, grafo de co-participación</a:t>
-            </a:r>
-          </a:p>
-          <a:p>
-            <a:r>
-              <a:t>Visualización top-150 nodos → hub-and-spoke MOONLORD</a:t>
-            </a:r>
-          </a:p>
-          <a:p>
-            <a:r>
-              <a:t>→ comparar con red de PMs, sección 4</a:t>
-            </a:r>
-          </a:p>
-          <a:p>
-            <a:r>
-              <a:t>¿Coinciden los brokers? en vivo</a:t>
+              <a:t>Paso trivial en apariencia, error frecuente</a:t>
+            </a:r>
+          </a:p>
+          <a:p>
+            <a:r>
+              <a:t>Modelo inglés en corpus ruso → ruido silencioso, no error</a:t>
+            </a:r>
+          </a:p>
+          <a:p>
+            <a:r>
+              <a:t>Confirmado: &gt;95% inglés, pipeline estándar OK</a:t>
+            </a:r>
+          </a:p>
+          <a:p>
+            <a:r>
+              <a:t>Regla general: verificar idioma SIEMPRE antes de NLP</a:t>
             </a:r>
           </a:p>
         </p:txBody>
@@ -901,17 +902,22 @@
           <a:lstStyle/>
           <a:p>
             <a:r>
-              <a:t>Ahora: NLP — BERTopic (temas) + NER (entidades)</a:t>
-            </a:r>
-          </a:p>
-          <a:p>
-            <a:r>
-              <a:t>Modelo local: qwen2.5:14b</a:t>
-            </a:r>
-          </a:p>
-          <a:p>
-            <a:r>
-              <a:t>→ sin enviar datos sensibles a APIs externas</a:t>
+              <a:t>Práctica: notebook 00, grafo de co-participación</a:t>
+            </a:r>
+          </a:p>
+          <a:p>
+            <a:r>
+              <a:t>Visualización top-150 nodos → hub-and-spoke MOONLORD</a:t>
+            </a:r>
+          </a:p>
+          <a:p>
+            <a:r>
+              <a:t>→ comparar con red de PMs, sección 4</a:t>
+            </a:r>
+          </a:p>
+          <a:p>
+            <a:r>
+              <a:t>¿Coinciden los brokers? en vivo</a:t>
             </a:r>
           </a:p>
         </p:txBody>
@@ -981,22 +987,17 @@
           <a:lstStyle/>
           <a:p>
             <a:r>
-              <a:t>BERTopic: descubre temas sin categorías previas</a:t>
-            </a:r>
-          </a:p>
-          <a:p>
-            <a:r>
-              <a:t>Validación: topics vs. subforos declarados</a:t>
-            </a:r>
-          </a:p>
-          <a:p>
-            <a:r>
-              <a:t>→ ideología permea todo el foro, sin fronteras</a:t>
-            </a:r>
-          </a:p>
-          <a:p>
-            <a:r>
-              <a:t>Modelo sin LLM: rápido, reproducible</a:t>
+              <a:t>Ahora: NLP — BERTopic (temas) + NER (entidades)</a:t>
+            </a:r>
+          </a:p>
+          <a:p>
+            <a:r>
+              <a:t>Modelo local: qwen2.5:14b</a:t>
+            </a:r>
+          </a:p>
+          <a:p>
+            <a:r>
+              <a:t>→ sin enviar datos sensibles a APIs externas</a:t>
             </a:r>
           </a:p>
         </p:txBody>
@@ -1066,27 +1067,12 @@
           <a:lstStyle/>
           <a:p>
             <a:r>
-              <a:t>LLM local: entidades sobre top-50 usuarios</a:t>
-            </a:r>
-          </a:p>
-          <a:p>
-            <a:r>
-              <a:t>Hitler esperable, pero Evola casi al mismo nivel</a:t>
-            </a:r>
-          </a:p>
-          <a:p>
-            <a:r>
-              <a:t>→ firma distintiva de Iron March</a:t>
-            </a:r>
-          </a:p>
-          <a:p>
-            <a:r>
-              <a:t>Atomwaffen: mencionado 3 años antes de ser terrorista</a:t>
-            </a:r>
-          </a:p>
-          <a:p>
-            <a:r>
-              <a:t>Foro como semillero temprano, no eco tardío</a:t>
+              <a:t>BERTopic: apoyo, no protagonista de este caso</a:t>
+            </a:r>
+          </a:p>
+          <a:p>
+            <a:r>
+              <a:t>→ ideología permea todo el foro, sin fronteras</a:t>
             </a:r>
           </a:p>
         </p:txBody>
@@ -1156,27 +1142,27 @@
           <a:lstStyle/>
           <a:p>
             <a:r>
-              <a:t>Pregunta: qué eventos reales activaron la comunidad</a:t>
-            </a:r>
-          </a:p>
-          <a:p>
-            <a:r>
-              <a:t>Único pico confirmado: atentados París 2015</a:t>
-            </a:r>
-          </a:p>
-          <a:p>
-            <a:r>
-              <a:t>Reacción islamófoba, no racista clásica</a:t>
-            </a:r>
-          </a:p>
-          <a:p>
-            <a:r>
-              <a:t>Sin pico: Trump 2016, Charlottesville 2017 (declive)</a:t>
-            </a:r>
-          </a:p>
-          <a:p>
-            <a:r>
-              <a:t>→ atentado usado como munición anti-inmigración</a:t>
+              <a:t>LLM local: entidades sobre top-50 usuarios</a:t>
+            </a:r>
+          </a:p>
+          <a:p>
+            <a:r>
+              <a:t>Hitler esperable, pero Evola casi al mismo nivel</a:t>
+            </a:r>
+          </a:p>
+          <a:p>
+            <a:r>
+              <a:t>→ firma distintiva de Iron March</a:t>
+            </a:r>
+          </a:p>
+          <a:p>
+            <a:r>
+              <a:t>Atomwaffen: mencionado 3 años antes de ser terrorista</a:t>
+            </a:r>
+          </a:p>
+          <a:p>
+            <a:r>
+              <a:t>Foro como semillero temprano, no eco tardío</a:t>
             </a:r>
           </a:p>
         </p:txBody>
@@ -1246,17 +1232,27 @@
           <a:lstStyle/>
           <a:p>
             <a:r>
-              <a:t>Demo: notebook 02, NER top-50 (checkpoint automático)</a:t>
-            </a:r>
-          </a:p>
-          <a:p>
-            <a:r>
-              <a:t>Visualizar picos con z-score</a:t>
-            </a:r>
-          </a:p>
-          <a:p>
-            <a:r>
-              <a:t>→ ejercicio en vivo: usuarios activos en nov. 2015</a:t>
+              <a:t>Pregunta: qué eventos reales activaron la comunidad</a:t>
+            </a:r>
+          </a:p>
+          <a:p>
+            <a:r>
+              <a:t>Único pico confirmado: atentados París 2015</a:t>
+            </a:r>
+          </a:p>
+          <a:p>
+            <a:r>
+              <a:t>Reacción islamófoba, no racista clásica</a:t>
+            </a:r>
+          </a:p>
+          <a:p>
+            <a:r>
+              <a:t>Sin pico: Trump 2016, Charlottesville 2017 (declive)</a:t>
+            </a:r>
+          </a:p>
+          <a:p>
+            <a:r>
+              <a:t>→ atentado usado como munición anti-inmigración</a:t>
             </a:r>
           </a:p>
         </p:txBody>
@@ -1326,17 +1322,17 @@
           <a:lstStyle/>
           <a:p>
             <a:r>
-              <a:t>Ahora: perfilado individual, usuario como vector</a:t>
-            </a:r>
-          </a:p>
-          <a:p>
-            <a:r>
-              <a:t>Detectar estilos similares con Burrows' Delta</a:t>
-            </a:r>
-          </a:p>
-          <a:p>
-            <a:r>
-              <a:t>→ clave para atribución de sockpuppets</a:t>
+              <a:t>Demo: notebook 02, NER top-50 (checkpoint automático)</a:t>
+            </a:r>
+          </a:p>
+          <a:p>
+            <a:r>
+              <a:t>Visualizar picos con z-score</a:t>
+            </a:r>
+          </a:p>
+          <a:p>
+            <a:r>
+              <a:t>→ ejercicio en vivo: usuarios activos en nov. 2015</a:t>
             </a:r>
           </a:p>
         </p:txBody>
@@ -1406,22 +1402,17 @@
           <a:lstStyle/>
           <a:p>
             <a:r>
-              <a:t>Pregunta de ingeniería: cuántos posts por usuario</a:t>
-            </a:r>
-          </a:p>
-          <a:p>
-            <a:r>
-              <a:t>5 estrategias probadas, de concatenar a promediar</a:t>
-            </a:r>
-          </a:p>
-          <a:p>
-            <a:r>
-              <a:t>Óptimo: D (top-100) → ρ=0.86, un tercio del tiempo</a:t>
-            </a:r>
-          </a:p>
-          <a:p>
-            <a:r>
-              <a:t>Lección: muestreo inteligente &gt; procesamiento exhaustivo</a:t>
+              <a:t>Ahora: perfilado individual, usuario como vector</a:t>
+            </a:r>
+          </a:p>
+          <a:p>
+            <a:r>
+              <a:t>Detectar estilos similares con Burrows' Delta</a:t>
+            </a:r>
+          </a:p>
+          <a:p>
+            <a:r>
+              <a:t>→ clave para atribución de sockpuppets</a:t>
             </a:r>
           </a:p>
         </p:txBody>
@@ -1491,22 +1482,22 @@
           <a:lstStyle/>
           <a:p>
             <a:r>
-              <a:t>Evidencia numérica de la decisión anterior</a:t>
-            </a:r>
-          </a:p>
-          <a:p>
-            <a:r>
-              <a:t>C→D: +37min, +6.1ρ — buena inversión</a:t>
-            </a:r>
-          </a:p>
-          <a:p>
-            <a:r>
-              <a:t>D→E: tiempo similar, mitad de mejora</a:t>
-            </a:r>
-          </a:p>
-          <a:p>
-            <a:r>
-              <a:t>→ rendimientos decrecientes: más datos ≠ siempre mejor</a:t>
+              <a:t>Pregunta de ingeniería: cuántos posts por usuario</a:t>
+            </a:r>
+          </a:p>
+          <a:p>
+            <a:r>
+              <a:t>5 estrategias probadas, de concatenar a promediar</a:t>
+            </a:r>
+          </a:p>
+          <a:p>
+            <a:r>
+              <a:t>Óptimo: D (top-100) → ρ=0.86, un tercio del tiempo</a:t>
+            </a:r>
+          </a:p>
+          <a:p>
+            <a:r>
+              <a:t>Lección: muestreo inteligente &gt; procesamiento exhaustivo</a:t>
             </a:r>
           </a:p>
         </p:txBody>
@@ -1576,22 +1567,22 @@
           <a:lstStyle/>
           <a:p>
             <a:r>
-              <a:t>UMAP: 4096D → 2D, preserva vecindad local</a:t>
-            </a:r>
-          </a:p>
-          <a:p>
-            <a:r>
-              <a:t>HDBSCAN: clusters sin fijar K a priori</a:t>
-            </a:r>
-          </a:p>
-          <a:p>
-            <a:r>
-              <a:t>→ clusters = corrientes ideológicas coherentes</a:t>
-            </a:r>
-          </a:p>
-          <a:p>
-            <a:r>
-              <a:t>Ruido (-1): usuarios sin afiliación clara, señal real</a:t>
+              <a:t>Evidencia numérica de la decisión anterior</a:t>
+            </a:r>
+          </a:p>
+          <a:p>
+            <a:r>
+              <a:t>C→D: +37min, +6.1ρ — buena inversión</a:t>
+            </a:r>
+          </a:p>
+          <a:p>
+            <a:r>
+              <a:t>D→E: tiempo similar, mitad de mejora</a:t>
+            </a:r>
+          </a:p>
+          <a:p>
+            <a:r>
+              <a:t>→ rendimientos decrecientes: más datos ≠ siempre mejor</a:t>
             </a:r>
           </a:p>
         </p:txBody>
@@ -1741,27 +1732,22 @@
           <a:lstStyle/>
           <a:p>
             <a:r>
-              <a:t>Burrows' Delta: técnica clásica de estilometría</a:t>
-            </a:r>
-          </a:p>
-          <a:p>
-            <a:r>
-              <a:t>Aplicado a 150 usuarios, ≥500 palabras</a:t>
-            </a:r>
-          </a:p>
-          <a:p>
-            <a:r>
-              <a:t>Par más sospechoso: 255 + Talleyrand</a:t>
-            </a:r>
-          </a:p>
-          <a:p>
-            <a:r>
-              <a:t>Delta=0.46 + similitud temporal 99%</a:t>
-            </a:r>
-          </a:p>
-          <a:p>
-            <a:r>
-              <a:t>→ evidencia circunstancial, no prueba definitiva</a:t>
+              <a:t>UMAP: 4096D → 2D, preserva vecindad local</a:t>
+            </a:r>
+          </a:p>
+          <a:p>
+            <a:r>
+              <a:t>HDBSCAN: clusters sin fijar K a priori</a:t>
+            </a:r>
+          </a:p>
+          <a:p>
+            <a:r>
+              <a:t>→ clusters = corrientes ideológicas coherentes</a:t>
+            </a:r>
+          </a:p>
+          <a:p>
+            <a:r>
+              <a:t>Ruido (-1): usuarios sin afiliación clara, señal real</a:t>
             </a:r>
           </a:p>
         </p:txBody>
@@ -1831,17 +1817,27 @@
           <a:lstStyle/>
           <a:p>
             <a:r>
-              <a:t>Demo: notebook 03, estrategias C/D/E cacheadas</a:t>
-            </a:r>
-          </a:p>
-          <a:p>
-            <a:r>
-              <a:t>UMAP interactivo → clusters ideológicos</a:t>
-            </a:r>
-          </a:p>
-          <a:p>
-            <a:r>
-              <a:t>→ heatmap Delta: par 255+Talleyrand, valor más bajo</a:t>
+              <a:t>Burrows' Delta: técnica clásica de estilometría</a:t>
+            </a:r>
+          </a:p>
+          <a:p>
+            <a:r>
+              <a:t>Aplicado a 150 usuarios, ≥500 palabras</a:t>
+            </a:r>
+          </a:p>
+          <a:p>
+            <a:r>
+              <a:t>Par más sospechoso: 255 + Talleyrand</a:t>
+            </a:r>
+          </a:p>
+          <a:p>
+            <a:r>
+              <a:t>Delta=0.46 + similitud temporal 99%</a:t>
+            </a:r>
+          </a:p>
+          <a:p>
+            <a:r>
+              <a:t>→ evidencia circunstancial, no prueba definitiva</a:t>
             </a:r>
           </a:p>
         </p:txBody>
@@ -1911,17 +1907,17 @@
           <a:lstStyle/>
           <a:p>
             <a:r>
-              <a:t>Cierre: combinar señales — estilo, tiempo, red</a:t>
-            </a:r>
-          </a:p>
-          <a:p>
-            <a:r>
-              <a:t>Criterio de atribución</a:t>
-            </a:r>
-          </a:p>
-          <a:p>
-            <a:r>
-              <a:t>→ límites éticos y metodológicos</a:t>
+              <a:t>Demo: notebook 03, estrategias C/D/E cacheadas</a:t>
+            </a:r>
+          </a:p>
+          <a:p>
+            <a:r>
+              <a:t>UMAP interactivo → clusters ideológicos</a:t>
+            </a:r>
+          </a:p>
+          <a:p>
+            <a:r>
+              <a:t>→ heatmap Delta: par 255+Talleyrand, valor más bajo</a:t>
             </a:r>
           </a:p>
         </p:txBody>
@@ -1991,22 +1987,17 @@
           <a:lstStyle/>
           <a:p>
             <a:r>
-              <a:t>Ninguna técnica es concluyente por sí sola</a:t>
-            </a:r>
-          </a:p>
-          <a:p>
-            <a:r>
-              <a:t>Regla de convergencia: ≥3 señales → investigar</a:t>
-            </a:r>
-          </a:p>
-          <a:p>
-            <a:r>
-              <a:t>Nunca conclusión automática</a:t>
-            </a:r>
-          </a:p>
-          <a:p>
-            <a:r>
-              <a:t>→ estándar forense: acumulación de indicios</a:t>
+              <a:t>Cierre: combinar señales — estilo, tiempo, red</a:t>
+            </a:r>
+          </a:p>
+          <a:p>
+            <a:r>
+              <a:t>Criterio de atribución</a:t>
+            </a:r>
+          </a:p>
+          <a:p>
+            <a:r>
+              <a:t>→ límites éticos y metodológicos</a:t>
             </a:r>
           </a:p>
         </p:txBody>
@@ -2076,27 +2067,22 @@
           <a:lstStyle/>
           <a:p>
             <a:r>
-              <a:t>Resumen: red, muestreo, hallazgo temporal</a:t>
-            </a:r>
-          </a:p>
-          <a:p>
-            <a:r>
-              <a:t>Detenerse en columna derecha: limitaciones</a:t>
-            </a:r>
-          </a:p>
-          <a:p>
-            <a:r>
-              <a:t>Resultados = leads, no pruebas periciales</a:t>
-            </a:r>
-          </a:p>
-          <a:p>
-            <a:r>
-              <a:t>Datos reales → manejo mínimamente invasivo</a:t>
-            </a:r>
-          </a:p>
-          <a:p>
-            <a:r>
-              <a:t>→ objetivo defensivo, no exponer perfiles</a:t>
+              <a:t>Ninguna técnica es concluyente por sí sola</a:t>
+            </a:r>
+          </a:p>
+          <a:p>
+            <a:r>
+              <a:t>Regla de convergencia: ≥3 señales → investigar</a:t>
+            </a:r>
+          </a:p>
+          <a:p>
+            <a:r>
+              <a:t>Nunca conclusión automática</a:t>
+            </a:r>
+          </a:p>
+          <a:p>
+            <a:r>
+              <a:t>→ estándar forense: acumulación de indicios</a:t>
             </a:r>
           </a:p>
         </p:txBody>
@@ -2166,6 +2152,96 @@
           <a:lstStyle/>
           <a:p>
             <a:r>
+              <a:t>Resumen: red, muestreo, hallazgo temporal</a:t>
+            </a:r>
+          </a:p>
+          <a:p>
+            <a:r>
+              <a:t>Detenerse en columna derecha: limitaciones</a:t>
+            </a:r>
+          </a:p>
+          <a:p>
+            <a:r>
+              <a:t>Resultados = leads, no pruebas periciales</a:t>
+            </a:r>
+          </a:p>
+          <a:p>
+            <a:r>
+              <a:t>Datos reales → manejo mínimamente invasivo</a:t>
+            </a:r>
+          </a:p>
+          <a:p>
+            <a:r>
+              <a:t>→ objetivo defensivo, no exponer perfiles</a:t>
+            </a:r>
+          </a:p>
+        </p:txBody>
+      </p:sp>
+      <p:sp>
+        <p:nvSpPr>
+          <p:cNvPr id="4" name="Slide Number Placeholder 3"/>
+          <p:cNvSpPr>
+            <a:spLocks noGrp="1"/>
+          </p:cNvSpPr>
+          <p:nvPr>
+            <p:ph type="sldNum" idx="5" sz="quarter"/>
+          </p:nvPr>
+        </p:nvSpPr>
+        <p:spPr/>
+      </p:sp>
+    </p:spTree>
+  </p:cSld>
+  <p:clrMapOvr>
+    <a:masterClrMapping/>
+  </p:clrMapOvr>
+</p:notes>
+</file>
+
+<file path=ppt/notesSlides/notesSlide26.xml><?xml version="1.0" encoding="utf-8"?>
+<p:notes xmlns:a="http://schemas.openxmlformats.org/drawingml/2006/main" xmlns:p="http://schemas.openxmlformats.org/presentationml/2006/main" xmlns:r="http://schemas.openxmlformats.org/officeDocument/2006/relationships">
+  <p:cSld>
+    <p:spTree>
+      <p:nvGrpSpPr>
+        <p:cNvPr id="1" name=""/>
+        <p:cNvGrpSpPr/>
+        <p:nvPr/>
+      </p:nvGrpSpPr>
+      <p:grpSpPr>
+        <a:xfrm>
+          <a:off x="0" y="0"/>
+          <a:ext cx="0" cy="0"/>
+          <a:chOff x="0" y="0"/>
+          <a:chExt cx="0" cy="0"/>
+        </a:xfrm>
+      </p:grpSpPr>
+      <p:sp>
+        <p:nvSpPr>
+          <p:cNvPr id="2" name="Slide Image Placeholder 1"/>
+          <p:cNvSpPr>
+            <a:spLocks noGrp="1"/>
+          </p:cNvSpPr>
+          <p:nvPr>
+            <p:ph type="sldImg" idx="2"/>
+          </p:nvPr>
+        </p:nvSpPr>
+        <p:spPr/>
+      </p:sp>
+      <p:sp>
+        <p:nvSpPr>
+          <p:cNvPr id="3" name="Notes Placeholder 2"/>
+          <p:cNvSpPr>
+            <a:spLocks noGrp="1"/>
+          </p:cNvSpPr>
+          <p:nvPr>
+            <p:ph type="body" idx="3" sz="quarter"/>
+          </p:nvPr>
+        </p:nvSpPr>
+        <p:spPr/>
+        <p:txBody>
+          <a:bodyPr/>
+          <a:lstStyle/>
+          <a:p>
+            <a:r>
               <a:t>Cuatro ideas para cerrar el caso</a:t>
             </a:r>
           </a:p>
@@ -2596,22 +2672,17 @@
           <a:lstStyle/>
           <a:p>
             <a:r>
-              <a:t>Números fríos primero: 836 activos, foro denso</a:t>
-            </a:r>
-          </a:p>
-          <a:p>
-            <a:r>
-              <a:t>Pico 2015 = atentados París → detalle con z-scores</a:t>
-            </a:r>
-          </a:p>
-          <a:p>
-            <a:r>
-              <a:t>Concentración: top-5 subforos de 138 dominan</a:t>
-            </a:r>
-          </a:p>
-          <a:p>
-            <a:r>
-              <a:t>Verificación idioma: sin ella, NLP inválido</a:t>
+              <a:t>EDA reducido a lo mínimo: foro pequeño y denso</a:t>
+            </a:r>
+          </a:p>
+          <a:p>
+            <a:r>
+              <a:t>Idioma verificado, pipeline estándar OK</a:t>
+            </a:r>
+          </a:p>
+          <a:p>
+            <a:r>
+              <a:t>→ el protagonista de hoy es la red, no el EDA</a:t>
             </a:r>
           </a:p>
         </p:txBody>
@@ -2691,17 +2762,17 @@
           </a:p>
           <a:p>
             <a:r>
-              <a:t>Privada: broker = usuario 255 (admin), 53% betweenness</a:t>
-            </a:r>
-          </a:p>
-          <a:p>
-            <a:r>
-              <a:t>→ liderazgo visible vs. estructural no coinciden</a:t>
-            </a:r>
-          </a:p>
-          <a:p>
-            <a:r>
-              <a:t>Señal forense a detectar siempre</a:t>
+              <a:t>Privada: usuario 255, 53% betweenness en PMs, invisible en público</a:t>
+            </a:r>
+          </a:p>
+          <a:p>
+            <a:r>
+              <a:t>Influencia visible ≠ influencia estructural real</a:t>
+            </a:r>
+          </a:p>
+          <a:p>
+            <a:r>
+              <a:t>Ground truth judicial (MOONLORD=Slavros doxxeado, casos judiciales) valida el hallazgo</a:t>
             </a:r>
           </a:p>
         </p:txBody>
@@ -2771,22 +2842,17 @@
           <a:lstStyle/>
           <a:p>
             <a:r>
-              <a:t>Paso trivial en apariencia, error frecuente</a:t>
-            </a:r>
-          </a:p>
-          <a:p>
-            <a:r>
-              <a:t>Modelo inglés en corpus ruso → ruido silencioso, no error</a:t>
-            </a:r>
-          </a:p>
-          <a:p>
-            <a:r>
-              <a:t>Confirmado: &gt;95% inglés, pipeline estándar OK</a:t>
-            </a:r>
-          </a:p>
-          <a:p>
-            <a:r>
-              <a:t>Regla general: verificar idioma SIEMPRE antes de NLP</a:t>
+              <a:t>Trade-off coste/precisión: exacto es O(V·E), horas</a:t>
+            </a:r>
+          </a:p>
+          <a:p>
+            <a:r>
+              <a:t>k=300 (pública) / k=200 (PMs): suficiente para el ranking top</a:t>
+            </a:r>
+          </a:p>
+          <a:p>
+            <a:r>
+              <a:t>Mismo principio de rendimientos decrecientes que el muestreo de embeddings</a:t>
             </a:r>
           </a:p>
         </p:txBody>
@@ -6457,7 +6523,7 @@
             <a:spLocks noGrp="1"/>
           </p:cNvSpPr>
           <p:nvPr>
-            <p:ph type="body" idx="10" sz="quarter"/>
+            <p:ph type="body" idx="13" sz="quarter"/>
           </p:nvPr>
         </p:nvSpPr>
         <p:spPr/>
@@ -6465,100 +6531,54 @@
           <a:bodyPr wrap="square"/>
           <a:lstStyle/>
           <a:p>
-            <a:pPr algn="ctr"/>
-            <a:r>
-              <a:rPr sz="1300" b="1">
-                <a:solidFill>
-                  <a:srgbClr val="CD2D37"/>
-                </a:solidFill>
-                <a:latin typeface="Arial"/>
-              </a:rPr>
-              <a:t>DEMO EN VIVO</a:t>
-            </a:r>
-          </a:p>
-          <a:p>
-            <a:pPr algn="ctr"/>
-            <a:r>
-              <a:t>Demo — red de co-participación</a:t>
-            </a:r>
-          </a:p>
-          <a:p>
-            <a:pPr algn="ctr"/>
-            <a:r>
-              <a:rPr sz="1400">
-                <a:solidFill>
-                  <a:srgbClr val="9AA3B5"/>
-                </a:solidFill>
-                <a:latin typeface="Arial"/>
-              </a:rPr>
-              <a:t>IronMarch/00_extract_and_explore.ipynb</a:t>
-            </a:r>
-          </a:p>
-        </p:txBody>
-      </p:sp>
-      <p:sp>
-        <p:nvSpPr>
-          <p:cNvPr id="3" name="TextBox 2"/>
-          <p:cNvSpPr txBox="1"/>
-          <p:nvPr/>
+            <a:r>
+              <a:t>Detección de idioma — paso obligatorio</a:t>
+            </a:r>
+          </a:p>
+        </p:txBody>
+      </p:sp>
+      <p:sp>
+        <p:nvSpPr>
+          <p:cNvPr id="3" name="Text Placeholder 2"/>
+          <p:cNvSpPr>
+            <a:spLocks noGrp="1"/>
+          </p:cNvSpPr>
+          <p:nvPr>
+            <p:ph type="body" idx="16" sz="quarter"/>
+          </p:nvPr>
         </p:nvSpPr>
         <p:spPr>
           <a:xfrm>
-            <a:off x="2505456" y="3657600"/>
-            <a:ext cx="7168896" cy="2560320"/>
+            <a:off x="1073427" y="2214736"/>
+            <a:ext cx="10084904" cy="3370138"/>
           </a:xfrm>
-          <a:prstGeom prst="rect">
-            <a:avLst/>
-          </a:prstGeom>
-          <a:noFill/>
         </p:spPr>
         <p:txBody>
-          <a:bodyPr wrap="square">
-            <a:spAutoFit/>
-          </a:bodyPr>
+          <a:bodyPr wrap="square"/>
           <a:lstStyle/>
           <a:p>
             <a:r>
-              <a:rPr sz="1600">
-                <a:solidFill>
-                  <a:srgbClr val="D6DAE2"/>
-                </a:solidFill>
-                <a:latin typeface="Arial"/>
-              </a:rPr>
-              <a:t>1.  Abrir notebook 00_extract_and_explore</a:t>
-            </a:r>
-          </a:p>
-          <a:p>
-            <a:r>
-              <a:rPr sz="1600">
-                <a:solidFill>
-                  <a:srgbClr val="D6DAE2"/>
-                </a:solidFill>
-                <a:latin typeface="Arial"/>
-              </a:rPr>
-              <a:t>2.  Ejecutar sección 3: grafo usuario↔usuario por threads compartidos</a:t>
-            </a:r>
-          </a:p>
-          <a:p>
-            <a:r>
-              <a:rPr sz="1600">
-                <a:solidFill>
-                  <a:srgbClr val="D6DAE2"/>
-                </a:solidFill>
-                <a:latin typeface="Arial"/>
-              </a:rPr>
-              <a:t>3.  Visualización Plotly interactiva: top-150 nodos por degree</a:t>
-            </a:r>
-          </a:p>
-          <a:p>
-            <a:r>
-              <a:rPr sz="1600">
-                <a:solidFill>
-                  <a:srgbClr val="D6DAE2"/>
-                </a:solidFill>
-                <a:latin typeface="Arial"/>
-              </a:rPr>
-              <a:t>4.  Comparar con sección 4: red de PMs — ¿los mismos brokers?</a:t>
+              <a:t>Burrows' Delta, NER y BERTopic son idioma-específicos</a:t>
+            </a:r>
+          </a:p>
+          <a:p>
+            <a:r>
+              <a:t>Sin verificación previa, aplicar el pipeline inglés a texto ruso produce ruido</a:t>
+            </a:r>
+          </a:p>
+          <a:p>
+            <a:r>
+              <a:t>Resultado IronMarch: &gt;95% inglés → pipeline estándar válido</a:t>
+            </a:r>
+          </a:p>
+          <a:p>
+            <a:r>
+              <a:t>La misma metodología aplicada a un foro en ruso requeriría un pipeline distinto</a:t>
+            </a:r>
+          </a:p>
+          <a:p>
+            <a:r>
+              <a:t>Regla general: detectar idioma ANTES de cualquier modelo NLP</a:t>
             </a:r>
           </a:p>
         </p:txBody>
@@ -6598,31 +6618,98 @@
           <a:p>
             <a:pPr algn="ctr"/>
             <a:r>
-              <a:rPr sz="1300" b="1">
+              <a:rPr sz="1700" b="1">
                 <a:solidFill>
                   <a:srgbClr val="CD2D37"/>
                 </a:solidFill>
                 <a:latin typeface="Arial"/>
               </a:rPr>
-              <a:t>SECCIÓN 3</a:t>
+              <a:t>DEMO EN VIVO</a:t>
             </a:r>
           </a:p>
           <a:p>
             <a:pPr algn="ctr"/>
             <a:r>
-              <a:t>Análisis con LLM local</a:t>
+              <a:t>Demo — red de co-participación</a:t>
             </a:r>
           </a:p>
           <a:p>
             <a:pPr algn="ctr"/>
             <a:r>
-              <a:rPr sz="1600">
-                <a:solidFill>
-                  <a:srgbClr val="D6DAE2"/>
+              <a:rPr sz="1400">
+                <a:solidFill>
+                  <a:srgbClr val="9AA3B5"/>
                 </a:solidFill>
                 <a:latin typeface="Arial"/>
               </a:rPr>
-              <a:t>BERTopic + NER con qwen2.5:14b</a:t>
+              <a:t>IronMarch/00_extract_and_explore.ipynb</a:t>
+            </a:r>
+          </a:p>
+        </p:txBody>
+      </p:sp>
+      <p:sp>
+        <p:nvSpPr>
+          <p:cNvPr id="3" name="TextBox 2"/>
+          <p:cNvSpPr txBox="1"/>
+          <p:nvPr/>
+        </p:nvSpPr>
+        <p:spPr>
+          <a:xfrm>
+            <a:off x="2505456" y="3657600"/>
+            <a:ext cx="7168896" cy="2560320"/>
+          </a:xfrm>
+          <a:prstGeom prst="rect">
+            <a:avLst/>
+          </a:prstGeom>
+          <a:noFill/>
+        </p:spPr>
+        <p:txBody>
+          <a:bodyPr wrap="square">
+            <a:spAutoFit/>
+          </a:bodyPr>
+          <a:lstStyle/>
+          <a:p>
+            <a:r>
+              <a:rPr sz="1600">
+                <a:solidFill>
+                  <a:srgbClr val="D6DAE2"/>
+                </a:solidFill>
+                <a:latin typeface="Arial"/>
+              </a:rPr>
+              <a:t>1.  Abrir notebook 00_extract_and_explore</a:t>
+            </a:r>
+          </a:p>
+          <a:p>
+            <a:r>
+              <a:rPr sz="1600">
+                <a:solidFill>
+                  <a:srgbClr val="D6DAE2"/>
+                </a:solidFill>
+                <a:latin typeface="Arial"/>
+              </a:rPr>
+              <a:t>2.  Ejecutar sección 3: grafo usuario↔usuario por threads compartidos</a:t>
+            </a:r>
+          </a:p>
+          <a:p>
+            <a:r>
+              <a:rPr sz="1600">
+                <a:solidFill>
+                  <a:srgbClr val="D6DAE2"/>
+                </a:solidFill>
+                <a:latin typeface="Arial"/>
+              </a:rPr>
+              <a:t>3.  Visualización Plotly interactiva: top-150 nodos por degree</a:t>
+            </a:r>
+          </a:p>
+          <a:p>
+            <a:r>
+              <a:rPr sz="1600">
+                <a:solidFill>
+                  <a:srgbClr val="D6DAE2"/>
+                </a:solidFill>
+                <a:latin typeface="Arial"/>
+              </a:rPr>
+              <a:t>4.  Comparar con sección 4: red de PMs — ¿los mismos brokers?</a:t>
             </a:r>
           </a:p>
         </p:txBody>
@@ -6652,7 +6739,7 @@
             <a:spLocks noGrp="1"/>
           </p:cNvSpPr>
           <p:nvPr>
-            <p:ph type="body" idx="13" sz="quarter"/>
+            <p:ph type="body" idx="10" sz="quarter"/>
           </p:nvPr>
         </p:nvSpPr>
         <p:spPr/>
@@ -6660,54 +6747,33 @@
           <a:bodyPr wrap="square"/>
           <a:lstStyle/>
           <a:p>
-            <a:r>
-              <a:t>BERTopic — descubrimiento de temas</a:t>
-            </a:r>
-          </a:p>
-        </p:txBody>
-      </p:sp>
-      <p:sp>
-        <p:nvSpPr>
-          <p:cNvPr id="3" name="Text Placeholder 2"/>
-          <p:cNvSpPr>
-            <a:spLocks noGrp="1"/>
-          </p:cNvSpPr>
-          <p:nvPr>
-            <p:ph type="body" idx="16" sz="quarter"/>
-          </p:nvPr>
-        </p:nvSpPr>
-        <p:spPr>
-          <a:xfrm>
-            <a:off x="1073427" y="2077576"/>
-            <a:ext cx="10084904" cy="3507298"/>
-          </a:xfrm>
-        </p:spPr>
-        <p:txBody>
-          <a:bodyPr wrap="square"/>
-          <a:lstStyle/>
-          <a:p>
-            <a:r>
-              <a:t>Objetivo: ¿de qué habla el foro sin imponer categorías a priori?</a:t>
-            </a:r>
-          </a:p>
-          <a:p>
-            <a:r>
-              <a:t>Validación cruzada: comparar topics automáticos vs. subforos reales</a:t>
-            </a:r>
-          </a:p>
-          <a:p>
-            <a:r>
-              <a:t>Top topics: racismo científico, estética fascista, Evola/Spengler, violencia política</a:t>
-            </a:r>
-          </a:p>
-          <a:p>
-            <a:r>
-              <a:t>Hallazgo: topics no respetan fronteras de subforos — ideología permea todo el foro</a:t>
-            </a:r>
-          </a:p>
-          <a:p>
-            <a:r>
-              <a:t>Modelo: sentence-transformers + UMAP + HDBSCAN (sin LLM, rápido y reproducible)</a:t>
+            <a:pPr algn="ctr"/>
+            <a:r>
+              <a:rPr sz="1700" b="1">
+                <a:solidFill>
+                  <a:srgbClr val="CD2D37"/>
+                </a:solidFill>
+                <a:latin typeface="Arial"/>
+              </a:rPr>
+              <a:t>SECCIÓN 3</a:t>
+            </a:r>
+          </a:p>
+          <a:p>
+            <a:pPr algn="ctr"/>
+            <a:r>
+              <a:t>Análisis con LLM local</a:t>
+            </a:r>
+          </a:p>
+          <a:p>
+            <a:pPr algn="ctr"/>
+            <a:r>
+              <a:rPr sz="1600">
+                <a:solidFill>
+                  <a:srgbClr val="D6DAE2"/>
+                </a:solidFill>
+                <a:latin typeface="Arial"/>
+              </a:rPr>
+              <a:t>BERTopic + NER con qwen2.5:14b</a:t>
             </a:r>
           </a:p>
         </p:txBody>
@@ -6746,7 +6812,7 @@
           <a:lstStyle/>
           <a:p>
             <a:r>
-              <a:t>NER con qwen2.5:14b — entidades clave</a:t>
+              <a:t>BERTopic — apoyo, no protagonista</a:t>
             </a:r>
           </a:p>
         </p:txBody>
@@ -6763,8 +6829,8 @@
         </p:nvSpPr>
         <p:spPr>
           <a:xfrm>
-            <a:off x="1073427" y="2077576"/>
-            <a:ext cx="10084904" cy="3507298"/>
+            <a:off x="1073427" y="2214736"/>
+            <a:ext cx="10084904" cy="3370138"/>
           </a:xfrm>
         </p:spPr>
         <p:txBody>
@@ -6772,50 +6838,12 @@
           <a:lstStyle/>
           <a:p>
             <a:r>
-              <a:t>Estrategia: top-50 usuarios por volumen, hasta 50 posts por usuario</a:t>
-            </a:r>
-          </a:p>
-          <a:p>
-            <a:r>
-              <a:t>Tipos de entidad: PERSON, ORG, LOCATION, IDEOLOGY, WEAPON, EVENT</a:t>
-            </a:r>
-          </a:p>
-          <a:p>
-            <a:r>
-              <a:t>2,515 entidades extraídas en 1,500 posts</a:t>
-            </a:r>
-          </a:p>
-          <a:p>
-            <a:pPr lvl="1" marL="274320" indent="-228600">
-              <a:buNone/>
-            </a:pPr>
-            <a:r>
-              <a:rPr sz="1500" b="0">
-                <a:solidFill>
-                  <a:srgbClr val="707888"/>
-                </a:solidFill>
-                <a:latin typeface="Arial"/>
-              </a:rPr>
-              <a:t>·  Hitler: ×28  |  Evola: ×15  |  Golden Dawn: ×10</a:t>
-            </a:r>
-          </a:p>
-          <a:p>
-            <a:pPr lvl="1" marL="274320" indent="-228600">
-              <a:buNone/>
-            </a:pPr>
-            <a:r>
-              <a:rPr sz="1500" b="0">
-                <a:solidFill>
-                  <a:srgbClr val="707888"/>
-                </a:solidFill>
-                <a:latin typeface="Arial"/>
-              </a:rPr>
-              <a:t>·  Atomwaffen Division mencionada 3 años antes de su clasificación como terrorista</a:t>
-            </a:r>
-          </a:p>
-          <a:p>
-            <a:r>
-              <a:t>Presencia de Evola casi al nivel de Hitler: rasgo distintivo vs. otros foros de ultraderecha</a:t>
+              <a:t>Solo evidencia de apoyo: el protagonista de este caso es la red de influencia, no los topics</a:t>
+            </a:r>
+          </a:p>
+          <a:p>
+            <a:r>
+              <a:t>Hallazgo a retener: los topics no respetan fronteras de subforos — la ideología permea todo el foro</a:t>
             </a:r>
           </a:p>
         </p:txBody>
@@ -6854,7 +6882,7 @@
           <a:lstStyle/>
           <a:p>
             <a:r>
-              <a:t>Picos de actividad — análisis temporal + topics</a:t>
+              <a:t>NER con qwen2.5:14b — entidades clave</a:t>
             </a:r>
           </a:p>
         </p:txBody>
@@ -6871,8 +6899,8 @@
         </p:nvSpPr>
         <p:spPr>
           <a:xfrm>
-            <a:off x="1073427" y="2077576"/>
-            <a:ext cx="10084904" cy="3507298"/>
+            <a:off x="1073427" y="2214736"/>
+            <a:ext cx="10084904" cy="3370138"/>
           </a:xfrm>
         </p:spPr>
         <p:txBody>
@@ -6880,17 +6908,17 @@
           <a:lstStyle/>
           <a:p>
             <a:r>
-              <a:t>Método: z-score semanal sobre serie temporal de posts (umbral: µ + 2σ)</a:t>
-            </a:r>
-          </a:p>
-          <a:p>
-            <a:r>
-              <a:t>Índice compuesto: volumen × longitud × señales de arousal (CAPS, !)</a:t>
-            </a:r>
-          </a:p>
-          <a:p>
-            <a:r>
-              <a:t>Atentados de París (nov 2015): ×1.62 baseline → único spike estadístico confirmado</a:t>
+              <a:t>Estrategia: top-50 usuarios por volumen, hasta 50 posts por usuario</a:t>
+            </a:r>
+          </a:p>
+          <a:p>
+            <a:r>
+              <a:t>Tipos de entidad: PERSON, ORG, LOCATION, IDEOLOGY, WEAPON, EVENT</a:t>
+            </a:r>
+          </a:p>
+          <a:p>
+            <a:r>
+              <a:t>2,515 entidades extraídas en 1,500 posts</a:t>
             </a:r>
           </a:p>
           <a:p>
@@ -6904,17 +6932,26 @@
                 </a:solidFill>
                 <a:latin typeface="Arial"/>
               </a:rPr>
-              <a:t>·  Reacción: islamofóbica, no racista — 'paris' ×22, 'refugee' ×16, 'white' baja</a:t>
-            </a:r>
-          </a:p>
-          <a:p>
-            <a:r>
-              <a:t>Trump 2016: ×1.03 — sin spike. Charlottesville 2017: ×0.96 — el foro ya estaba en declive</a:t>
-            </a:r>
-          </a:p>
-          <a:p>
-            <a:r>
-              <a:t>Conclusión: la comunidad usó el atentado como munición narrativa anti-inmigración</a:t>
+              <a:t>·  Hitler: ×28  |  Evola: ×15  |  Golden Dawn: ×10</a:t>
+            </a:r>
+          </a:p>
+          <a:p>
+            <a:pPr lvl="1" marL="274320" indent="-228600">
+              <a:buNone/>
+            </a:pPr>
+            <a:r>
+              <a:rPr sz="1500" b="0">
+                <a:solidFill>
+                  <a:srgbClr val="707888"/>
+                </a:solidFill>
+                <a:latin typeface="Arial"/>
+              </a:rPr>
+              <a:t>·  Atomwaffen Division mencionada 3 años antes de su clasificación como terrorista</a:t>
+            </a:r>
+          </a:p>
+          <a:p>
+            <a:r>
+              <a:t>Presencia de Evola casi al nivel de Hitler: rasgo distintivo vs. otros foros de ultraderecha</a:t>
             </a:r>
           </a:p>
         </p:txBody>
@@ -6944,7 +6981,7 @@
             <a:spLocks noGrp="1"/>
           </p:cNvSpPr>
           <p:nvPr>
-            <p:ph type="body" idx="10" sz="quarter"/>
+            <p:ph type="body" idx="13" sz="quarter"/>
           </p:nvPr>
         </p:nvSpPr>
         <p:spPr/>
@@ -6952,100 +6989,68 @@
           <a:bodyPr wrap="square"/>
           <a:lstStyle/>
           <a:p>
-            <a:pPr algn="ctr"/>
-            <a:r>
-              <a:rPr sz="1300" b="1">
-                <a:solidFill>
-                  <a:srgbClr val="CD2D37"/>
+            <a:r>
+              <a:t>Picos de actividad — análisis temporal + topics</a:t>
+            </a:r>
+          </a:p>
+        </p:txBody>
+      </p:sp>
+      <p:sp>
+        <p:nvSpPr>
+          <p:cNvPr id="3" name="Text Placeholder 2"/>
+          <p:cNvSpPr>
+            <a:spLocks noGrp="1"/>
+          </p:cNvSpPr>
+          <p:nvPr>
+            <p:ph type="body" idx="16" sz="quarter"/>
+          </p:nvPr>
+        </p:nvSpPr>
+        <p:spPr>
+          <a:xfrm>
+            <a:off x="1073427" y="2214736"/>
+            <a:ext cx="10084904" cy="3370138"/>
+          </a:xfrm>
+        </p:spPr>
+        <p:txBody>
+          <a:bodyPr wrap="square"/>
+          <a:lstStyle/>
+          <a:p>
+            <a:r>
+              <a:t>Método: z-score semanal sobre serie temporal de posts (umbral: µ + 2σ)</a:t>
+            </a:r>
+          </a:p>
+          <a:p>
+            <a:r>
+              <a:t>Índice compuesto: volumen × longitud × señales de arousal (CAPS, !)</a:t>
+            </a:r>
+          </a:p>
+          <a:p>
+            <a:r>
+              <a:t>Atentados de París (nov 2015): ×1.62 baseline → único spike estadístico confirmado</a:t>
+            </a:r>
+          </a:p>
+          <a:p>
+            <a:pPr lvl="1" marL="274320" indent="-228600">
+              <a:buNone/>
+            </a:pPr>
+            <a:r>
+              <a:rPr sz="1500" b="0">
+                <a:solidFill>
+                  <a:srgbClr val="707888"/>
                 </a:solidFill>
                 <a:latin typeface="Arial"/>
               </a:rPr>
-              <a:t>DEMO EN VIVO</a:t>
-            </a:r>
-          </a:p>
-          <a:p>
-            <a:pPr algn="ctr"/>
-            <a:r>
-              <a:t>Demo — NER y picos de actividad</a:t>
-            </a:r>
-          </a:p>
-          <a:p>
-            <a:pPr algn="ctr"/>
-            <a:r>
-              <a:rPr sz="1400">
-                <a:solidFill>
-                  <a:srgbClr val="9AA3B5"/>
-                </a:solidFill>
-                <a:latin typeface="Arial"/>
-              </a:rPr>
-              <a:t>IronMarch/02_llm_analysis.ipynb</a:t>
-            </a:r>
-          </a:p>
-        </p:txBody>
-      </p:sp>
-      <p:sp>
-        <p:nvSpPr>
-          <p:cNvPr id="3" name="TextBox 2"/>
-          <p:cNvSpPr txBox="1"/>
-          <p:nvPr/>
-        </p:nvSpPr>
-        <p:spPr>
-          <a:xfrm>
-            <a:off x="2505456" y="3657600"/>
-            <a:ext cx="7168896" cy="2560320"/>
-          </a:xfrm>
-          <a:prstGeom prst="rect">
-            <a:avLst/>
-          </a:prstGeom>
-          <a:noFill/>
-        </p:spPr>
-        <p:txBody>
-          <a:bodyPr wrap="square">
-            <a:spAutoFit/>
-          </a:bodyPr>
-          <a:lstStyle/>
-          <a:p>
-            <a:r>
-              <a:rPr sz="1600">
-                <a:solidFill>
-                  <a:srgbClr val="D6DAE2"/>
-                </a:solidFill>
-                <a:latin typeface="Arial"/>
-              </a:rPr>
-              <a:t>1.  Abrir notebook 02_llm_analysis</a:t>
-            </a:r>
-          </a:p>
-          <a:p>
-            <a:r>
-              <a:rPr sz="1600">
-                <a:solidFill>
-                  <a:srgbClr val="D6DAE2"/>
-                </a:solidFill>
-                <a:latin typeface="Arial"/>
-              </a:rPr>
-              <a:t>2.  Sección 2: ejecutar NER sobre top-50 usuarios (checkpoint automático)</a:t>
-            </a:r>
-          </a:p>
-          <a:p>
-            <a:r>
-              <a:rPr sz="1600">
-                <a:solidFill>
-                  <a:srgbClr val="D6DAE2"/>
-                </a:solidFill>
-                <a:latin typeface="Arial"/>
-              </a:rPr>
-              <a:t>3.  Sección 3: visualizar picos temporales con z-score</a:t>
-            </a:r>
-          </a:p>
-          <a:p>
-            <a:r>
-              <a:rPr sz="1600">
-                <a:solidFill>
-                  <a:srgbClr val="D6DAE2"/>
-                </a:solidFill>
-                <a:latin typeface="Arial"/>
-              </a:rPr>
-              <a:t>4.  Cruzar: ¿qué usuarios están más activos en los picos?</a:t>
+              <a:t>·  Reacción: islamofóbica, no racista — 'paris' ×22, 'refugee' ×16, 'white' baja</a:t>
+            </a:r>
+          </a:p>
+          <a:p>
+            <a:r>
+              <a:t>Trump 2016: ×1.03 — sin spike. Charlottesville 2017: ×0.96 — el foro ya estaba en declive</a:t>
+            </a:r>
+          </a:p>
+          <a:p>
+            <a:r>
+              <a:t>Conclusión: la comunidad usó el atentado como munición narrativa anti-inmigración</a:t>
             </a:r>
           </a:p>
         </p:txBody>
@@ -7085,31 +7090,98 @@
           <a:p>
             <a:pPr algn="ctr"/>
             <a:r>
-              <a:rPr sz="1300" b="1">
+              <a:rPr sz="1700" b="1">
                 <a:solidFill>
                   <a:srgbClr val="CD2D37"/>
                 </a:solidFill>
                 <a:latin typeface="Arial"/>
               </a:rPr>
-              <a:t>SECCIÓN 4</a:t>
+              <a:t>DEMO EN VIVO</a:t>
             </a:r>
           </a:p>
           <a:p>
             <a:pPr algn="ctr"/>
             <a:r>
-              <a:t>Embeddings y estilometría</a:t>
+              <a:t>Demo — NER y picos de actividad</a:t>
             </a:r>
           </a:p>
           <a:p>
             <a:pPr algn="ctr"/>
             <a:r>
-              <a:rPr sz="1600">
-                <a:solidFill>
-                  <a:srgbClr val="D6DAE2"/>
+              <a:rPr sz="1400">
+                <a:solidFill>
+                  <a:srgbClr val="9AA3B5"/>
                 </a:solidFill>
                 <a:latin typeface="Arial"/>
               </a:rPr>
-              <a:t>qwen3-embedding + Burrows' Delta</a:t>
+              <a:t>IronMarch/02_llm_analysis.ipynb</a:t>
+            </a:r>
+          </a:p>
+        </p:txBody>
+      </p:sp>
+      <p:sp>
+        <p:nvSpPr>
+          <p:cNvPr id="3" name="TextBox 2"/>
+          <p:cNvSpPr txBox="1"/>
+          <p:nvPr/>
+        </p:nvSpPr>
+        <p:spPr>
+          <a:xfrm>
+            <a:off x="2505456" y="3657600"/>
+            <a:ext cx="7168896" cy="2560320"/>
+          </a:xfrm>
+          <a:prstGeom prst="rect">
+            <a:avLst/>
+          </a:prstGeom>
+          <a:noFill/>
+        </p:spPr>
+        <p:txBody>
+          <a:bodyPr wrap="square">
+            <a:spAutoFit/>
+          </a:bodyPr>
+          <a:lstStyle/>
+          <a:p>
+            <a:r>
+              <a:rPr sz="1600">
+                <a:solidFill>
+                  <a:srgbClr val="D6DAE2"/>
+                </a:solidFill>
+                <a:latin typeface="Arial"/>
+              </a:rPr>
+              <a:t>1.  Abrir notebook 02_llm_analysis</a:t>
+            </a:r>
+          </a:p>
+          <a:p>
+            <a:r>
+              <a:rPr sz="1600">
+                <a:solidFill>
+                  <a:srgbClr val="D6DAE2"/>
+                </a:solidFill>
+                <a:latin typeface="Arial"/>
+              </a:rPr>
+              <a:t>2.  Sección 2: ejecutar NER sobre top-50 usuarios (checkpoint automático)</a:t>
+            </a:r>
+          </a:p>
+          <a:p>
+            <a:r>
+              <a:rPr sz="1600">
+                <a:solidFill>
+                  <a:srgbClr val="D6DAE2"/>
+                </a:solidFill>
+                <a:latin typeface="Arial"/>
+              </a:rPr>
+              <a:t>3.  Sección 3: visualizar picos temporales con z-score</a:t>
+            </a:r>
+          </a:p>
+          <a:p>
+            <a:r>
+              <a:rPr sz="1600">
+                <a:solidFill>
+                  <a:srgbClr val="D6DAE2"/>
+                </a:solidFill>
+                <a:latin typeface="Arial"/>
+              </a:rPr>
+              <a:t>4.  Cruzar: ¿qué usuarios están más activos en los picos?</a:t>
             </a:r>
           </a:p>
         </p:txBody>
@@ -7139,7 +7211,7 @@
             <a:spLocks noGrp="1"/>
           </p:cNvSpPr>
           <p:nvPr>
-            <p:ph type="body" idx="13" sz="quarter"/>
+            <p:ph type="body" idx="10" sz="quarter"/>
           </p:nvPr>
         </p:nvSpPr>
         <p:spPr/>
@@ -7147,59 +7219,33 @@
           <a:bodyPr wrap="square"/>
           <a:lstStyle/>
           <a:p>
-            <a:r>
-              <a:t>Cinco estrategias de embedding por usuario</a:t>
-            </a:r>
-          </a:p>
-        </p:txBody>
-      </p:sp>
-      <p:sp>
-        <p:nvSpPr>
-          <p:cNvPr id="3" name="Text Placeholder 2"/>
-          <p:cNvSpPr>
-            <a:spLocks noGrp="1"/>
-          </p:cNvSpPr>
-          <p:nvPr>
-            <p:ph type="body" idx="16" sz="quarter"/>
-          </p:nvPr>
-        </p:nvSpPr>
-        <p:spPr>
-          <a:xfrm>
-            <a:off x="1073427" y="2077576"/>
-            <a:ext cx="10084904" cy="3507298"/>
-          </a:xfrm>
-        </p:spPr>
-        <p:txBody>
-          <a:bodyPr wrap="square"/>
-          <a:lstStyle/>
-          <a:p>
-            <a:r>
-              <a:t>Pregunta: ¿cuántos posts necesitamos para representar bien a un usuario?</a:t>
-            </a:r>
-          </a:p>
-          <a:p>
-            <a:r>
-              <a:t>A — embed_users: concatenar TODOS los posts → 1 vector (truncado a 50K chars)</a:t>
-            </a:r>
-          </a:p>
-          <a:p>
-            <a:r>
-              <a:t>B — centroids full: 1 embedding por post, promedio → referencia (ground truth)</a:t>
-            </a:r>
-          </a:p>
-          <a:p>
-            <a:r>
-              <a:t>C/D/E — centroids muestreados: top-50/100/150 posts MÁS LARGOS por usuario</a:t>
-            </a:r>
-          </a:p>
-          <a:p>
-            <a:r>
-              <a:t>Métrica: Spearman ρ entre ranking de similitudes de cada estrategia vs. B</a:t>
-            </a:r>
-          </a:p>
-          <a:p>
-            <a:r>
-              <a:t>Punto óptimo: D (top-100) → ρ=0.860, 3h 33min vs. ~9h completo</a:t>
+            <a:pPr algn="ctr"/>
+            <a:r>
+              <a:rPr sz="1700" b="1">
+                <a:solidFill>
+                  <a:srgbClr val="CD2D37"/>
+                </a:solidFill>
+                <a:latin typeface="Arial"/>
+              </a:rPr>
+              <a:t>SECCIÓN 4</a:t>
+            </a:r>
+          </a:p>
+          <a:p>
+            <a:pPr algn="ctr"/>
+            <a:r>
+              <a:t>Embeddings y estilometría</a:t>
+            </a:r>
+          </a:p>
+          <a:p>
+            <a:pPr algn="ctr"/>
+            <a:r>
+              <a:rPr sz="1600">
+                <a:solidFill>
+                  <a:srgbClr val="D6DAE2"/>
+                </a:solidFill>
+                <a:latin typeface="Arial"/>
+              </a:rPr>
+              <a:t>qwen3-embedding + Burrows' Delta</a:t>
             </a:r>
           </a:p>
         </p:txBody>
@@ -7238,6 +7284,96 @@
           <a:lstStyle/>
           <a:p>
             <a:r>
+              <a:t>Cinco estrategias de embedding por usuario</a:t>
+            </a:r>
+          </a:p>
+        </p:txBody>
+      </p:sp>
+      <p:sp>
+        <p:nvSpPr>
+          <p:cNvPr id="3" name="Text Placeholder 2"/>
+          <p:cNvSpPr>
+            <a:spLocks noGrp="1"/>
+          </p:cNvSpPr>
+          <p:nvPr>
+            <p:ph type="body" idx="16" sz="quarter"/>
+          </p:nvPr>
+        </p:nvSpPr>
+        <p:spPr>
+          <a:xfrm>
+            <a:off x="1073427" y="2214736"/>
+            <a:ext cx="10084904" cy="3370138"/>
+          </a:xfrm>
+        </p:spPr>
+        <p:txBody>
+          <a:bodyPr wrap="square"/>
+          <a:lstStyle/>
+          <a:p>
+            <a:r>
+              <a:t>Pregunta: ¿cuántos posts necesitamos para representar bien a un usuario?</a:t>
+            </a:r>
+          </a:p>
+          <a:p>
+            <a:r>
+              <a:t>A — embed_users: concatenar TODOS los posts → 1 vector (truncado a 50K chars)</a:t>
+            </a:r>
+          </a:p>
+          <a:p>
+            <a:r>
+              <a:t>B — centroids full: 1 embedding por post, promedio → referencia (ground truth)</a:t>
+            </a:r>
+          </a:p>
+          <a:p>
+            <a:r>
+              <a:t>C/D/E — centroids muestreados: top-50/100/150 posts MÁS LARGOS por usuario</a:t>
+            </a:r>
+          </a:p>
+          <a:p>
+            <a:r>
+              <a:t>Métrica: Spearman ρ entre ranking de similitudes de cada estrategia vs. B</a:t>
+            </a:r>
+          </a:p>
+          <a:p>
+            <a:r>
+              <a:t>Punto óptimo: D (top-100) → ρ=0.860, 3h 33min vs. ~9h completo</a:t>
+            </a:r>
+          </a:p>
+        </p:txBody>
+      </p:sp>
+    </p:spTree>
+  </p:cSld>
+  <p:clrMapOvr>
+    <a:masterClrMapping/>
+  </p:clrMapOvr>
+</p:sld>
+</file>
+
+<file path=ppt/slides/slide19.xml><?xml version="1.0" encoding="utf-8"?>
+<p:sld xmlns:a="http://schemas.openxmlformats.org/drawingml/2006/main" xmlns:p="http://schemas.openxmlformats.org/presentationml/2006/main" xmlns:r="http://schemas.openxmlformats.org/officeDocument/2006/relationships">
+  <p:cSld>
+    <p:spTree>
+      <p:nvGrpSpPr>
+        <p:cNvPr id="1" name=""/>
+        <p:cNvGrpSpPr/>
+        <p:nvPr/>
+      </p:nvGrpSpPr>
+      <p:grpSpPr/>
+      <p:sp>
+        <p:nvSpPr>
+          <p:cNvPr id="2" name="Text Placeholder 1"/>
+          <p:cNvSpPr>
+            <a:spLocks noGrp="1"/>
+          </p:cNvSpPr>
+          <p:nvPr>
+            <p:ph type="body" idx="13" sz="quarter"/>
+          </p:nvPr>
+        </p:nvSpPr>
+        <p:spPr/>
+        <p:txBody>
+          <a:bodyPr wrap="square"/>
+          <a:lstStyle/>
+          <a:p>
+            <a:r>
               <a:t>Resultados del experimento de muestreo</a:t>
             </a:r>
           </a:p>
@@ -7269,7 +7405,7 @@
           <p:nvPr/>
         </p:nvGraphicFramePr>
         <p:xfrm>
-          <a:off x="1051560" y="2148840"/>
+          <a:off x="1051560" y="2286000"/>
           <a:ext cx="10058400" cy="1828800"/>
         </p:xfrm>
         <a:graphic>
@@ -7892,91 +8028,6 @@
 </p:sld>
 </file>
 
-<file path=ppt/slides/slide19.xml><?xml version="1.0" encoding="utf-8"?>
-<p:sld xmlns:a="http://schemas.openxmlformats.org/drawingml/2006/main" xmlns:p="http://schemas.openxmlformats.org/presentationml/2006/main" xmlns:r="http://schemas.openxmlformats.org/officeDocument/2006/relationships">
-  <p:cSld>
-    <p:spTree>
-      <p:nvGrpSpPr>
-        <p:cNvPr id="1" name=""/>
-        <p:cNvGrpSpPr/>
-        <p:nvPr/>
-      </p:nvGrpSpPr>
-      <p:grpSpPr/>
-      <p:sp>
-        <p:nvSpPr>
-          <p:cNvPr id="2" name="Text Placeholder 1"/>
-          <p:cNvSpPr>
-            <a:spLocks noGrp="1"/>
-          </p:cNvSpPr>
-          <p:nvPr>
-            <p:ph type="body" idx="13" sz="quarter"/>
-          </p:nvPr>
-        </p:nvSpPr>
-        <p:spPr/>
-        <p:txBody>
-          <a:bodyPr wrap="square"/>
-          <a:lstStyle/>
-          <a:p>
-            <a:r>
-              <a:t>UMAP + HDBSCAN — estructura del espacio de usuarios</a:t>
-            </a:r>
-          </a:p>
-        </p:txBody>
-      </p:sp>
-      <p:sp>
-        <p:nvSpPr>
-          <p:cNvPr id="3" name="Text Placeholder 2"/>
-          <p:cNvSpPr>
-            <a:spLocks noGrp="1"/>
-          </p:cNvSpPr>
-          <p:nvPr>
-            <p:ph type="body" idx="16" sz="quarter"/>
-          </p:nvPr>
-        </p:nvSpPr>
-        <p:spPr>
-          <a:xfrm>
-            <a:off x="1073427" y="2580496"/>
-            <a:ext cx="10084904" cy="3004378"/>
-          </a:xfrm>
-        </p:spPr>
-        <p:txBody>
-          <a:bodyPr wrap="square"/>
-          <a:lstStyle/>
-          <a:p>
-            <a:r>
-              <a:t>UMAP reduce 4096D → 2D preservando estructura de vecindad local</a:t>
-            </a:r>
-          </a:p>
-          <a:p>
-            <a:r>
-              <a:t>HDBSCAN detecta clusters densos sin fijar K a priori</a:t>
-            </a:r>
-          </a:p>
-          <a:p>
-            <a:r>
-              <a:t>Visualización interactiva Plotly: hover = nombre de usuario + cluster</a:t>
-            </a:r>
-          </a:p>
-          <a:p>
-            <a:r>
-              <a:t>Clusters identificados: grupos ideológicos coherentes (aceleracionistas, nacional-bolcheviques...)</a:t>
-            </a:r>
-          </a:p>
-          <a:p>
-            <a:r>
-              <a:t>Ruido (cluster -1): usuarios esporádicos sin afiliación ideológica clara</a:t>
-            </a:r>
-          </a:p>
-        </p:txBody>
-      </p:sp>
-    </p:spTree>
-  </p:cSld>
-  <p:clrMapOvr>
-    <a:masterClrMapping/>
-  </p:clrMapOvr>
-</p:sld>
-</file>
-
 <file path=ppt/slides/slide2.xml><?xml version="1.0" encoding="utf-8"?>
 <p:sld xmlns:a="http://schemas.openxmlformats.org/drawingml/2006/main" xmlns:p="http://schemas.openxmlformats.org/presentationml/2006/main" xmlns:r="http://schemas.openxmlformats.org/officeDocument/2006/relationships">
   <p:cSld>
@@ -8004,7 +8055,7 @@
           <a:p>
             <a:pPr algn="ctr"/>
             <a:r>
-              <a:rPr sz="1300" b="1">
+              <a:rPr sz="1700" b="1">
                 <a:solidFill>
                   <a:srgbClr val="CD2D37"/>
                 </a:solidFill>
@@ -8067,7 +8118,7 @@
           <a:lstStyle/>
           <a:p>
             <a:r>
-              <a:t>Burrows' Delta — estilometría para sockpuppets</a:t>
+              <a:t>UMAP + HDBSCAN — estructura del espacio de usuarios</a:t>
             </a:r>
           </a:p>
         </p:txBody>
@@ -8084,8 +8135,8 @@
         </p:nvSpPr>
         <p:spPr>
           <a:xfrm>
-            <a:off x="1073427" y="2580496"/>
-            <a:ext cx="10084904" cy="3004378"/>
+            <a:off x="1073427" y="2717656"/>
+            <a:ext cx="10084904" cy="2867218"/>
           </a:xfrm>
         </p:spPr>
         <p:txBody>
@@ -8093,41 +8144,27 @@
           <a:lstStyle/>
           <a:p>
             <a:r>
-              <a:t>Mide frecuencia relativa de las N palabras más comunes, normalizada por z-score</a:t>
-            </a:r>
-          </a:p>
-          <a:p>
-            <a:r>
-              <a:t>Delta bajo entre dos usuarios → estilo similar → candidato a misma persona</a:t>
-            </a:r>
-          </a:p>
-          <a:p>
-            <a:r>
-              <a:t>Corpus IronMarch: top-200 palabras función, top-150 usuarios (≥500 palabras)</a:t>
-            </a:r>
-          </a:p>
-          <a:p>
-            <a:r>
-              <a:t>Delta medio: 1.08  |  mínimo: 0.46  |  máximo: 2.03</a:t>
-            </a:r>
-          </a:p>
-          <a:p>
-            <a:r>
-              <a:t>Par más sospechoso: 255 + Talleyrand</a:t>
-            </a:r>
-          </a:p>
-          <a:p>
-            <a:pPr lvl="1" marL="274320" indent="-228600">
-              <a:buNone/>
-            </a:pPr>
-            <a:r>
-              <a:rPr sz="1500" b="0">
-                <a:solidFill>
-                  <a:srgbClr val="707888"/>
-                </a:solidFill>
-                <a:latin typeface="Arial"/>
-              </a:rPr>
-              <a:t>·  Delta=0.46, similitud temporal=0.99, Talleyrand: anicot@elon.edu, activo 2011–2014</a:t>
+              <a:t>UMAP reduce 4096D → 2D preservando estructura de vecindad local</a:t>
+            </a:r>
+          </a:p>
+          <a:p>
+            <a:r>
+              <a:t>HDBSCAN detecta clusters densos sin fijar K a priori</a:t>
+            </a:r>
+          </a:p>
+          <a:p>
+            <a:r>
+              <a:t>Visualización interactiva Plotly: hover = nombre de usuario + cluster</a:t>
+            </a:r>
+          </a:p>
+          <a:p>
+            <a:r>
+              <a:t>Clusters identificados: grupos ideológicos coherentes (aceleracionistas, nacional-bolcheviques...)</a:t>
+            </a:r>
+          </a:p>
+          <a:p>
+            <a:r>
+              <a:t>Ruido (cluster -1): usuarios esporádicos sin afiliación ideológica clara</a:t>
             </a:r>
           </a:p>
         </p:txBody>
@@ -8157,7 +8194,7 @@
             <a:spLocks noGrp="1"/>
           </p:cNvSpPr>
           <p:nvPr>
-            <p:ph type="body" idx="10" sz="quarter"/>
+            <p:ph type="body" idx="13" sz="quarter"/>
           </p:nvPr>
         </p:nvSpPr>
         <p:spPr/>
@@ -8165,100 +8202,68 @@
           <a:bodyPr wrap="square"/>
           <a:lstStyle/>
           <a:p>
-            <a:pPr algn="ctr"/>
-            <a:r>
-              <a:rPr sz="1300" b="1">
-                <a:solidFill>
-                  <a:srgbClr val="CD2D37"/>
+            <a:r>
+              <a:t>Burrows' Delta — estilometría para sockpuppets</a:t>
+            </a:r>
+          </a:p>
+        </p:txBody>
+      </p:sp>
+      <p:sp>
+        <p:nvSpPr>
+          <p:cNvPr id="3" name="Text Placeholder 2"/>
+          <p:cNvSpPr>
+            <a:spLocks noGrp="1"/>
+          </p:cNvSpPr>
+          <p:nvPr>
+            <p:ph type="body" idx="16" sz="quarter"/>
+          </p:nvPr>
+        </p:nvSpPr>
+        <p:spPr>
+          <a:xfrm>
+            <a:off x="1073427" y="2717656"/>
+            <a:ext cx="10084904" cy="2867218"/>
+          </a:xfrm>
+        </p:spPr>
+        <p:txBody>
+          <a:bodyPr wrap="square"/>
+          <a:lstStyle/>
+          <a:p>
+            <a:r>
+              <a:t>Mide frecuencia relativa de las N palabras más comunes, normalizada por z-score</a:t>
+            </a:r>
+          </a:p>
+          <a:p>
+            <a:r>
+              <a:t>Delta bajo entre dos usuarios → estilo similar → candidato a misma persona</a:t>
+            </a:r>
+          </a:p>
+          <a:p>
+            <a:r>
+              <a:t>Corpus IronMarch: top-200 palabras función, top-150 usuarios (≥500 palabras)</a:t>
+            </a:r>
+          </a:p>
+          <a:p>
+            <a:r>
+              <a:t>Delta medio: 1.08  |  mínimo: 0.46  |  máximo: 2.03</a:t>
+            </a:r>
+          </a:p>
+          <a:p>
+            <a:r>
+              <a:t>Par más sospechoso: 255 + Talleyrand</a:t>
+            </a:r>
+          </a:p>
+          <a:p>
+            <a:pPr lvl="1" marL="274320" indent="-228600">
+              <a:buNone/>
+            </a:pPr>
+            <a:r>
+              <a:rPr sz="1500" b="0">
+                <a:solidFill>
+                  <a:srgbClr val="707888"/>
                 </a:solidFill>
                 <a:latin typeface="Arial"/>
               </a:rPr>
-              <a:t>DEMO EN VIVO</a:t>
-            </a:r>
-          </a:p>
-          <a:p>
-            <a:pPr algn="ctr"/>
-            <a:r>
-              <a:t>Demo — embeddings y Delta</a:t>
-            </a:r>
-          </a:p>
-          <a:p>
-            <a:pPr algn="ctr"/>
-            <a:r>
-              <a:rPr sz="1400">
-                <a:solidFill>
-                  <a:srgbClr val="9AA3B5"/>
-                </a:solidFill>
-                <a:latin typeface="Arial"/>
-              </a:rPr>
-              <a:t>IronMarch/03_embeddings_profiling.ipynb</a:t>
-            </a:r>
-          </a:p>
-        </p:txBody>
-      </p:sp>
-      <p:sp>
-        <p:nvSpPr>
-          <p:cNvPr id="3" name="TextBox 2"/>
-          <p:cNvSpPr txBox="1"/>
-          <p:nvPr/>
-        </p:nvSpPr>
-        <p:spPr>
-          <a:xfrm>
-            <a:off x="2505456" y="3657600"/>
-            <a:ext cx="7168896" cy="2560320"/>
-          </a:xfrm>
-          <a:prstGeom prst="rect">
-            <a:avLst/>
-          </a:prstGeom>
-          <a:noFill/>
-        </p:spPr>
-        <p:txBody>
-          <a:bodyPr wrap="square">
-            <a:spAutoFit/>
-          </a:bodyPr>
-          <a:lstStyle/>
-          <a:p>
-            <a:r>
-              <a:rPr sz="1600">
-                <a:solidFill>
-                  <a:srgbClr val="D6DAE2"/>
-                </a:solidFill>
-                <a:latin typeface="Arial"/>
-              </a:rPr>
-              <a:t>1.  Abrir notebook 03_embeddings_profiling</a:t>
-            </a:r>
-          </a:p>
-          <a:p>
-            <a:r>
-              <a:rPr sz="1600">
-                <a:solidFill>
-                  <a:srgbClr val="D6DAE2"/>
-                </a:solidFill>
-                <a:latin typeface="Arial"/>
-              </a:rPr>
-              <a:t>2.  Sección 1: verificar que las estrategias C/D/E están cacheadas</a:t>
-            </a:r>
-          </a:p>
-          <a:p>
-            <a:r>
-              <a:rPr sz="1600">
-                <a:solidFill>
-                  <a:srgbClr val="D6DAE2"/>
-                </a:solidFill>
-                <a:latin typeface="Arial"/>
-              </a:rPr>
-              <a:t>3.  Sección 2: UMAP interactivo → identificar clusters ideológicos</a:t>
-            </a:r>
-          </a:p>
-          <a:p>
-            <a:r>
-              <a:rPr sz="1600">
-                <a:solidFill>
-                  <a:srgbClr val="D6DAE2"/>
-                </a:solidFill>
-                <a:latin typeface="Arial"/>
-              </a:rPr>
-              <a:t>4.  Sección 3: heatmap Burrows' Delta → par 255+Talleyrand en esquina inferior</a:t>
+              <a:t>·  Delta=0.46, similitud temporal=0.99, Talleyrand: anicot@elon.edu, activo 2011–2014</a:t>
             </a:r>
           </a:p>
         </p:txBody>
@@ -8298,31 +8303,98 @@
           <a:p>
             <a:pPr algn="ctr"/>
             <a:r>
-              <a:rPr sz="1300" b="1">
+              <a:rPr sz="1700" b="1">
                 <a:solidFill>
                   <a:srgbClr val="CD2D37"/>
                 </a:solidFill>
                 <a:latin typeface="Arial"/>
               </a:rPr>
-              <a:t>SECCIÓN 5</a:t>
+              <a:t>DEMO EN VIVO</a:t>
             </a:r>
           </a:p>
           <a:p>
             <a:pPr algn="ctr"/>
             <a:r>
-              <a:t>Atribución y conclusiones</a:t>
+              <a:t>Demo — embeddings y Delta</a:t>
             </a:r>
           </a:p>
           <a:p>
             <a:pPr algn="ctr"/>
             <a:r>
-              <a:rPr sz="1600">
-                <a:solidFill>
-                  <a:srgbClr val="D6DAE2"/>
+              <a:rPr sz="1400">
+                <a:solidFill>
+                  <a:srgbClr val="9AA3B5"/>
                 </a:solidFill>
                 <a:latin typeface="Arial"/>
               </a:rPr>
-              <a:t>Señal combinada + limitaciones éticas</a:t>
+              <a:t>IronMarch/03_embeddings_profiling.ipynb</a:t>
+            </a:r>
+          </a:p>
+        </p:txBody>
+      </p:sp>
+      <p:sp>
+        <p:nvSpPr>
+          <p:cNvPr id="3" name="TextBox 2"/>
+          <p:cNvSpPr txBox="1"/>
+          <p:nvPr/>
+        </p:nvSpPr>
+        <p:spPr>
+          <a:xfrm>
+            <a:off x="2505456" y="3657600"/>
+            <a:ext cx="7168896" cy="2560320"/>
+          </a:xfrm>
+          <a:prstGeom prst="rect">
+            <a:avLst/>
+          </a:prstGeom>
+          <a:noFill/>
+        </p:spPr>
+        <p:txBody>
+          <a:bodyPr wrap="square">
+            <a:spAutoFit/>
+          </a:bodyPr>
+          <a:lstStyle/>
+          <a:p>
+            <a:r>
+              <a:rPr sz="1600">
+                <a:solidFill>
+                  <a:srgbClr val="D6DAE2"/>
+                </a:solidFill>
+                <a:latin typeface="Arial"/>
+              </a:rPr>
+              <a:t>1.  Abrir notebook 03_embeddings_profiling</a:t>
+            </a:r>
+          </a:p>
+          <a:p>
+            <a:r>
+              <a:rPr sz="1600">
+                <a:solidFill>
+                  <a:srgbClr val="D6DAE2"/>
+                </a:solidFill>
+                <a:latin typeface="Arial"/>
+              </a:rPr>
+              <a:t>2.  Sección 1: verificar que las estrategias C/D/E están cacheadas</a:t>
+            </a:r>
+          </a:p>
+          <a:p>
+            <a:r>
+              <a:rPr sz="1600">
+                <a:solidFill>
+                  <a:srgbClr val="D6DAE2"/>
+                </a:solidFill>
+                <a:latin typeface="Arial"/>
+              </a:rPr>
+              <a:t>3.  Sección 2: UMAP interactivo → identificar clusters ideológicos</a:t>
+            </a:r>
+          </a:p>
+          <a:p>
+            <a:r>
+              <a:rPr sz="1600">
+                <a:solidFill>
+                  <a:srgbClr val="D6DAE2"/>
+                </a:solidFill>
+                <a:latin typeface="Arial"/>
+              </a:rPr>
+              <a:t>4.  Sección 3: heatmap Burrows' Delta → par 255+Talleyrand en esquina inferior</a:t>
             </a:r>
           </a:p>
         </p:txBody>
@@ -8352,7 +8424,7 @@
             <a:spLocks noGrp="1"/>
           </p:cNvSpPr>
           <p:nvPr>
-            <p:ph type="body" idx="13" sz="quarter"/>
+            <p:ph type="body" idx="10" sz="quarter"/>
           </p:nvPr>
         </p:nvSpPr>
         <p:spPr/>
@@ -8360,59 +8432,33 @@
           <a:bodyPr wrap="square"/>
           <a:lstStyle/>
           <a:p>
-            <a:r>
-              <a:t>Señal combinada de atribución</a:t>
-            </a:r>
-          </a:p>
-        </p:txBody>
-      </p:sp>
-      <p:sp>
-        <p:nvSpPr>
-          <p:cNvPr id="3" name="Text Placeholder 2"/>
-          <p:cNvSpPr>
-            <a:spLocks noGrp="1"/>
-          </p:cNvSpPr>
-          <p:nvPr>
-            <p:ph type="body" idx="16" sz="quarter"/>
-          </p:nvPr>
-        </p:nvSpPr>
-        <p:spPr>
-          <a:xfrm>
-            <a:off x="1073427" y="2077576"/>
-            <a:ext cx="10084904" cy="3507298"/>
-          </a:xfrm>
-        </p:spPr>
-        <p:txBody>
-          <a:bodyPr wrap="square"/>
-          <a:lstStyle/>
-          <a:p>
-            <a:r>
-              <a:t>Ninguna señal sola es suficiente — se requiere convergencia</a:t>
-            </a:r>
-          </a:p>
-          <a:p>
-            <a:r>
-              <a:t>Burrows' Delta bajo → mismo estilo de escritura</a:t>
-            </a:r>
-          </a:p>
-          <a:p>
-            <a:r>
-              <a:t>Similitud temporal alta → mismo horario de actividad → mismo huso horario</a:t>
-            </a:r>
-          </a:p>
-          <a:p>
-            <a:r>
-              <a:t>Presencia en clusters UMAP cercanos → misma ideología y vocabulario</a:t>
-            </a:r>
-          </a:p>
-          <a:p>
-            <a:r>
-              <a:t>Co-participación en threads privados (PMs) → relación directa</a:t>
-            </a:r>
-          </a:p>
-          <a:p>
-            <a:r>
-              <a:t>Regla de tres: si ≥3 señales coinciden, el par merece investigación adicional</a:t>
+            <a:pPr algn="ctr"/>
+            <a:r>
+              <a:rPr sz="1700" b="1">
+                <a:solidFill>
+                  <a:srgbClr val="CD2D37"/>
+                </a:solidFill>
+                <a:latin typeface="Arial"/>
+              </a:rPr>
+              <a:t>SECCIÓN 5</a:t>
+            </a:r>
+          </a:p>
+          <a:p>
+            <a:pPr algn="ctr"/>
+            <a:r>
+              <a:t>Atribución y conclusiones</a:t>
+            </a:r>
+          </a:p>
+          <a:p>
+            <a:pPr algn="ctr"/>
+            <a:r>
+              <a:rPr sz="1600">
+                <a:solidFill>
+                  <a:srgbClr val="D6DAE2"/>
+                </a:solidFill>
+                <a:latin typeface="Arial"/>
+              </a:rPr>
+              <a:t>Señal combinada + limitaciones éticas</a:t>
             </a:r>
           </a:p>
         </p:txBody>
@@ -8451,7 +8497,7 @@
           <a:lstStyle/>
           <a:p>
             <a:r>
-              <a:t>Resumen ejecutivo</a:t>
+              <a:t>Señal combinada de atribución</a:t>
             </a:r>
           </a:p>
         </p:txBody>
@@ -8465,236 +8511,44 @@
           <p:nvPr>
             <p:ph type="body" idx="16" sz="quarter"/>
           </p:nvPr>
-        </p:nvSpPr>
-        <p:spPr/>
-        <p:txBody>
-          <a:bodyPr/>
-          <a:lstStyle/>
-          <a:p/>
-        </p:txBody>
-      </p:sp>
-      <p:sp>
-        <p:nvSpPr>
-          <p:cNvPr id="4" name="TextBox 3"/>
-          <p:cNvSpPr txBox="1"/>
-          <p:nvPr/>
         </p:nvSpPr>
         <p:spPr>
           <a:xfrm>
-            <a:off x="1051560" y="1691640"/>
-            <a:ext cx="4846320" cy="411480"/>
+            <a:off x="1073427" y="2214736"/>
+            <a:ext cx="10084904" cy="3370138"/>
           </a:xfrm>
-          <a:prstGeom prst="rect">
-            <a:avLst/>
-          </a:prstGeom>
-          <a:noFill/>
         </p:spPr>
         <p:txBody>
-          <a:bodyPr wrap="square">
-            <a:spAutoFit/>
-          </a:bodyPr>
+          <a:bodyPr wrap="square"/>
           <a:lstStyle/>
           <a:p>
-            <a:pPr algn="l"/>
-            <a:r>
-              <a:rPr sz="1600" b="1">
-                <a:solidFill>
-                  <a:srgbClr val="CD2D37"/>
-                </a:solidFill>
-                <a:latin typeface="Arial"/>
-              </a:rPr>
-              <a:t>Hallazgos técnicos</a:t>
-            </a:r>
-          </a:p>
-        </p:txBody>
-      </p:sp>
-      <p:sp>
-        <p:nvSpPr>
-          <p:cNvPr id="5" name="TextBox 4"/>
-          <p:cNvSpPr txBox="1"/>
-          <p:nvPr/>
-        </p:nvSpPr>
-        <p:spPr>
-          <a:xfrm>
-            <a:off x="1051560" y="2148840"/>
-            <a:ext cx="4846320" cy="3840480"/>
-          </a:xfrm>
-          <a:prstGeom prst="rect">
-            <a:avLst/>
-          </a:prstGeom>
-          <a:noFill/>
-        </p:spPr>
-        <p:txBody>
-          <a:bodyPr wrap="square">
-            <a:spAutoFit/>
-          </a:bodyPr>
-          <a:lstStyle/>
-          <a:p>
-            <a:r>
-              <a:rPr sz="1600">
-                <a:solidFill>
-                  <a:srgbClr val="465461"/>
-                </a:solidFill>
-                <a:latin typeface="Arial"/>
-              </a:rPr>
-              <a:t>▸  100% de usuarios en componente gigante</a:t>
-            </a:r>
-          </a:p>
-          <a:p>
-            <a:r>
-              <a:rPr sz="1600">
-                <a:solidFill>
-                  <a:srgbClr val="465461"/>
-                </a:solidFill>
-                <a:latin typeface="Arial"/>
-              </a:rPr>
-              <a:t>▸  Dos capas de influencia: pública (MOONLORD) y oculta (usuario 255)</a:t>
-            </a:r>
-          </a:p>
-          <a:p>
-            <a:r>
-              <a:rPr sz="1600">
-                <a:solidFill>
-                  <a:srgbClr val="465461"/>
-                </a:solidFill>
-                <a:latin typeface="Arial"/>
-              </a:rPr>
-              <a:t>▸  Top-100 posts = 86% de fidelidad al embedding completo</a:t>
-            </a:r>
-          </a:p>
-          <a:p>
-            <a:r>
-              <a:rPr sz="1600">
-                <a:solidFill>
-                  <a:srgbClr val="465461"/>
-                </a:solidFill>
-                <a:latin typeface="Arial"/>
-              </a:rPr>
-              <a:t>▸  Atentados de París: único evento con spike confirmado (×1.62)</a:t>
-            </a:r>
-          </a:p>
-          <a:p>
-            <a:r>
-              <a:rPr sz="1600">
-                <a:solidFill>
-                  <a:srgbClr val="465461"/>
-                </a:solidFill>
-                <a:latin typeface="Arial"/>
-              </a:rPr>
-              <a:t>▸  Par 255+Talleyrand: candidato prioritario a investigación</a:t>
-            </a:r>
-          </a:p>
-        </p:txBody>
-      </p:sp>
-      <p:sp>
-        <p:nvSpPr>
-          <p:cNvPr id="6" name="TextBox 5"/>
-          <p:cNvSpPr txBox="1"/>
-          <p:nvPr/>
-        </p:nvSpPr>
-        <p:spPr>
-          <a:xfrm>
-            <a:off x="6217920" y="1691640"/>
-            <a:ext cx="4846320" cy="411480"/>
-          </a:xfrm>
-          <a:prstGeom prst="rect">
-            <a:avLst/>
-          </a:prstGeom>
-          <a:noFill/>
-        </p:spPr>
-        <p:txBody>
-          <a:bodyPr wrap="square">
-            <a:spAutoFit/>
-          </a:bodyPr>
-          <a:lstStyle/>
-          <a:p>
-            <a:pPr algn="l"/>
-            <a:r>
-              <a:rPr sz="1600" b="1">
-                <a:solidFill>
-                  <a:srgbClr val="CD2D37"/>
-                </a:solidFill>
-                <a:latin typeface="Arial"/>
-              </a:rPr>
-              <a:t>Limitaciones y ética</a:t>
-            </a:r>
-          </a:p>
-        </p:txBody>
-      </p:sp>
-      <p:sp>
-        <p:nvSpPr>
-          <p:cNvPr id="7" name="TextBox 6"/>
-          <p:cNvSpPr txBox="1"/>
-          <p:nvPr/>
-        </p:nvSpPr>
-        <p:spPr>
-          <a:xfrm>
-            <a:off x="6217920" y="2148840"/>
-            <a:ext cx="4846320" cy="3840480"/>
-          </a:xfrm>
-          <a:prstGeom prst="rect">
-            <a:avLst/>
-          </a:prstGeom>
-          <a:noFill/>
-        </p:spPr>
-        <p:txBody>
-          <a:bodyPr wrap="square">
-            <a:spAutoFit/>
-          </a:bodyPr>
-          <a:lstStyle/>
-          <a:p>
-            <a:r>
-              <a:rPr sz="1600">
-                <a:solidFill>
-                  <a:srgbClr val="465461"/>
-                </a:solidFill>
-                <a:latin typeface="Arial"/>
-              </a:rPr>
-              <a:t>▸  Análisis exploratorio: los resultados son leads, no pruebas</a:t>
-            </a:r>
-          </a:p>
-          <a:p>
-            <a:r>
-              <a:rPr sz="1600">
-                <a:solidFill>
-                  <a:srgbClr val="465461"/>
-                </a:solidFill>
-                <a:latin typeface="Arial"/>
-              </a:rPr>
-              <a:t>▸  Delta en corpus homogéneo tiene menor poder discriminante</a:t>
-            </a:r>
-          </a:p>
-          <a:p>
-            <a:r>
-              <a:rPr sz="1600">
-                <a:solidFill>
-                  <a:srgbClr val="465461"/>
-                </a:solidFill>
-                <a:latin typeface="Arial"/>
-              </a:rPr>
-              <a:t>▸  Datos de personas reales: manejo mínimamente invasivo</a:t>
-            </a:r>
-          </a:p>
-          <a:p>
-            <a:r>
-              <a:rPr sz="1600">
-                <a:solidFill>
-                  <a:srgbClr val="465461"/>
-                </a:solidFill>
-                <a:latin typeface="Arial"/>
-              </a:rPr>
-              <a:t>▸  Objetivo defensivo: entender la red, no publicar perfiles</a:t>
-            </a:r>
-          </a:p>
-          <a:p>
-            <a:r>
-              <a:rPr sz="1600">
-                <a:solidFill>
-                  <a:srgbClr val="465461"/>
-                </a:solidFill>
-                <a:latin typeface="Arial"/>
-              </a:rPr>
-              <a:t>▸  Ground truth valida la metodología, no identifica nuevos actores</a:t>
+            <a:r>
+              <a:t>Ninguna señal sola es suficiente — se requiere convergencia</a:t>
+            </a:r>
+          </a:p>
+          <a:p>
+            <a:r>
+              <a:t>Burrows' Delta bajo → mismo estilo de escritura</a:t>
+            </a:r>
+          </a:p>
+          <a:p>
+            <a:r>
+              <a:t>Similitud temporal alta → mismo horario de actividad → mismo huso horario</a:t>
+            </a:r>
+          </a:p>
+          <a:p>
+            <a:r>
+              <a:t>Presencia en clusters UMAP cercanos → misma ideología y vocabulario</a:t>
+            </a:r>
+          </a:p>
+          <a:p>
+            <a:r>
+              <a:t>Co-participación en threads privados (PMs) → relación directa</a:t>
+            </a:r>
+          </a:p>
+          <a:p>
+            <a:r>
+              <a:t>Regla de tres: si ≥3 señales coinciden, el par merece investigación adicional</a:t>
             </a:r>
           </a:p>
         </p:txBody>
@@ -8733,7 +8587,7 @@
           <a:lstStyle/>
           <a:p>
             <a:r>
-              <a:t>¿Qué aprendemos del caso IronMarch?</a:t>
+              <a:t>Resumen ejecutivo</a:t>
             </a:r>
           </a:p>
         </p:txBody>
@@ -8747,11 +8601,383 @@
           <p:nvPr>
             <p:ph type="body" idx="16" sz="quarter"/>
           </p:nvPr>
+        </p:nvSpPr>
+        <p:spPr/>
+        <p:txBody>
+          <a:bodyPr/>
+          <a:lstStyle/>
+          <a:p/>
+        </p:txBody>
+      </p:sp>
+      <p:sp>
+        <p:nvSpPr>
+          <p:cNvPr id="4" name="TextBox 3"/>
+          <p:cNvSpPr txBox="1"/>
+          <p:nvPr/>
         </p:nvSpPr>
         <p:spPr>
           <a:xfrm>
-            <a:off x="1073427" y="2077576"/>
-            <a:ext cx="10084904" cy="3507298"/>
+            <a:off x="1051560" y="1828800"/>
+            <a:ext cx="4846320" cy="411480"/>
+          </a:xfrm>
+          <a:prstGeom prst="rect">
+            <a:avLst/>
+          </a:prstGeom>
+          <a:noFill/>
+        </p:spPr>
+        <p:txBody>
+          <a:bodyPr wrap="square">
+            <a:spAutoFit/>
+          </a:bodyPr>
+          <a:lstStyle/>
+          <a:p>
+            <a:pPr algn="l"/>
+            <a:r>
+              <a:rPr sz="1600" b="1">
+                <a:solidFill>
+                  <a:srgbClr val="CD2D37"/>
+                </a:solidFill>
+                <a:latin typeface="Arial"/>
+              </a:rPr>
+              <a:t>Hallazgos técnicos</a:t>
+            </a:r>
+          </a:p>
+        </p:txBody>
+      </p:sp>
+      <p:sp>
+        <p:nvSpPr>
+          <p:cNvPr id="5" name="TextBox 4"/>
+          <p:cNvSpPr txBox="1"/>
+          <p:nvPr/>
+        </p:nvSpPr>
+        <p:spPr>
+          <a:xfrm>
+            <a:off x="1051560" y="2286000"/>
+            <a:ext cx="4846320" cy="3703320"/>
+          </a:xfrm>
+          <a:prstGeom prst="rect">
+            <a:avLst/>
+          </a:prstGeom>
+          <a:noFill/>
+        </p:spPr>
+        <p:txBody>
+          <a:bodyPr wrap="square">
+            <a:spAutoFit/>
+          </a:bodyPr>
+          <a:lstStyle/>
+          <a:p>
+            <a:r>
+              <a:rPr sz="1600">
+                <a:solidFill>
+                  <a:srgbClr val="CD2D37"/>
+                </a:solidFill>
+                <a:latin typeface="Arial"/>
+              </a:rPr>
+              <a:t>▸  </a:t>
+            </a:r>
+            <a:r>
+              <a:rPr sz="1600">
+                <a:solidFill>
+                  <a:srgbClr val="465461"/>
+                </a:solidFill>
+                <a:latin typeface="Arial"/>
+              </a:rPr>
+              <a:t>100% de usuarios en componente gigante</a:t>
+            </a:r>
+          </a:p>
+          <a:p>
+            <a:r>
+              <a:rPr sz="1600">
+                <a:solidFill>
+                  <a:srgbClr val="CD2D37"/>
+                </a:solidFill>
+                <a:latin typeface="Arial"/>
+              </a:rPr>
+              <a:t>▸  </a:t>
+            </a:r>
+            <a:r>
+              <a:rPr sz="1600">
+                <a:solidFill>
+                  <a:srgbClr val="465461"/>
+                </a:solidFill>
+                <a:latin typeface="Arial"/>
+              </a:rPr>
+              <a:t>Dos capas de influencia: pública (MOONLORD) y oculta (usuario 255)</a:t>
+            </a:r>
+          </a:p>
+          <a:p>
+            <a:r>
+              <a:rPr sz="1600">
+                <a:solidFill>
+                  <a:srgbClr val="CD2D37"/>
+                </a:solidFill>
+                <a:latin typeface="Arial"/>
+              </a:rPr>
+              <a:t>▸  </a:t>
+            </a:r>
+            <a:r>
+              <a:rPr sz="1600">
+                <a:solidFill>
+                  <a:srgbClr val="465461"/>
+                </a:solidFill>
+                <a:latin typeface="Arial"/>
+              </a:rPr>
+              <a:t>Top-100 posts = 86% de fidelidad al embedding completo</a:t>
+            </a:r>
+          </a:p>
+          <a:p>
+            <a:r>
+              <a:rPr sz="1600">
+                <a:solidFill>
+                  <a:srgbClr val="CD2D37"/>
+                </a:solidFill>
+                <a:latin typeface="Arial"/>
+              </a:rPr>
+              <a:t>▸  </a:t>
+            </a:r>
+            <a:r>
+              <a:rPr sz="1600">
+                <a:solidFill>
+                  <a:srgbClr val="465461"/>
+                </a:solidFill>
+                <a:latin typeface="Arial"/>
+              </a:rPr>
+              <a:t>Atentados de París: único evento con spike confirmado (×1.62)</a:t>
+            </a:r>
+          </a:p>
+          <a:p>
+            <a:r>
+              <a:rPr sz="1600">
+                <a:solidFill>
+                  <a:srgbClr val="CD2D37"/>
+                </a:solidFill>
+                <a:latin typeface="Arial"/>
+              </a:rPr>
+              <a:t>▸  </a:t>
+            </a:r>
+            <a:r>
+              <a:rPr sz="1600">
+                <a:solidFill>
+                  <a:srgbClr val="465461"/>
+                </a:solidFill>
+                <a:latin typeface="Arial"/>
+              </a:rPr>
+              <a:t>Par 255+Talleyrand: candidato prioritario a investigación</a:t>
+            </a:r>
+          </a:p>
+        </p:txBody>
+      </p:sp>
+      <p:sp>
+        <p:nvSpPr>
+          <p:cNvPr id="6" name="TextBox 5"/>
+          <p:cNvSpPr txBox="1"/>
+          <p:nvPr/>
+        </p:nvSpPr>
+        <p:spPr>
+          <a:xfrm>
+            <a:off x="6217920" y="1828800"/>
+            <a:ext cx="4846320" cy="411480"/>
+          </a:xfrm>
+          <a:prstGeom prst="rect">
+            <a:avLst/>
+          </a:prstGeom>
+          <a:noFill/>
+        </p:spPr>
+        <p:txBody>
+          <a:bodyPr wrap="square">
+            <a:spAutoFit/>
+          </a:bodyPr>
+          <a:lstStyle/>
+          <a:p>
+            <a:pPr algn="l"/>
+            <a:r>
+              <a:rPr sz="1600" b="1">
+                <a:solidFill>
+                  <a:srgbClr val="CD2D37"/>
+                </a:solidFill>
+                <a:latin typeface="Arial"/>
+              </a:rPr>
+              <a:t>Limitaciones y ética</a:t>
+            </a:r>
+          </a:p>
+        </p:txBody>
+      </p:sp>
+      <p:sp>
+        <p:nvSpPr>
+          <p:cNvPr id="7" name="TextBox 6"/>
+          <p:cNvSpPr txBox="1"/>
+          <p:nvPr/>
+        </p:nvSpPr>
+        <p:spPr>
+          <a:xfrm>
+            <a:off x="6217920" y="2286000"/>
+            <a:ext cx="4846320" cy="3703320"/>
+          </a:xfrm>
+          <a:prstGeom prst="rect">
+            <a:avLst/>
+          </a:prstGeom>
+          <a:noFill/>
+        </p:spPr>
+        <p:txBody>
+          <a:bodyPr wrap="square">
+            <a:spAutoFit/>
+          </a:bodyPr>
+          <a:lstStyle/>
+          <a:p>
+            <a:r>
+              <a:rPr sz="1600">
+                <a:solidFill>
+                  <a:srgbClr val="CD2D37"/>
+                </a:solidFill>
+                <a:latin typeface="Arial"/>
+              </a:rPr>
+              <a:t>▸  </a:t>
+            </a:r>
+            <a:r>
+              <a:rPr sz="1600">
+                <a:solidFill>
+                  <a:srgbClr val="465461"/>
+                </a:solidFill>
+                <a:latin typeface="Arial"/>
+              </a:rPr>
+              <a:t>Análisis exploratorio: los resultados son leads, no pruebas</a:t>
+            </a:r>
+          </a:p>
+          <a:p>
+            <a:r>
+              <a:rPr sz="1600">
+                <a:solidFill>
+                  <a:srgbClr val="CD2D37"/>
+                </a:solidFill>
+                <a:latin typeface="Arial"/>
+              </a:rPr>
+              <a:t>▸  </a:t>
+            </a:r>
+            <a:r>
+              <a:rPr sz="1600">
+                <a:solidFill>
+                  <a:srgbClr val="465461"/>
+                </a:solidFill>
+                <a:latin typeface="Arial"/>
+              </a:rPr>
+              <a:t>Delta en corpus homogéneo tiene menor poder discriminante</a:t>
+            </a:r>
+          </a:p>
+          <a:p>
+            <a:r>
+              <a:rPr sz="1600">
+                <a:solidFill>
+                  <a:srgbClr val="CD2D37"/>
+                </a:solidFill>
+                <a:latin typeface="Arial"/>
+              </a:rPr>
+              <a:t>▸  </a:t>
+            </a:r>
+            <a:r>
+              <a:rPr sz="1600">
+                <a:solidFill>
+                  <a:srgbClr val="465461"/>
+                </a:solidFill>
+                <a:latin typeface="Arial"/>
+              </a:rPr>
+              <a:t>Datos de personas reales: manejo mínimamente invasivo</a:t>
+            </a:r>
+          </a:p>
+          <a:p>
+            <a:r>
+              <a:rPr sz="1600">
+                <a:solidFill>
+                  <a:srgbClr val="CD2D37"/>
+                </a:solidFill>
+                <a:latin typeface="Arial"/>
+              </a:rPr>
+              <a:t>▸  </a:t>
+            </a:r>
+            <a:r>
+              <a:rPr sz="1600">
+                <a:solidFill>
+                  <a:srgbClr val="465461"/>
+                </a:solidFill>
+                <a:latin typeface="Arial"/>
+              </a:rPr>
+              <a:t>Objetivo defensivo: entender la red, no publicar perfiles</a:t>
+            </a:r>
+          </a:p>
+          <a:p>
+            <a:r>
+              <a:rPr sz="1600">
+                <a:solidFill>
+                  <a:srgbClr val="CD2D37"/>
+                </a:solidFill>
+                <a:latin typeface="Arial"/>
+              </a:rPr>
+              <a:t>▸  </a:t>
+            </a:r>
+            <a:r>
+              <a:rPr sz="1600">
+                <a:solidFill>
+                  <a:srgbClr val="465461"/>
+                </a:solidFill>
+                <a:latin typeface="Arial"/>
+              </a:rPr>
+              <a:t>Ground truth valida la metodología, no identifica nuevos actores</a:t>
+            </a:r>
+          </a:p>
+        </p:txBody>
+      </p:sp>
+    </p:spTree>
+  </p:cSld>
+  <p:clrMapOvr>
+    <a:masterClrMapping/>
+  </p:clrMapOvr>
+</p:sld>
+</file>
+
+<file path=ppt/slides/slide26.xml><?xml version="1.0" encoding="utf-8"?>
+<p:sld xmlns:a="http://schemas.openxmlformats.org/drawingml/2006/main" xmlns:p="http://schemas.openxmlformats.org/presentationml/2006/main" xmlns:r="http://schemas.openxmlformats.org/officeDocument/2006/relationships">
+  <p:cSld>
+    <p:spTree>
+      <p:nvGrpSpPr>
+        <p:cNvPr id="1" name=""/>
+        <p:cNvGrpSpPr/>
+        <p:nvPr/>
+      </p:nvGrpSpPr>
+      <p:grpSpPr/>
+      <p:sp>
+        <p:nvSpPr>
+          <p:cNvPr id="2" name="Text Placeholder 1"/>
+          <p:cNvSpPr>
+            <a:spLocks noGrp="1"/>
+          </p:cNvSpPr>
+          <p:nvPr>
+            <p:ph type="body" idx="13" sz="quarter"/>
+          </p:nvPr>
+        </p:nvSpPr>
+        <p:spPr/>
+        <p:txBody>
+          <a:bodyPr wrap="square"/>
+          <a:lstStyle/>
+          <a:p>
+            <a:r>
+              <a:t>¿Qué aprendemos del caso IronMarch?</a:t>
+            </a:r>
+          </a:p>
+        </p:txBody>
+      </p:sp>
+      <p:sp>
+        <p:nvSpPr>
+          <p:cNvPr id="3" name="Text Placeholder 2"/>
+          <p:cNvSpPr>
+            <a:spLocks noGrp="1"/>
+          </p:cNvSpPr>
+          <p:nvPr>
+            <p:ph type="body" idx="16" sz="quarter"/>
+          </p:nvPr>
+        </p:nvSpPr>
+        <p:spPr>
+          <a:xfrm>
+            <a:off x="1073427" y="2214736"/>
+            <a:ext cx="10084904" cy="3370138"/>
           </a:xfrm>
         </p:spPr>
         <p:txBody>
@@ -8833,7 +9059,12 @@
             <p:ph type="body" idx="16" sz="quarter"/>
           </p:nvPr>
         </p:nvSpPr>
-        <p:spPr/>
+        <p:spPr>
+          <a:xfrm>
+            <a:off x="1073427" y="1711816"/>
+            <a:ext cx="10084904" cy="3873058"/>
+          </a:xfrm>
+        </p:spPr>
         <p:txBody>
           <a:bodyPr wrap="square"/>
           <a:lstStyle/>
@@ -8929,7 +9160,7 @@
           <p:nvPr/>
         </p:nvGraphicFramePr>
         <p:xfrm>
-          <a:off x="1051560" y="2148840"/>
+          <a:off x="1051560" y="2286000"/>
           <a:ext cx="10058400" cy="2194560"/>
         </p:xfrm>
         <a:graphic>
@@ -9441,8 +9672,8 @@
         </p:nvSpPr>
         <p:spPr>
           <a:xfrm>
-            <a:off x="1073427" y="2077576"/>
-            <a:ext cx="10084904" cy="3507298"/>
+            <a:off x="1073427" y="2214736"/>
+            <a:ext cx="10084904" cy="3370138"/>
           </a:xfrm>
         </p:spPr>
         <p:txBody>
@@ -9542,7 +9773,7 @@
           <a:p>
             <a:pPr algn="ctr"/>
             <a:r>
-              <a:rPr sz="1300" b="1">
+              <a:rPr sz="1700" b="1">
                 <a:solidFill>
                   <a:srgbClr val="CD2D37"/>
                 </a:solidFill>
@@ -9605,7 +9836,7 @@
           <a:lstStyle/>
           <a:p>
             <a:r>
-              <a:t>EDA — primeras métricas</a:t>
+              <a:t>EDA — primeras métricas (apoyo, no protagonista)</a:t>
             </a:r>
           </a:p>
         </p:txBody>
@@ -9620,7 +9851,12 @@
             <p:ph type="body" idx="16" sz="quarter"/>
           </p:nvPr>
         </p:nvSpPr>
-        <p:spPr/>
+        <p:spPr>
+          <a:xfrm>
+            <a:off x="1073427" y="2214736"/>
+            <a:ext cx="10084904" cy="3370138"/>
+          </a:xfrm>
+        </p:spPr>
         <p:txBody>
           <a:bodyPr wrap="square"/>
           <a:lstStyle/>
@@ -9631,22 +9867,12 @@
           </a:p>
           <a:p>
             <a:r>
-              <a:t>157,779 posts válidos tras limpieza: media de 189 posts/usuario activo</a:t>
-            </a:r>
-          </a:p>
-          <a:p>
-            <a:r>
-              <a:t>Actividad: 2011–2017. Pico en 2015 (atentados de París) → +62% baseline</a:t>
-            </a:r>
-          </a:p>
-          <a:p>
-            <a:r>
-              <a:t>138 subforos activos, pero concentración alta: top-5 generan el 60% del tráfico</a:t>
-            </a:r>
-          </a:p>
-          <a:p>
-            <a:r>
-              <a:t>Idioma: inglés (verificado por detección automática) → pipeline estándar válido</a:t>
+              <a:t>157,779 posts válidos, top-5 de 138 subforos concentran el 60% del tráfico</a:t>
+            </a:r>
+          </a:p>
+          <a:p>
+            <a:r>
+              <a:t>Idioma: &gt;95% inglés (verificado) → pipeline estándar válido sin ajustes</a:t>
             </a:r>
           </a:p>
         </p:txBody>
@@ -9715,7 +9941,7 @@
         </p:nvSpPr>
         <p:spPr>
           <a:xfrm>
-            <a:off x="1051560" y="2194560"/>
+            <a:off x="1051560" y="2331720"/>
             <a:ext cx="4846320" cy="411480"/>
           </a:xfrm>
           <a:prstGeom prst="rect">
@@ -9750,8 +9976,8 @@
         </p:nvSpPr>
         <p:spPr>
           <a:xfrm>
-            <a:off x="1051560" y="2651760"/>
-            <a:ext cx="4846320" cy="3337560"/>
+            <a:off x="1051560" y="2788920"/>
+            <a:ext cx="4846320" cy="3200400"/>
           </a:xfrm>
           <a:prstGeom prst="rect">
             <a:avLst/>
@@ -9767,14 +9993,12 @@
             <a:r>
               <a:rPr sz="1600">
                 <a:solidFill>
-                  <a:srgbClr val="465461"/>
+                  <a:srgbClr val="CD2D37"/>
                 </a:solidFill>
                 <a:latin typeface="Arial"/>
               </a:rPr>
-              <a:t>▸  836 nodos, 100% en componente gigante</a:t>
-            </a:r>
-          </a:p>
-          <a:p>
+              <a:t>▸  </a:t>
+            </a:r>
             <a:r>
               <a:rPr sz="1600">
                 <a:solidFill>
@@ -9782,21 +10006,19 @@
                 </a:solidFill>
                 <a:latin typeface="Arial"/>
               </a:rPr>
-              <a:t>▸  Broker principal: MOONLORD (Slavros)</a:t>
+              <a:t>836 nodos, 100% en componente gigante</a:t>
             </a:r>
           </a:p>
           <a:p>
             <a:r>
               <a:rPr sz="1600">
                 <a:solidFill>
-                  <a:srgbClr val="465461"/>
+                  <a:srgbClr val="CD2D37"/>
                 </a:solidFill>
                 <a:latin typeface="Arial"/>
               </a:rPr>
-              <a:t>▸  Estructura de hub-and-spoke: el fundador conecta grupos ideológicos</a:t>
-            </a:r>
-          </a:p>
-          <a:p>
+              <a:t>▸  </a:t>
+            </a:r>
             <a:r>
               <a:rPr sz="1600">
                 <a:solidFill>
@@ -9804,7 +10026,47 @@
                 </a:solidFill>
                 <a:latin typeface="Arial"/>
               </a:rPr>
-              <a:t>▸  Hilos filosóficos (Evola, Spengler) concentran el betweenness</a:t>
+              <a:t>Broker principal: MOONLORD (Slavros)</a:t>
+            </a:r>
+          </a:p>
+          <a:p>
+            <a:r>
+              <a:rPr sz="1600">
+                <a:solidFill>
+                  <a:srgbClr val="CD2D37"/>
+                </a:solidFill>
+                <a:latin typeface="Arial"/>
+              </a:rPr>
+              <a:t>▸  </a:t>
+            </a:r>
+            <a:r>
+              <a:rPr sz="1600">
+                <a:solidFill>
+                  <a:srgbClr val="465461"/>
+                </a:solidFill>
+                <a:latin typeface="Arial"/>
+              </a:rPr>
+              <a:t>Estructura de hub-and-spoke: el fundador conecta grupos ideológicos</a:t>
+            </a:r>
+          </a:p>
+          <a:p>
+            <a:r>
+              <a:rPr sz="1600">
+                <a:solidFill>
+                  <a:srgbClr val="CD2D37"/>
+                </a:solidFill>
+                <a:latin typeface="Arial"/>
+              </a:rPr>
+              <a:t>▸  </a:t>
+            </a:r>
+            <a:r>
+              <a:rPr sz="1600">
+                <a:solidFill>
+                  <a:srgbClr val="465461"/>
+                </a:solidFill>
+                <a:latin typeface="Arial"/>
+              </a:rPr>
+              <a:t>Hilos filosóficos (Evola, Spengler) concentran el betweenness</a:t>
             </a:r>
           </a:p>
         </p:txBody>
@@ -9817,7 +10079,7 @@
         </p:nvSpPr>
         <p:spPr>
           <a:xfrm>
-            <a:off x="6217920" y="2194560"/>
+            <a:off x="6217920" y="2331720"/>
             <a:ext cx="4846320" cy="411480"/>
           </a:xfrm>
           <a:prstGeom prst="rect">
@@ -9852,8 +10114,8 @@
         </p:nvSpPr>
         <p:spPr>
           <a:xfrm>
-            <a:off x="6217920" y="2651760"/>
-            <a:ext cx="4846320" cy="3337560"/>
+            <a:off x="6217920" y="2788920"/>
+            <a:ext cx="4846320" cy="3200400"/>
           </a:xfrm>
           <a:prstGeom prst="rect">
             <a:avLst/>
@@ -9869,14 +10131,12 @@
             <a:r>
               <a:rPr sz="1600">
                 <a:solidFill>
-                  <a:srgbClr val="465461"/>
+                  <a:srgbClr val="CD2D37"/>
                 </a:solidFill>
                 <a:latin typeface="Arial"/>
               </a:rPr>
-              <a:t>▸  55K PMs — dato rarísimo en leaks de foros</a:t>
-            </a:r>
-          </a:p>
-          <a:p>
+              <a:t>▸  </a:t>
+            </a:r>
             <a:r>
               <a:rPr sz="1600">
                 <a:solidFill>
@@ -9884,21 +10144,19 @@
                 </a:solidFill>
                 <a:latin typeface="Arial"/>
               </a:rPr>
-              <a:t>▸  Broker principal: usuario 255 (userid=0, admin)</a:t>
+              <a:t>55K PMs — dato rarísimo en leaks de foros</a:t>
             </a:r>
           </a:p>
           <a:p>
             <a:r>
               <a:rPr sz="1600">
                 <a:solidFill>
-                  <a:srgbClr val="465461"/>
+                  <a:srgbClr val="CD2D37"/>
                 </a:solidFill>
                 <a:latin typeface="Arial"/>
               </a:rPr>
-              <a:t>▸  53% del betweenness en la red privada</a:t>
-            </a:r>
-          </a:p>
-          <a:p>
+              <a:t>▸  </a:t>
+            </a:r>
             <a:r>
               <a:rPr sz="1600">
                 <a:solidFill>
@@ -9906,7 +10164,47 @@
                 </a:solidFill>
                 <a:latin typeface="Arial"/>
               </a:rPr>
-              <a:t>▸  Los brokers públicos y privados NO coinciden</a:t>
+              <a:t>Broker principal: usuario 255 (userid=0, admin)</a:t>
+            </a:r>
+          </a:p>
+          <a:p>
+            <a:r>
+              <a:rPr sz="1600">
+                <a:solidFill>
+                  <a:srgbClr val="CD2D37"/>
+                </a:solidFill>
+                <a:latin typeface="Arial"/>
+              </a:rPr>
+              <a:t>▸  </a:t>
+            </a:r>
+            <a:r>
+              <a:rPr sz="1600">
+                <a:solidFill>
+                  <a:srgbClr val="465461"/>
+                </a:solidFill>
+                <a:latin typeface="Arial"/>
+              </a:rPr>
+              <a:t>53% del betweenness en PMs, invisible en la actividad pública</a:t>
+            </a:r>
+          </a:p>
+          <a:p>
+            <a:r>
+              <a:rPr sz="1600">
+                <a:solidFill>
+                  <a:srgbClr val="CD2D37"/>
+                </a:solidFill>
+                <a:latin typeface="Arial"/>
+              </a:rPr>
+              <a:t>▸  </a:t>
+            </a:r>
+            <a:r>
+              <a:rPr sz="1600">
+                <a:solidFill>
+                  <a:srgbClr val="465461"/>
+                </a:solidFill>
+                <a:latin typeface="Arial"/>
+              </a:rPr>
+              <a:t>Influencia visible ≠ influencia estructural real</a:t>
             </a:r>
           </a:p>
         </p:txBody>
@@ -9945,7 +10243,7 @@
           <a:lstStyle/>
           <a:p>
             <a:r>
-              <a:t>Detección de idioma — paso obligatorio</a:t>
+              <a:t>¿Por qué muestreo (k) y no betweenness exacto?</a:t>
             </a:r>
           </a:p>
         </p:txBody>
@@ -9959,39 +10257,161 @@
           <p:nvPr>
             <p:ph type="body" idx="16" sz="quarter"/>
           </p:nvPr>
+        </p:nvSpPr>
+        <p:spPr/>
+        <p:txBody>
+          <a:bodyPr/>
+          <a:lstStyle/>
+          <a:p/>
+        </p:txBody>
+      </p:sp>
+      <p:sp>
+        <p:nvSpPr>
+          <p:cNvPr id="4" name="TextBox 3"/>
+          <p:cNvSpPr txBox="1"/>
+          <p:nvPr/>
         </p:nvSpPr>
         <p:spPr>
           <a:xfrm>
-            <a:off x="1073427" y="2077576"/>
-            <a:ext cx="10084904" cy="3507298"/>
+            <a:off x="1051560" y="2331720"/>
+            <a:ext cx="10058400" cy="502920"/>
           </a:xfrm>
+          <a:prstGeom prst="rect">
+            <a:avLst/>
+          </a:prstGeom>
+          <a:noFill/>
         </p:spPr>
         <p:txBody>
-          <a:bodyPr wrap="square"/>
+          <a:bodyPr wrap="square">
+            <a:spAutoFit/>
+          </a:bodyPr>
           <a:lstStyle/>
           <a:p>
-            <a:r>
-              <a:t>Burrows' Delta, NER y BERTopic son idioma-específicos</a:t>
-            </a:r>
-          </a:p>
-          <a:p>
-            <a:r>
-              <a:t>Sin verificación previa, aplicar el pipeline inglés a texto ruso produce ruido</a:t>
-            </a:r>
-          </a:p>
-          <a:p>
-            <a:r>
-              <a:t>Resultado IronMarch: &gt;95% inglés → pipeline estándar válido</a:t>
-            </a:r>
-          </a:p>
-          <a:p>
-            <a:r>
-              <a:t>La misma metodología aplicada a un foro en ruso requeriría un pipeline distinto</a:t>
-            </a:r>
-          </a:p>
-          <a:p>
-            <a:r>
-              <a:t>Regla general: detectar idioma ANTES de cualquier modelo NLP</a:t>
+            <a:pPr algn="l"/>
+            <a:r>
+              <a:rPr sz="1600" b="0">
+                <a:solidFill>
+                  <a:srgbClr val="465461"/>
+                </a:solidFill>
+                <a:latin typeface="Arial"/>
+              </a:rPr>
+              <a:t>Betweenness exacto es O(V·E) — horas en grafos grandes. Estimamos con k nodos origen al azar:</a:t>
+            </a:r>
+          </a:p>
+        </p:txBody>
+      </p:sp>
+      <p:sp>
+        <p:nvSpPr>
+          <p:cNvPr id="5" name="Rectangle 4"/>
+          <p:cNvSpPr/>
+          <p:nvPr/>
+        </p:nvSpPr>
+        <p:spPr>
+          <a:xfrm>
+            <a:off x="1005840" y="2880360"/>
+            <a:ext cx="10149840" cy="2926080"/>
+          </a:xfrm>
+          <a:prstGeom prst="rect">
+            <a:avLst/>
+          </a:prstGeom>
+          <a:solidFill>
+            <a:srgbClr val="0D1B2A"/>
+          </a:solidFill>
+          <a:ln>
+            <a:noFill/>
+          </a:ln>
+        </p:spPr>
+        <p:style>
+          <a:lnRef idx="1">
+            <a:schemeClr val="accent1"/>
+          </a:lnRef>
+          <a:fillRef idx="3">
+            <a:schemeClr val="accent1"/>
+          </a:fillRef>
+          <a:effectRef idx="2">
+            <a:schemeClr val="accent1"/>
+          </a:effectRef>
+          <a:fontRef idx="minor">
+            <a:schemeClr val="lt1"/>
+          </a:fontRef>
+        </p:style>
+        <p:txBody>
+          <a:bodyPr rtlCol="0" anchor="ctr"/>
+          <a:lstStyle/>
+          <a:p>
+            <a:pPr algn="ctr"/>
+          </a:p>
+        </p:txBody>
+      </p:sp>
+      <p:sp>
+        <p:nvSpPr>
+          <p:cNvPr id="6" name="TextBox 5"/>
+          <p:cNvSpPr txBox="1"/>
+          <p:nvPr/>
+        </p:nvSpPr>
+        <p:spPr>
+          <a:xfrm>
+            <a:off x="1188720" y="3017520"/>
+            <a:ext cx="9784080" cy="2651760"/>
+          </a:xfrm>
+          <a:prstGeom prst="rect">
+            <a:avLst/>
+          </a:prstGeom>
+          <a:noFill/>
+        </p:spPr>
+        <p:txBody>
+          <a:bodyPr wrap="none">
+            <a:spAutoFit/>
+          </a:bodyPr>
+          <a:lstStyle/>
+          <a:p>
+            <a:r>
+              <a:rPr sz="1400">
+                <a:solidFill>
+                  <a:srgbClr val="A8FF78"/>
+                </a:solidFill>
+                <a:latin typeface="Consolas"/>
+              </a:rPr>
+              <a:t>k_sample = min(300, G_public.number_of_nodes())  # red pública
+btw_cent = nx.betweenness_centrality(
+    G_public, k=k_sample, normalized=True, weight='weight')
+k_pm = min(200, G_pm_und.number_of_nodes())        # red de PMs
+btw_pm = nx.betweenness_centrality(G_pm_und, k=k_pm, normalized=True)</a:t>
+            </a:r>
+          </a:p>
+        </p:txBody>
+      </p:sp>
+      <p:sp>
+        <p:nvSpPr>
+          <p:cNvPr id="7" name="TextBox 6"/>
+          <p:cNvSpPr txBox="1"/>
+          <p:nvPr/>
+        </p:nvSpPr>
+        <p:spPr>
+          <a:xfrm>
+            <a:off x="1051560" y="5760720"/>
+            <a:ext cx="10058400" cy="365760"/>
+          </a:xfrm>
+          <a:prstGeom prst="rect">
+            <a:avLst/>
+          </a:prstGeom>
+          <a:noFill/>
+        </p:spPr>
+        <p:txBody>
+          <a:bodyPr wrap="square">
+            <a:spAutoFit/>
+          </a:bodyPr>
+          <a:lstStyle/>
+          <a:p>
+            <a:pPr algn="l"/>
+            <a:r>
+              <a:rPr sz="1100" b="0">
+                <a:solidFill>
+                  <a:srgbClr val="707888"/>
+                </a:solidFill>
+                <a:latin typeface="Arial"/>
+              </a:rPr>
+              <a:t>ℹ  El ranking de brokers converge con la muestra — no hace falta el valor exacto para identificar quién ocupa el top.</a:t>
             </a:r>
           </a:p>
         </p:txBody>
